--- a/sports-econ/downloads/chapter-2-the-supply-and-demand-playbook.pptx
+++ b/sports-econ/downloads/chapter-2-the-supply-and-demand-playbook.pptx
@@ -2,31 +2,31 @@
 <file path=ppt/presentation.xml><?xml version="1.0" encoding="utf-8"?>
 <p:presentation xmlns:p="http://schemas.openxmlformats.org/presentationml/2006/main">
   <p:sldMasterIdLst>
-    <p:sldMasterId xmlns:r="http://schemas.openxmlformats.org/officeDocument/2006/relationships" id="2147483648" r:id="R8752ee95b98a4f7b"/>
+    <p:sldMasterId xmlns:r="http://schemas.openxmlformats.org/officeDocument/2006/relationships" id="2147483648" r:id="R576341ec2f6b4113"/>
   </p:sldMasterIdLst>
   <p:notesMasterIdLst>
-    <p:notesMasterId xmlns:r="http://schemas.openxmlformats.org/officeDocument/2006/relationships" r:id="R736e5bf1ffeb4d12"/>
+    <p:notesMasterId xmlns:r="http://schemas.openxmlformats.org/officeDocument/2006/relationships" r:id="Rdb73b54d23624c65"/>
   </p:notesMasterIdLst>
   <p:sldIdLst>
-    <p:sldId xmlns:r="http://schemas.openxmlformats.org/officeDocument/2006/relationships" id="256" r:id="Ra93fb614b01a4b2b"/>
-    <p:sldId xmlns:r="http://schemas.openxmlformats.org/officeDocument/2006/relationships" id="257" r:id="R27c24a2cce554c4e"/>
-    <p:sldId xmlns:r="http://schemas.openxmlformats.org/officeDocument/2006/relationships" id="258" r:id="R81ab207dad5d4b91"/>
-    <p:sldId xmlns:r="http://schemas.openxmlformats.org/officeDocument/2006/relationships" id="259" r:id="R8e012f3fccfe4bed"/>
-    <p:sldId xmlns:r="http://schemas.openxmlformats.org/officeDocument/2006/relationships" id="260" r:id="Rbc82143294cb4839"/>
-    <p:sldId xmlns:r="http://schemas.openxmlformats.org/officeDocument/2006/relationships" id="261" r:id="Rd5e36c9d67604c59"/>
-    <p:sldId xmlns:r="http://schemas.openxmlformats.org/officeDocument/2006/relationships" id="262" r:id="Rc4ccf08f13f74994"/>
-    <p:sldId xmlns:r="http://schemas.openxmlformats.org/officeDocument/2006/relationships" id="263" r:id="R7ead8fcfd9524145"/>
-    <p:sldId xmlns:r="http://schemas.openxmlformats.org/officeDocument/2006/relationships" id="264" r:id="R2d1d6e82fd5744c7"/>
-    <p:sldId xmlns:r="http://schemas.openxmlformats.org/officeDocument/2006/relationships" id="265" r:id="R26e0853d366b4089"/>
-    <p:sldId xmlns:r="http://schemas.openxmlformats.org/officeDocument/2006/relationships" id="266" r:id="R568caeb7eff64da4"/>
-    <p:sldId xmlns:r="http://schemas.openxmlformats.org/officeDocument/2006/relationships" id="267" r:id="R320c5ded5b454226"/>
-    <p:sldId xmlns:r="http://schemas.openxmlformats.org/officeDocument/2006/relationships" id="268" r:id="Rf7c6f1828ed941d9"/>
-    <p:sldId xmlns:r="http://schemas.openxmlformats.org/officeDocument/2006/relationships" id="269" r:id="R47bdec06b1304658"/>
-    <p:sldId xmlns:r="http://schemas.openxmlformats.org/officeDocument/2006/relationships" id="270" r:id="R75640052108d482a"/>
-    <p:sldId xmlns:r="http://schemas.openxmlformats.org/officeDocument/2006/relationships" id="271" r:id="Rbef2e080a01542a3"/>
-    <p:sldId xmlns:r="http://schemas.openxmlformats.org/officeDocument/2006/relationships" id="272" r:id="R155d9c52ce704eff"/>
-    <p:sldId xmlns:r="http://schemas.openxmlformats.org/officeDocument/2006/relationships" id="273" r:id="Rf76d427803854461"/>
-    <p:sldId xmlns:r="http://schemas.openxmlformats.org/officeDocument/2006/relationships" id="274" r:id="Raa99ad132cad47bc"/>
+    <p:sldId xmlns:r="http://schemas.openxmlformats.org/officeDocument/2006/relationships" id="256" r:id="R9de39235424a4ba9"/>
+    <p:sldId xmlns:r="http://schemas.openxmlformats.org/officeDocument/2006/relationships" id="257" r:id="Reb26291540ef41ee"/>
+    <p:sldId xmlns:r="http://schemas.openxmlformats.org/officeDocument/2006/relationships" id="258" r:id="Rf976b98b01fa4b73"/>
+    <p:sldId xmlns:r="http://schemas.openxmlformats.org/officeDocument/2006/relationships" id="259" r:id="Rc1d79ec7132f47fe"/>
+    <p:sldId xmlns:r="http://schemas.openxmlformats.org/officeDocument/2006/relationships" id="260" r:id="R5d8f8f1485d746e2"/>
+    <p:sldId xmlns:r="http://schemas.openxmlformats.org/officeDocument/2006/relationships" id="261" r:id="R0b5b65b570704f20"/>
+    <p:sldId xmlns:r="http://schemas.openxmlformats.org/officeDocument/2006/relationships" id="262" r:id="R1ebd2fb2d87742fe"/>
+    <p:sldId xmlns:r="http://schemas.openxmlformats.org/officeDocument/2006/relationships" id="263" r:id="R2b29c86c51084763"/>
+    <p:sldId xmlns:r="http://schemas.openxmlformats.org/officeDocument/2006/relationships" id="264" r:id="Rf89e0784e833454d"/>
+    <p:sldId xmlns:r="http://schemas.openxmlformats.org/officeDocument/2006/relationships" id="265" r:id="R618d3cb9d9d5490c"/>
+    <p:sldId xmlns:r="http://schemas.openxmlformats.org/officeDocument/2006/relationships" id="266" r:id="R1007bd6565844e6d"/>
+    <p:sldId xmlns:r="http://schemas.openxmlformats.org/officeDocument/2006/relationships" id="267" r:id="R02645d6864854d2b"/>
+    <p:sldId xmlns:r="http://schemas.openxmlformats.org/officeDocument/2006/relationships" id="268" r:id="R20d60d32e7eb476f"/>
+    <p:sldId xmlns:r="http://schemas.openxmlformats.org/officeDocument/2006/relationships" id="269" r:id="Ra517136c39494101"/>
+    <p:sldId xmlns:r="http://schemas.openxmlformats.org/officeDocument/2006/relationships" id="270" r:id="R976c1bebdaf84f67"/>
+    <p:sldId xmlns:r="http://schemas.openxmlformats.org/officeDocument/2006/relationships" id="271" r:id="R6caea55c96cc4aab"/>
+    <p:sldId xmlns:r="http://schemas.openxmlformats.org/officeDocument/2006/relationships" id="272" r:id="R12dbced84c21438c"/>
+    <p:sldId xmlns:r="http://schemas.openxmlformats.org/officeDocument/2006/relationships" id="273" r:id="R4ab0f3d17347427b"/>
+    <p:sldId xmlns:r="http://schemas.openxmlformats.org/officeDocument/2006/relationships" id="274" r:id="Re75c10d96fd548c7"/>
   </p:sldIdLst>
   <p:sldSz cx="12192000" cy="6858000"/>
   <p:notesSz cx="6858000" cy="9144000"/>
@@ -2193,7 +2193,7 @@
   </p:cSld>
   <p:clrMap bg1="lt1" tx1="dk1" bg2="lt2" tx2="dk2" accent1="accent1" accent2="accent2" accent3="accent3" accent4="accent4" accent5="accent5" accent6="accent6" hlink="hlink" folHlink="folHlink"/>
   <p:sldLayoutIdLst>
-    <p:sldLayoutId xmlns:r="http://schemas.openxmlformats.org/officeDocument/2006/relationships" id="2147483649" r:id="R5a1f6f69d0b94611"/>
+    <p:sldLayoutId xmlns:r="http://schemas.openxmlformats.org/officeDocument/2006/relationships" id="2147483649" r:id="Rd010f3d55ef542bf"/>
   </p:sldLayoutIdLst>
   <p:txStyles>
     <p:titleStyle>
@@ -2744,7 +2744,7 @@
           <p:cNvPr id="6" name="deck-supertitle">
             <a:extLst xmlns:a="http://schemas.openxmlformats.org/drawingml/2006/main">
               <a:ext uri="{FF2B5EF4-FFF2-40B4-BE49-F238E27FC236}">
-                <a16:creationId xmlns:a16="http://schemas.microsoft.com/office/drawing/2014/main" id="{559B9AA3-4D4C-426A-81CF-B09B9829A19B}"/>
+                <a16:creationId xmlns:a16="http://schemas.microsoft.com/office/drawing/2014/main" id="{41A1145E-AD30-4AF1-B68F-387E718A539A}"/>
               </a:ext>
             </a:extLst>
           </p:cNvPr>
@@ -2806,7 +2806,7 @@
           <p:cNvPr id="2" name="deck-title">
             <a:extLst xmlns:a="http://schemas.openxmlformats.org/drawingml/2006/main">
               <a:ext uri="{FF2B5EF4-FFF2-40B4-BE49-F238E27FC236}">
-                <a16:creationId xmlns:a16="http://schemas.microsoft.com/office/drawing/2014/main" id="{421DD16B-BBD4-4381-B103-9E020BEDE4B2}"/>
+                <a16:creationId xmlns:a16="http://schemas.microsoft.com/office/drawing/2014/main" id="{EE8E42AD-5347-45DB-87C8-F7C1D779DD5B}"/>
               </a:ext>
             </a:extLst>
           </p:cNvPr>
@@ -2868,7 +2868,7 @@
           <p:cNvPr id="3" name="deck-subtitle">
             <a:extLst xmlns:a="http://schemas.openxmlformats.org/drawingml/2006/main">
               <a:ext uri="{FF2B5EF4-FFF2-40B4-BE49-F238E27FC236}">
-                <a16:creationId xmlns:a16="http://schemas.microsoft.com/office/drawing/2014/main" id="{BE060271-4DD7-4E6E-8100-DBDE6A1E0EA7}"/>
+                <a16:creationId xmlns:a16="http://schemas.microsoft.com/office/drawing/2014/main" id="{7D24AC12-FEE2-43FA-83BB-69DE0C405C90}"/>
               </a:ext>
             </a:extLst>
           </p:cNvPr>
@@ -2930,7 +2930,7 @@
           <p:cNvPr id="4" name="title-field">
             <a:extLst xmlns:a="http://schemas.openxmlformats.org/drawingml/2006/main">
               <a:ext uri="{FF2B5EF4-FFF2-40B4-BE49-F238E27FC236}">
-                <a16:creationId xmlns:a16="http://schemas.microsoft.com/office/drawing/2014/main" id="{5CFC464A-26A7-447E-9532-232BF95158B3}"/>
+                <a16:creationId xmlns:a16="http://schemas.microsoft.com/office/drawing/2014/main" id="{B213A482-F787-4D17-8B68-EA082EC6EF16}"/>
               </a:ext>
             </a:extLst>
           </p:cNvPr>
@@ -2961,7 +2961,7 @@
           <p:cNvPr id="5" name="deck-number">
             <a:extLst xmlns:a="http://schemas.openxmlformats.org/drawingml/2006/main">
               <a:ext uri="{FF2B5EF4-FFF2-40B4-BE49-F238E27FC236}">
-                <a16:creationId xmlns:a16="http://schemas.microsoft.com/office/drawing/2014/main" id="{86789468-3AFB-4289-8AC9-417C3502D8AF}"/>
+                <a16:creationId xmlns:a16="http://schemas.microsoft.com/office/drawing/2014/main" id="{F041710A-141D-4F20-8319-D26D2BA24B43}"/>
               </a:ext>
             </a:extLst>
           </p:cNvPr>
@@ -3021,7 +3021,7 @@
     </p:spTree>
     <p:extLst>
       <p:ext uri="{BB962C8B-B14F-4D97-AF65-F5344CB8AC3E}">
-        <p14:creationId xmlns:p14="http://schemas.microsoft.com/office/powerpoint/2010/main" val="1245838415"/>
+        <p14:creationId xmlns:p14="http://schemas.microsoft.com/office/powerpoint/2010/main" val="1536713857"/>
       </p:ext>
     </p:extLst>
   </p:cSld>
@@ -3052,7 +3052,7 @@
           <p:cNvPr id="27" name="chapter-label">
             <a:extLst xmlns:a="http://schemas.openxmlformats.org/drawingml/2006/main">
               <a:ext uri="{FF2B5EF4-FFF2-40B4-BE49-F238E27FC236}">
-                <a16:creationId xmlns:a16="http://schemas.microsoft.com/office/drawing/2014/main" id="{99CC289F-EF3E-4337-89DF-21FCCEF7108C}"/>
+                <a16:creationId xmlns:a16="http://schemas.microsoft.com/office/drawing/2014/main" id="{AB6EF2F9-54F5-4585-A5EC-3E0366DF6209}"/>
               </a:ext>
             </a:extLst>
           </p:cNvPr>
@@ -3114,7 +3114,7 @@
           <p:cNvPr id="2" name="slide-title">
             <a:extLst xmlns:a="http://schemas.openxmlformats.org/drawingml/2006/main">
               <a:ext uri="{FF2B5EF4-FFF2-40B4-BE49-F238E27FC236}">
-                <a16:creationId xmlns:a16="http://schemas.microsoft.com/office/drawing/2014/main" id="{F2F37557-DD07-4533-BB23-BBF6555E049F}"/>
+                <a16:creationId xmlns:a16="http://schemas.microsoft.com/office/drawing/2014/main" id="{FF31AF31-79A3-4441-B4E6-35EAC9A88C20}"/>
               </a:ext>
             </a:extLst>
           </p:cNvPr>
@@ -3176,7 +3176,7 @@
           <p:cNvPr id="3" name="footer-rule">
             <a:extLst xmlns:a="http://schemas.openxmlformats.org/drawingml/2006/main">
               <a:ext uri="{FF2B5EF4-FFF2-40B4-BE49-F238E27FC236}">
-                <a16:creationId xmlns:a16="http://schemas.microsoft.com/office/drawing/2014/main" id="{63362747-BB35-4C07-9D52-65B649E076E4}"/>
+                <a16:creationId xmlns:a16="http://schemas.microsoft.com/office/drawing/2014/main" id="{CD670E38-0E92-4C7F-8196-9BC24CC4DD34}"/>
               </a:ext>
             </a:extLst>
           </p:cNvPr>
@@ -3207,7 +3207,7 @@
           <p:cNvPr id="4" name="footer-book">
             <a:extLst xmlns:a="http://schemas.openxmlformats.org/drawingml/2006/main">
               <a:ext uri="{FF2B5EF4-FFF2-40B4-BE49-F238E27FC236}">
-                <a16:creationId xmlns:a16="http://schemas.microsoft.com/office/drawing/2014/main" id="{FC1BD2D1-5177-4DF1-B151-09167F268D50}"/>
+                <a16:creationId xmlns:a16="http://schemas.microsoft.com/office/drawing/2014/main" id="{177510C4-4B29-4013-8C5B-30133EB4C9C3}"/>
               </a:ext>
             </a:extLst>
           </p:cNvPr>
@@ -3269,7 +3269,7 @@
           <p:cNvPr id="5" name="footer-number">
             <a:extLst xmlns:a="http://schemas.openxmlformats.org/drawingml/2006/main">
               <a:ext uri="{FF2B5EF4-FFF2-40B4-BE49-F238E27FC236}">
-                <a16:creationId xmlns:a16="http://schemas.microsoft.com/office/drawing/2014/main" id="{269952DD-BE59-499B-8B18-D2E7C5ECC1BD}"/>
+                <a16:creationId xmlns:a16="http://schemas.microsoft.com/office/drawing/2014/main" id="{4173A185-3CB4-4A74-BF3F-907E26D8E111}"/>
               </a:ext>
             </a:extLst>
           </p:cNvPr>
@@ -3331,7 +3331,7 @@
           <p:cNvPr id="6" name="">
             <a:extLst xmlns:a="http://schemas.openxmlformats.org/drawingml/2006/main">
               <a:ext uri="{FF2B5EF4-FFF2-40B4-BE49-F238E27FC236}">
-                <a16:creationId xmlns:a16="http://schemas.microsoft.com/office/drawing/2014/main" id="{00C3A30C-DE0A-432F-953F-B118B90C5BC7}"/>
+                <a16:creationId xmlns:a16="http://schemas.microsoft.com/office/drawing/2014/main" id="{A897DC56-E5EF-467D-BEA0-A094EE794F62}"/>
               </a:ext>
             </a:extLst>
           </p:cNvPr>
@@ -3393,7 +3393,7 @@
           <p:cNvPr id="7" name="step-rule-1">
             <a:extLst xmlns:a="http://schemas.openxmlformats.org/drawingml/2006/main">
               <a:ext uri="{FF2B5EF4-FFF2-40B4-BE49-F238E27FC236}">
-                <a16:creationId xmlns:a16="http://schemas.microsoft.com/office/drawing/2014/main" id="{F53AF53E-E638-4B30-894D-05DFA8A98932}"/>
+                <a16:creationId xmlns:a16="http://schemas.microsoft.com/office/drawing/2014/main" id="{944B8455-7C95-46D3-BFB2-1B6FE0F66C4D}"/>
               </a:ext>
             </a:extLst>
           </p:cNvPr>
@@ -3424,7 +3424,7 @@
           <p:cNvPr id="8" name="">
             <a:extLst xmlns:a="http://schemas.openxmlformats.org/drawingml/2006/main">
               <a:ext uri="{FF2B5EF4-FFF2-40B4-BE49-F238E27FC236}">
-                <a16:creationId xmlns:a16="http://schemas.microsoft.com/office/drawing/2014/main" id="{A0B0231A-4259-407E-AD16-11CCC5CE31A0}"/>
+                <a16:creationId xmlns:a16="http://schemas.microsoft.com/office/drawing/2014/main" id="{B02DE700-1BC4-4125-9AA3-8370AB43E044}"/>
               </a:ext>
             </a:extLst>
           </p:cNvPr>
@@ -3486,7 +3486,7 @@
           <p:cNvPr id="9" name="">
             <a:extLst xmlns:a="http://schemas.openxmlformats.org/drawingml/2006/main">
               <a:ext uri="{FF2B5EF4-FFF2-40B4-BE49-F238E27FC236}">
-                <a16:creationId xmlns:a16="http://schemas.microsoft.com/office/drawing/2014/main" id="{752C8D66-4EA9-42DE-9B48-D921F5DB1CA0}"/>
+                <a16:creationId xmlns:a16="http://schemas.microsoft.com/office/drawing/2014/main" id="{7325B7F8-232B-463C-AB54-653B8807607F}"/>
               </a:ext>
             </a:extLst>
           </p:cNvPr>
@@ -3548,7 +3548,7 @@
           <p:cNvPr id="10" name="">
             <a:extLst xmlns:a="http://schemas.openxmlformats.org/drawingml/2006/main">
               <a:ext uri="{FF2B5EF4-FFF2-40B4-BE49-F238E27FC236}">
-                <a16:creationId xmlns:a16="http://schemas.microsoft.com/office/drawing/2014/main" id="{9BC06A0F-A6B2-4C42-AD26-FD68AC5A9606}"/>
+                <a16:creationId xmlns:a16="http://schemas.microsoft.com/office/drawing/2014/main" id="{07B7F835-9ADC-45E0-B13F-342E9BD52009}"/>
               </a:ext>
             </a:extLst>
           </p:cNvPr>
@@ -3610,7 +3610,7 @@
           <p:cNvPr id="11" name="step-rule-2">
             <a:extLst xmlns:a="http://schemas.openxmlformats.org/drawingml/2006/main">
               <a:ext uri="{FF2B5EF4-FFF2-40B4-BE49-F238E27FC236}">
-                <a16:creationId xmlns:a16="http://schemas.microsoft.com/office/drawing/2014/main" id="{0E23F6C3-6978-436A-8387-F9C5FA49C05C}"/>
+                <a16:creationId xmlns:a16="http://schemas.microsoft.com/office/drawing/2014/main" id="{1C07BD19-ADE3-4037-9F50-81AD03C46AD6}"/>
               </a:ext>
             </a:extLst>
           </p:cNvPr>
@@ -3641,7 +3641,7 @@
           <p:cNvPr id="12" name="">
             <a:extLst xmlns:a="http://schemas.openxmlformats.org/drawingml/2006/main">
               <a:ext uri="{FF2B5EF4-FFF2-40B4-BE49-F238E27FC236}">
-                <a16:creationId xmlns:a16="http://schemas.microsoft.com/office/drawing/2014/main" id="{1F930374-405E-4A82-A694-37F42CA770DA}"/>
+                <a16:creationId xmlns:a16="http://schemas.microsoft.com/office/drawing/2014/main" id="{1365F5FA-8D24-4DB3-ABDB-7F3C0019F54C}"/>
               </a:ext>
             </a:extLst>
           </p:cNvPr>
@@ -3703,7 +3703,7 @@
           <p:cNvPr id="13" name="">
             <a:extLst xmlns:a="http://schemas.openxmlformats.org/drawingml/2006/main">
               <a:ext uri="{FF2B5EF4-FFF2-40B4-BE49-F238E27FC236}">
-                <a16:creationId xmlns:a16="http://schemas.microsoft.com/office/drawing/2014/main" id="{EA2BAC4D-36A8-4BDE-BDEE-7D3C0782C9DC}"/>
+                <a16:creationId xmlns:a16="http://schemas.microsoft.com/office/drawing/2014/main" id="{B62F6956-012D-48F8-9BC2-3298F386D588}"/>
               </a:ext>
             </a:extLst>
           </p:cNvPr>
@@ -3765,7 +3765,7 @@
           <p:cNvPr id="14" name="">
             <a:extLst xmlns:a="http://schemas.openxmlformats.org/drawingml/2006/main">
               <a:ext uri="{FF2B5EF4-FFF2-40B4-BE49-F238E27FC236}">
-                <a16:creationId xmlns:a16="http://schemas.microsoft.com/office/drawing/2014/main" id="{111668C6-E7D5-4661-8B4E-9A8FBD9DEDAA}"/>
+                <a16:creationId xmlns:a16="http://schemas.microsoft.com/office/drawing/2014/main" id="{2C394A92-9794-4417-9142-E9BB6C87C890}"/>
               </a:ext>
             </a:extLst>
           </p:cNvPr>
@@ -3827,7 +3827,7 @@
           <p:cNvPr id="15" name="step-rule-3">
             <a:extLst xmlns:a="http://schemas.openxmlformats.org/drawingml/2006/main">
               <a:ext uri="{FF2B5EF4-FFF2-40B4-BE49-F238E27FC236}">
-                <a16:creationId xmlns:a16="http://schemas.microsoft.com/office/drawing/2014/main" id="{24EEE08E-596E-47BA-A5A9-1273073255B8}"/>
+                <a16:creationId xmlns:a16="http://schemas.microsoft.com/office/drawing/2014/main" id="{75EDB2E7-ECDD-491B-A84C-F7DCEC02B845}"/>
               </a:ext>
             </a:extLst>
           </p:cNvPr>
@@ -3858,7 +3858,7 @@
           <p:cNvPr id="16" name="">
             <a:extLst xmlns:a="http://schemas.openxmlformats.org/drawingml/2006/main">
               <a:ext uri="{FF2B5EF4-FFF2-40B4-BE49-F238E27FC236}">
-                <a16:creationId xmlns:a16="http://schemas.microsoft.com/office/drawing/2014/main" id="{9DCACA33-74F9-4A98-BE30-ED7B6D4E6C73}"/>
+                <a16:creationId xmlns:a16="http://schemas.microsoft.com/office/drawing/2014/main" id="{E474A5EA-2A9E-45ED-96BF-F01C36B10323}"/>
               </a:ext>
             </a:extLst>
           </p:cNvPr>
@@ -3920,7 +3920,7 @@
           <p:cNvPr id="17" name="">
             <a:extLst xmlns:a="http://schemas.openxmlformats.org/drawingml/2006/main">
               <a:ext uri="{FF2B5EF4-FFF2-40B4-BE49-F238E27FC236}">
-                <a16:creationId xmlns:a16="http://schemas.microsoft.com/office/drawing/2014/main" id="{B4B06BC0-02CB-4EDD-8AA6-2A43759A990A}"/>
+                <a16:creationId xmlns:a16="http://schemas.microsoft.com/office/drawing/2014/main" id="{1653FD37-9D8A-406F-83A0-1D009BA35DCD}"/>
               </a:ext>
             </a:extLst>
           </p:cNvPr>
@@ -3982,7 +3982,7 @@
           <p:cNvPr id="18" name="">
             <a:extLst xmlns:a="http://schemas.openxmlformats.org/drawingml/2006/main">
               <a:ext uri="{FF2B5EF4-FFF2-40B4-BE49-F238E27FC236}">
-                <a16:creationId xmlns:a16="http://schemas.microsoft.com/office/drawing/2014/main" id="{ACF90425-9C0C-4D6D-8CFB-A5F1DE7CC522}"/>
+                <a16:creationId xmlns:a16="http://schemas.microsoft.com/office/drawing/2014/main" id="{C226FB18-1AB6-48CE-BA18-5326D34A724D}"/>
               </a:ext>
             </a:extLst>
           </p:cNvPr>
@@ -4044,7 +4044,7 @@
           <p:cNvPr id="19" name="step-rule-4">
             <a:extLst xmlns:a="http://schemas.openxmlformats.org/drawingml/2006/main">
               <a:ext uri="{FF2B5EF4-FFF2-40B4-BE49-F238E27FC236}">
-                <a16:creationId xmlns:a16="http://schemas.microsoft.com/office/drawing/2014/main" id="{C3AC5FD6-1E7D-4C6B-827F-58E7D49039FD}"/>
+                <a16:creationId xmlns:a16="http://schemas.microsoft.com/office/drawing/2014/main" id="{3416C8AD-979A-4854-B649-0C02E6FA471F}"/>
               </a:ext>
             </a:extLst>
           </p:cNvPr>
@@ -4075,7 +4075,7 @@
           <p:cNvPr id="20" name="">
             <a:extLst xmlns:a="http://schemas.openxmlformats.org/drawingml/2006/main">
               <a:ext uri="{FF2B5EF4-FFF2-40B4-BE49-F238E27FC236}">
-                <a16:creationId xmlns:a16="http://schemas.microsoft.com/office/drawing/2014/main" id="{89C08594-9E10-4082-B064-B9540C3938A2}"/>
+                <a16:creationId xmlns:a16="http://schemas.microsoft.com/office/drawing/2014/main" id="{691DE914-979A-4A0F-BFB8-8D2FDEE9462B}"/>
               </a:ext>
             </a:extLst>
           </p:cNvPr>
@@ -4137,7 +4137,7 @@
           <p:cNvPr id="21" name="">
             <a:extLst xmlns:a="http://schemas.openxmlformats.org/drawingml/2006/main">
               <a:ext uri="{FF2B5EF4-FFF2-40B4-BE49-F238E27FC236}">
-                <a16:creationId xmlns:a16="http://schemas.microsoft.com/office/drawing/2014/main" id="{CD9D2AFA-FFBE-4CED-9EBB-E8ABC9945B72}"/>
+                <a16:creationId xmlns:a16="http://schemas.microsoft.com/office/drawing/2014/main" id="{D9DA1E5C-D7DE-4470-9865-08EAC1741829}"/>
               </a:ext>
             </a:extLst>
           </p:cNvPr>
@@ -4199,7 +4199,7 @@
           <p:cNvPr id="22" name="">
             <a:extLst xmlns:a="http://schemas.openxmlformats.org/drawingml/2006/main">
               <a:ext uri="{FF2B5EF4-FFF2-40B4-BE49-F238E27FC236}">
-                <a16:creationId xmlns:a16="http://schemas.microsoft.com/office/drawing/2014/main" id="{E5B42E64-EE58-4F37-9599-61C5AF26DACE}"/>
+                <a16:creationId xmlns:a16="http://schemas.microsoft.com/office/drawing/2014/main" id="{2B4708FA-5C2A-4C00-9DB6-74633900238F}"/>
               </a:ext>
             </a:extLst>
           </p:cNvPr>
@@ -4261,7 +4261,7 @@
           <p:cNvPr id="23" name="step-rule-5">
             <a:extLst xmlns:a="http://schemas.openxmlformats.org/drawingml/2006/main">
               <a:ext uri="{FF2B5EF4-FFF2-40B4-BE49-F238E27FC236}">
-                <a16:creationId xmlns:a16="http://schemas.microsoft.com/office/drawing/2014/main" id="{25A4499F-0530-47A1-AA6B-DE42F264C136}"/>
+                <a16:creationId xmlns:a16="http://schemas.microsoft.com/office/drawing/2014/main" id="{B80BF25D-1C51-47AB-816A-E5FAD043CED4}"/>
               </a:ext>
             </a:extLst>
           </p:cNvPr>
@@ -4292,7 +4292,7 @@
           <p:cNvPr id="24" name="">
             <a:extLst xmlns:a="http://schemas.openxmlformats.org/drawingml/2006/main">
               <a:ext uri="{FF2B5EF4-FFF2-40B4-BE49-F238E27FC236}">
-                <a16:creationId xmlns:a16="http://schemas.microsoft.com/office/drawing/2014/main" id="{15874244-4DD6-4A3A-8007-A60527C3066A}"/>
+                <a16:creationId xmlns:a16="http://schemas.microsoft.com/office/drawing/2014/main" id="{4DAB4C8B-9B10-4385-8F7E-19C73FD9148C}"/>
               </a:ext>
             </a:extLst>
           </p:cNvPr>
@@ -4354,7 +4354,7 @@
           <p:cNvPr id="25" name="">
             <a:extLst xmlns:a="http://schemas.openxmlformats.org/drawingml/2006/main">
               <a:ext uri="{FF2B5EF4-FFF2-40B4-BE49-F238E27FC236}">
-                <a16:creationId xmlns:a16="http://schemas.microsoft.com/office/drawing/2014/main" id="{D48B5619-D106-4F37-BB8C-28871B1CB011}"/>
+                <a16:creationId xmlns:a16="http://schemas.microsoft.com/office/drawing/2014/main" id="{41E0D9BE-07F1-46FD-8545-71B8B53F0B82}"/>
               </a:ext>
             </a:extLst>
           </p:cNvPr>
@@ -4416,7 +4416,7 @@
           <p:cNvPr id="26" name="">
             <a:extLst xmlns:a="http://schemas.openxmlformats.org/drawingml/2006/main">
               <a:ext uri="{FF2B5EF4-FFF2-40B4-BE49-F238E27FC236}">
-                <a16:creationId xmlns:a16="http://schemas.microsoft.com/office/drawing/2014/main" id="{9CE12E32-3244-4CBC-96D4-E6D3AA0497F0}"/>
+                <a16:creationId xmlns:a16="http://schemas.microsoft.com/office/drawing/2014/main" id="{AC3F3CFB-128F-4D7F-92C9-4284EF254426}"/>
               </a:ext>
             </a:extLst>
           </p:cNvPr>
@@ -4476,7 +4476,7 @@
     </p:spTree>
     <p:extLst>
       <p:ext uri="{BB962C8B-B14F-4D97-AF65-F5344CB8AC3E}">
-        <p14:creationId xmlns:p14="http://schemas.microsoft.com/office/powerpoint/2010/main" val="1808309332"/>
+        <p14:creationId xmlns:p14="http://schemas.microsoft.com/office/powerpoint/2010/main" val="1146170220"/>
       </p:ext>
     </p:extLst>
   </p:cSld>
@@ -4507,7 +4507,7 @@
           <p:cNvPr id="8" name="chapter-label">
             <a:extLst xmlns:a="http://schemas.openxmlformats.org/drawingml/2006/main">
               <a:ext uri="{FF2B5EF4-FFF2-40B4-BE49-F238E27FC236}">
-                <a16:creationId xmlns:a16="http://schemas.microsoft.com/office/drawing/2014/main" id="{2C469759-E08C-42E4-BE57-193E530CF70C}"/>
+                <a16:creationId xmlns:a16="http://schemas.microsoft.com/office/drawing/2014/main" id="{AE644C5F-61A5-4301-A6F0-D20E5D55E6C3}"/>
               </a:ext>
             </a:extLst>
           </p:cNvPr>
@@ -4569,7 +4569,7 @@
           <p:cNvPr id="2" name="slide-title">
             <a:extLst xmlns:a="http://schemas.openxmlformats.org/drawingml/2006/main">
               <a:ext uri="{FF2B5EF4-FFF2-40B4-BE49-F238E27FC236}">
-                <a16:creationId xmlns:a16="http://schemas.microsoft.com/office/drawing/2014/main" id="{D07ADCED-6B90-414F-B181-A971A7BB7C39}"/>
+                <a16:creationId xmlns:a16="http://schemas.microsoft.com/office/drawing/2014/main" id="{B191A420-740F-492D-A4C4-FF4386A89FD8}"/>
               </a:ext>
             </a:extLst>
           </p:cNvPr>
@@ -4631,7 +4631,7 @@
           <p:cNvPr id="3" name="footer-rule">
             <a:extLst xmlns:a="http://schemas.openxmlformats.org/drawingml/2006/main">
               <a:ext uri="{FF2B5EF4-FFF2-40B4-BE49-F238E27FC236}">
-                <a16:creationId xmlns:a16="http://schemas.microsoft.com/office/drawing/2014/main" id="{99D74D05-F0D0-447A-A2FA-1E70BE763DF5}"/>
+                <a16:creationId xmlns:a16="http://schemas.microsoft.com/office/drawing/2014/main" id="{82D238D4-2DE8-450F-8EDA-0A701DB364B1}"/>
               </a:ext>
             </a:extLst>
           </p:cNvPr>
@@ -4662,7 +4662,7 @@
           <p:cNvPr id="4" name="footer-book">
             <a:extLst xmlns:a="http://schemas.openxmlformats.org/drawingml/2006/main">
               <a:ext uri="{FF2B5EF4-FFF2-40B4-BE49-F238E27FC236}">
-                <a16:creationId xmlns:a16="http://schemas.microsoft.com/office/drawing/2014/main" id="{D96371DB-F455-477B-805A-5D6F88751533}"/>
+                <a16:creationId xmlns:a16="http://schemas.microsoft.com/office/drawing/2014/main" id="{3C324F8A-7FBD-46D6-ADCF-6CC5FF78DF5B}"/>
               </a:ext>
             </a:extLst>
           </p:cNvPr>
@@ -4724,7 +4724,7 @@
           <p:cNvPr id="5" name="footer-number">
             <a:extLst xmlns:a="http://schemas.openxmlformats.org/drawingml/2006/main">
               <a:ext uri="{FF2B5EF4-FFF2-40B4-BE49-F238E27FC236}">
-                <a16:creationId xmlns:a16="http://schemas.microsoft.com/office/drawing/2014/main" id="{F49F63FC-7D0A-4982-82C9-48F40DEC2425}"/>
+                <a16:creationId xmlns:a16="http://schemas.microsoft.com/office/drawing/2014/main" id="{D58020E3-D4F7-4E01-AEAA-864CBE4679D5}"/>
               </a:ext>
             </a:extLst>
           </p:cNvPr>
@@ -4790,7 +4790,7 @@
           <p:nvPr/>
         </p:nvPicPr>
         <p:blipFill>
-          <a:blip xmlns:r="http://schemas.openxmlformats.org/officeDocument/2006/relationships" xmlns:a="http://schemas.openxmlformats.org/drawingml/2006/main" r:embed="R0e85c0858827406b"/>
+          <a:blip xmlns:r="http://schemas.openxmlformats.org/officeDocument/2006/relationships" xmlns:a="http://schemas.openxmlformats.org/drawingml/2006/main" r:embed="R5d700256043549ab"/>
           <a:stretch xmlns:a="http://schemas.openxmlformats.org/drawingml/2006/main"/>
         </p:blipFill>
         <p:spPr>
@@ -4808,7 +4808,7 @@
           <p:cNvPr id="7" name="">
             <a:extLst xmlns:a="http://schemas.openxmlformats.org/drawingml/2006/main">
               <a:ext uri="{FF2B5EF4-FFF2-40B4-BE49-F238E27FC236}">
-                <a16:creationId xmlns:a16="http://schemas.microsoft.com/office/drawing/2014/main" id="{09C7F84C-FAE9-4D8C-B155-286FA61AF61C}"/>
+                <a16:creationId xmlns:a16="http://schemas.microsoft.com/office/drawing/2014/main" id="{0903D590-F660-4923-A95E-F890884B11A8}"/>
               </a:ext>
             </a:extLst>
           </p:cNvPr>
@@ -4868,7 +4868,7 @@
     </p:spTree>
     <p:extLst>
       <p:ext uri="{BB962C8B-B14F-4D97-AF65-F5344CB8AC3E}">
-        <p14:creationId xmlns:p14="http://schemas.microsoft.com/office/powerpoint/2010/main" val="1899193077"/>
+        <p14:creationId xmlns:p14="http://schemas.microsoft.com/office/powerpoint/2010/main" val="528562741"/>
       </p:ext>
     </p:extLst>
   </p:cSld>
@@ -4899,7 +4899,7 @@
           <p:cNvPr id="10" name="">
             <a:extLst xmlns:a="http://schemas.openxmlformats.org/drawingml/2006/main">
               <a:ext uri="{FF2B5EF4-FFF2-40B4-BE49-F238E27FC236}">
-                <a16:creationId xmlns:a16="http://schemas.microsoft.com/office/drawing/2014/main" id="{A4D1163F-5606-47BA-AA79-9D662F5C9103}"/>
+                <a16:creationId xmlns:a16="http://schemas.microsoft.com/office/drawing/2014/main" id="{0FA482B9-DE14-40C4-ACD8-F757204D58FE}"/>
               </a:ext>
             </a:extLst>
           </p:cNvPr>
@@ -4961,7 +4961,7 @@
           <p:cNvPr id="2" name="">
             <a:extLst xmlns:a="http://schemas.openxmlformats.org/drawingml/2006/main">
               <a:ext uri="{FF2B5EF4-FFF2-40B4-BE49-F238E27FC236}">
-                <a16:creationId xmlns:a16="http://schemas.microsoft.com/office/drawing/2014/main" id="{CB0959F5-B9AE-48E8-8BC2-F4D07B075908}"/>
+                <a16:creationId xmlns:a16="http://schemas.microsoft.com/office/drawing/2014/main" id="{B36A98ED-1826-47F8-B31C-542DBD3A24DD}"/>
               </a:ext>
             </a:extLst>
           </p:cNvPr>
@@ -5023,7 +5023,7 @@
           <p:cNvPr id="3" name="big-statement">
             <a:extLst xmlns:a="http://schemas.openxmlformats.org/drawingml/2006/main">
               <a:ext uri="{FF2B5EF4-FFF2-40B4-BE49-F238E27FC236}">
-                <a16:creationId xmlns:a16="http://schemas.microsoft.com/office/drawing/2014/main" id="{A8228DD8-28ED-4508-BF0A-00B52AC62A59}"/>
+                <a16:creationId xmlns:a16="http://schemas.microsoft.com/office/drawing/2014/main" id="{E09DD06B-7A97-4DD4-8A03-C99DB1162408}"/>
               </a:ext>
             </a:extLst>
           </p:cNvPr>
@@ -5085,7 +5085,7 @@
           <p:cNvPr id="4" name="bullet-mark-1">
             <a:extLst xmlns:a="http://schemas.openxmlformats.org/drawingml/2006/main">
               <a:ext uri="{FF2B5EF4-FFF2-40B4-BE49-F238E27FC236}">
-                <a16:creationId xmlns:a16="http://schemas.microsoft.com/office/drawing/2014/main" id="{8B3637A7-7CCC-4A5F-8AE0-1D547DF73D86}"/>
+                <a16:creationId xmlns:a16="http://schemas.microsoft.com/office/drawing/2014/main" id="{ACAD9ED0-16EF-4E8F-9C45-E5573EB27694}"/>
               </a:ext>
             </a:extLst>
           </p:cNvPr>
@@ -5147,7 +5147,7 @@
           <p:cNvPr id="5" name="bullet-1">
             <a:extLst xmlns:a="http://schemas.openxmlformats.org/drawingml/2006/main">
               <a:ext uri="{FF2B5EF4-FFF2-40B4-BE49-F238E27FC236}">
-                <a16:creationId xmlns:a16="http://schemas.microsoft.com/office/drawing/2014/main" id="{CE78E34B-99D9-4797-BBE4-7874E891F870}"/>
+                <a16:creationId xmlns:a16="http://schemas.microsoft.com/office/drawing/2014/main" id="{9CDA6410-B284-4D7F-AB01-B8D7CBF9D3B4}"/>
               </a:ext>
             </a:extLst>
           </p:cNvPr>
@@ -5209,7 +5209,7 @@
           <p:cNvPr id="6" name="bullet-mark-2">
             <a:extLst xmlns:a="http://schemas.openxmlformats.org/drawingml/2006/main">
               <a:ext uri="{FF2B5EF4-FFF2-40B4-BE49-F238E27FC236}">
-                <a16:creationId xmlns:a16="http://schemas.microsoft.com/office/drawing/2014/main" id="{754E12FE-CAD4-4845-B943-C9092A227C8C}"/>
+                <a16:creationId xmlns:a16="http://schemas.microsoft.com/office/drawing/2014/main" id="{BFFAC4C4-F8BC-4340-BD37-BFE8166914F7}"/>
               </a:ext>
             </a:extLst>
           </p:cNvPr>
@@ -5271,7 +5271,7 @@
           <p:cNvPr id="7" name="bullet-2">
             <a:extLst xmlns:a="http://schemas.openxmlformats.org/drawingml/2006/main">
               <a:ext uri="{FF2B5EF4-FFF2-40B4-BE49-F238E27FC236}">
-                <a16:creationId xmlns:a16="http://schemas.microsoft.com/office/drawing/2014/main" id="{B104422F-9166-4B2B-9011-560A7B925FFC}"/>
+                <a16:creationId xmlns:a16="http://schemas.microsoft.com/office/drawing/2014/main" id="{6B7BC099-3559-4B03-8280-75826056FF20}"/>
               </a:ext>
             </a:extLst>
           </p:cNvPr>
@@ -5333,7 +5333,7 @@
           <p:cNvPr id="8" name="bullet-mark-3">
             <a:extLst xmlns:a="http://schemas.openxmlformats.org/drawingml/2006/main">
               <a:ext uri="{FF2B5EF4-FFF2-40B4-BE49-F238E27FC236}">
-                <a16:creationId xmlns:a16="http://schemas.microsoft.com/office/drawing/2014/main" id="{DCA7CF56-695D-499A-B23A-55C54D9B2573}"/>
+                <a16:creationId xmlns:a16="http://schemas.microsoft.com/office/drawing/2014/main" id="{27B74441-F3D9-498F-B152-D9D1B129EE95}"/>
               </a:ext>
             </a:extLst>
           </p:cNvPr>
@@ -5395,7 +5395,7 @@
           <p:cNvPr id="9" name="bullet-3">
             <a:extLst xmlns:a="http://schemas.openxmlformats.org/drawingml/2006/main">
               <a:ext uri="{FF2B5EF4-FFF2-40B4-BE49-F238E27FC236}">
-                <a16:creationId xmlns:a16="http://schemas.microsoft.com/office/drawing/2014/main" id="{12C2E630-3A54-4103-AE75-5D71DE169EC4}"/>
+                <a16:creationId xmlns:a16="http://schemas.microsoft.com/office/drawing/2014/main" id="{EDF20E9F-DBFE-4E2C-8879-8B122BA17615}"/>
               </a:ext>
             </a:extLst>
           </p:cNvPr>
@@ -5455,7 +5455,7 @@
     </p:spTree>
     <p:extLst>
       <p:ext uri="{BB962C8B-B14F-4D97-AF65-F5344CB8AC3E}">
-        <p14:creationId xmlns:p14="http://schemas.microsoft.com/office/powerpoint/2010/main" val="1195790266"/>
+        <p14:creationId xmlns:p14="http://schemas.microsoft.com/office/powerpoint/2010/main" val="1460864792"/>
       </p:ext>
     </p:extLst>
   </p:cSld>
@@ -5486,7 +5486,7 @@
           <p:cNvPr id="15" name="chapter-label">
             <a:extLst xmlns:a="http://schemas.openxmlformats.org/drawingml/2006/main">
               <a:ext uri="{FF2B5EF4-FFF2-40B4-BE49-F238E27FC236}">
-                <a16:creationId xmlns:a16="http://schemas.microsoft.com/office/drawing/2014/main" id="{AB2FF324-A2CB-4CD5-A801-11220C63E0D5}"/>
+                <a16:creationId xmlns:a16="http://schemas.microsoft.com/office/drawing/2014/main" id="{42A266E5-01EE-4902-9413-09187CA357FD}"/>
               </a:ext>
             </a:extLst>
           </p:cNvPr>
@@ -5548,7 +5548,7 @@
           <p:cNvPr id="2" name="slide-title">
             <a:extLst xmlns:a="http://schemas.openxmlformats.org/drawingml/2006/main">
               <a:ext uri="{FF2B5EF4-FFF2-40B4-BE49-F238E27FC236}">
-                <a16:creationId xmlns:a16="http://schemas.microsoft.com/office/drawing/2014/main" id="{0CB21787-093B-4536-BE9F-F6F5513FFA11}"/>
+                <a16:creationId xmlns:a16="http://schemas.microsoft.com/office/drawing/2014/main" id="{3D714DE4-1DF7-4DEC-A76A-12E00A8D0C4D}"/>
               </a:ext>
             </a:extLst>
           </p:cNvPr>
@@ -5610,7 +5610,7 @@
           <p:cNvPr id="3" name="footer-rule">
             <a:extLst xmlns:a="http://schemas.openxmlformats.org/drawingml/2006/main">
               <a:ext uri="{FF2B5EF4-FFF2-40B4-BE49-F238E27FC236}">
-                <a16:creationId xmlns:a16="http://schemas.microsoft.com/office/drawing/2014/main" id="{D026759E-DEAA-42B6-BC19-0FBB4FE4F99F}"/>
+                <a16:creationId xmlns:a16="http://schemas.microsoft.com/office/drawing/2014/main" id="{CFAB6207-97E1-4EE8-AA80-334D77830F9A}"/>
               </a:ext>
             </a:extLst>
           </p:cNvPr>
@@ -5641,7 +5641,7 @@
           <p:cNvPr id="4" name="footer-book">
             <a:extLst xmlns:a="http://schemas.openxmlformats.org/drawingml/2006/main">
               <a:ext uri="{FF2B5EF4-FFF2-40B4-BE49-F238E27FC236}">
-                <a16:creationId xmlns:a16="http://schemas.microsoft.com/office/drawing/2014/main" id="{5DA2D79D-126B-44BF-84F6-EAA0D0078071}"/>
+                <a16:creationId xmlns:a16="http://schemas.microsoft.com/office/drawing/2014/main" id="{0734692D-19BD-4F43-8BE3-1CB4E31433DB}"/>
               </a:ext>
             </a:extLst>
           </p:cNvPr>
@@ -5703,7 +5703,7 @@
           <p:cNvPr id="5" name="footer-number">
             <a:extLst xmlns:a="http://schemas.openxmlformats.org/drawingml/2006/main">
               <a:ext uri="{FF2B5EF4-FFF2-40B4-BE49-F238E27FC236}">
-                <a16:creationId xmlns:a16="http://schemas.microsoft.com/office/drawing/2014/main" id="{2377D262-FE6F-4598-9C1F-A5B0BAF4DD3C}"/>
+                <a16:creationId xmlns:a16="http://schemas.microsoft.com/office/drawing/2014/main" id="{386E0A77-7C49-4854-B70A-27B5516ECFB7}"/>
               </a:ext>
             </a:extLst>
           </p:cNvPr>
@@ -5765,7 +5765,7 @@
           <p:cNvPr id="6" name="panel-1">
             <a:extLst xmlns:a="http://schemas.openxmlformats.org/drawingml/2006/main">
               <a:ext uri="{FF2B5EF4-FFF2-40B4-BE49-F238E27FC236}">
-                <a16:creationId xmlns:a16="http://schemas.microsoft.com/office/drawing/2014/main" id="{C63629CE-1C53-4B1A-A30C-538370550B62}"/>
+                <a16:creationId xmlns:a16="http://schemas.microsoft.com/office/drawing/2014/main" id="{C80C031C-482C-4058-B7BC-5E01ABCEE30E}"/>
               </a:ext>
             </a:extLst>
           </p:cNvPr>
@@ -5798,7 +5798,7 @@
           <p:cNvPr id="7" name="">
             <a:extLst xmlns:a="http://schemas.openxmlformats.org/drawingml/2006/main">
               <a:ext uri="{FF2B5EF4-FFF2-40B4-BE49-F238E27FC236}">
-                <a16:creationId xmlns:a16="http://schemas.microsoft.com/office/drawing/2014/main" id="{81E6755D-AF23-47E8-BD80-E5AF2D45B825}"/>
+                <a16:creationId xmlns:a16="http://schemas.microsoft.com/office/drawing/2014/main" id="{AE987493-F23A-4724-B742-B50865D403BC}"/>
               </a:ext>
             </a:extLst>
           </p:cNvPr>
@@ -5860,7 +5860,7 @@
           <p:cNvPr id="8" name="">
             <a:extLst xmlns:a="http://schemas.openxmlformats.org/drawingml/2006/main">
               <a:ext uri="{FF2B5EF4-FFF2-40B4-BE49-F238E27FC236}">
-                <a16:creationId xmlns:a16="http://schemas.microsoft.com/office/drawing/2014/main" id="{F8EBED03-E3CD-4A36-91C9-19359FEBCBDE}"/>
+                <a16:creationId xmlns:a16="http://schemas.microsoft.com/office/drawing/2014/main" id="{3CF11B28-0055-4719-AD67-91A21B7BB081}"/>
               </a:ext>
             </a:extLst>
           </p:cNvPr>
@@ -5922,7 +5922,7 @@
           <p:cNvPr id="9" name="">
             <a:extLst xmlns:a="http://schemas.openxmlformats.org/drawingml/2006/main">
               <a:ext uri="{FF2B5EF4-FFF2-40B4-BE49-F238E27FC236}">
-                <a16:creationId xmlns:a16="http://schemas.microsoft.com/office/drawing/2014/main" id="{0B48A714-C73D-470D-9E84-0C103DA1DA17}"/>
+                <a16:creationId xmlns:a16="http://schemas.microsoft.com/office/drawing/2014/main" id="{0855AD4C-DF74-4644-8C18-42CAF58596B2}"/>
               </a:ext>
             </a:extLst>
           </p:cNvPr>
@@ -5984,7 +5984,7 @@
           <p:cNvPr id="10" name="panel-2">
             <a:extLst xmlns:a="http://schemas.openxmlformats.org/drawingml/2006/main">
               <a:ext uri="{FF2B5EF4-FFF2-40B4-BE49-F238E27FC236}">
-                <a16:creationId xmlns:a16="http://schemas.microsoft.com/office/drawing/2014/main" id="{B43FA1BF-A0C1-4EC0-957B-363E678F1D8A}"/>
+                <a16:creationId xmlns:a16="http://schemas.microsoft.com/office/drawing/2014/main" id="{6339C14E-B2E5-4026-8DBB-AED3CC22DA4A}"/>
               </a:ext>
             </a:extLst>
           </p:cNvPr>
@@ -6017,7 +6017,7 @@
           <p:cNvPr id="11" name="">
             <a:extLst xmlns:a="http://schemas.openxmlformats.org/drawingml/2006/main">
               <a:ext uri="{FF2B5EF4-FFF2-40B4-BE49-F238E27FC236}">
-                <a16:creationId xmlns:a16="http://schemas.microsoft.com/office/drawing/2014/main" id="{A8F3E2B7-78AD-4129-83EB-9C8E36E48862}"/>
+                <a16:creationId xmlns:a16="http://schemas.microsoft.com/office/drawing/2014/main" id="{CE3EB334-736E-4714-9AFD-03EC3B924227}"/>
               </a:ext>
             </a:extLst>
           </p:cNvPr>
@@ -6079,7 +6079,7 @@
           <p:cNvPr id="12" name="">
             <a:extLst xmlns:a="http://schemas.openxmlformats.org/drawingml/2006/main">
               <a:ext uri="{FF2B5EF4-FFF2-40B4-BE49-F238E27FC236}">
-                <a16:creationId xmlns:a16="http://schemas.microsoft.com/office/drawing/2014/main" id="{4D1C700A-817B-45A4-81AC-C9B185145924}"/>
+                <a16:creationId xmlns:a16="http://schemas.microsoft.com/office/drawing/2014/main" id="{2506F90F-883A-421B-B5A4-01F94DCE0B24}"/>
               </a:ext>
             </a:extLst>
           </p:cNvPr>
@@ -6141,7 +6141,7 @@
           <p:cNvPr id="13" name="">
             <a:extLst xmlns:a="http://schemas.openxmlformats.org/drawingml/2006/main">
               <a:ext uri="{FF2B5EF4-FFF2-40B4-BE49-F238E27FC236}">
-                <a16:creationId xmlns:a16="http://schemas.microsoft.com/office/drawing/2014/main" id="{649C0511-9125-4C4B-8F5C-70D5DE58C889}"/>
+                <a16:creationId xmlns:a16="http://schemas.microsoft.com/office/drawing/2014/main" id="{D695F79C-74D3-4B74-9C3F-3645809C204C}"/>
               </a:ext>
             </a:extLst>
           </p:cNvPr>
@@ -6203,7 +6203,7 @@
           <p:cNvPr id="14" name="">
             <a:extLst xmlns:a="http://schemas.openxmlformats.org/drawingml/2006/main">
               <a:ext uri="{FF2B5EF4-FFF2-40B4-BE49-F238E27FC236}">
-                <a16:creationId xmlns:a16="http://schemas.microsoft.com/office/drawing/2014/main" id="{3A233752-64AF-4385-9412-46A3AA9C6663}"/>
+                <a16:creationId xmlns:a16="http://schemas.microsoft.com/office/drawing/2014/main" id="{F300FD07-9345-4BFC-BF03-E9C1706107A2}"/>
               </a:ext>
             </a:extLst>
           </p:cNvPr>
@@ -6263,7 +6263,7 @@
     </p:spTree>
     <p:extLst>
       <p:ext uri="{BB962C8B-B14F-4D97-AF65-F5344CB8AC3E}">
-        <p14:creationId xmlns:p14="http://schemas.microsoft.com/office/powerpoint/2010/main" val="1693543844"/>
+        <p14:creationId xmlns:p14="http://schemas.microsoft.com/office/powerpoint/2010/main" val="824060146"/>
       </p:ext>
     </p:extLst>
   </p:cSld>
@@ -6294,7 +6294,7 @@
           <p:cNvPr id="10" name="">
             <a:extLst xmlns:a="http://schemas.openxmlformats.org/drawingml/2006/main">
               <a:ext uri="{FF2B5EF4-FFF2-40B4-BE49-F238E27FC236}">
-                <a16:creationId xmlns:a16="http://schemas.microsoft.com/office/drawing/2014/main" id="{5B69C98A-B00B-4C0D-9436-BCC064F7C206}"/>
+                <a16:creationId xmlns:a16="http://schemas.microsoft.com/office/drawing/2014/main" id="{E3D67C99-749C-40DE-B15D-99BD0443C1BC}"/>
               </a:ext>
             </a:extLst>
           </p:cNvPr>
@@ -6356,7 +6356,7 @@
           <p:cNvPr id="2" name="">
             <a:extLst xmlns:a="http://schemas.openxmlformats.org/drawingml/2006/main">
               <a:ext uri="{FF2B5EF4-FFF2-40B4-BE49-F238E27FC236}">
-                <a16:creationId xmlns:a16="http://schemas.microsoft.com/office/drawing/2014/main" id="{B19EBA5E-B3FF-4FC8-B4A2-017D98BF72FF}"/>
+                <a16:creationId xmlns:a16="http://schemas.microsoft.com/office/drawing/2014/main" id="{D1A59CC2-743C-4F7E-8F9A-909F7794C6E4}"/>
               </a:ext>
             </a:extLst>
           </p:cNvPr>
@@ -6418,7 +6418,7 @@
           <p:cNvPr id="3" name="big-statement">
             <a:extLst xmlns:a="http://schemas.openxmlformats.org/drawingml/2006/main">
               <a:ext uri="{FF2B5EF4-FFF2-40B4-BE49-F238E27FC236}">
-                <a16:creationId xmlns:a16="http://schemas.microsoft.com/office/drawing/2014/main" id="{A92309BA-2278-45EE-82E7-464E29D37FF7}"/>
+                <a16:creationId xmlns:a16="http://schemas.microsoft.com/office/drawing/2014/main" id="{26019BC0-6991-4A9F-BA7F-B0EA66D08F62}"/>
               </a:ext>
             </a:extLst>
           </p:cNvPr>
@@ -6480,7 +6480,7 @@
           <p:cNvPr id="4" name="bullet-mark-1">
             <a:extLst xmlns:a="http://schemas.openxmlformats.org/drawingml/2006/main">
               <a:ext uri="{FF2B5EF4-FFF2-40B4-BE49-F238E27FC236}">
-                <a16:creationId xmlns:a16="http://schemas.microsoft.com/office/drawing/2014/main" id="{69EFB515-3DEB-4679-B8EA-223A8BF725E6}"/>
+                <a16:creationId xmlns:a16="http://schemas.microsoft.com/office/drawing/2014/main" id="{C434CD36-6392-40BA-A27A-A9D010B8AAB0}"/>
               </a:ext>
             </a:extLst>
           </p:cNvPr>
@@ -6542,7 +6542,7 @@
           <p:cNvPr id="5" name="bullet-1">
             <a:extLst xmlns:a="http://schemas.openxmlformats.org/drawingml/2006/main">
               <a:ext uri="{FF2B5EF4-FFF2-40B4-BE49-F238E27FC236}">
-                <a16:creationId xmlns:a16="http://schemas.microsoft.com/office/drawing/2014/main" id="{D5BCF8EB-E867-466C-8A4B-38EA99EC232B}"/>
+                <a16:creationId xmlns:a16="http://schemas.microsoft.com/office/drawing/2014/main" id="{C94BD018-3F60-4526-B183-FDE40669F9AD}"/>
               </a:ext>
             </a:extLst>
           </p:cNvPr>
@@ -6604,7 +6604,7 @@
           <p:cNvPr id="6" name="bullet-mark-2">
             <a:extLst xmlns:a="http://schemas.openxmlformats.org/drawingml/2006/main">
               <a:ext uri="{FF2B5EF4-FFF2-40B4-BE49-F238E27FC236}">
-                <a16:creationId xmlns:a16="http://schemas.microsoft.com/office/drawing/2014/main" id="{A77389AC-9A00-4623-8AA2-9932A70EF22F}"/>
+                <a16:creationId xmlns:a16="http://schemas.microsoft.com/office/drawing/2014/main" id="{F85D5EA0-81C8-40DE-B0EE-28C08F05FFE4}"/>
               </a:ext>
             </a:extLst>
           </p:cNvPr>
@@ -6666,7 +6666,7 @@
           <p:cNvPr id="7" name="bullet-2">
             <a:extLst xmlns:a="http://schemas.openxmlformats.org/drawingml/2006/main">
               <a:ext uri="{FF2B5EF4-FFF2-40B4-BE49-F238E27FC236}">
-                <a16:creationId xmlns:a16="http://schemas.microsoft.com/office/drawing/2014/main" id="{FBEFEB9C-40B1-422A-9FB3-477841288726}"/>
+                <a16:creationId xmlns:a16="http://schemas.microsoft.com/office/drawing/2014/main" id="{31E7251A-AECD-4239-AFCA-B6563B458138}"/>
               </a:ext>
             </a:extLst>
           </p:cNvPr>
@@ -6728,7 +6728,7 @@
           <p:cNvPr id="8" name="bullet-mark-3">
             <a:extLst xmlns:a="http://schemas.openxmlformats.org/drawingml/2006/main">
               <a:ext uri="{FF2B5EF4-FFF2-40B4-BE49-F238E27FC236}">
-                <a16:creationId xmlns:a16="http://schemas.microsoft.com/office/drawing/2014/main" id="{05C846C0-4AC4-429A-9418-75CD67857641}"/>
+                <a16:creationId xmlns:a16="http://schemas.microsoft.com/office/drawing/2014/main" id="{AD0D134A-63CF-407A-90CD-A8DD1D4D9D56}"/>
               </a:ext>
             </a:extLst>
           </p:cNvPr>
@@ -6790,7 +6790,7 @@
           <p:cNvPr id="9" name="bullet-3">
             <a:extLst xmlns:a="http://schemas.openxmlformats.org/drawingml/2006/main">
               <a:ext uri="{FF2B5EF4-FFF2-40B4-BE49-F238E27FC236}">
-                <a16:creationId xmlns:a16="http://schemas.microsoft.com/office/drawing/2014/main" id="{FC39827F-188E-42CD-9925-06E84E39E2BD}"/>
+                <a16:creationId xmlns:a16="http://schemas.microsoft.com/office/drawing/2014/main" id="{6D08F29D-678E-4480-8A79-9BA3040AAD38}"/>
               </a:ext>
             </a:extLst>
           </p:cNvPr>
@@ -6850,7 +6850,7 @@
     </p:spTree>
     <p:extLst>
       <p:ext uri="{BB962C8B-B14F-4D97-AF65-F5344CB8AC3E}">
-        <p14:creationId xmlns:p14="http://schemas.microsoft.com/office/powerpoint/2010/main" val="1348808423"/>
+        <p14:creationId xmlns:p14="http://schemas.microsoft.com/office/powerpoint/2010/main" val="94088135"/>
       </p:ext>
     </p:extLst>
   </p:cSld>
@@ -6881,7 +6881,7 @@
           <p:cNvPr id="8" name="chapter-label">
             <a:extLst xmlns:a="http://schemas.openxmlformats.org/drawingml/2006/main">
               <a:ext uri="{FF2B5EF4-FFF2-40B4-BE49-F238E27FC236}">
-                <a16:creationId xmlns:a16="http://schemas.microsoft.com/office/drawing/2014/main" id="{F3C8DC3E-71E1-4D6D-B1D4-D66FB7F2F3B6}"/>
+                <a16:creationId xmlns:a16="http://schemas.microsoft.com/office/drawing/2014/main" id="{DA2D60C3-C478-4D73-8722-2F80ABFFA634}"/>
               </a:ext>
             </a:extLst>
           </p:cNvPr>
@@ -6943,7 +6943,7 @@
           <p:cNvPr id="2" name="slide-title">
             <a:extLst xmlns:a="http://schemas.openxmlformats.org/drawingml/2006/main">
               <a:ext uri="{FF2B5EF4-FFF2-40B4-BE49-F238E27FC236}">
-                <a16:creationId xmlns:a16="http://schemas.microsoft.com/office/drawing/2014/main" id="{0A0ED004-4948-4DF6-9C6F-2FD0B354D60C}"/>
+                <a16:creationId xmlns:a16="http://schemas.microsoft.com/office/drawing/2014/main" id="{FE567DA6-5898-42CF-9CD1-4E2A9F0FC35D}"/>
               </a:ext>
             </a:extLst>
           </p:cNvPr>
@@ -7005,7 +7005,7 @@
           <p:cNvPr id="3" name="footer-rule">
             <a:extLst xmlns:a="http://schemas.openxmlformats.org/drawingml/2006/main">
               <a:ext uri="{FF2B5EF4-FFF2-40B4-BE49-F238E27FC236}">
-                <a16:creationId xmlns:a16="http://schemas.microsoft.com/office/drawing/2014/main" id="{4DD7DA99-37D1-47BF-ADDE-308CB78A2408}"/>
+                <a16:creationId xmlns:a16="http://schemas.microsoft.com/office/drawing/2014/main" id="{F2D8F672-6C71-4967-A3FC-508D1F527BC9}"/>
               </a:ext>
             </a:extLst>
           </p:cNvPr>
@@ -7036,7 +7036,7 @@
           <p:cNvPr id="4" name="footer-book">
             <a:extLst xmlns:a="http://schemas.openxmlformats.org/drawingml/2006/main">
               <a:ext uri="{FF2B5EF4-FFF2-40B4-BE49-F238E27FC236}">
-                <a16:creationId xmlns:a16="http://schemas.microsoft.com/office/drawing/2014/main" id="{A018424F-E6AE-46EF-9C57-4BD8774D207C}"/>
+                <a16:creationId xmlns:a16="http://schemas.microsoft.com/office/drawing/2014/main" id="{D9626494-8F03-43E4-9A38-D3712F7C7BCD}"/>
               </a:ext>
             </a:extLst>
           </p:cNvPr>
@@ -7098,7 +7098,7 @@
           <p:cNvPr id="5" name="footer-number">
             <a:extLst xmlns:a="http://schemas.openxmlformats.org/drawingml/2006/main">
               <a:ext uri="{FF2B5EF4-FFF2-40B4-BE49-F238E27FC236}">
-                <a16:creationId xmlns:a16="http://schemas.microsoft.com/office/drawing/2014/main" id="{169456CD-ECF6-4D6C-9BDA-FA5C91DBB12A}"/>
+                <a16:creationId xmlns:a16="http://schemas.microsoft.com/office/drawing/2014/main" id="{B80E1DBD-4BF0-422D-83B9-3D523F4DEA4A}"/>
               </a:ext>
             </a:extLst>
           </p:cNvPr>
@@ -7164,7 +7164,7 @@
           <p:nvPr/>
         </p:nvPicPr>
         <p:blipFill>
-          <a:blip xmlns:r="http://schemas.openxmlformats.org/officeDocument/2006/relationships" xmlns:a="http://schemas.openxmlformats.org/drawingml/2006/main" r:embed="R12a2b73194fe415d"/>
+          <a:blip xmlns:r="http://schemas.openxmlformats.org/officeDocument/2006/relationships" xmlns:a="http://schemas.openxmlformats.org/drawingml/2006/main" r:embed="R041b4e20f19f44b1"/>
           <a:stretch xmlns:a="http://schemas.openxmlformats.org/drawingml/2006/main"/>
         </p:blipFill>
         <p:spPr>
@@ -7182,7 +7182,7 @@
           <p:cNvPr id="7" name="">
             <a:extLst xmlns:a="http://schemas.openxmlformats.org/drawingml/2006/main">
               <a:ext uri="{FF2B5EF4-FFF2-40B4-BE49-F238E27FC236}">
-                <a16:creationId xmlns:a16="http://schemas.microsoft.com/office/drawing/2014/main" id="{C9C9FB24-9D1E-451A-906F-B2B3A87E06CC}"/>
+                <a16:creationId xmlns:a16="http://schemas.microsoft.com/office/drawing/2014/main" id="{ADE222C9-0A4A-4383-A048-FDCF7F8BBEAF}"/>
               </a:ext>
             </a:extLst>
           </p:cNvPr>
@@ -7242,7 +7242,7 @@
     </p:spTree>
     <p:extLst>
       <p:ext uri="{BB962C8B-B14F-4D97-AF65-F5344CB8AC3E}">
-        <p14:creationId xmlns:p14="http://schemas.microsoft.com/office/powerpoint/2010/main" val="979311901"/>
+        <p14:creationId xmlns:p14="http://schemas.microsoft.com/office/powerpoint/2010/main" val="311457612"/>
       </p:ext>
     </p:extLst>
   </p:cSld>
@@ -7273,7 +7273,7 @@
           <p:cNvPr id="19" name="chapter-label">
             <a:extLst xmlns:a="http://schemas.openxmlformats.org/drawingml/2006/main">
               <a:ext uri="{FF2B5EF4-FFF2-40B4-BE49-F238E27FC236}">
-                <a16:creationId xmlns:a16="http://schemas.microsoft.com/office/drawing/2014/main" id="{FC04EC12-6343-4452-B028-42E35FBC31EE}"/>
+                <a16:creationId xmlns:a16="http://schemas.microsoft.com/office/drawing/2014/main" id="{2379152F-3D6F-4087-81E1-AD426747FA24}"/>
               </a:ext>
             </a:extLst>
           </p:cNvPr>
@@ -7335,7 +7335,7 @@
           <p:cNvPr id="2" name="slide-title">
             <a:extLst xmlns:a="http://schemas.openxmlformats.org/drawingml/2006/main">
               <a:ext uri="{FF2B5EF4-FFF2-40B4-BE49-F238E27FC236}">
-                <a16:creationId xmlns:a16="http://schemas.microsoft.com/office/drawing/2014/main" id="{0C9ACD40-D598-482F-8C85-FD7DA9434AEC}"/>
+                <a16:creationId xmlns:a16="http://schemas.microsoft.com/office/drawing/2014/main" id="{3418CA7E-0BE1-46C9-9492-1CB4FCB7C5A7}"/>
               </a:ext>
             </a:extLst>
           </p:cNvPr>
@@ -7397,7 +7397,7 @@
           <p:cNvPr id="3" name="footer-rule">
             <a:extLst xmlns:a="http://schemas.openxmlformats.org/drawingml/2006/main">
               <a:ext uri="{FF2B5EF4-FFF2-40B4-BE49-F238E27FC236}">
-                <a16:creationId xmlns:a16="http://schemas.microsoft.com/office/drawing/2014/main" id="{498C8AEE-5798-4421-B729-547A3D8CE2C0}"/>
+                <a16:creationId xmlns:a16="http://schemas.microsoft.com/office/drawing/2014/main" id="{57266E97-C004-4104-82B4-F9CF8B6B7AE8}"/>
               </a:ext>
             </a:extLst>
           </p:cNvPr>
@@ -7428,7 +7428,7 @@
           <p:cNvPr id="4" name="footer-book">
             <a:extLst xmlns:a="http://schemas.openxmlformats.org/drawingml/2006/main">
               <a:ext uri="{FF2B5EF4-FFF2-40B4-BE49-F238E27FC236}">
-                <a16:creationId xmlns:a16="http://schemas.microsoft.com/office/drawing/2014/main" id="{1CB2C327-CC8A-4C7B-8740-7269BE757557}"/>
+                <a16:creationId xmlns:a16="http://schemas.microsoft.com/office/drawing/2014/main" id="{00698D2C-7D65-405E-AA82-A42AE85D95E0}"/>
               </a:ext>
             </a:extLst>
           </p:cNvPr>
@@ -7490,7 +7490,7 @@
           <p:cNvPr id="5" name="footer-number">
             <a:extLst xmlns:a="http://schemas.openxmlformats.org/drawingml/2006/main">
               <a:ext uri="{FF2B5EF4-FFF2-40B4-BE49-F238E27FC236}">
-                <a16:creationId xmlns:a16="http://schemas.microsoft.com/office/drawing/2014/main" id="{660530EB-5F67-46A5-91D9-39A4D7F70E0D}"/>
+                <a16:creationId xmlns:a16="http://schemas.microsoft.com/office/drawing/2014/main" id="{AC862414-5204-49D2-BCC9-08DB75F3C902}"/>
               </a:ext>
             </a:extLst>
           </p:cNvPr>
@@ -7552,7 +7552,7 @@
           <p:cNvPr id="6" name="panel-1">
             <a:extLst xmlns:a="http://schemas.openxmlformats.org/drawingml/2006/main">
               <a:ext uri="{FF2B5EF4-FFF2-40B4-BE49-F238E27FC236}">
-                <a16:creationId xmlns:a16="http://schemas.microsoft.com/office/drawing/2014/main" id="{A3478FC8-62E3-4DE0-877E-70A4E6505DD2}"/>
+                <a16:creationId xmlns:a16="http://schemas.microsoft.com/office/drawing/2014/main" id="{6FF03535-4491-43D5-9E9A-49712BED8E62}"/>
               </a:ext>
             </a:extLst>
           </p:cNvPr>
@@ -7585,7 +7585,7 @@
           <p:cNvPr id="7" name="">
             <a:extLst xmlns:a="http://schemas.openxmlformats.org/drawingml/2006/main">
               <a:ext uri="{FF2B5EF4-FFF2-40B4-BE49-F238E27FC236}">
-                <a16:creationId xmlns:a16="http://schemas.microsoft.com/office/drawing/2014/main" id="{F8038B91-0041-4FB0-8F96-FC659A25A8F2}"/>
+                <a16:creationId xmlns:a16="http://schemas.microsoft.com/office/drawing/2014/main" id="{4C335075-4A83-402A-A7AD-C2B1F44421ED}"/>
               </a:ext>
             </a:extLst>
           </p:cNvPr>
@@ -7647,7 +7647,7 @@
           <p:cNvPr id="8" name="">
             <a:extLst xmlns:a="http://schemas.openxmlformats.org/drawingml/2006/main">
               <a:ext uri="{FF2B5EF4-FFF2-40B4-BE49-F238E27FC236}">
-                <a16:creationId xmlns:a16="http://schemas.microsoft.com/office/drawing/2014/main" id="{EDDF1EBD-0DA7-42D3-A361-E9D0E3EED068}"/>
+                <a16:creationId xmlns:a16="http://schemas.microsoft.com/office/drawing/2014/main" id="{2C9F2E69-BE6F-40F5-9BE1-1AF30DFD6FBB}"/>
               </a:ext>
             </a:extLst>
           </p:cNvPr>
@@ -7709,7 +7709,7 @@
           <p:cNvPr id="9" name="">
             <a:extLst xmlns:a="http://schemas.openxmlformats.org/drawingml/2006/main">
               <a:ext uri="{FF2B5EF4-FFF2-40B4-BE49-F238E27FC236}">
-                <a16:creationId xmlns:a16="http://schemas.microsoft.com/office/drawing/2014/main" id="{8DEC17BE-D86D-4089-8F49-CD52F71CB70F}"/>
+                <a16:creationId xmlns:a16="http://schemas.microsoft.com/office/drawing/2014/main" id="{14288790-C6BB-4213-B2C5-200439C745A4}"/>
               </a:ext>
             </a:extLst>
           </p:cNvPr>
@@ -7771,7 +7771,7 @@
           <p:cNvPr id="10" name="panel-2">
             <a:extLst xmlns:a="http://schemas.openxmlformats.org/drawingml/2006/main">
               <a:ext uri="{FF2B5EF4-FFF2-40B4-BE49-F238E27FC236}">
-                <a16:creationId xmlns:a16="http://schemas.microsoft.com/office/drawing/2014/main" id="{A9437BD4-377B-48EB-91BB-119052A2F675}"/>
+                <a16:creationId xmlns:a16="http://schemas.microsoft.com/office/drawing/2014/main" id="{51C021D3-B568-4FC3-87F5-B0A6DAFACB12}"/>
               </a:ext>
             </a:extLst>
           </p:cNvPr>
@@ -7804,7 +7804,7 @@
           <p:cNvPr id="11" name="">
             <a:extLst xmlns:a="http://schemas.openxmlformats.org/drawingml/2006/main">
               <a:ext uri="{FF2B5EF4-FFF2-40B4-BE49-F238E27FC236}">
-                <a16:creationId xmlns:a16="http://schemas.microsoft.com/office/drawing/2014/main" id="{0BC357FC-46CB-4F55-8C36-A2660239D8BA}"/>
+                <a16:creationId xmlns:a16="http://schemas.microsoft.com/office/drawing/2014/main" id="{B0BDEBD1-24DE-40ED-8C9C-F835D3F847E6}"/>
               </a:ext>
             </a:extLst>
           </p:cNvPr>
@@ -7866,7 +7866,7 @@
           <p:cNvPr id="12" name="">
             <a:extLst xmlns:a="http://schemas.openxmlformats.org/drawingml/2006/main">
               <a:ext uri="{FF2B5EF4-FFF2-40B4-BE49-F238E27FC236}">
-                <a16:creationId xmlns:a16="http://schemas.microsoft.com/office/drawing/2014/main" id="{5030A390-2E35-40FB-850E-C26DDDD06284}"/>
+                <a16:creationId xmlns:a16="http://schemas.microsoft.com/office/drawing/2014/main" id="{E4D92958-2EDB-466B-9D7D-AB6A295D8620}"/>
               </a:ext>
             </a:extLst>
           </p:cNvPr>
@@ -7928,7 +7928,7 @@
           <p:cNvPr id="13" name="">
             <a:extLst xmlns:a="http://schemas.openxmlformats.org/drawingml/2006/main">
               <a:ext uri="{FF2B5EF4-FFF2-40B4-BE49-F238E27FC236}">
-                <a16:creationId xmlns:a16="http://schemas.microsoft.com/office/drawing/2014/main" id="{029EB711-CC73-4C2A-95D2-0524300F1B91}"/>
+                <a16:creationId xmlns:a16="http://schemas.microsoft.com/office/drawing/2014/main" id="{7D8FF166-6564-4FBF-89EA-EC628F0E184C}"/>
               </a:ext>
             </a:extLst>
           </p:cNvPr>
@@ -7990,7 +7990,7 @@
           <p:cNvPr id="14" name="panel-3">
             <a:extLst xmlns:a="http://schemas.openxmlformats.org/drawingml/2006/main">
               <a:ext uri="{FF2B5EF4-FFF2-40B4-BE49-F238E27FC236}">
-                <a16:creationId xmlns:a16="http://schemas.microsoft.com/office/drawing/2014/main" id="{951E4220-DDB9-4665-9C90-D758390A5A67}"/>
+                <a16:creationId xmlns:a16="http://schemas.microsoft.com/office/drawing/2014/main" id="{5B27C88D-4E37-40A5-AFCA-66A8EB7D06A5}"/>
               </a:ext>
             </a:extLst>
           </p:cNvPr>
@@ -8023,7 +8023,7 @@
           <p:cNvPr id="15" name="">
             <a:extLst xmlns:a="http://schemas.openxmlformats.org/drawingml/2006/main">
               <a:ext uri="{FF2B5EF4-FFF2-40B4-BE49-F238E27FC236}">
-                <a16:creationId xmlns:a16="http://schemas.microsoft.com/office/drawing/2014/main" id="{7A22E00B-F1D0-4020-944D-F84A6401C9C3}"/>
+                <a16:creationId xmlns:a16="http://schemas.microsoft.com/office/drawing/2014/main" id="{52CDCF27-EA44-47CE-8C53-458FAE961F25}"/>
               </a:ext>
             </a:extLst>
           </p:cNvPr>
@@ -8085,7 +8085,7 @@
           <p:cNvPr id="16" name="">
             <a:extLst xmlns:a="http://schemas.openxmlformats.org/drawingml/2006/main">
               <a:ext uri="{FF2B5EF4-FFF2-40B4-BE49-F238E27FC236}">
-                <a16:creationId xmlns:a16="http://schemas.microsoft.com/office/drawing/2014/main" id="{1008E22E-865B-448A-9856-B7A63E89EFB8}"/>
+                <a16:creationId xmlns:a16="http://schemas.microsoft.com/office/drawing/2014/main" id="{4947E84F-AF30-4053-820E-F15EC35582B9}"/>
               </a:ext>
             </a:extLst>
           </p:cNvPr>
@@ -8147,7 +8147,7 @@
           <p:cNvPr id="17" name="">
             <a:extLst xmlns:a="http://schemas.openxmlformats.org/drawingml/2006/main">
               <a:ext uri="{FF2B5EF4-FFF2-40B4-BE49-F238E27FC236}">
-                <a16:creationId xmlns:a16="http://schemas.microsoft.com/office/drawing/2014/main" id="{D28B2F5D-772F-4946-B342-92269667B447}"/>
+                <a16:creationId xmlns:a16="http://schemas.microsoft.com/office/drawing/2014/main" id="{2C60BA1C-CD33-4389-8390-841642E9D2D3}"/>
               </a:ext>
             </a:extLst>
           </p:cNvPr>
@@ -8209,7 +8209,7 @@
           <p:cNvPr id="18" name="">
             <a:extLst xmlns:a="http://schemas.openxmlformats.org/drawingml/2006/main">
               <a:ext uri="{FF2B5EF4-FFF2-40B4-BE49-F238E27FC236}">
-                <a16:creationId xmlns:a16="http://schemas.microsoft.com/office/drawing/2014/main" id="{62BEEF26-5D26-43EF-B9B5-298636BEE1E6}"/>
+                <a16:creationId xmlns:a16="http://schemas.microsoft.com/office/drawing/2014/main" id="{3C8AB65A-0AE8-4514-9559-DE631D652A7E}"/>
               </a:ext>
             </a:extLst>
           </p:cNvPr>
@@ -8269,7 +8269,7 @@
     </p:spTree>
     <p:extLst>
       <p:ext uri="{BB962C8B-B14F-4D97-AF65-F5344CB8AC3E}">
-        <p14:creationId xmlns:p14="http://schemas.microsoft.com/office/powerpoint/2010/main" val="1720488930"/>
+        <p14:creationId xmlns:p14="http://schemas.microsoft.com/office/powerpoint/2010/main" val="1132712769"/>
       </p:ext>
     </p:extLst>
   </p:cSld>
@@ -8300,7 +8300,7 @@
           <p:cNvPr id="17" name="chapter-label">
             <a:extLst xmlns:a="http://schemas.openxmlformats.org/drawingml/2006/main">
               <a:ext uri="{FF2B5EF4-FFF2-40B4-BE49-F238E27FC236}">
-                <a16:creationId xmlns:a16="http://schemas.microsoft.com/office/drawing/2014/main" id="{63DEB131-5419-44FF-B4CF-1F435B842BAF}"/>
+                <a16:creationId xmlns:a16="http://schemas.microsoft.com/office/drawing/2014/main" id="{FA720163-013B-4FA2-82EE-944A3CEFFD00}"/>
               </a:ext>
             </a:extLst>
           </p:cNvPr>
@@ -8362,7 +8362,7 @@
           <p:cNvPr id="2" name="slide-title">
             <a:extLst xmlns:a="http://schemas.openxmlformats.org/drawingml/2006/main">
               <a:ext uri="{FF2B5EF4-FFF2-40B4-BE49-F238E27FC236}">
-                <a16:creationId xmlns:a16="http://schemas.microsoft.com/office/drawing/2014/main" id="{6A123AD2-F1F2-4F6B-87FF-44BDF5AFAAA3}"/>
+                <a16:creationId xmlns:a16="http://schemas.microsoft.com/office/drawing/2014/main" id="{8C562079-B815-45C1-8499-7D3AC37AFF87}"/>
               </a:ext>
             </a:extLst>
           </p:cNvPr>
@@ -8424,7 +8424,7 @@
           <p:cNvPr id="3" name="footer-rule">
             <a:extLst xmlns:a="http://schemas.openxmlformats.org/drawingml/2006/main">
               <a:ext uri="{FF2B5EF4-FFF2-40B4-BE49-F238E27FC236}">
-                <a16:creationId xmlns:a16="http://schemas.microsoft.com/office/drawing/2014/main" id="{DE39101A-33F8-4EFD-9F74-5C597CDFE682}"/>
+                <a16:creationId xmlns:a16="http://schemas.microsoft.com/office/drawing/2014/main" id="{F701776E-8567-4D92-BDC0-F9422F8C776F}"/>
               </a:ext>
             </a:extLst>
           </p:cNvPr>
@@ -8455,7 +8455,7 @@
           <p:cNvPr id="4" name="footer-book">
             <a:extLst xmlns:a="http://schemas.openxmlformats.org/drawingml/2006/main">
               <a:ext uri="{FF2B5EF4-FFF2-40B4-BE49-F238E27FC236}">
-                <a16:creationId xmlns:a16="http://schemas.microsoft.com/office/drawing/2014/main" id="{3BA12EDF-81B3-4337-BF4E-2DFA75403764}"/>
+                <a16:creationId xmlns:a16="http://schemas.microsoft.com/office/drawing/2014/main" id="{1DB7107D-94AD-448E-8132-5B61A7C69450}"/>
               </a:ext>
             </a:extLst>
           </p:cNvPr>
@@ -8517,7 +8517,7 @@
           <p:cNvPr id="5" name="footer-number">
             <a:extLst xmlns:a="http://schemas.openxmlformats.org/drawingml/2006/main">
               <a:ext uri="{FF2B5EF4-FFF2-40B4-BE49-F238E27FC236}">
-                <a16:creationId xmlns:a16="http://schemas.microsoft.com/office/drawing/2014/main" id="{FC4A2DE2-6A96-4E74-A210-6795BE2DDD3A}"/>
+                <a16:creationId xmlns:a16="http://schemas.microsoft.com/office/drawing/2014/main" id="{0FEA6B2E-4811-4C24-8C3F-578C69806F1E}"/>
               </a:ext>
             </a:extLst>
           </p:cNvPr>
@@ -8579,7 +8579,7 @@
           <p:cNvPr id="6" name="bullet-mark-1">
             <a:extLst xmlns:a="http://schemas.openxmlformats.org/drawingml/2006/main">
               <a:ext uri="{FF2B5EF4-FFF2-40B4-BE49-F238E27FC236}">
-                <a16:creationId xmlns:a16="http://schemas.microsoft.com/office/drawing/2014/main" id="{3CC496EB-E0E3-420C-8209-CBEFFE4FE27F}"/>
+                <a16:creationId xmlns:a16="http://schemas.microsoft.com/office/drawing/2014/main" id="{0E9BC683-D8A2-489F-AAF3-2E29167C9F10}"/>
               </a:ext>
             </a:extLst>
           </p:cNvPr>
@@ -8641,7 +8641,7 @@
           <p:cNvPr id="7" name="bullet-1">
             <a:extLst xmlns:a="http://schemas.openxmlformats.org/drawingml/2006/main">
               <a:ext uri="{FF2B5EF4-FFF2-40B4-BE49-F238E27FC236}">
-                <a16:creationId xmlns:a16="http://schemas.microsoft.com/office/drawing/2014/main" id="{46546681-54CA-4A22-8B63-D1F079CE6F18}"/>
+                <a16:creationId xmlns:a16="http://schemas.microsoft.com/office/drawing/2014/main" id="{6E0F5FBC-7CC3-4316-B855-9D77440BC2D4}"/>
               </a:ext>
             </a:extLst>
           </p:cNvPr>
@@ -8703,7 +8703,7 @@
           <p:cNvPr id="8" name="bullet-mark-2">
             <a:extLst xmlns:a="http://schemas.openxmlformats.org/drawingml/2006/main">
               <a:ext uri="{FF2B5EF4-FFF2-40B4-BE49-F238E27FC236}">
-                <a16:creationId xmlns:a16="http://schemas.microsoft.com/office/drawing/2014/main" id="{0E423D2C-71B7-400A-9B9B-EEEAEB8B4D32}"/>
+                <a16:creationId xmlns:a16="http://schemas.microsoft.com/office/drawing/2014/main" id="{98F453EE-959D-4130-9AA3-CEA2858124CD}"/>
               </a:ext>
             </a:extLst>
           </p:cNvPr>
@@ -8765,7 +8765,7 @@
           <p:cNvPr id="9" name="bullet-2">
             <a:extLst xmlns:a="http://schemas.openxmlformats.org/drawingml/2006/main">
               <a:ext uri="{FF2B5EF4-FFF2-40B4-BE49-F238E27FC236}">
-                <a16:creationId xmlns:a16="http://schemas.microsoft.com/office/drawing/2014/main" id="{42B02614-97AB-4444-ABCA-CE94BEEAD067}"/>
+                <a16:creationId xmlns:a16="http://schemas.microsoft.com/office/drawing/2014/main" id="{0C4C4439-B4DA-4BC3-9A9A-4D10FA5B0D4C}"/>
               </a:ext>
             </a:extLst>
           </p:cNvPr>
@@ -8827,7 +8827,7 @@
           <p:cNvPr id="10" name="bullet-mark-3">
             <a:extLst xmlns:a="http://schemas.openxmlformats.org/drawingml/2006/main">
               <a:ext uri="{FF2B5EF4-FFF2-40B4-BE49-F238E27FC236}">
-                <a16:creationId xmlns:a16="http://schemas.microsoft.com/office/drawing/2014/main" id="{A1D0702A-5C3A-4230-BAAB-89002357B185}"/>
+                <a16:creationId xmlns:a16="http://schemas.microsoft.com/office/drawing/2014/main" id="{5E49BCE8-36CC-4A77-A6AC-0602AADDAE99}"/>
               </a:ext>
             </a:extLst>
           </p:cNvPr>
@@ -8889,7 +8889,7 @@
           <p:cNvPr id="11" name="bullet-3">
             <a:extLst xmlns:a="http://schemas.openxmlformats.org/drawingml/2006/main">
               <a:ext uri="{FF2B5EF4-FFF2-40B4-BE49-F238E27FC236}">
-                <a16:creationId xmlns:a16="http://schemas.microsoft.com/office/drawing/2014/main" id="{6F2E58F2-1B8E-4E06-8487-753CA35C2BC9}"/>
+                <a16:creationId xmlns:a16="http://schemas.microsoft.com/office/drawing/2014/main" id="{2B3F2784-C139-47C3-A617-17DCDC422D58}"/>
               </a:ext>
             </a:extLst>
           </p:cNvPr>
@@ -8951,7 +8951,7 @@
           <p:cNvPr id="12" name="bullet-mark-4">
             <a:extLst xmlns:a="http://schemas.openxmlformats.org/drawingml/2006/main">
               <a:ext uri="{FF2B5EF4-FFF2-40B4-BE49-F238E27FC236}">
-                <a16:creationId xmlns:a16="http://schemas.microsoft.com/office/drawing/2014/main" id="{E4C0C78B-67C6-483A-8CD3-7B786181761B}"/>
+                <a16:creationId xmlns:a16="http://schemas.microsoft.com/office/drawing/2014/main" id="{F3E8256B-F250-47F5-8104-5F39FC9246B2}"/>
               </a:ext>
             </a:extLst>
           </p:cNvPr>
@@ -9013,7 +9013,7 @@
           <p:cNvPr id="13" name="bullet-4">
             <a:extLst xmlns:a="http://schemas.openxmlformats.org/drawingml/2006/main">
               <a:ext uri="{FF2B5EF4-FFF2-40B4-BE49-F238E27FC236}">
-                <a16:creationId xmlns:a16="http://schemas.microsoft.com/office/drawing/2014/main" id="{6A2A6193-7D4C-4F09-9650-AB65C0D14392}"/>
+                <a16:creationId xmlns:a16="http://schemas.microsoft.com/office/drawing/2014/main" id="{712BF3C5-8B77-423C-89B8-7BEE8CD5091A}"/>
               </a:ext>
             </a:extLst>
           </p:cNvPr>
@@ -9075,7 +9075,7 @@
           <p:cNvPr id="14" name="bullet-mark-5">
             <a:extLst xmlns:a="http://schemas.openxmlformats.org/drawingml/2006/main">
               <a:ext uri="{FF2B5EF4-FFF2-40B4-BE49-F238E27FC236}">
-                <a16:creationId xmlns:a16="http://schemas.microsoft.com/office/drawing/2014/main" id="{14F2ECD4-C65C-4E9D-8E3E-E370D7371AA9}"/>
+                <a16:creationId xmlns:a16="http://schemas.microsoft.com/office/drawing/2014/main" id="{3C45DF3D-C120-40A4-9699-4B99DB56470E}"/>
               </a:ext>
             </a:extLst>
           </p:cNvPr>
@@ -9137,7 +9137,7 @@
           <p:cNvPr id="15" name="bullet-5">
             <a:extLst xmlns:a="http://schemas.openxmlformats.org/drawingml/2006/main">
               <a:ext uri="{FF2B5EF4-FFF2-40B4-BE49-F238E27FC236}">
-                <a16:creationId xmlns:a16="http://schemas.microsoft.com/office/drawing/2014/main" id="{04CBCB42-ABC3-4EB6-934D-6DEC2E88E472}"/>
+                <a16:creationId xmlns:a16="http://schemas.microsoft.com/office/drawing/2014/main" id="{757FB077-8147-4D85-A282-DCE701ADBD81}"/>
               </a:ext>
             </a:extLst>
           </p:cNvPr>
@@ -9199,7 +9199,7 @@
           <p:cNvPr id="16" name="">
             <a:extLst xmlns:a="http://schemas.openxmlformats.org/drawingml/2006/main">
               <a:ext uri="{FF2B5EF4-FFF2-40B4-BE49-F238E27FC236}">
-                <a16:creationId xmlns:a16="http://schemas.microsoft.com/office/drawing/2014/main" id="{EBABB678-17BC-4BA4-94B8-7A0AAFEB5496}"/>
+                <a16:creationId xmlns:a16="http://schemas.microsoft.com/office/drawing/2014/main" id="{928B9B95-2649-4220-BCEA-93BFC81DA326}"/>
               </a:ext>
             </a:extLst>
           </p:cNvPr>
@@ -9259,7 +9259,7 @@
     </p:spTree>
     <p:extLst>
       <p:ext uri="{BB962C8B-B14F-4D97-AF65-F5344CB8AC3E}">
-        <p14:creationId xmlns:p14="http://schemas.microsoft.com/office/powerpoint/2010/main" val="686576133"/>
+        <p14:creationId xmlns:p14="http://schemas.microsoft.com/office/powerpoint/2010/main" val="1568636076"/>
       </p:ext>
     </p:extLst>
   </p:cSld>
@@ -9290,7 +9290,7 @@
           <p:cNvPr id="15" name="chapter-label">
             <a:extLst xmlns:a="http://schemas.openxmlformats.org/drawingml/2006/main">
               <a:ext uri="{FF2B5EF4-FFF2-40B4-BE49-F238E27FC236}">
-                <a16:creationId xmlns:a16="http://schemas.microsoft.com/office/drawing/2014/main" id="{E26736C5-5749-40F8-BDE6-DE5E1705D8E7}"/>
+                <a16:creationId xmlns:a16="http://schemas.microsoft.com/office/drawing/2014/main" id="{8BF073EF-4B72-457C-B13B-57EEEC610A5E}"/>
               </a:ext>
             </a:extLst>
           </p:cNvPr>
@@ -9352,7 +9352,7 @@
           <p:cNvPr id="2" name="slide-title">
             <a:extLst xmlns:a="http://schemas.openxmlformats.org/drawingml/2006/main">
               <a:ext uri="{FF2B5EF4-FFF2-40B4-BE49-F238E27FC236}">
-                <a16:creationId xmlns:a16="http://schemas.microsoft.com/office/drawing/2014/main" id="{886574D6-60F3-4CE0-B4CB-87234987E479}"/>
+                <a16:creationId xmlns:a16="http://schemas.microsoft.com/office/drawing/2014/main" id="{F13C73ED-2631-4783-9D99-27420C1C3546}"/>
               </a:ext>
             </a:extLst>
           </p:cNvPr>
@@ -9414,7 +9414,7 @@
           <p:cNvPr id="3" name="footer-rule">
             <a:extLst xmlns:a="http://schemas.openxmlformats.org/drawingml/2006/main">
               <a:ext uri="{FF2B5EF4-FFF2-40B4-BE49-F238E27FC236}">
-                <a16:creationId xmlns:a16="http://schemas.microsoft.com/office/drawing/2014/main" id="{E38D64AC-DAFA-4AA8-95D9-6F7B25DB5C4D}"/>
+                <a16:creationId xmlns:a16="http://schemas.microsoft.com/office/drawing/2014/main" id="{3D265A18-491E-4F9C-A62B-E2EE454D5F25}"/>
               </a:ext>
             </a:extLst>
           </p:cNvPr>
@@ -9445,7 +9445,7 @@
           <p:cNvPr id="4" name="footer-book">
             <a:extLst xmlns:a="http://schemas.openxmlformats.org/drawingml/2006/main">
               <a:ext uri="{FF2B5EF4-FFF2-40B4-BE49-F238E27FC236}">
-                <a16:creationId xmlns:a16="http://schemas.microsoft.com/office/drawing/2014/main" id="{928DBD2C-69C8-4145-9D4A-40A4D4CBA483}"/>
+                <a16:creationId xmlns:a16="http://schemas.microsoft.com/office/drawing/2014/main" id="{CD20C48E-AFB8-4635-8BEF-CABCBBD1B1A4}"/>
               </a:ext>
             </a:extLst>
           </p:cNvPr>
@@ -9507,7 +9507,7 @@
           <p:cNvPr id="5" name="footer-number">
             <a:extLst xmlns:a="http://schemas.openxmlformats.org/drawingml/2006/main">
               <a:ext uri="{FF2B5EF4-FFF2-40B4-BE49-F238E27FC236}">
-                <a16:creationId xmlns:a16="http://schemas.microsoft.com/office/drawing/2014/main" id="{B372737B-B36B-4919-864A-A81A66C4C9AA}"/>
+                <a16:creationId xmlns:a16="http://schemas.microsoft.com/office/drawing/2014/main" id="{6C0EC433-60FA-47BD-8663-5F894D8FFD04}"/>
               </a:ext>
             </a:extLst>
           </p:cNvPr>
@@ -9569,7 +9569,7 @@
           <p:cNvPr id="6" name="panel-1">
             <a:extLst xmlns:a="http://schemas.openxmlformats.org/drawingml/2006/main">
               <a:ext uri="{FF2B5EF4-FFF2-40B4-BE49-F238E27FC236}">
-                <a16:creationId xmlns:a16="http://schemas.microsoft.com/office/drawing/2014/main" id="{5AD59FE9-8E16-467B-9D27-1E2677BD994F}"/>
+                <a16:creationId xmlns:a16="http://schemas.microsoft.com/office/drawing/2014/main" id="{D665BD44-4AD0-4D34-8D36-C736FC257B49}"/>
               </a:ext>
             </a:extLst>
           </p:cNvPr>
@@ -9602,7 +9602,7 @@
           <p:cNvPr id="7" name="">
             <a:extLst xmlns:a="http://schemas.openxmlformats.org/drawingml/2006/main">
               <a:ext uri="{FF2B5EF4-FFF2-40B4-BE49-F238E27FC236}">
-                <a16:creationId xmlns:a16="http://schemas.microsoft.com/office/drawing/2014/main" id="{AE7E76D6-02A0-46C2-97D8-A95360F250BB}"/>
+                <a16:creationId xmlns:a16="http://schemas.microsoft.com/office/drawing/2014/main" id="{EAE17CBE-47C3-4154-B737-DE21AAB7F69D}"/>
               </a:ext>
             </a:extLst>
           </p:cNvPr>
@@ -9664,7 +9664,7 @@
           <p:cNvPr id="8" name="">
             <a:extLst xmlns:a="http://schemas.openxmlformats.org/drawingml/2006/main">
               <a:ext uri="{FF2B5EF4-FFF2-40B4-BE49-F238E27FC236}">
-                <a16:creationId xmlns:a16="http://schemas.microsoft.com/office/drawing/2014/main" id="{819D769D-853E-4368-A2BA-0CA9C4CCF03C}"/>
+                <a16:creationId xmlns:a16="http://schemas.microsoft.com/office/drawing/2014/main" id="{FF2F9F17-AB08-4402-98C5-D9E7A6374F1C}"/>
               </a:ext>
             </a:extLst>
           </p:cNvPr>
@@ -9726,7 +9726,7 @@
           <p:cNvPr id="9" name="">
             <a:extLst xmlns:a="http://schemas.openxmlformats.org/drawingml/2006/main">
               <a:ext uri="{FF2B5EF4-FFF2-40B4-BE49-F238E27FC236}">
-                <a16:creationId xmlns:a16="http://schemas.microsoft.com/office/drawing/2014/main" id="{C3C776E9-B2C2-433D-A67B-7E842BDC6405}"/>
+                <a16:creationId xmlns:a16="http://schemas.microsoft.com/office/drawing/2014/main" id="{54F60EED-EC3C-471A-9501-A0B6C1BEC63B}"/>
               </a:ext>
             </a:extLst>
           </p:cNvPr>
@@ -9788,7 +9788,7 @@
           <p:cNvPr id="10" name="panel-2">
             <a:extLst xmlns:a="http://schemas.openxmlformats.org/drawingml/2006/main">
               <a:ext uri="{FF2B5EF4-FFF2-40B4-BE49-F238E27FC236}">
-                <a16:creationId xmlns:a16="http://schemas.microsoft.com/office/drawing/2014/main" id="{751C9C23-AA92-4330-8BA1-B2FC8051C830}"/>
+                <a16:creationId xmlns:a16="http://schemas.microsoft.com/office/drawing/2014/main" id="{05F56955-0CFD-42A6-A8A4-8B0A6A04502D}"/>
               </a:ext>
             </a:extLst>
           </p:cNvPr>
@@ -9821,7 +9821,7 @@
           <p:cNvPr id="11" name="">
             <a:extLst xmlns:a="http://schemas.openxmlformats.org/drawingml/2006/main">
               <a:ext uri="{FF2B5EF4-FFF2-40B4-BE49-F238E27FC236}">
-                <a16:creationId xmlns:a16="http://schemas.microsoft.com/office/drawing/2014/main" id="{0B0303AE-F59F-4CF3-8D71-249C3F7FF0A6}"/>
+                <a16:creationId xmlns:a16="http://schemas.microsoft.com/office/drawing/2014/main" id="{7EEBB96E-FD3C-47A3-940C-D06782E2C1FE}"/>
               </a:ext>
             </a:extLst>
           </p:cNvPr>
@@ -9883,7 +9883,7 @@
           <p:cNvPr id="12" name="">
             <a:extLst xmlns:a="http://schemas.openxmlformats.org/drawingml/2006/main">
               <a:ext uri="{FF2B5EF4-FFF2-40B4-BE49-F238E27FC236}">
-                <a16:creationId xmlns:a16="http://schemas.microsoft.com/office/drawing/2014/main" id="{222E04F7-A508-4372-AF5C-2EB069345F15}"/>
+                <a16:creationId xmlns:a16="http://schemas.microsoft.com/office/drawing/2014/main" id="{B0A975BD-3135-4A5A-960A-B7485941B48F}"/>
               </a:ext>
             </a:extLst>
           </p:cNvPr>
@@ -9945,7 +9945,7 @@
           <p:cNvPr id="13" name="">
             <a:extLst xmlns:a="http://schemas.openxmlformats.org/drawingml/2006/main">
               <a:ext uri="{FF2B5EF4-FFF2-40B4-BE49-F238E27FC236}">
-                <a16:creationId xmlns:a16="http://schemas.microsoft.com/office/drawing/2014/main" id="{6E4E77C1-0E65-4CE4-B78A-455EFCFB4B81}"/>
+                <a16:creationId xmlns:a16="http://schemas.microsoft.com/office/drawing/2014/main" id="{80554665-DE8B-4E30-8DFC-57E50ED30F61}"/>
               </a:ext>
             </a:extLst>
           </p:cNvPr>
@@ -10007,7 +10007,7 @@
           <p:cNvPr id="14" name="">
             <a:extLst xmlns:a="http://schemas.openxmlformats.org/drawingml/2006/main">
               <a:ext uri="{FF2B5EF4-FFF2-40B4-BE49-F238E27FC236}">
-                <a16:creationId xmlns:a16="http://schemas.microsoft.com/office/drawing/2014/main" id="{8E11171D-DC52-4A1C-826B-B5DB6462D627}"/>
+                <a16:creationId xmlns:a16="http://schemas.microsoft.com/office/drawing/2014/main" id="{61041E66-32BF-45F5-ADF9-DA5CBE7D377C}"/>
               </a:ext>
             </a:extLst>
           </p:cNvPr>
@@ -10067,7 +10067,7 @@
     </p:spTree>
     <p:extLst>
       <p:ext uri="{BB962C8B-B14F-4D97-AF65-F5344CB8AC3E}">
-        <p14:creationId xmlns:p14="http://schemas.microsoft.com/office/powerpoint/2010/main" val="414908589"/>
+        <p14:creationId xmlns:p14="http://schemas.microsoft.com/office/powerpoint/2010/main" val="1507347085"/>
       </p:ext>
     </p:extLst>
   </p:cSld>
@@ -10098,7 +10098,7 @@
           <p:cNvPr id="11" name="">
             <a:extLst xmlns:a="http://schemas.openxmlformats.org/drawingml/2006/main">
               <a:ext uri="{FF2B5EF4-FFF2-40B4-BE49-F238E27FC236}">
-                <a16:creationId xmlns:a16="http://schemas.microsoft.com/office/drawing/2014/main" id="{9BE2CD63-69A9-41E6-A7C5-A5FC10B4D67A}"/>
+                <a16:creationId xmlns:a16="http://schemas.microsoft.com/office/drawing/2014/main" id="{6F788EF7-477E-4D0A-9F81-3A9E95906BBD}"/>
               </a:ext>
             </a:extLst>
           </p:cNvPr>
@@ -10160,7 +10160,7 @@
           <p:cNvPr id="2" name="bullet-mark-1">
             <a:extLst xmlns:a="http://schemas.openxmlformats.org/drawingml/2006/main">
               <a:ext uri="{FF2B5EF4-FFF2-40B4-BE49-F238E27FC236}">
-                <a16:creationId xmlns:a16="http://schemas.microsoft.com/office/drawing/2014/main" id="{49A63365-0D5D-4B30-860C-18CB7A054F09}"/>
+                <a16:creationId xmlns:a16="http://schemas.microsoft.com/office/drawing/2014/main" id="{AC8EC1B9-3100-4F8A-B85C-B47434AABE8C}"/>
               </a:ext>
             </a:extLst>
           </p:cNvPr>
@@ -10222,7 +10222,7 @@
           <p:cNvPr id="3" name="bullet-1">
             <a:extLst xmlns:a="http://schemas.openxmlformats.org/drawingml/2006/main">
               <a:ext uri="{FF2B5EF4-FFF2-40B4-BE49-F238E27FC236}">
-                <a16:creationId xmlns:a16="http://schemas.microsoft.com/office/drawing/2014/main" id="{90995AF3-1AED-45DD-B73A-ED6DA8744193}"/>
+                <a16:creationId xmlns:a16="http://schemas.microsoft.com/office/drawing/2014/main" id="{83519EA9-01C7-4B88-981C-4A0D4D26C652}"/>
               </a:ext>
             </a:extLst>
           </p:cNvPr>
@@ -10284,7 +10284,7 @@
           <p:cNvPr id="4" name="bullet-mark-2">
             <a:extLst xmlns:a="http://schemas.openxmlformats.org/drawingml/2006/main">
               <a:ext uri="{FF2B5EF4-FFF2-40B4-BE49-F238E27FC236}">
-                <a16:creationId xmlns:a16="http://schemas.microsoft.com/office/drawing/2014/main" id="{3AC08ACF-E74B-4477-BC8E-D4D82DE2887A}"/>
+                <a16:creationId xmlns:a16="http://schemas.microsoft.com/office/drawing/2014/main" id="{45EE87B8-3FCC-4F2A-AF93-0B7D9B200D19}"/>
               </a:ext>
             </a:extLst>
           </p:cNvPr>
@@ -10346,7 +10346,7 @@
           <p:cNvPr id="5" name="bullet-2">
             <a:extLst xmlns:a="http://schemas.openxmlformats.org/drawingml/2006/main">
               <a:ext uri="{FF2B5EF4-FFF2-40B4-BE49-F238E27FC236}">
-                <a16:creationId xmlns:a16="http://schemas.microsoft.com/office/drawing/2014/main" id="{76FDB0A1-D10B-4F8D-9495-23443104CE59}"/>
+                <a16:creationId xmlns:a16="http://schemas.microsoft.com/office/drawing/2014/main" id="{9AFC3E91-500F-475B-B783-E21A59AFF881}"/>
               </a:ext>
             </a:extLst>
           </p:cNvPr>
@@ -10408,7 +10408,7 @@
           <p:cNvPr id="6" name="bullet-mark-3">
             <a:extLst xmlns:a="http://schemas.openxmlformats.org/drawingml/2006/main">
               <a:ext uri="{FF2B5EF4-FFF2-40B4-BE49-F238E27FC236}">
-                <a16:creationId xmlns:a16="http://schemas.microsoft.com/office/drawing/2014/main" id="{6C02C4BC-F932-4A48-B896-405F816CF9CE}"/>
+                <a16:creationId xmlns:a16="http://schemas.microsoft.com/office/drawing/2014/main" id="{41E71471-6487-4335-AF56-C6EE9B6BC9D9}"/>
               </a:ext>
             </a:extLst>
           </p:cNvPr>
@@ -10470,7 +10470,7 @@
           <p:cNvPr id="7" name="bullet-3">
             <a:extLst xmlns:a="http://schemas.openxmlformats.org/drawingml/2006/main">
               <a:ext uri="{FF2B5EF4-FFF2-40B4-BE49-F238E27FC236}">
-                <a16:creationId xmlns:a16="http://schemas.microsoft.com/office/drawing/2014/main" id="{09C56B23-3306-4587-9512-4B942C3E613C}"/>
+                <a16:creationId xmlns:a16="http://schemas.microsoft.com/office/drawing/2014/main" id="{752B32C1-0659-4AEA-AE7E-79AAEC703C3C}"/>
               </a:ext>
             </a:extLst>
           </p:cNvPr>
@@ -10532,7 +10532,7 @@
           <p:cNvPr id="8" name="bullet-mark-4">
             <a:extLst xmlns:a="http://schemas.openxmlformats.org/drawingml/2006/main">
               <a:ext uri="{FF2B5EF4-FFF2-40B4-BE49-F238E27FC236}">
-                <a16:creationId xmlns:a16="http://schemas.microsoft.com/office/drawing/2014/main" id="{9E774001-66F4-4335-B6E5-A01E4095FA6F}"/>
+                <a16:creationId xmlns:a16="http://schemas.microsoft.com/office/drawing/2014/main" id="{931F1D5F-F72D-4640-8FBF-13F2C56E6FEC}"/>
               </a:ext>
             </a:extLst>
           </p:cNvPr>
@@ -10594,7 +10594,7 @@
           <p:cNvPr id="9" name="bullet-4">
             <a:extLst xmlns:a="http://schemas.openxmlformats.org/drawingml/2006/main">
               <a:ext uri="{FF2B5EF4-FFF2-40B4-BE49-F238E27FC236}">
-                <a16:creationId xmlns:a16="http://schemas.microsoft.com/office/drawing/2014/main" id="{E9143C11-A42D-42B3-979E-B54EA6584967}"/>
+                <a16:creationId xmlns:a16="http://schemas.microsoft.com/office/drawing/2014/main" id="{B8AA546B-A168-456A-86FB-CA3437459609}"/>
               </a:ext>
             </a:extLst>
           </p:cNvPr>
@@ -10656,7 +10656,7 @@
           <p:cNvPr id="10" name="">
             <a:extLst xmlns:a="http://schemas.openxmlformats.org/drawingml/2006/main">
               <a:ext uri="{FF2B5EF4-FFF2-40B4-BE49-F238E27FC236}">
-                <a16:creationId xmlns:a16="http://schemas.microsoft.com/office/drawing/2014/main" id="{6C17CD99-46DE-4714-BFD3-9B2B9C583B9E}"/>
+                <a16:creationId xmlns:a16="http://schemas.microsoft.com/office/drawing/2014/main" id="{17424EDF-F170-495D-9BDC-CEDBDFE2C25F}"/>
               </a:ext>
             </a:extLst>
           </p:cNvPr>
@@ -10716,7 +10716,7 @@
     </p:spTree>
     <p:extLst>
       <p:ext uri="{BB962C8B-B14F-4D97-AF65-F5344CB8AC3E}">
-        <p14:creationId xmlns:p14="http://schemas.microsoft.com/office/powerpoint/2010/main" val="925768718"/>
+        <p14:creationId xmlns:p14="http://schemas.microsoft.com/office/powerpoint/2010/main" val="626533443"/>
       </p:ext>
     </p:extLst>
   </p:cSld>
@@ -10747,7 +10747,7 @@
           <p:cNvPr id="4" name="">
             <a:extLst xmlns:a="http://schemas.openxmlformats.org/drawingml/2006/main">
               <a:ext uri="{FF2B5EF4-FFF2-40B4-BE49-F238E27FC236}">
-                <a16:creationId xmlns:a16="http://schemas.microsoft.com/office/drawing/2014/main" id="{08B450A4-DFB8-42AA-BC70-F9A98129F252}"/>
+                <a16:creationId xmlns:a16="http://schemas.microsoft.com/office/drawing/2014/main" id="{97C1FD96-B33B-4CCA-826C-BC9C2311DBDC}"/>
               </a:ext>
             </a:extLst>
           </p:cNvPr>
@@ -10809,7 +10809,7 @@
           <p:cNvPr id="2" name="">
             <a:extLst xmlns:a="http://schemas.openxmlformats.org/drawingml/2006/main">
               <a:ext uri="{FF2B5EF4-FFF2-40B4-BE49-F238E27FC236}">
-                <a16:creationId xmlns:a16="http://schemas.microsoft.com/office/drawing/2014/main" id="{8EC7BE6D-D822-4D13-AA3C-121BF3867DE4}"/>
+                <a16:creationId xmlns:a16="http://schemas.microsoft.com/office/drawing/2014/main" id="{DDFC44C3-C3F2-4E8B-8E66-E38121FA42BE}"/>
               </a:ext>
             </a:extLst>
           </p:cNvPr>
@@ -10871,7 +10871,7 @@
           <p:cNvPr id="3" name="big-statement">
             <a:extLst xmlns:a="http://schemas.openxmlformats.org/drawingml/2006/main">
               <a:ext uri="{FF2B5EF4-FFF2-40B4-BE49-F238E27FC236}">
-                <a16:creationId xmlns:a16="http://schemas.microsoft.com/office/drawing/2014/main" id="{1A2AC90F-2929-46F5-8DC5-65EC57042131}"/>
+                <a16:creationId xmlns:a16="http://schemas.microsoft.com/office/drawing/2014/main" id="{B4211BEB-77AE-4793-A07B-5921B5952F7D}"/>
               </a:ext>
             </a:extLst>
           </p:cNvPr>
@@ -10931,7 +10931,7 @@
     </p:spTree>
     <p:extLst>
       <p:ext uri="{BB962C8B-B14F-4D97-AF65-F5344CB8AC3E}">
-        <p14:creationId xmlns:p14="http://schemas.microsoft.com/office/powerpoint/2010/main" val="1614634615"/>
+        <p14:creationId xmlns:p14="http://schemas.microsoft.com/office/powerpoint/2010/main" val="317178739"/>
       </p:ext>
     </p:extLst>
   </p:cSld>
@@ -10962,7 +10962,7 @@
           <p:cNvPr id="17" name="chapter-label">
             <a:extLst xmlns:a="http://schemas.openxmlformats.org/drawingml/2006/main">
               <a:ext uri="{FF2B5EF4-FFF2-40B4-BE49-F238E27FC236}">
-                <a16:creationId xmlns:a16="http://schemas.microsoft.com/office/drawing/2014/main" id="{F56C4DED-9A31-4C26-A39E-9F2567956F6E}"/>
+                <a16:creationId xmlns:a16="http://schemas.microsoft.com/office/drawing/2014/main" id="{7C8C7A9E-5A68-4199-9B2A-E2D42CC66C65}"/>
               </a:ext>
             </a:extLst>
           </p:cNvPr>
@@ -11024,7 +11024,7 @@
           <p:cNvPr id="2" name="slide-title">
             <a:extLst xmlns:a="http://schemas.openxmlformats.org/drawingml/2006/main">
               <a:ext uri="{FF2B5EF4-FFF2-40B4-BE49-F238E27FC236}">
-                <a16:creationId xmlns:a16="http://schemas.microsoft.com/office/drawing/2014/main" id="{588C9ADC-8731-48CF-880A-D70F96B43978}"/>
+                <a16:creationId xmlns:a16="http://schemas.microsoft.com/office/drawing/2014/main" id="{6C080BBB-EDF9-4BAD-9D98-ACC2FB27DDC3}"/>
               </a:ext>
             </a:extLst>
           </p:cNvPr>
@@ -11086,7 +11086,7 @@
           <p:cNvPr id="3" name="footer-rule">
             <a:extLst xmlns:a="http://schemas.openxmlformats.org/drawingml/2006/main">
               <a:ext uri="{FF2B5EF4-FFF2-40B4-BE49-F238E27FC236}">
-                <a16:creationId xmlns:a16="http://schemas.microsoft.com/office/drawing/2014/main" id="{381E0787-0645-43CB-B6EC-4F89A105398C}"/>
+                <a16:creationId xmlns:a16="http://schemas.microsoft.com/office/drawing/2014/main" id="{27EB5366-84CB-47F6-9E17-D20C50BCDC7B}"/>
               </a:ext>
             </a:extLst>
           </p:cNvPr>
@@ -11117,7 +11117,7 @@
           <p:cNvPr id="4" name="footer-book">
             <a:extLst xmlns:a="http://schemas.openxmlformats.org/drawingml/2006/main">
               <a:ext uri="{FF2B5EF4-FFF2-40B4-BE49-F238E27FC236}">
-                <a16:creationId xmlns:a16="http://schemas.microsoft.com/office/drawing/2014/main" id="{BF76F871-018B-4859-B9D7-C1E2FA80BB36}"/>
+                <a16:creationId xmlns:a16="http://schemas.microsoft.com/office/drawing/2014/main" id="{632EACB6-1F37-4956-804D-62B498A0D9F9}"/>
               </a:ext>
             </a:extLst>
           </p:cNvPr>
@@ -11179,7 +11179,7 @@
           <p:cNvPr id="5" name="footer-number">
             <a:extLst xmlns:a="http://schemas.openxmlformats.org/drawingml/2006/main">
               <a:ext uri="{FF2B5EF4-FFF2-40B4-BE49-F238E27FC236}">
-                <a16:creationId xmlns:a16="http://schemas.microsoft.com/office/drawing/2014/main" id="{7221A8DD-D3E9-485D-81A5-51D5F9B9A19A}"/>
+                <a16:creationId xmlns:a16="http://schemas.microsoft.com/office/drawing/2014/main" id="{30DED060-B41B-4985-8F87-8BB2CC512A09}"/>
               </a:ext>
             </a:extLst>
           </p:cNvPr>
@@ -11241,7 +11241,7 @@
           <p:cNvPr id="6" name="bullet-mark-1">
             <a:extLst xmlns:a="http://schemas.openxmlformats.org/drawingml/2006/main">
               <a:ext uri="{FF2B5EF4-FFF2-40B4-BE49-F238E27FC236}">
-                <a16:creationId xmlns:a16="http://schemas.microsoft.com/office/drawing/2014/main" id="{54A44746-DBF5-48C1-980F-6209793B9382}"/>
+                <a16:creationId xmlns:a16="http://schemas.microsoft.com/office/drawing/2014/main" id="{D1317FC5-6EE4-488B-9CE8-F868B4AA43D8}"/>
               </a:ext>
             </a:extLst>
           </p:cNvPr>
@@ -11303,7 +11303,7 @@
           <p:cNvPr id="7" name="bullet-1">
             <a:extLst xmlns:a="http://schemas.openxmlformats.org/drawingml/2006/main">
               <a:ext uri="{FF2B5EF4-FFF2-40B4-BE49-F238E27FC236}">
-                <a16:creationId xmlns:a16="http://schemas.microsoft.com/office/drawing/2014/main" id="{9FD842C1-1EB4-43B9-8B4C-5E9EDE9E36EE}"/>
+                <a16:creationId xmlns:a16="http://schemas.microsoft.com/office/drawing/2014/main" id="{B0FC32A8-E3A8-4124-93C5-C9C99FFDD335}"/>
               </a:ext>
             </a:extLst>
           </p:cNvPr>
@@ -11365,7 +11365,7 @@
           <p:cNvPr id="8" name="bullet-mark-2">
             <a:extLst xmlns:a="http://schemas.openxmlformats.org/drawingml/2006/main">
               <a:ext uri="{FF2B5EF4-FFF2-40B4-BE49-F238E27FC236}">
-                <a16:creationId xmlns:a16="http://schemas.microsoft.com/office/drawing/2014/main" id="{2070636D-30CA-421A-9D01-43050015358A}"/>
+                <a16:creationId xmlns:a16="http://schemas.microsoft.com/office/drawing/2014/main" id="{857AFD94-9315-4CF0-B770-4C1A0D60F677}"/>
               </a:ext>
             </a:extLst>
           </p:cNvPr>
@@ -11427,7 +11427,7 @@
           <p:cNvPr id="9" name="bullet-2">
             <a:extLst xmlns:a="http://schemas.openxmlformats.org/drawingml/2006/main">
               <a:ext uri="{FF2B5EF4-FFF2-40B4-BE49-F238E27FC236}">
-                <a16:creationId xmlns:a16="http://schemas.microsoft.com/office/drawing/2014/main" id="{0ED42DB1-B617-46CD-8072-272DDE9257A1}"/>
+                <a16:creationId xmlns:a16="http://schemas.microsoft.com/office/drawing/2014/main" id="{519888BF-14F2-463E-BC97-0D9EAF685EFB}"/>
               </a:ext>
             </a:extLst>
           </p:cNvPr>
@@ -11489,7 +11489,7 @@
           <p:cNvPr id="10" name="bullet-mark-3">
             <a:extLst xmlns:a="http://schemas.openxmlformats.org/drawingml/2006/main">
               <a:ext uri="{FF2B5EF4-FFF2-40B4-BE49-F238E27FC236}">
-                <a16:creationId xmlns:a16="http://schemas.microsoft.com/office/drawing/2014/main" id="{6D919BE0-7475-492C-8441-D92D2E34F09F}"/>
+                <a16:creationId xmlns:a16="http://schemas.microsoft.com/office/drawing/2014/main" id="{5D38C788-D3D0-46BE-A2F7-C1D11C135A0D}"/>
               </a:ext>
             </a:extLst>
           </p:cNvPr>
@@ -11551,7 +11551,7 @@
           <p:cNvPr id="11" name="bullet-3">
             <a:extLst xmlns:a="http://schemas.openxmlformats.org/drawingml/2006/main">
               <a:ext uri="{FF2B5EF4-FFF2-40B4-BE49-F238E27FC236}">
-                <a16:creationId xmlns:a16="http://schemas.microsoft.com/office/drawing/2014/main" id="{16DD9C69-FE47-4B99-B2DE-DD56AEC42138}"/>
+                <a16:creationId xmlns:a16="http://schemas.microsoft.com/office/drawing/2014/main" id="{4CD0C1A6-6A74-4FC3-A129-1CB143AE7835}"/>
               </a:ext>
             </a:extLst>
           </p:cNvPr>
@@ -11613,7 +11613,7 @@
           <p:cNvPr id="12" name="bullet-mark-4">
             <a:extLst xmlns:a="http://schemas.openxmlformats.org/drawingml/2006/main">
               <a:ext uri="{FF2B5EF4-FFF2-40B4-BE49-F238E27FC236}">
-                <a16:creationId xmlns:a16="http://schemas.microsoft.com/office/drawing/2014/main" id="{ED51647C-2021-45BF-9BED-1DF63C82EA53}"/>
+                <a16:creationId xmlns:a16="http://schemas.microsoft.com/office/drawing/2014/main" id="{D6BB91BC-168D-4D26-B3A8-DCA0E275A573}"/>
               </a:ext>
             </a:extLst>
           </p:cNvPr>
@@ -11675,7 +11675,7 @@
           <p:cNvPr id="13" name="bullet-4">
             <a:extLst xmlns:a="http://schemas.openxmlformats.org/drawingml/2006/main">
               <a:ext uri="{FF2B5EF4-FFF2-40B4-BE49-F238E27FC236}">
-                <a16:creationId xmlns:a16="http://schemas.microsoft.com/office/drawing/2014/main" id="{650BF553-279E-44BA-9120-1675F8FFBD63}"/>
+                <a16:creationId xmlns:a16="http://schemas.microsoft.com/office/drawing/2014/main" id="{B323D466-FE1B-4D16-B40F-3C221C02D6FA}"/>
               </a:ext>
             </a:extLst>
           </p:cNvPr>
@@ -11737,7 +11737,7 @@
           <p:cNvPr id="14" name="bullet-mark-5">
             <a:extLst xmlns:a="http://schemas.openxmlformats.org/drawingml/2006/main">
               <a:ext uri="{FF2B5EF4-FFF2-40B4-BE49-F238E27FC236}">
-                <a16:creationId xmlns:a16="http://schemas.microsoft.com/office/drawing/2014/main" id="{EAAC520B-6AE8-418E-BD79-9F417039F8A4}"/>
+                <a16:creationId xmlns:a16="http://schemas.microsoft.com/office/drawing/2014/main" id="{F3403A9D-C743-45C1-B6E7-6C96F42F485E}"/>
               </a:ext>
             </a:extLst>
           </p:cNvPr>
@@ -11799,7 +11799,7 @@
           <p:cNvPr id="15" name="bullet-5">
             <a:extLst xmlns:a="http://schemas.openxmlformats.org/drawingml/2006/main">
               <a:ext uri="{FF2B5EF4-FFF2-40B4-BE49-F238E27FC236}">
-                <a16:creationId xmlns:a16="http://schemas.microsoft.com/office/drawing/2014/main" id="{4FC30AC0-9A0F-477B-B28E-B1F7506087C6}"/>
+                <a16:creationId xmlns:a16="http://schemas.microsoft.com/office/drawing/2014/main" id="{7ED67FED-252F-4D6F-8589-CCC8DD180A13}"/>
               </a:ext>
             </a:extLst>
           </p:cNvPr>
@@ -11861,7 +11861,7 @@
           <p:cNvPr id="16" name="">
             <a:extLst xmlns:a="http://schemas.openxmlformats.org/drawingml/2006/main">
               <a:ext uri="{FF2B5EF4-FFF2-40B4-BE49-F238E27FC236}">
-                <a16:creationId xmlns:a16="http://schemas.microsoft.com/office/drawing/2014/main" id="{ACAAACDE-F001-4B9A-BDBF-532AE3C94073}"/>
+                <a16:creationId xmlns:a16="http://schemas.microsoft.com/office/drawing/2014/main" id="{C63F4FDE-62CE-414C-A9C3-710366E714E5}"/>
               </a:ext>
             </a:extLst>
           </p:cNvPr>
@@ -11921,7 +11921,7 @@
     </p:spTree>
     <p:extLst>
       <p:ext uri="{BB962C8B-B14F-4D97-AF65-F5344CB8AC3E}">
-        <p14:creationId xmlns:p14="http://schemas.microsoft.com/office/powerpoint/2010/main" val="147648325"/>
+        <p14:creationId xmlns:p14="http://schemas.microsoft.com/office/powerpoint/2010/main" val="583011287"/>
       </p:ext>
     </p:extLst>
   </p:cSld>
@@ -11952,7 +11952,7 @@
           <p:cNvPr id="15" name="chapter-label">
             <a:extLst xmlns:a="http://schemas.openxmlformats.org/drawingml/2006/main">
               <a:ext uri="{FF2B5EF4-FFF2-40B4-BE49-F238E27FC236}">
-                <a16:creationId xmlns:a16="http://schemas.microsoft.com/office/drawing/2014/main" id="{19547A3D-C107-4487-8BFC-B94BC62A4E06}"/>
+                <a16:creationId xmlns:a16="http://schemas.microsoft.com/office/drawing/2014/main" id="{D0937C10-F135-47B1-AF79-155B2C1ED090}"/>
               </a:ext>
             </a:extLst>
           </p:cNvPr>
@@ -12014,7 +12014,7 @@
           <p:cNvPr id="2" name="slide-title">
             <a:extLst xmlns:a="http://schemas.openxmlformats.org/drawingml/2006/main">
               <a:ext uri="{FF2B5EF4-FFF2-40B4-BE49-F238E27FC236}">
-                <a16:creationId xmlns:a16="http://schemas.microsoft.com/office/drawing/2014/main" id="{2DB9220F-DBC5-4953-889E-65095F0C286C}"/>
+                <a16:creationId xmlns:a16="http://schemas.microsoft.com/office/drawing/2014/main" id="{3B9073EC-BAB8-4626-B7B1-8CB5DCDD1366}"/>
               </a:ext>
             </a:extLst>
           </p:cNvPr>
@@ -12076,7 +12076,7 @@
           <p:cNvPr id="3" name="footer-rule">
             <a:extLst xmlns:a="http://schemas.openxmlformats.org/drawingml/2006/main">
               <a:ext uri="{FF2B5EF4-FFF2-40B4-BE49-F238E27FC236}">
-                <a16:creationId xmlns:a16="http://schemas.microsoft.com/office/drawing/2014/main" id="{25AAE608-774F-48A5-91ED-DD3C50949090}"/>
+                <a16:creationId xmlns:a16="http://schemas.microsoft.com/office/drawing/2014/main" id="{F1BD592A-03C5-4B62-98D2-E5AAD83A72B4}"/>
               </a:ext>
             </a:extLst>
           </p:cNvPr>
@@ -12107,7 +12107,7 @@
           <p:cNvPr id="4" name="footer-book">
             <a:extLst xmlns:a="http://schemas.openxmlformats.org/drawingml/2006/main">
               <a:ext uri="{FF2B5EF4-FFF2-40B4-BE49-F238E27FC236}">
-                <a16:creationId xmlns:a16="http://schemas.microsoft.com/office/drawing/2014/main" id="{BA7D1450-DB27-4AE3-BA63-A730BF963894}"/>
+                <a16:creationId xmlns:a16="http://schemas.microsoft.com/office/drawing/2014/main" id="{35A99A88-EF59-407D-808E-91A0024ED159}"/>
               </a:ext>
             </a:extLst>
           </p:cNvPr>
@@ -12169,7 +12169,7 @@
           <p:cNvPr id="5" name="footer-number">
             <a:extLst xmlns:a="http://schemas.openxmlformats.org/drawingml/2006/main">
               <a:ext uri="{FF2B5EF4-FFF2-40B4-BE49-F238E27FC236}">
-                <a16:creationId xmlns:a16="http://schemas.microsoft.com/office/drawing/2014/main" id="{675DB41F-9789-4583-80BF-A480ECE33014}"/>
+                <a16:creationId xmlns:a16="http://schemas.microsoft.com/office/drawing/2014/main" id="{CD6D4DE4-E6E0-4EC6-9EF1-B47A692C45CD}"/>
               </a:ext>
             </a:extLst>
           </p:cNvPr>
@@ -12231,7 +12231,7 @@
           <p:cNvPr id="6" name="panel-1">
             <a:extLst xmlns:a="http://schemas.openxmlformats.org/drawingml/2006/main">
               <a:ext uri="{FF2B5EF4-FFF2-40B4-BE49-F238E27FC236}">
-                <a16:creationId xmlns:a16="http://schemas.microsoft.com/office/drawing/2014/main" id="{4C6DDA6A-E82B-4784-B76D-157AE401FCDD}"/>
+                <a16:creationId xmlns:a16="http://schemas.microsoft.com/office/drawing/2014/main" id="{F6E411A2-FBE7-4F90-B124-306CC7BC7E70}"/>
               </a:ext>
             </a:extLst>
           </p:cNvPr>
@@ -12264,7 +12264,7 @@
           <p:cNvPr id="7" name="">
             <a:extLst xmlns:a="http://schemas.openxmlformats.org/drawingml/2006/main">
               <a:ext uri="{FF2B5EF4-FFF2-40B4-BE49-F238E27FC236}">
-                <a16:creationId xmlns:a16="http://schemas.microsoft.com/office/drawing/2014/main" id="{94056F15-AF27-4842-BCC2-1D2B186075E0}"/>
+                <a16:creationId xmlns:a16="http://schemas.microsoft.com/office/drawing/2014/main" id="{5DE13AFE-2959-4951-BCB8-9694D29534E2}"/>
               </a:ext>
             </a:extLst>
           </p:cNvPr>
@@ -12326,7 +12326,7 @@
           <p:cNvPr id="8" name="">
             <a:extLst xmlns:a="http://schemas.openxmlformats.org/drawingml/2006/main">
               <a:ext uri="{FF2B5EF4-FFF2-40B4-BE49-F238E27FC236}">
-                <a16:creationId xmlns:a16="http://schemas.microsoft.com/office/drawing/2014/main" id="{81434FEA-416E-45F1-A3C6-4E7E253F8E8A}"/>
+                <a16:creationId xmlns:a16="http://schemas.microsoft.com/office/drawing/2014/main" id="{BA02A203-ECAD-410F-96B3-1658C87A3B7A}"/>
               </a:ext>
             </a:extLst>
           </p:cNvPr>
@@ -12388,7 +12388,7 @@
           <p:cNvPr id="9" name="">
             <a:extLst xmlns:a="http://schemas.openxmlformats.org/drawingml/2006/main">
               <a:ext uri="{FF2B5EF4-FFF2-40B4-BE49-F238E27FC236}">
-                <a16:creationId xmlns:a16="http://schemas.microsoft.com/office/drawing/2014/main" id="{F2B8AB6A-2A8C-416D-A2C1-34FACB9CE551}"/>
+                <a16:creationId xmlns:a16="http://schemas.microsoft.com/office/drawing/2014/main" id="{6231E2B4-9724-46F8-A267-7B47AC48F68C}"/>
               </a:ext>
             </a:extLst>
           </p:cNvPr>
@@ -12450,7 +12450,7 @@
           <p:cNvPr id="10" name="panel-2">
             <a:extLst xmlns:a="http://schemas.openxmlformats.org/drawingml/2006/main">
               <a:ext uri="{FF2B5EF4-FFF2-40B4-BE49-F238E27FC236}">
-                <a16:creationId xmlns:a16="http://schemas.microsoft.com/office/drawing/2014/main" id="{4D67CAF7-D35E-49CC-8D02-F22192AFE171}"/>
+                <a16:creationId xmlns:a16="http://schemas.microsoft.com/office/drawing/2014/main" id="{01783DB5-C880-4E82-84A2-545C077C3617}"/>
               </a:ext>
             </a:extLst>
           </p:cNvPr>
@@ -12483,7 +12483,7 @@
           <p:cNvPr id="11" name="">
             <a:extLst xmlns:a="http://schemas.openxmlformats.org/drawingml/2006/main">
               <a:ext uri="{FF2B5EF4-FFF2-40B4-BE49-F238E27FC236}">
-                <a16:creationId xmlns:a16="http://schemas.microsoft.com/office/drawing/2014/main" id="{07273B10-F67C-40D5-A283-31756A541AA5}"/>
+                <a16:creationId xmlns:a16="http://schemas.microsoft.com/office/drawing/2014/main" id="{9A114A6B-92CC-4FB6-8343-D7CC00B4E5FC}"/>
               </a:ext>
             </a:extLst>
           </p:cNvPr>
@@ -12545,7 +12545,7 @@
           <p:cNvPr id="12" name="">
             <a:extLst xmlns:a="http://schemas.openxmlformats.org/drawingml/2006/main">
               <a:ext uri="{FF2B5EF4-FFF2-40B4-BE49-F238E27FC236}">
-                <a16:creationId xmlns:a16="http://schemas.microsoft.com/office/drawing/2014/main" id="{7BCEFBAF-56D2-401F-9962-4C991B4E984C}"/>
+                <a16:creationId xmlns:a16="http://schemas.microsoft.com/office/drawing/2014/main" id="{231CB11A-EA5A-4356-AC47-B94EC39F0DAD}"/>
               </a:ext>
             </a:extLst>
           </p:cNvPr>
@@ -12607,7 +12607,7 @@
           <p:cNvPr id="13" name="">
             <a:extLst xmlns:a="http://schemas.openxmlformats.org/drawingml/2006/main">
               <a:ext uri="{FF2B5EF4-FFF2-40B4-BE49-F238E27FC236}">
-                <a16:creationId xmlns:a16="http://schemas.microsoft.com/office/drawing/2014/main" id="{823C967C-BAF7-488E-81D9-5CD2BF85D104}"/>
+                <a16:creationId xmlns:a16="http://schemas.microsoft.com/office/drawing/2014/main" id="{40CEAD45-0931-405B-8ED4-BC67916BDB60}"/>
               </a:ext>
             </a:extLst>
           </p:cNvPr>
@@ -12669,7 +12669,7 @@
           <p:cNvPr id="14" name="">
             <a:extLst xmlns:a="http://schemas.openxmlformats.org/drawingml/2006/main">
               <a:ext uri="{FF2B5EF4-FFF2-40B4-BE49-F238E27FC236}">
-                <a16:creationId xmlns:a16="http://schemas.microsoft.com/office/drawing/2014/main" id="{F9BF9614-8AED-4927-A757-77FA4A586551}"/>
+                <a16:creationId xmlns:a16="http://schemas.microsoft.com/office/drawing/2014/main" id="{EAE1CB4B-6AF7-4C2A-AA77-7AC80663DCDF}"/>
               </a:ext>
             </a:extLst>
           </p:cNvPr>
@@ -12729,7 +12729,7 @@
     </p:spTree>
     <p:extLst>
       <p:ext uri="{BB962C8B-B14F-4D97-AF65-F5344CB8AC3E}">
-        <p14:creationId xmlns:p14="http://schemas.microsoft.com/office/powerpoint/2010/main" val="1426665851"/>
+        <p14:creationId xmlns:p14="http://schemas.microsoft.com/office/powerpoint/2010/main" val="1195729902"/>
       </p:ext>
     </p:extLst>
   </p:cSld>
@@ -12760,7 +12760,7 @@
           <p:cNvPr id="18" name="chapter-label">
             <a:extLst xmlns:a="http://schemas.openxmlformats.org/drawingml/2006/main">
               <a:ext uri="{FF2B5EF4-FFF2-40B4-BE49-F238E27FC236}">
-                <a16:creationId xmlns:a16="http://schemas.microsoft.com/office/drawing/2014/main" id="{512FE7B3-695F-4967-8445-13FDF43CB549}"/>
+                <a16:creationId xmlns:a16="http://schemas.microsoft.com/office/drawing/2014/main" id="{6BC7C339-0DAD-4992-BC1B-11256ECFBF5C}"/>
               </a:ext>
             </a:extLst>
           </p:cNvPr>
@@ -12822,7 +12822,7 @@
           <p:cNvPr id="2" name="slide-title">
             <a:extLst xmlns:a="http://schemas.openxmlformats.org/drawingml/2006/main">
               <a:ext uri="{FF2B5EF4-FFF2-40B4-BE49-F238E27FC236}">
-                <a16:creationId xmlns:a16="http://schemas.microsoft.com/office/drawing/2014/main" id="{EF5F689B-B51C-4C41-B242-9C6FB5CBD398}"/>
+                <a16:creationId xmlns:a16="http://schemas.microsoft.com/office/drawing/2014/main" id="{AE9475B6-334E-40B3-B6A8-CA2F4F28B9A7}"/>
               </a:ext>
             </a:extLst>
           </p:cNvPr>
@@ -12884,7 +12884,7 @@
           <p:cNvPr id="3" name="footer-rule">
             <a:extLst xmlns:a="http://schemas.openxmlformats.org/drawingml/2006/main">
               <a:ext uri="{FF2B5EF4-FFF2-40B4-BE49-F238E27FC236}">
-                <a16:creationId xmlns:a16="http://schemas.microsoft.com/office/drawing/2014/main" id="{1285AD2B-D9AF-4035-9058-CB6CCC96B1F4}"/>
+                <a16:creationId xmlns:a16="http://schemas.microsoft.com/office/drawing/2014/main" id="{F1E17E3D-D39C-4717-B78C-2085C9EFDDE5}"/>
               </a:ext>
             </a:extLst>
           </p:cNvPr>
@@ -12915,7 +12915,7 @@
           <p:cNvPr id="4" name="footer-book">
             <a:extLst xmlns:a="http://schemas.openxmlformats.org/drawingml/2006/main">
               <a:ext uri="{FF2B5EF4-FFF2-40B4-BE49-F238E27FC236}">
-                <a16:creationId xmlns:a16="http://schemas.microsoft.com/office/drawing/2014/main" id="{FB034CE0-5DF1-4D80-9842-FEA7840D5890}"/>
+                <a16:creationId xmlns:a16="http://schemas.microsoft.com/office/drawing/2014/main" id="{3D915BAF-48EF-4984-8AF5-CBD5320EFD8E}"/>
               </a:ext>
             </a:extLst>
           </p:cNvPr>
@@ -12977,7 +12977,7 @@
           <p:cNvPr id="5" name="footer-number">
             <a:extLst xmlns:a="http://schemas.openxmlformats.org/drawingml/2006/main">
               <a:ext uri="{FF2B5EF4-FFF2-40B4-BE49-F238E27FC236}">
-                <a16:creationId xmlns:a16="http://schemas.microsoft.com/office/drawing/2014/main" id="{F4A6D13C-0F44-4D84-8D0B-772DA61C238D}"/>
+                <a16:creationId xmlns:a16="http://schemas.microsoft.com/office/drawing/2014/main" id="{75062FBC-B92A-4A35-8993-EEAA30333C7A}"/>
               </a:ext>
             </a:extLst>
           </p:cNvPr>
@@ -13039,7 +13039,7 @@
           <p:cNvPr id="6" name="">
             <a:extLst xmlns:a="http://schemas.openxmlformats.org/drawingml/2006/main">
               <a:ext uri="{FF2B5EF4-FFF2-40B4-BE49-F238E27FC236}">
-                <a16:creationId xmlns:a16="http://schemas.microsoft.com/office/drawing/2014/main" id="{96CDDA60-86E6-498B-92AB-1A76DC570E58}"/>
+                <a16:creationId xmlns:a16="http://schemas.microsoft.com/office/drawing/2014/main" id="{B4612F29-7AA4-4ADE-9898-3E1F9A52157A}"/>
               </a:ext>
             </a:extLst>
           </p:cNvPr>
@@ -13101,7 +13101,7 @@
           <p:cNvPr id="7" name="bullet-mark-1">
             <a:extLst xmlns:a="http://schemas.openxmlformats.org/drawingml/2006/main">
               <a:ext uri="{FF2B5EF4-FFF2-40B4-BE49-F238E27FC236}">
-                <a16:creationId xmlns:a16="http://schemas.microsoft.com/office/drawing/2014/main" id="{63353184-6DCA-4FC6-B33B-6B72562F638C}"/>
+                <a16:creationId xmlns:a16="http://schemas.microsoft.com/office/drawing/2014/main" id="{7B177644-2B01-4D7B-9C66-BF1CD70EA5A8}"/>
               </a:ext>
             </a:extLst>
           </p:cNvPr>
@@ -13163,7 +13163,7 @@
           <p:cNvPr id="8" name="bullet-1">
             <a:extLst xmlns:a="http://schemas.openxmlformats.org/drawingml/2006/main">
               <a:ext uri="{FF2B5EF4-FFF2-40B4-BE49-F238E27FC236}">
-                <a16:creationId xmlns:a16="http://schemas.microsoft.com/office/drawing/2014/main" id="{48D761E7-12C0-47CB-972B-392B281ED5D3}"/>
+                <a16:creationId xmlns:a16="http://schemas.microsoft.com/office/drawing/2014/main" id="{FF2FD7C1-A3E0-491A-8BAC-242A03A84100}"/>
               </a:ext>
             </a:extLst>
           </p:cNvPr>
@@ -13225,7 +13225,7 @@
           <p:cNvPr id="9" name="bullet-mark-2">
             <a:extLst xmlns:a="http://schemas.openxmlformats.org/drawingml/2006/main">
               <a:ext uri="{FF2B5EF4-FFF2-40B4-BE49-F238E27FC236}">
-                <a16:creationId xmlns:a16="http://schemas.microsoft.com/office/drawing/2014/main" id="{56C074D5-FD91-4B76-BBB4-5F520EB5E02C}"/>
+                <a16:creationId xmlns:a16="http://schemas.microsoft.com/office/drawing/2014/main" id="{106DA331-B3F2-4934-B18D-CD38D960A926}"/>
               </a:ext>
             </a:extLst>
           </p:cNvPr>
@@ -13287,7 +13287,7 @@
           <p:cNvPr id="10" name="bullet-2">
             <a:extLst xmlns:a="http://schemas.openxmlformats.org/drawingml/2006/main">
               <a:ext uri="{FF2B5EF4-FFF2-40B4-BE49-F238E27FC236}">
-                <a16:creationId xmlns:a16="http://schemas.microsoft.com/office/drawing/2014/main" id="{5E4F7BB4-9EC4-4E6B-9DFD-3A440D83F5F2}"/>
+                <a16:creationId xmlns:a16="http://schemas.microsoft.com/office/drawing/2014/main" id="{3C8647C5-E2DC-4D49-9492-58A6065A01BE}"/>
               </a:ext>
             </a:extLst>
           </p:cNvPr>
@@ -13349,7 +13349,7 @@
           <p:cNvPr id="11" name="bullet-mark-3">
             <a:extLst xmlns:a="http://schemas.openxmlformats.org/drawingml/2006/main">
               <a:ext uri="{FF2B5EF4-FFF2-40B4-BE49-F238E27FC236}">
-                <a16:creationId xmlns:a16="http://schemas.microsoft.com/office/drawing/2014/main" id="{AB389203-35BF-4A36-B60C-A0571E368FCE}"/>
+                <a16:creationId xmlns:a16="http://schemas.microsoft.com/office/drawing/2014/main" id="{5C2A055E-FF21-4AD8-96D1-E7A0ACFC9830}"/>
               </a:ext>
             </a:extLst>
           </p:cNvPr>
@@ -13411,7 +13411,7 @@
           <p:cNvPr id="12" name="bullet-3">
             <a:extLst xmlns:a="http://schemas.openxmlformats.org/drawingml/2006/main">
               <a:ext uri="{FF2B5EF4-FFF2-40B4-BE49-F238E27FC236}">
-                <a16:creationId xmlns:a16="http://schemas.microsoft.com/office/drawing/2014/main" id="{5D23755E-D2BD-4C5F-81CC-1D0E187DD41C}"/>
+                <a16:creationId xmlns:a16="http://schemas.microsoft.com/office/drawing/2014/main" id="{DC7D487E-D02F-4957-A8A6-6E636B0ECE06}"/>
               </a:ext>
             </a:extLst>
           </p:cNvPr>
@@ -13473,7 +13473,7 @@
           <p:cNvPr id="13" name="bullet-mark-4">
             <a:extLst xmlns:a="http://schemas.openxmlformats.org/drawingml/2006/main">
               <a:ext uri="{FF2B5EF4-FFF2-40B4-BE49-F238E27FC236}">
-                <a16:creationId xmlns:a16="http://schemas.microsoft.com/office/drawing/2014/main" id="{2AB183F3-22DE-4CA6-B817-C51E756A9084}"/>
+                <a16:creationId xmlns:a16="http://schemas.microsoft.com/office/drawing/2014/main" id="{072540EE-A5A0-4336-9691-5AA763DB7989}"/>
               </a:ext>
             </a:extLst>
           </p:cNvPr>
@@ -13535,7 +13535,7 @@
           <p:cNvPr id="14" name="bullet-4">
             <a:extLst xmlns:a="http://schemas.openxmlformats.org/drawingml/2006/main">
               <a:ext uri="{FF2B5EF4-FFF2-40B4-BE49-F238E27FC236}">
-                <a16:creationId xmlns:a16="http://schemas.microsoft.com/office/drawing/2014/main" id="{63A0392C-F01D-4B2E-B57B-F28AFD6B0118}"/>
+                <a16:creationId xmlns:a16="http://schemas.microsoft.com/office/drawing/2014/main" id="{E9F6E92C-4ECD-4084-8E88-2C53418517C4}"/>
               </a:ext>
             </a:extLst>
           </p:cNvPr>
@@ -13597,7 +13597,7 @@
           <p:cNvPr id="15" name="bullet-mark-5">
             <a:extLst xmlns:a="http://schemas.openxmlformats.org/drawingml/2006/main">
               <a:ext uri="{FF2B5EF4-FFF2-40B4-BE49-F238E27FC236}">
-                <a16:creationId xmlns:a16="http://schemas.microsoft.com/office/drawing/2014/main" id="{97BAA6E1-73B0-4A4C-ADBD-CAB54F5E4BD2}"/>
+                <a16:creationId xmlns:a16="http://schemas.microsoft.com/office/drawing/2014/main" id="{26070E74-1749-4F25-9BD5-3159631F7EA1}"/>
               </a:ext>
             </a:extLst>
           </p:cNvPr>
@@ -13659,7 +13659,7 @@
           <p:cNvPr id="16" name="bullet-5">
             <a:extLst xmlns:a="http://schemas.openxmlformats.org/drawingml/2006/main">
               <a:ext uri="{FF2B5EF4-FFF2-40B4-BE49-F238E27FC236}">
-                <a16:creationId xmlns:a16="http://schemas.microsoft.com/office/drawing/2014/main" id="{1AE6D17D-1A0F-45D1-A16F-BCC964DB46A2}"/>
+                <a16:creationId xmlns:a16="http://schemas.microsoft.com/office/drawing/2014/main" id="{B8D7C4AA-5A78-4343-AD3A-DD996E3B8078}"/>
               </a:ext>
             </a:extLst>
           </p:cNvPr>
@@ -13721,7 +13721,7 @@
           <p:cNvPr id="17" name="">
             <a:extLst xmlns:a="http://schemas.openxmlformats.org/drawingml/2006/main">
               <a:ext uri="{FF2B5EF4-FFF2-40B4-BE49-F238E27FC236}">
-                <a16:creationId xmlns:a16="http://schemas.microsoft.com/office/drawing/2014/main" id="{96B7EC9D-5A79-4E3C-A0C3-AB9DA40D74EA}"/>
+                <a16:creationId xmlns:a16="http://schemas.microsoft.com/office/drawing/2014/main" id="{6BDC0497-CB67-43E1-B97A-DA207D36E649}"/>
               </a:ext>
             </a:extLst>
           </p:cNvPr>
@@ -13781,7 +13781,7 @@
     </p:spTree>
     <p:extLst>
       <p:ext uri="{BB962C8B-B14F-4D97-AF65-F5344CB8AC3E}">
-        <p14:creationId xmlns:p14="http://schemas.microsoft.com/office/powerpoint/2010/main" val="806635739"/>
+        <p14:creationId xmlns:p14="http://schemas.microsoft.com/office/powerpoint/2010/main" val="277968874"/>
       </p:ext>
     </p:extLst>
   </p:cSld>
@@ -13812,7 +13812,7 @@
           <p:cNvPr id="8" name="chapter-label">
             <a:extLst xmlns:a="http://schemas.openxmlformats.org/drawingml/2006/main">
               <a:ext uri="{FF2B5EF4-FFF2-40B4-BE49-F238E27FC236}">
-                <a16:creationId xmlns:a16="http://schemas.microsoft.com/office/drawing/2014/main" id="{6F1CD557-4E0C-4151-B006-F3B965A92F00}"/>
+                <a16:creationId xmlns:a16="http://schemas.microsoft.com/office/drawing/2014/main" id="{DA3D6A92-2C52-4A1C-997A-66A08FECC667}"/>
               </a:ext>
             </a:extLst>
           </p:cNvPr>
@@ -13874,7 +13874,7 @@
           <p:cNvPr id="2" name="slide-title">
             <a:extLst xmlns:a="http://schemas.openxmlformats.org/drawingml/2006/main">
               <a:ext uri="{FF2B5EF4-FFF2-40B4-BE49-F238E27FC236}">
-                <a16:creationId xmlns:a16="http://schemas.microsoft.com/office/drawing/2014/main" id="{F3427D91-22A9-467A-BECD-D479852B9DEE}"/>
+                <a16:creationId xmlns:a16="http://schemas.microsoft.com/office/drawing/2014/main" id="{AFC8B568-E8AC-4B81-A5E6-64A88E269A0A}"/>
               </a:ext>
             </a:extLst>
           </p:cNvPr>
@@ -13936,7 +13936,7 @@
           <p:cNvPr id="3" name="footer-rule">
             <a:extLst xmlns:a="http://schemas.openxmlformats.org/drawingml/2006/main">
               <a:ext uri="{FF2B5EF4-FFF2-40B4-BE49-F238E27FC236}">
-                <a16:creationId xmlns:a16="http://schemas.microsoft.com/office/drawing/2014/main" id="{9F400429-FCF1-4199-BED4-78A013DD71E1}"/>
+                <a16:creationId xmlns:a16="http://schemas.microsoft.com/office/drawing/2014/main" id="{955C46A1-0CE4-4CCB-8D98-8A25352008EA}"/>
               </a:ext>
             </a:extLst>
           </p:cNvPr>
@@ -13967,7 +13967,7 @@
           <p:cNvPr id="4" name="footer-book">
             <a:extLst xmlns:a="http://schemas.openxmlformats.org/drawingml/2006/main">
               <a:ext uri="{FF2B5EF4-FFF2-40B4-BE49-F238E27FC236}">
-                <a16:creationId xmlns:a16="http://schemas.microsoft.com/office/drawing/2014/main" id="{6230DE23-694B-4D9F-B7B3-D5B1CAEE456E}"/>
+                <a16:creationId xmlns:a16="http://schemas.microsoft.com/office/drawing/2014/main" id="{3D31BDAE-8767-4620-ABE4-A1056D3B58D7}"/>
               </a:ext>
             </a:extLst>
           </p:cNvPr>
@@ -14029,7 +14029,7 @@
           <p:cNvPr id="5" name="footer-number">
             <a:extLst xmlns:a="http://schemas.openxmlformats.org/drawingml/2006/main">
               <a:ext uri="{FF2B5EF4-FFF2-40B4-BE49-F238E27FC236}">
-                <a16:creationId xmlns:a16="http://schemas.microsoft.com/office/drawing/2014/main" id="{0AD8CD9B-47BD-4DE9-A94D-783F3A65A398}"/>
+                <a16:creationId xmlns:a16="http://schemas.microsoft.com/office/drawing/2014/main" id="{80796BE6-1644-467B-802D-2865E2A25169}"/>
               </a:ext>
             </a:extLst>
           </p:cNvPr>
@@ -14095,7 +14095,7 @@
           <p:nvPr/>
         </p:nvPicPr>
         <p:blipFill>
-          <a:blip xmlns:r="http://schemas.openxmlformats.org/officeDocument/2006/relationships" xmlns:a="http://schemas.openxmlformats.org/drawingml/2006/main" r:embed="R72de4c16ea914fef"/>
+          <a:blip xmlns:r="http://schemas.openxmlformats.org/officeDocument/2006/relationships" xmlns:a="http://schemas.openxmlformats.org/drawingml/2006/main" r:embed="R7c0c78c9366f4651"/>
           <a:stretch xmlns:a="http://schemas.openxmlformats.org/drawingml/2006/main"/>
         </p:blipFill>
         <p:spPr>
@@ -14113,7 +14113,7 @@
           <p:cNvPr id="7" name="">
             <a:extLst xmlns:a="http://schemas.openxmlformats.org/drawingml/2006/main">
               <a:ext uri="{FF2B5EF4-FFF2-40B4-BE49-F238E27FC236}">
-                <a16:creationId xmlns:a16="http://schemas.microsoft.com/office/drawing/2014/main" id="{3A1FF201-9F3C-4BB9-A57B-4215AE6000ED}"/>
+                <a16:creationId xmlns:a16="http://schemas.microsoft.com/office/drawing/2014/main" id="{86BB410C-14C2-4CEC-BD02-D3575B35C825}"/>
               </a:ext>
             </a:extLst>
           </p:cNvPr>
@@ -14173,7 +14173,7 @@
     </p:spTree>
     <p:extLst>
       <p:ext uri="{BB962C8B-B14F-4D97-AF65-F5344CB8AC3E}">
-        <p14:creationId xmlns:p14="http://schemas.microsoft.com/office/powerpoint/2010/main" val="820627115"/>
+        <p14:creationId xmlns:p14="http://schemas.microsoft.com/office/powerpoint/2010/main" val="775353843"/>
       </p:ext>
     </p:extLst>
   </p:cSld>
@@ -14204,7 +14204,7 @@
           <p:cNvPr id="18" name="chapter-label">
             <a:extLst xmlns:a="http://schemas.openxmlformats.org/drawingml/2006/main">
               <a:ext uri="{FF2B5EF4-FFF2-40B4-BE49-F238E27FC236}">
-                <a16:creationId xmlns:a16="http://schemas.microsoft.com/office/drawing/2014/main" id="{A95726EB-FBA0-4B72-93F0-815F1410B99A}"/>
+                <a16:creationId xmlns:a16="http://schemas.microsoft.com/office/drawing/2014/main" id="{866CFBA4-533E-4B60-904F-6313BA408D9F}"/>
               </a:ext>
             </a:extLst>
           </p:cNvPr>
@@ -14266,7 +14266,7 @@
           <p:cNvPr id="2" name="slide-title">
             <a:extLst xmlns:a="http://schemas.openxmlformats.org/drawingml/2006/main">
               <a:ext uri="{FF2B5EF4-FFF2-40B4-BE49-F238E27FC236}">
-                <a16:creationId xmlns:a16="http://schemas.microsoft.com/office/drawing/2014/main" id="{DAEC4A9C-7AD5-4DF2-BCC8-D581758048CF}"/>
+                <a16:creationId xmlns:a16="http://schemas.microsoft.com/office/drawing/2014/main" id="{E563AA75-FC3A-4A45-80CB-A77492BE60D6}"/>
               </a:ext>
             </a:extLst>
           </p:cNvPr>
@@ -14328,7 +14328,7 @@
           <p:cNvPr id="3" name="footer-rule">
             <a:extLst xmlns:a="http://schemas.openxmlformats.org/drawingml/2006/main">
               <a:ext uri="{FF2B5EF4-FFF2-40B4-BE49-F238E27FC236}">
-                <a16:creationId xmlns:a16="http://schemas.microsoft.com/office/drawing/2014/main" id="{37E7F742-6504-4E31-A44F-888599D906FF}"/>
+                <a16:creationId xmlns:a16="http://schemas.microsoft.com/office/drawing/2014/main" id="{5784FA51-DB28-4C95-9E00-C983DF044F41}"/>
               </a:ext>
             </a:extLst>
           </p:cNvPr>
@@ -14359,7 +14359,7 @@
           <p:cNvPr id="4" name="footer-book">
             <a:extLst xmlns:a="http://schemas.openxmlformats.org/drawingml/2006/main">
               <a:ext uri="{FF2B5EF4-FFF2-40B4-BE49-F238E27FC236}">
-                <a16:creationId xmlns:a16="http://schemas.microsoft.com/office/drawing/2014/main" id="{DF914DDE-112D-444A-9638-99067FF3C27F}"/>
+                <a16:creationId xmlns:a16="http://schemas.microsoft.com/office/drawing/2014/main" id="{FA0993F1-8760-4A9E-8F18-99F5CEF17EF8}"/>
               </a:ext>
             </a:extLst>
           </p:cNvPr>
@@ -14421,7 +14421,7 @@
           <p:cNvPr id="5" name="footer-number">
             <a:extLst xmlns:a="http://schemas.openxmlformats.org/drawingml/2006/main">
               <a:ext uri="{FF2B5EF4-FFF2-40B4-BE49-F238E27FC236}">
-                <a16:creationId xmlns:a16="http://schemas.microsoft.com/office/drawing/2014/main" id="{5F0129EF-8ED4-4062-84C2-852345DC8DE5}"/>
+                <a16:creationId xmlns:a16="http://schemas.microsoft.com/office/drawing/2014/main" id="{C0E12262-AF23-485D-A04C-BFEC187E4D55}"/>
               </a:ext>
             </a:extLst>
           </p:cNvPr>
@@ -14483,7 +14483,7 @@
           <p:cNvPr id="6" name="">
             <a:extLst xmlns:a="http://schemas.openxmlformats.org/drawingml/2006/main">
               <a:ext uri="{FF2B5EF4-FFF2-40B4-BE49-F238E27FC236}">
-                <a16:creationId xmlns:a16="http://schemas.microsoft.com/office/drawing/2014/main" id="{5B400CB6-6CB1-49D8-9908-05D24B8F9C44}"/>
+                <a16:creationId xmlns:a16="http://schemas.microsoft.com/office/drawing/2014/main" id="{C5BFF478-D096-4D58-8CA7-76C78F103F79}"/>
               </a:ext>
             </a:extLst>
           </p:cNvPr>
@@ -14545,7 +14545,7 @@
           <p:cNvPr id="7" name="bullet-mark-1">
             <a:extLst xmlns:a="http://schemas.openxmlformats.org/drawingml/2006/main">
               <a:ext uri="{FF2B5EF4-FFF2-40B4-BE49-F238E27FC236}">
-                <a16:creationId xmlns:a16="http://schemas.microsoft.com/office/drawing/2014/main" id="{231112DA-3FDB-44FD-946B-3696B25B74A3}"/>
+                <a16:creationId xmlns:a16="http://schemas.microsoft.com/office/drawing/2014/main" id="{02F56119-89E1-4ACE-8348-EA72AFC39949}"/>
               </a:ext>
             </a:extLst>
           </p:cNvPr>
@@ -14607,7 +14607,7 @@
           <p:cNvPr id="8" name="bullet-1">
             <a:extLst xmlns:a="http://schemas.openxmlformats.org/drawingml/2006/main">
               <a:ext uri="{FF2B5EF4-FFF2-40B4-BE49-F238E27FC236}">
-                <a16:creationId xmlns:a16="http://schemas.microsoft.com/office/drawing/2014/main" id="{4970A0F2-7BD4-4A66-ABAC-E1A947DC08E4}"/>
+                <a16:creationId xmlns:a16="http://schemas.microsoft.com/office/drawing/2014/main" id="{EE709908-C05B-4F6D-984E-336F79B65CDF}"/>
               </a:ext>
             </a:extLst>
           </p:cNvPr>
@@ -14669,7 +14669,7 @@
           <p:cNvPr id="9" name="bullet-mark-2">
             <a:extLst xmlns:a="http://schemas.openxmlformats.org/drawingml/2006/main">
               <a:ext uri="{FF2B5EF4-FFF2-40B4-BE49-F238E27FC236}">
-                <a16:creationId xmlns:a16="http://schemas.microsoft.com/office/drawing/2014/main" id="{2D9BDE1D-1DCC-413D-B53D-A37642BDF8E5}"/>
+                <a16:creationId xmlns:a16="http://schemas.microsoft.com/office/drawing/2014/main" id="{E6388121-0767-4C77-A2BD-E52186DEDB9C}"/>
               </a:ext>
             </a:extLst>
           </p:cNvPr>
@@ -14731,7 +14731,7 @@
           <p:cNvPr id="10" name="bullet-2">
             <a:extLst xmlns:a="http://schemas.openxmlformats.org/drawingml/2006/main">
               <a:ext uri="{FF2B5EF4-FFF2-40B4-BE49-F238E27FC236}">
-                <a16:creationId xmlns:a16="http://schemas.microsoft.com/office/drawing/2014/main" id="{2A06F649-EAB5-4F45-B570-BFC4942BDC7E}"/>
+                <a16:creationId xmlns:a16="http://schemas.microsoft.com/office/drawing/2014/main" id="{777F4D31-32C3-4B7C-97B6-8EDB6A4461DC}"/>
               </a:ext>
             </a:extLst>
           </p:cNvPr>
@@ -14793,7 +14793,7 @@
           <p:cNvPr id="11" name="bullet-mark-3">
             <a:extLst xmlns:a="http://schemas.openxmlformats.org/drawingml/2006/main">
               <a:ext uri="{FF2B5EF4-FFF2-40B4-BE49-F238E27FC236}">
-                <a16:creationId xmlns:a16="http://schemas.microsoft.com/office/drawing/2014/main" id="{6232699C-B7A8-4ECF-BB7F-6979349750FE}"/>
+                <a16:creationId xmlns:a16="http://schemas.microsoft.com/office/drawing/2014/main" id="{555E57DE-E3C6-4FF5-BDE7-C2C87F180D9D}"/>
               </a:ext>
             </a:extLst>
           </p:cNvPr>
@@ -14855,7 +14855,7 @@
           <p:cNvPr id="12" name="bullet-3">
             <a:extLst xmlns:a="http://schemas.openxmlformats.org/drawingml/2006/main">
               <a:ext uri="{FF2B5EF4-FFF2-40B4-BE49-F238E27FC236}">
-                <a16:creationId xmlns:a16="http://schemas.microsoft.com/office/drawing/2014/main" id="{325FE5F4-47F2-432D-ACF3-1F46BC2EAC2C}"/>
+                <a16:creationId xmlns:a16="http://schemas.microsoft.com/office/drawing/2014/main" id="{1DC3B94F-075B-4A7F-8AEF-7598B2F4F0D6}"/>
               </a:ext>
             </a:extLst>
           </p:cNvPr>
@@ -14917,7 +14917,7 @@
           <p:cNvPr id="13" name="bullet-mark-4">
             <a:extLst xmlns:a="http://schemas.openxmlformats.org/drawingml/2006/main">
               <a:ext uri="{FF2B5EF4-FFF2-40B4-BE49-F238E27FC236}">
-                <a16:creationId xmlns:a16="http://schemas.microsoft.com/office/drawing/2014/main" id="{BF4E18D1-9156-4F45-9B8D-6726C14BE5F8}"/>
+                <a16:creationId xmlns:a16="http://schemas.microsoft.com/office/drawing/2014/main" id="{02E8F529-06DB-4735-9171-B93323720F66}"/>
               </a:ext>
             </a:extLst>
           </p:cNvPr>
@@ -14979,7 +14979,7 @@
           <p:cNvPr id="14" name="bullet-4">
             <a:extLst xmlns:a="http://schemas.openxmlformats.org/drawingml/2006/main">
               <a:ext uri="{FF2B5EF4-FFF2-40B4-BE49-F238E27FC236}">
-                <a16:creationId xmlns:a16="http://schemas.microsoft.com/office/drawing/2014/main" id="{C9C3C8C5-0CFE-426A-8CD5-0CEB9ACD6727}"/>
+                <a16:creationId xmlns:a16="http://schemas.microsoft.com/office/drawing/2014/main" id="{5D318D9D-D079-4B2C-8DD4-45B51FB24A00}"/>
               </a:ext>
             </a:extLst>
           </p:cNvPr>
@@ -15041,7 +15041,7 @@
           <p:cNvPr id="15" name="bullet-mark-5">
             <a:extLst xmlns:a="http://schemas.openxmlformats.org/drawingml/2006/main">
               <a:ext uri="{FF2B5EF4-FFF2-40B4-BE49-F238E27FC236}">
-                <a16:creationId xmlns:a16="http://schemas.microsoft.com/office/drawing/2014/main" id="{1C30C8AF-C7CA-4AB6-A21C-C333B772223D}"/>
+                <a16:creationId xmlns:a16="http://schemas.microsoft.com/office/drawing/2014/main" id="{EBBFD15D-6930-456D-B538-A96A8C2DF6F9}"/>
               </a:ext>
             </a:extLst>
           </p:cNvPr>
@@ -15103,7 +15103,7 @@
           <p:cNvPr id="16" name="bullet-5">
             <a:extLst xmlns:a="http://schemas.openxmlformats.org/drawingml/2006/main">
               <a:ext uri="{FF2B5EF4-FFF2-40B4-BE49-F238E27FC236}">
-                <a16:creationId xmlns:a16="http://schemas.microsoft.com/office/drawing/2014/main" id="{903A9DDA-12C1-4F32-AC10-06779EFCC290}"/>
+                <a16:creationId xmlns:a16="http://schemas.microsoft.com/office/drawing/2014/main" id="{9DB53450-068D-4AE5-98CB-B2741521D5B0}"/>
               </a:ext>
             </a:extLst>
           </p:cNvPr>
@@ -15165,7 +15165,7 @@
           <p:cNvPr id="17" name="">
             <a:extLst xmlns:a="http://schemas.openxmlformats.org/drawingml/2006/main">
               <a:ext uri="{FF2B5EF4-FFF2-40B4-BE49-F238E27FC236}">
-                <a16:creationId xmlns:a16="http://schemas.microsoft.com/office/drawing/2014/main" id="{7827E5CA-FF8D-4299-91F3-BFBE128F8ACE}"/>
+                <a16:creationId xmlns:a16="http://schemas.microsoft.com/office/drawing/2014/main" id="{22FD8186-5715-4AA3-AD2B-EFD0C6664AA3}"/>
               </a:ext>
             </a:extLst>
           </p:cNvPr>
@@ -15225,7 +15225,7 @@
     </p:spTree>
     <p:extLst>
       <p:ext uri="{BB962C8B-B14F-4D97-AF65-F5344CB8AC3E}">
-        <p14:creationId xmlns:p14="http://schemas.microsoft.com/office/powerpoint/2010/main" val="1882350560"/>
+        <p14:creationId xmlns:p14="http://schemas.microsoft.com/office/powerpoint/2010/main" val="2020103308"/>
       </p:ext>
     </p:extLst>
   </p:cSld>
@@ -15256,7 +15256,7 @@
           <p:cNvPr id="8" name="chapter-label">
             <a:extLst xmlns:a="http://schemas.openxmlformats.org/drawingml/2006/main">
               <a:ext uri="{FF2B5EF4-FFF2-40B4-BE49-F238E27FC236}">
-                <a16:creationId xmlns:a16="http://schemas.microsoft.com/office/drawing/2014/main" id="{932A1036-D24D-48CB-880B-0EDF3DF33170}"/>
+                <a16:creationId xmlns:a16="http://schemas.microsoft.com/office/drawing/2014/main" id="{ED820D55-D709-4A34-B832-C143B4956D72}"/>
               </a:ext>
             </a:extLst>
           </p:cNvPr>
@@ -15318,7 +15318,7 @@
           <p:cNvPr id="2" name="slide-title">
             <a:extLst xmlns:a="http://schemas.openxmlformats.org/drawingml/2006/main">
               <a:ext uri="{FF2B5EF4-FFF2-40B4-BE49-F238E27FC236}">
-                <a16:creationId xmlns:a16="http://schemas.microsoft.com/office/drawing/2014/main" id="{FBEF8F38-4009-4758-B39F-E49D56546082}"/>
+                <a16:creationId xmlns:a16="http://schemas.microsoft.com/office/drawing/2014/main" id="{17672327-C1A9-491D-B816-B16A0A52AC2A}"/>
               </a:ext>
             </a:extLst>
           </p:cNvPr>
@@ -15380,7 +15380,7 @@
           <p:cNvPr id="3" name="footer-rule">
             <a:extLst xmlns:a="http://schemas.openxmlformats.org/drawingml/2006/main">
               <a:ext uri="{FF2B5EF4-FFF2-40B4-BE49-F238E27FC236}">
-                <a16:creationId xmlns:a16="http://schemas.microsoft.com/office/drawing/2014/main" id="{73D737EE-EB66-4587-87A7-FED7E5DBD1CF}"/>
+                <a16:creationId xmlns:a16="http://schemas.microsoft.com/office/drawing/2014/main" id="{030F6A64-EBF0-4319-B76D-12042F85D3F0}"/>
               </a:ext>
             </a:extLst>
           </p:cNvPr>
@@ -15411,7 +15411,7 @@
           <p:cNvPr id="4" name="footer-book">
             <a:extLst xmlns:a="http://schemas.openxmlformats.org/drawingml/2006/main">
               <a:ext uri="{FF2B5EF4-FFF2-40B4-BE49-F238E27FC236}">
-                <a16:creationId xmlns:a16="http://schemas.microsoft.com/office/drawing/2014/main" id="{BBC99185-C73C-4753-A351-AA5E2452B86A}"/>
+                <a16:creationId xmlns:a16="http://schemas.microsoft.com/office/drawing/2014/main" id="{D7B969D1-68B9-4417-B63D-E71E3F15410E}"/>
               </a:ext>
             </a:extLst>
           </p:cNvPr>
@@ -15473,7 +15473,7 @@
           <p:cNvPr id="5" name="footer-number">
             <a:extLst xmlns:a="http://schemas.openxmlformats.org/drawingml/2006/main">
               <a:ext uri="{FF2B5EF4-FFF2-40B4-BE49-F238E27FC236}">
-                <a16:creationId xmlns:a16="http://schemas.microsoft.com/office/drawing/2014/main" id="{21DAB03C-B4D5-42C8-AE47-C523E5D7EF0D}"/>
+                <a16:creationId xmlns:a16="http://schemas.microsoft.com/office/drawing/2014/main" id="{3156DD4A-2301-4B03-B132-F8B4154A1E89}"/>
               </a:ext>
             </a:extLst>
           </p:cNvPr>
@@ -15539,7 +15539,7 @@
           <p:nvPr/>
         </p:nvPicPr>
         <p:blipFill>
-          <a:blip xmlns:r="http://schemas.openxmlformats.org/officeDocument/2006/relationships" xmlns:a="http://schemas.openxmlformats.org/drawingml/2006/main" r:embed="R907a3ebaedc64d31"/>
+          <a:blip xmlns:r="http://schemas.openxmlformats.org/officeDocument/2006/relationships" xmlns:a="http://schemas.openxmlformats.org/drawingml/2006/main" r:embed="Rdaed2d2c73b24879"/>
           <a:stretch xmlns:a="http://schemas.openxmlformats.org/drawingml/2006/main"/>
         </p:blipFill>
         <p:spPr>
@@ -15557,7 +15557,7 @@
           <p:cNvPr id="7" name="">
             <a:extLst xmlns:a="http://schemas.openxmlformats.org/drawingml/2006/main">
               <a:ext uri="{FF2B5EF4-FFF2-40B4-BE49-F238E27FC236}">
-                <a16:creationId xmlns:a16="http://schemas.microsoft.com/office/drawing/2014/main" id="{FE9C561F-ABFB-448B-B211-87A2815C3EB6}"/>
+                <a16:creationId xmlns:a16="http://schemas.microsoft.com/office/drawing/2014/main" id="{79AFA4E1-91A7-43D4-BE11-109E31D0FAA4}"/>
               </a:ext>
             </a:extLst>
           </p:cNvPr>
@@ -15617,7 +15617,7 @@
     </p:spTree>
     <p:extLst>
       <p:ext uri="{BB962C8B-B14F-4D97-AF65-F5344CB8AC3E}">
-        <p14:creationId xmlns:p14="http://schemas.microsoft.com/office/powerpoint/2010/main" val="555681731"/>
+        <p14:creationId xmlns:p14="http://schemas.microsoft.com/office/powerpoint/2010/main" val="858943690"/>
       </p:ext>
     </p:extLst>
   </p:cSld>
@@ -15648,7 +15648,7 @@
           <p:cNvPr id="8" name="chapter-label">
             <a:extLst xmlns:a="http://schemas.openxmlformats.org/drawingml/2006/main">
               <a:ext uri="{FF2B5EF4-FFF2-40B4-BE49-F238E27FC236}">
-                <a16:creationId xmlns:a16="http://schemas.microsoft.com/office/drawing/2014/main" id="{08C20F85-B660-45D6-A4AB-D9BF864DE834}"/>
+                <a16:creationId xmlns:a16="http://schemas.microsoft.com/office/drawing/2014/main" id="{6918AAAF-D62C-4916-B121-7E27E1E64FF7}"/>
               </a:ext>
             </a:extLst>
           </p:cNvPr>
@@ -15710,7 +15710,7 @@
           <p:cNvPr id="2" name="slide-title">
             <a:extLst xmlns:a="http://schemas.openxmlformats.org/drawingml/2006/main">
               <a:ext uri="{FF2B5EF4-FFF2-40B4-BE49-F238E27FC236}">
-                <a16:creationId xmlns:a16="http://schemas.microsoft.com/office/drawing/2014/main" id="{D69A2034-DD57-4819-8620-42AC065B2387}"/>
+                <a16:creationId xmlns:a16="http://schemas.microsoft.com/office/drawing/2014/main" id="{1AD90457-DF77-4DD9-9DEE-15376B01D57E}"/>
               </a:ext>
             </a:extLst>
           </p:cNvPr>
@@ -15772,7 +15772,7 @@
           <p:cNvPr id="3" name="footer-rule">
             <a:extLst xmlns:a="http://schemas.openxmlformats.org/drawingml/2006/main">
               <a:ext uri="{FF2B5EF4-FFF2-40B4-BE49-F238E27FC236}">
-                <a16:creationId xmlns:a16="http://schemas.microsoft.com/office/drawing/2014/main" id="{9E72AF3C-75B5-4160-B7EF-0C12B8DC5DA1}"/>
+                <a16:creationId xmlns:a16="http://schemas.microsoft.com/office/drawing/2014/main" id="{6913291F-5F90-45E3-A962-CEE1B63786B2}"/>
               </a:ext>
             </a:extLst>
           </p:cNvPr>
@@ -15803,7 +15803,7 @@
           <p:cNvPr id="4" name="footer-book">
             <a:extLst xmlns:a="http://schemas.openxmlformats.org/drawingml/2006/main">
               <a:ext uri="{FF2B5EF4-FFF2-40B4-BE49-F238E27FC236}">
-                <a16:creationId xmlns:a16="http://schemas.microsoft.com/office/drawing/2014/main" id="{DE48CBD0-C631-43CC-B480-269CEDA27B56}"/>
+                <a16:creationId xmlns:a16="http://schemas.microsoft.com/office/drawing/2014/main" id="{26702E40-EBFB-4C88-B40B-97B361619495}"/>
               </a:ext>
             </a:extLst>
           </p:cNvPr>
@@ -15865,7 +15865,7 @@
           <p:cNvPr id="5" name="footer-number">
             <a:extLst xmlns:a="http://schemas.openxmlformats.org/drawingml/2006/main">
               <a:ext uri="{FF2B5EF4-FFF2-40B4-BE49-F238E27FC236}">
-                <a16:creationId xmlns:a16="http://schemas.microsoft.com/office/drawing/2014/main" id="{82BABD51-5A0B-47D8-A4E5-0FD20D05D820}"/>
+                <a16:creationId xmlns:a16="http://schemas.microsoft.com/office/drawing/2014/main" id="{2982DEFB-129C-46B2-B798-6DE72CB0E3ED}"/>
               </a:ext>
             </a:extLst>
           </p:cNvPr>
@@ -15931,7 +15931,7 @@
           <p:nvPr/>
         </p:nvPicPr>
         <p:blipFill>
-          <a:blip xmlns:r="http://schemas.openxmlformats.org/officeDocument/2006/relationships" xmlns:a="http://schemas.openxmlformats.org/drawingml/2006/main" r:embed="R491ca0c6c4c24420"/>
+          <a:blip xmlns:r="http://schemas.openxmlformats.org/officeDocument/2006/relationships" xmlns:a="http://schemas.openxmlformats.org/drawingml/2006/main" r:embed="R6879569d9a184ea8"/>
           <a:stretch xmlns:a="http://schemas.openxmlformats.org/drawingml/2006/main"/>
         </p:blipFill>
         <p:spPr>
@@ -15949,7 +15949,7 @@
           <p:cNvPr id="7" name="">
             <a:extLst xmlns:a="http://schemas.openxmlformats.org/drawingml/2006/main">
               <a:ext uri="{FF2B5EF4-FFF2-40B4-BE49-F238E27FC236}">
-                <a16:creationId xmlns:a16="http://schemas.microsoft.com/office/drawing/2014/main" id="{6D25B729-27FE-4059-A12D-730F357B08AE}"/>
+                <a16:creationId xmlns:a16="http://schemas.microsoft.com/office/drawing/2014/main" id="{667B3B00-4230-465D-B86F-892C082EB035}"/>
               </a:ext>
             </a:extLst>
           </p:cNvPr>
@@ -16009,7 +16009,7 @@
     </p:spTree>
     <p:extLst>
       <p:ext uri="{BB962C8B-B14F-4D97-AF65-F5344CB8AC3E}">
-        <p14:creationId xmlns:p14="http://schemas.microsoft.com/office/powerpoint/2010/main" val="1611320417"/>
+        <p14:creationId xmlns:p14="http://schemas.microsoft.com/office/powerpoint/2010/main" val="1090872596"/>
       </p:ext>
     </p:extLst>
   </p:cSld>

--- a/sports-econ/downloads/chapter-2-the-supply-and-demand-playbook.pptx
+++ b/sports-econ/downloads/chapter-2-the-supply-and-demand-playbook.pptx
@@ -2,89 +2,89 @@
 <file path=ppt/presentation.xml><?xml version="1.0" encoding="utf-8"?>
 <p:presentation xmlns:p="http://schemas.openxmlformats.org/presentationml/2006/main">
   <p:sldMasterIdLst>
-    <p:sldMasterId xmlns:r="http://schemas.openxmlformats.org/officeDocument/2006/relationships" id="2147483648" r:id="R255e3cd1167c4b4c"/>
+    <p:sldMasterId xmlns:r="http://schemas.openxmlformats.org/officeDocument/2006/relationships" id="2147483648" r:id="R85b9162cb2a04b84"/>
   </p:sldMasterIdLst>
   <p:notesMasterIdLst>
-    <p:notesMasterId xmlns:r="http://schemas.openxmlformats.org/officeDocument/2006/relationships" r:id="R1181a506d6c54293"/>
+    <p:notesMasterId xmlns:r="http://schemas.openxmlformats.org/officeDocument/2006/relationships" r:id="R3e38a254f8c841c1"/>
   </p:notesMasterIdLst>
   <p:sldIdLst>
-    <p:sldId xmlns:r="http://schemas.openxmlformats.org/officeDocument/2006/relationships" id="256" r:id="R464c1f10ea8d4c74"/>
-    <p:sldId xmlns:r="http://schemas.openxmlformats.org/officeDocument/2006/relationships" id="257" r:id="Rc6d9c913e5b5499b"/>
-    <p:sldId xmlns:r="http://schemas.openxmlformats.org/officeDocument/2006/relationships" id="258" r:id="R5383e4c675574710"/>
-    <p:sldId xmlns:r="http://schemas.openxmlformats.org/officeDocument/2006/relationships" id="259" r:id="Rc59e8a6abf694cac"/>
-    <p:sldId xmlns:r="http://schemas.openxmlformats.org/officeDocument/2006/relationships" id="260" r:id="R7abbae08ab96415b"/>
-    <p:sldId xmlns:r="http://schemas.openxmlformats.org/officeDocument/2006/relationships" id="261" r:id="R1536f92110bb4d89"/>
-    <p:sldId xmlns:r="http://schemas.openxmlformats.org/officeDocument/2006/relationships" id="262" r:id="Re4566e9ed8d54671"/>
-    <p:sldId xmlns:r="http://schemas.openxmlformats.org/officeDocument/2006/relationships" id="263" r:id="R81aae59b1799488b"/>
-    <p:sldId xmlns:r="http://schemas.openxmlformats.org/officeDocument/2006/relationships" id="264" r:id="Rd62dc5313f3d4afd"/>
-    <p:sldId xmlns:r="http://schemas.openxmlformats.org/officeDocument/2006/relationships" id="265" r:id="R5468b1d867c94060"/>
-    <p:sldId xmlns:r="http://schemas.openxmlformats.org/officeDocument/2006/relationships" id="266" r:id="Re63117cd27a64516"/>
-    <p:sldId xmlns:r="http://schemas.openxmlformats.org/officeDocument/2006/relationships" id="267" r:id="R046872fa60d34e38"/>
-    <p:sldId xmlns:r="http://schemas.openxmlformats.org/officeDocument/2006/relationships" id="268" r:id="Rf037f0925ef64302"/>
-    <p:sldId xmlns:r="http://schemas.openxmlformats.org/officeDocument/2006/relationships" id="269" r:id="Rc9fe73d4da5146c8"/>
-    <p:sldId xmlns:r="http://schemas.openxmlformats.org/officeDocument/2006/relationships" id="270" r:id="Re4822bb91851496f"/>
-    <p:sldId xmlns:r="http://schemas.openxmlformats.org/officeDocument/2006/relationships" id="271" r:id="Rd6e1de758fe04e4c"/>
-    <p:sldId xmlns:r="http://schemas.openxmlformats.org/officeDocument/2006/relationships" id="272" r:id="R560e851e88ef4597"/>
-    <p:sldId xmlns:r="http://schemas.openxmlformats.org/officeDocument/2006/relationships" id="273" r:id="R67e173ae99074459"/>
-    <p:sldId xmlns:r="http://schemas.openxmlformats.org/officeDocument/2006/relationships" id="274" r:id="Rc26eaedac2d64762"/>
-    <p:sldId xmlns:r="http://schemas.openxmlformats.org/officeDocument/2006/relationships" id="275" r:id="Rb7fc9c35ad3a428b"/>
-    <p:sldId xmlns:r="http://schemas.openxmlformats.org/officeDocument/2006/relationships" id="276" r:id="R32d2319bf3bf442e"/>
-    <p:sldId xmlns:r="http://schemas.openxmlformats.org/officeDocument/2006/relationships" id="277" r:id="R47f324e52c564298"/>
-    <p:sldId xmlns:r="http://schemas.openxmlformats.org/officeDocument/2006/relationships" id="278" r:id="R1c2f3dffb6fd4b96"/>
-    <p:sldId xmlns:r="http://schemas.openxmlformats.org/officeDocument/2006/relationships" id="279" r:id="R3081c6de989e41ea"/>
-    <p:sldId xmlns:r="http://schemas.openxmlformats.org/officeDocument/2006/relationships" id="280" r:id="Re601cb8e58884fb6"/>
-    <p:sldId xmlns:r="http://schemas.openxmlformats.org/officeDocument/2006/relationships" id="281" r:id="R4d028262a8d3422d"/>
-    <p:sldId xmlns:r="http://schemas.openxmlformats.org/officeDocument/2006/relationships" id="282" r:id="R7e0e265cd11e497d"/>
-    <p:sldId xmlns:r="http://schemas.openxmlformats.org/officeDocument/2006/relationships" id="283" r:id="R41e3932268a846be"/>
-    <p:sldId xmlns:r="http://schemas.openxmlformats.org/officeDocument/2006/relationships" id="284" r:id="Rcebec3d738764353"/>
-    <p:sldId xmlns:r="http://schemas.openxmlformats.org/officeDocument/2006/relationships" id="285" r:id="Ra04c2b48e4874aca"/>
-    <p:sldId xmlns:r="http://schemas.openxmlformats.org/officeDocument/2006/relationships" id="286" r:id="Rc529252442734db6"/>
-    <p:sldId xmlns:r="http://schemas.openxmlformats.org/officeDocument/2006/relationships" id="287" r:id="R1eb225fc71e4480c"/>
-    <p:sldId xmlns:r="http://schemas.openxmlformats.org/officeDocument/2006/relationships" id="288" r:id="Re80d9f0f8c58463c"/>
-    <p:sldId xmlns:r="http://schemas.openxmlformats.org/officeDocument/2006/relationships" id="289" r:id="Rf6d0b51b9a264d22"/>
-    <p:sldId xmlns:r="http://schemas.openxmlformats.org/officeDocument/2006/relationships" id="290" r:id="R72baa8d5dda64564"/>
-    <p:sldId xmlns:r="http://schemas.openxmlformats.org/officeDocument/2006/relationships" id="291" r:id="R36892b42dcc84e29"/>
-    <p:sldId xmlns:r="http://schemas.openxmlformats.org/officeDocument/2006/relationships" id="292" r:id="R420b2f6c645d4f14"/>
-    <p:sldId xmlns:r="http://schemas.openxmlformats.org/officeDocument/2006/relationships" id="293" r:id="Rb92a19ba93cd4736"/>
-    <p:sldId xmlns:r="http://schemas.openxmlformats.org/officeDocument/2006/relationships" id="294" r:id="Rdd43035ecff44ace"/>
-    <p:sldId xmlns:r="http://schemas.openxmlformats.org/officeDocument/2006/relationships" id="295" r:id="R9a4c60381a4e42ca"/>
-    <p:sldId xmlns:r="http://schemas.openxmlformats.org/officeDocument/2006/relationships" id="296" r:id="Rc7eaa9d9cb934bba"/>
-    <p:sldId xmlns:r="http://schemas.openxmlformats.org/officeDocument/2006/relationships" id="297" r:id="R74c05f6f2b1f4f7b"/>
-    <p:sldId xmlns:r="http://schemas.openxmlformats.org/officeDocument/2006/relationships" id="298" r:id="Rde4191335b60451b"/>
-    <p:sldId xmlns:r="http://schemas.openxmlformats.org/officeDocument/2006/relationships" id="299" r:id="R62fb1adefe254f5c"/>
-    <p:sldId xmlns:r="http://schemas.openxmlformats.org/officeDocument/2006/relationships" id="300" r:id="R8aef87fc61474860"/>
-    <p:sldId xmlns:r="http://schemas.openxmlformats.org/officeDocument/2006/relationships" id="301" r:id="R5f85abba314f441a"/>
-    <p:sldId xmlns:r="http://schemas.openxmlformats.org/officeDocument/2006/relationships" id="302" r:id="R902e19a9c5174023"/>
-    <p:sldId xmlns:r="http://schemas.openxmlformats.org/officeDocument/2006/relationships" id="303" r:id="R182dc02f604a49ef"/>
-    <p:sldId xmlns:r="http://schemas.openxmlformats.org/officeDocument/2006/relationships" id="304" r:id="R0017518253d3478c"/>
-    <p:sldId xmlns:r="http://schemas.openxmlformats.org/officeDocument/2006/relationships" id="305" r:id="Rfc1c874e2d514644"/>
-    <p:sldId xmlns:r="http://schemas.openxmlformats.org/officeDocument/2006/relationships" id="306" r:id="R6cc41bbdf60a42f9"/>
-    <p:sldId xmlns:r="http://schemas.openxmlformats.org/officeDocument/2006/relationships" id="307" r:id="R940d80c4605a408e"/>
-    <p:sldId xmlns:r="http://schemas.openxmlformats.org/officeDocument/2006/relationships" id="308" r:id="R5fcf014e012a45c1"/>
-    <p:sldId xmlns:r="http://schemas.openxmlformats.org/officeDocument/2006/relationships" id="309" r:id="R864e6508c8a44af8"/>
-    <p:sldId xmlns:r="http://schemas.openxmlformats.org/officeDocument/2006/relationships" id="310" r:id="Ra4edc0c972d640e0"/>
-    <p:sldId xmlns:r="http://schemas.openxmlformats.org/officeDocument/2006/relationships" id="311" r:id="R4199ab2acef04758"/>
-    <p:sldId xmlns:r="http://schemas.openxmlformats.org/officeDocument/2006/relationships" id="312" r:id="Rc1d7b70ead2c4349"/>
-    <p:sldId xmlns:r="http://schemas.openxmlformats.org/officeDocument/2006/relationships" id="313" r:id="Rbea66cfea11846b1"/>
-    <p:sldId xmlns:r="http://schemas.openxmlformats.org/officeDocument/2006/relationships" id="314" r:id="R01fbbf74b1734bfd"/>
-    <p:sldId xmlns:r="http://schemas.openxmlformats.org/officeDocument/2006/relationships" id="315" r:id="R4277c235e0694f78"/>
-    <p:sldId xmlns:r="http://schemas.openxmlformats.org/officeDocument/2006/relationships" id="316" r:id="Red421d32b82e4f49"/>
-    <p:sldId xmlns:r="http://schemas.openxmlformats.org/officeDocument/2006/relationships" id="317" r:id="R872fe2c8ac4c4e1c"/>
-    <p:sldId xmlns:r="http://schemas.openxmlformats.org/officeDocument/2006/relationships" id="318" r:id="Rfa5cf10e5a2a4c6f"/>
-    <p:sldId xmlns:r="http://schemas.openxmlformats.org/officeDocument/2006/relationships" id="319" r:id="Re49599addcec4560"/>
-    <p:sldId xmlns:r="http://schemas.openxmlformats.org/officeDocument/2006/relationships" id="320" r:id="R4c9893d498bf47b4"/>
-    <p:sldId xmlns:r="http://schemas.openxmlformats.org/officeDocument/2006/relationships" id="321" r:id="R910e3626a9c14336"/>
-    <p:sldId xmlns:r="http://schemas.openxmlformats.org/officeDocument/2006/relationships" id="322" r:id="R129cc16b83df48de"/>
-    <p:sldId xmlns:r="http://schemas.openxmlformats.org/officeDocument/2006/relationships" id="323" r:id="R3325255f0cc440e6"/>
-    <p:sldId xmlns:r="http://schemas.openxmlformats.org/officeDocument/2006/relationships" id="324" r:id="Rf5f6f12453c44f78"/>
-    <p:sldId xmlns:r="http://schemas.openxmlformats.org/officeDocument/2006/relationships" id="325" r:id="R76a92b1d04d44aa4"/>
-    <p:sldId xmlns:r="http://schemas.openxmlformats.org/officeDocument/2006/relationships" id="326" r:id="Rb135408a048d435d"/>
-    <p:sldId xmlns:r="http://schemas.openxmlformats.org/officeDocument/2006/relationships" id="327" r:id="R39dc4d4f9592467d"/>
-    <p:sldId xmlns:r="http://schemas.openxmlformats.org/officeDocument/2006/relationships" id="328" r:id="R0a1a85f4e5da4c52"/>
-    <p:sldId xmlns:r="http://schemas.openxmlformats.org/officeDocument/2006/relationships" id="329" r:id="R66b146566161490c"/>
-    <p:sldId xmlns:r="http://schemas.openxmlformats.org/officeDocument/2006/relationships" id="330" r:id="R68d57ec448934b39"/>
-    <p:sldId xmlns:r="http://schemas.openxmlformats.org/officeDocument/2006/relationships" id="331" r:id="R34326731af974b5e"/>
-    <p:sldId xmlns:r="http://schemas.openxmlformats.org/officeDocument/2006/relationships" id="332" r:id="Rcef0e5b4a95a4661"/>
+    <p:sldId xmlns:r="http://schemas.openxmlformats.org/officeDocument/2006/relationships" id="256" r:id="R709ade6407d44e4e"/>
+    <p:sldId xmlns:r="http://schemas.openxmlformats.org/officeDocument/2006/relationships" id="257" r:id="R08141e7c8c55451d"/>
+    <p:sldId xmlns:r="http://schemas.openxmlformats.org/officeDocument/2006/relationships" id="258" r:id="Rc65530bd5c4d41af"/>
+    <p:sldId xmlns:r="http://schemas.openxmlformats.org/officeDocument/2006/relationships" id="259" r:id="R458c1e84c3784f3b"/>
+    <p:sldId xmlns:r="http://schemas.openxmlformats.org/officeDocument/2006/relationships" id="260" r:id="R5343d23d12bb4e9f"/>
+    <p:sldId xmlns:r="http://schemas.openxmlformats.org/officeDocument/2006/relationships" id="261" r:id="R286e333a3519405e"/>
+    <p:sldId xmlns:r="http://schemas.openxmlformats.org/officeDocument/2006/relationships" id="262" r:id="Red4a86870d524887"/>
+    <p:sldId xmlns:r="http://schemas.openxmlformats.org/officeDocument/2006/relationships" id="263" r:id="Rd4dafe99021d4286"/>
+    <p:sldId xmlns:r="http://schemas.openxmlformats.org/officeDocument/2006/relationships" id="264" r:id="Rd1c1a49f5ba04e6d"/>
+    <p:sldId xmlns:r="http://schemas.openxmlformats.org/officeDocument/2006/relationships" id="265" r:id="R69a138f1804b40b3"/>
+    <p:sldId xmlns:r="http://schemas.openxmlformats.org/officeDocument/2006/relationships" id="266" r:id="R2a79682746764183"/>
+    <p:sldId xmlns:r="http://schemas.openxmlformats.org/officeDocument/2006/relationships" id="267" r:id="R06aa166ad8b64db4"/>
+    <p:sldId xmlns:r="http://schemas.openxmlformats.org/officeDocument/2006/relationships" id="268" r:id="R49fc9f007cef454b"/>
+    <p:sldId xmlns:r="http://schemas.openxmlformats.org/officeDocument/2006/relationships" id="269" r:id="R2cae2a162c6e4986"/>
+    <p:sldId xmlns:r="http://schemas.openxmlformats.org/officeDocument/2006/relationships" id="270" r:id="R81174b55edd644b8"/>
+    <p:sldId xmlns:r="http://schemas.openxmlformats.org/officeDocument/2006/relationships" id="271" r:id="R3dbce4790e264b68"/>
+    <p:sldId xmlns:r="http://schemas.openxmlformats.org/officeDocument/2006/relationships" id="272" r:id="R8d46d0e13fbc43f1"/>
+    <p:sldId xmlns:r="http://schemas.openxmlformats.org/officeDocument/2006/relationships" id="273" r:id="R0e9704f22c07433f"/>
+    <p:sldId xmlns:r="http://schemas.openxmlformats.org/officeDocument/2006/relationships" id="274" r:id="Rca209484f6ed4fb2"/>
+    <p:sldId xmlns:r="http://schemas.openxmlformats.org/officeDocument/2006/relationships" id="275" r:id="Rac1964377ac6460e"/>
+    <p:sldId xmlns:r="http://schemas.openxmlformats.org/officeDocument/2006/relationships" id="276" r:id="Rf4620f2bbb3049e3"/>
+    <p:sldId xmlns:r="http://schemas.openxmlformats.org/officeDocument/2006/relationships" id="277" r:id="Re9523e23df844a7b"/>
+    <p:sldId xmlns:r="http://schemas.openxmlformats.org/officeDocument/2006/relationships" id="278" r:id="Re1d513b13d054173"/>
+    <p:sldId xmlns:r="http://schemas.openxmlformats.org/officeDocument/2006/relationships" id="279" r:id="R908de3f32c6e4e43"/>
+    <p:sldId xmlns:r="http://schemas.openxmlformats.org/officeDocument/2006/relationships" id="280" r:id="R452a727fb94c4e03"/>
+    <p:sldId xmlns:r="http://schemas.openxmlformats.org/officeDocument/2006/relationships" id="281" r:id="Rf3d42843b2764259"/>
+    <p:sldId xmlns:r="http://schemas.openxmlformats.org/officeDocument/2006/relationships" id="282" r:id="R393ab3df4f144b55"/>
+    <p:sldId xmlns:r="http://schemas.openxmlformats.org/officeDocument/2006/relationships" id="283" r:id="Ref5561e3ae3f4803"/>
+    <p:sldId xmlns:r="http://schemas.openxmlformats.org/officeDocument/2006/relationships" id="284" r:id="R464b7636779c4341"/>
+    <p:sldId xmlns:r="http://schemas.openxmlformats.org/officeDocument/2006/relationships" id="285" r:id="Rec78e9897a8046a4"/>
+    <p:sldId xmlns:r="http://schemas.openxmlformats.org/officeDocument/2006/relationships" id="286" r:id="R234b7a2a81344e54"/>
+    <p:sldId xmlns:r="http://schemas.openxmlformats.org/officeDocument/2006/relationships" id="287" r:id="R452bb12a90ec4ac4"/>
+    <p:sldId xmlns:r="http://schemas.openxmlformats.org/officeDocument/2006/relationships" id="288" r:id="Ra6e9363932a04247"/>
+    <p:sldId xmlns:r="http://schemas.openxmlformats.org/officeDocument/2006/relationships" id="289" r:id="R64b61cfd74fd42cb"/>
+    <p:sldId xmlns:r="http://schemas.openxmlformats.org/officeDocument/2006/relationships" id="290" r:id="R31da6bf7c843463a"/>
+    <p:sldId xmlns:r="http://schemas.openxmlformats.org/officeDocument/2006/relationships" id="291" r:id="R55b669da90ec4587"/>
+    <p:sldId xmlns:r="http://schemas.openxmlformats.org/officeDocument/2006/relationships" id="292" r:id="R90e60c0d228346bd"/>
+    <p:sldId xmlns:r="http://schemas.openxmlformats.org/officeDocument/2006/relationships" id="293" r:id="R9acd64bbdf234290"/>
+    <p:sldId xmlns:r="http://schemas.openxmlformats.org/officeDocument/2006/relationships" id="294" r:id="R49640f4d63934842"/>
+    <p:sldId xmlns:r="http://schemas.openxmlformats.org/officeDocument/2006/relationships" id="295" r:id="Rd149843250c24565"/>
+    <p:sldId xmlns:r="http://schemas.openxmlformats.org/officeDocument/2006/relationships" id="296" r:id="Rd79ed84af1d34082"/>
+    <p:sldId xmlns:r="http://schemas.openxmlformats.org/officeDocument/2006/relationships" id="297" r:id="R9585221a4c914b23"/>
+    <p:sldId xmlns:r="http://schemas.openxmlformats.org/officeDocument/2006/relationships" id="298" r:id="Re5dc633c3e1d4040"/>
+    <p:sldId xmlns:r="http://schemas.openxmlformats.org/officeDocument/2006/relationships" id="299" r:id="R8ed390113b5f4916"/>
+    <p:sldId xmlns:r="http://schemas.openxmlformats.org/officeDocument/2006/relationships" id="300" r:id="R45235e672c034b45"/>
+    <p:sldId xmlns:r="http://schemas.openxmlformats.org/officeDocument/2006/relationships" id="301" r:id="Raecd0db8b9eb418b"/>
+    <p:sldId xmlns:r="http://schemas.openxmlformats.org/officeDocument/2006/relationships" id="302" r:id="Rb3d3ffdc471c4449"/>
+    <p:sldId xmlns:r="http://schemas.openxmlformats.org/officeDocument/2006/relationships" id="303" r:id="R4d993f4cd2564d43"/>
+    <p:sldId xmlns:r="http://schemas.openxmlformats.org/officeDocument/2006/relationships" id="304" r:id="R5b23771912ee43f0"/>
+    <p:sldId xmlns:r="http://schemas.openxmlformats.org/officeDocument/2006/relationships" id="305" r:id="R5eef67be148643c5"/>
+    <p:sldId xmlns:r="http://schemas.openxmlformats.org/officeDocument/2006/relationships" id="306" r:id="R54f740a92ed5479d"/>
+    <p:sldId xmlns:r="http://schemas.openxmlformats.org/officeDocument/2006/relationships" id="307" r:id="Rc1cf0ea2175c4f5b"/>
+    <p:sldId xmlns:r="http://schemas.openxmlformats.org/officeDocument/2006/relationships" id="308" r:id="Re3a5ddb932d54886"/>
+    <p:sldId xmlns:r="http://schemas.openxmlformats.org/officeDocument/2006/relationships" id="309" r:id="R652bd130e28f4e08"/>
+    <p:sldId xmlns:r="http://schemas.openxmlformats.org/officeDocument/2006/relationships" id="310" r:id="R94c010c324594c58"/>
+    <p:sldId xmlns:r="http://schemas.openxmlformats.org/officeDocument/2006/relationships" id="311" r:id="Re855ad8bd31e4900"/>
+    <p:sldId xmlns:r="http://schemas.openxmlformats.org/officeDocument/2006/relationships" id="312" r:id="Rc992ea55dcb04857"/>
+    <p:sldId xmlns:r="http://schemas.openxmlformats.org/officeDocument/2006/relationships" id="313" r:id="Rbaa93e686a93435a"/>
+    <p:sldId xmlns:r="http://schemas.openxmlformats.org/officeDocument/2006/relationships" id="314" r:id="R8820704eafcd4adb"/>
+    <p:sldId xmlns:r="http://schemas.openxmlformats.org/officeDocument/2006/relationships" id="315" r:id="R2abba5471dfd452e"/>
+    <p:sldId xmlns:r="http://schemas.openxmlformats.org/officeDocument/2006/relationships" id="316" r:id="Re0413156deb048e6"/>
+    <p:sldId xmlns:r="http://schemas.openxmlformats.org/officeDocument/2006/relationships" id="317" r:id="Rca0c7c0f59b04a28"/>
+    <p:sldId xmlns:r="http://schemas.openxmlformats.org/officeDocument/2006/relationships" id="318" r:id="R170452193df743c1"/>
+    <p:sldId xmlns:r="http://schemas.openxmlformats.org/officeDocument/2006/relationships" id="319" r:id="Rf0a6a2cd47924770"/>
+    <p:sldId xmlns:r="http://schemas.openxmlformats.org/officeDocument/2006/relationships" id="320" r:id="Rf7872bec37844119"/>
+    <p:sldId xmlns:r="http://schemas.openxmlformats.org/officeDocument/2006/relationships" id="321" r:id="R9a27e360765947fb"/>
+    <p:sldId xmlns:r="http://schemas.openxmlformats.org/officeDocument/2006/relationships" id="322" r:id="R515f3c48c819436a"/>
+    <p:sldId xmlns:r="http://schemas.openxmlformats.org/officeDocument/2006/relationships" id="323" r:id="Rffafbc6dadcf4114"/>
+    <p:sldId xmlns:r="http://schemas.openxmlformats.org/officeDocument/2006/relationships" id="324" r:id="Rf3a4d0f764bb4cb6"/>
+    <p:sldId xmlns:r="http://schemas.openxmlformats.org/officeDocument/2006/relationships" id="325" r:id="R05f3b241f99b4a7c"/>
+    <p:sldId xmlns:r="http://schemas.openxmlformats.org/officeDocument/2006/relationships" id="326" r:id="Rdb691fe843e341e7"/>
+    <p:sldId xmlns:r="http://schemas.openxmlformats.org/officeDocument/2006/relationships" id="327" r:id="R92609e99201d44dd"/>
+    <p:sldId xmlns:r="http://schemas.openxmlformats.org/officeDocument/2006/relationships" id="328" r:id="R1ef98b5e953d4f6f"/>
+    <p:sldId xmlns:r="http://schemas.openxmlformats.org/officeDocument/2006/relationships" id="329" r:id="R35a04eaed1304c76"/>
+    <p:sldId xmlns:r="http://schemas.openxmlformats.org/officeDocument/2006/relationships" id="330" r:id="Rd3c9494f40b44c88"/>
+    <p:sldId xmlns:r="http://schemas.openxmlformats.org/officeDocument/2006/relationships" id="331" r:id="R04b2d05bc62145ab"/>
+    <p:sldId xmlns:r="http://schemas.openxmlformats.org/officeDocument/2006/relationships" id="332" r:id="R306253537bf94578"/>
   </p:sldIdLst>
   <p:sldSz cx="12192000" cy="6858000"/>
   <p:notesSz cx="6858000" cy="9144000"/>
@@ -4128,7 +4128,7 @@
           </a:p>
           <a:p xmlns:a="http://schemas.openxmlformats.org/drawingml/2006/main">
             <a:r>
-              <a:t>Book Study and Learn prompts. Answers: 1 demand right, P/Q up; 2 supply left, P up Q down; 3 demand and supply right, Q up P ambiguous; 4 demand and supply left, Q down P ambiguous. Define the market and time period before answering; apply the standard competitive model.</a:t>
+              <a:t>Book Study and Learn prompts. Answers: 1 demand right, P/Q up; 2 supply left, P up Q down; 3 demand and supply right, Q up P ambiguous; 4 demand and supply left, Q down P ambiguous. Define the market and time period before answering; apply the standard competitive model. Shared practice app: https://sbu-econ.org/supply-demand-shift-practice/?course=sports-econ. Start with One Event, then try Two Events. No calculations are required. Substitutes and complements are cases of related-good prices; weather is an operating condition.</a:t>
             </a:r>
           </a:p>
           <a:p xmlns:a="http://schemas.openxmlformats.org/drawingml/2006/main">
@@ -8626,7 +8626,7 @@
   </p:cSld>
   <p:clrMap bg1="lt1" tx1="dk1" bg2="lt2" tx2="dk2" accent1="accent1" accent2="accent2" accent3="accent3" accent4="accent4" accent5="accent5" accent6="accent6" hlink="hlink" folHlink="folHlink"/>
   <p:sldLayoutIdLst>
-    <p:sldLayoutId xmlns:r="http://schemas.openxmlformats.org/officeDocument/2006/relationships" id="2147483649" r:id="Rfb603e25c4f74c66"/>
+    <p:sldLayoutId xmlns:r="http://schemas.openxmlformats.org/officeDocument/2006/relationships" id="2147483649" r:id="R0c3e74b91b1c4d9d"/>
   </p:sldLayoutIdLst>
   <p:txStyles>
     <p:titleStyle>
@@ -9177,7 +9177,7 @@
           <p:cNvPr id="8" name="text-0">
             <a:extLst xmlns:a="http://schemas.openxmlformats.org/drawingml/2006/main">
               <a:ext uri="{FF2B5EF4-FFF2-40B4-BE49-F238E27FC236}">
-                <a16:creationId xmlns:a16="http://schemas.microsoft.com/office/drawing/2014/main" id="{EB2E900D-DA88-4278-B641-0EDFFA78994D}"/>
+                <a16:creationId xmlns:a16="http://schemas.microsoft.com/office/drawing/2014/main" id="{2AF3B194-394E-461C-AFC2-92ECCC0FA71E}"/>
               </a:ext>
             </a:extLst>
           </p:cNvPr>
@@ -9239,7 +9239,7 @@
           <p:cNvPr id="2" name="text-1">
             <a:extLst xmlns:a="http://schemas.openxmlformats.org/drawingml/2006/main">
               <a:ext uri="{FF2B5EF4-FFF2-40B4-BE49-F238E27FC236}">
-                <a16:creationId xmlns:a16="http://schemas.microsoft.com/office/drawing/2014/main" id="{9DD10DFB-37C2-4E37-B268-77325C763FA5}"/>
+                <a16:creationId xmlns:a16="http://schemas.microsoft.com/office/drawing/2014/main" id="{CB82FD7F-EAA5-4AC7-A688-2326AA732FE3}"/>
               </a:ext>
             </a:extLst>
           </p:cNvPr>
@@ -9301,7 +9301,7 @@
           <p:cNvPr id="3" name="text-2">
             <a:extLst xmlns:a="http://schemas.openxmlformats.org/drawingml/2006/main">
               <a:ext uri="{FF2B5EF4-FFF2-40B4-BE49-F238E27FC236}">
-                <a16:creationId xmlns:a16="http://schemas.microsoft.com/office/drawing/2014/main" id="{7942EDB5-0898-40A2-8697-5075A0288C34}"/>
+                <a16:creationId xmlns:a16="http://schemas.microsoft.com/office/drawing/2014/main" id="{DD84C8DA-09F9-46F3-818C-AE548DB7C502}"/>
               </a:ext>
             </a:extLst>
           </p:cNvPr>
@@ -9363,7 +9363,7 @@
           <p:cNvPr id="4" name="text-3">
             <a:extLst xmlns:a="http://schemas.openxmlformats.org/drawingml/2006/main">
               <a:ext uri="{FF2B5EF4-FFF2-40B4-BE49-F238E27FC236}">
-                <a16:creationId xmlns:a16="http://schemas.microsoft.com/office/drawing/2014/main" id="{A4FD67C6-EE88-448A-87CD-C16FD5B109D3}"/>
+                <a16:creationId xmlns:a16="http://schemas.microsoft.com/office/drawing/2014/main" id="{03A835E8-5440-404B-BD31-B4A8474C7AAC}"/>
               </a:ext>
             </a:extLst>
           </p:cNvPr>
@@ -9436,7 +9436,7 @@
           <p:cNvPr id="5" name="">
             <a:extLst xmlns:a="http://schemas.openxmlformats.org/drawingml/2006/main">
               <a:ext uri="{FF2B5EF4-FFF2-40B4-BE49-F238E27FC236}">
-                <a16:creationId xmlns:a16="http://schemas.microsoft.com/office/drawing/2014/main" id="{62383325-E60E-40CB-A583-9EE72857745B}"/>
+                <a16:creationId xmlns:a16="http://schemas.microsoft.com/office/drawing/2014/main" id="{947F02DD-1151-45CF-AD75-C379BED6D333}"/>
               </a:ext>
             </a:extLst>
           </p:cNvPr>
@@ -9467,7 +9467,7 @@
           <p:cNvPr id="6" name="text-5">
             <a:extLst xmlns:a="http://schemas.openxmlformats.org/drawingml/2006/main">
               <a:ext uri="{FF2B5EF4-FFF2-40B4-BE49-F238E27FC236}">
-                <a16:creationId xmlns:a16="http://schemas.microsoft.com/office/drawing/2014/main" id="{C3453F5D-784B-4E8A-86B6-141D6150B077}"/>
+                <a16:creationId xmlns:a16="http://schemas.microsoft.com/office/drawing/2014/main" id="{C6085B8E-A6C8-495E-92F7-782DE1EC5FBD}"/>
               </a:ext>
             </a:extLst>
           </p:cNvPr>
@@ -9529,7 +9529,7 @@
           <p:cNvPr id="7" name="text-6">
             <a:extLst xmlns:a="http://schemas.openxmlformats.org/drawingml/2006/main">
               <a:ext uri="{FF2B5EF4-FFF2-40B4-BE49-F238E27FC236}">
-                <a16:creationId xmlns:a16="http://schemas.microsoft.com/office/drawing/2014/main" id="{F7C3C690-D239-4C4D-A219-4C8113350934}"/>
+                <a16:creationId xmlns:a16="http://schemas.microsoft.com/office/drawing/2014/main" id="{6781B610-FB6E-46A3-8B92-027D54251DD2}"/>
               </a:ext>
             </a:extLst>
           </p:cNvPr>
@@ -9589,7 +9589,7 @@
     </p:spTree>
     <p:extLst>
       <p:ext uri="{BB962C8B-B14F-4D97-AF65-F5344CB8AC3E}">
-        <p14:creationId xmlns:p14="http://schemas.microsoft.com/office/powerpoint/2010/main" val="542608420"/>
+        <p14:creationId xmlns:p14="http://schemas.microsoft.com/office/powerpoint/2010/main" val="1845343556"/>
       </p:ext>
     </p:extLst>
   </p:cSld>
@@ -9620,7 +9620,7 @@
           <p:cNvPr id="8" name="text-0">
             <a:extLst xmlns:a="http://schemas.openxmlformats.org/drawingml/2006/main">
               <a:ext uri="{FF2B5EF4-FFF2-40B4-BE49-F238E27FC236}">
-                <a16:creationId xmlns:a16="http://schemas.microsoft.com/office/drawing/2014/main" id="{BA235F64-4A02-4790-86CD-294F1098E04A}"/>
+                <a16:creationId xmlns:a16="http://schemas.microsoft.com/office/drawing/2014/main" id="{6D289B71-B145-4801-B687-DED8DD7735EA}"/>
               </a:ext>
             </a:extLst>
           </p:cNvPr>
@@ -9682,7 +9682,7 @@
           <p:cNvPr id="2" name="text-1">
             <a:extLst xmlns:a="http://schemas.openxmlformats.org/drawingml/2006/main">
               <a:ext uri="{FF2B5EF4-FFF2-40B4-BE49-F238E27FC236}">
-                <a16:creationId xmlns:a16="http://schemas.microsoft.com/office/drawing/2014/main" id="{155F8E92-210D-4F5E-94CC-EEEF7BA8994F}"/>
+                <a16:creationId xmlns:a16="http://schemas.microsoft.com/office/drawing/2014/main" id="{91592B52-4E8F-4948-AC12-3B3769E06E03}"/>
               </a:ext>
             </a:extLst>
           </p:cNvPr>
@@ -9744,7 +9744,7 @@
           <p:cNvPr id="3" name="text-2">
             <a:extLst xmlns:a="http://schemas.openxmlformats.org/drawingml/2006/main">
               <a:ext uri="{FF2B5EF4-FFF2-40B4-BE49-F238E27FC236}">
-                <a16:creationId xmlns:a16="http://schemas.microsoft.com/office/drawing/2014/main" id="{ADAB522D-5270-474E-B770-77335D5945AD}"/>
+                <a16:creationId xmlns:a16="http://schemas.microsoft.com/office/drawing/2014/main" id="{C39CD783-6442-4433-9AC0-E3F67D32885A}"/>
               </a:ext>
             </a:extLst>
           </p:cNvPr>
@@ -9806,7 +9806,7 @@
           <p:cNvPr id="4" name="text-3">
             <a:extLst xmlns:a="http://schemas.openxmlformats.org/drawingml/2006/main">
               <a:ext uri="{FF2B5EF4-FFF2-40B4-BE49-F238E27FC236}">
-                <a16:creationId xmlns:a16="http://schemas.microsoft.com/office/drawing/2014/main" id="{7A783BAD-CEF0-4EA8-A294-10D205A5E54E}"/>
+                <a16:creationId xmlns:a16="http://schemas.microsoft.com/office/drawing/2014/main" id="{BB1923AB-0868-468F-90A7-AF3B383D433B}"/>
               </a:ext>
             </a:extLst>
           </p:cNvPr>
@@ -9898,7 +9898,7 @@
           <p:cNvPr id="5" name="">
             <a:extLst xmlns:a="http://schemas.openxmlformats.org/drawingml/2006/main">
               <a:ext uri="{FF2B5EF4-FFF2-40B4-BE49-F238E27FC236}">
-                <a16:creationId xmlns:a16="http://schemas.microsoft.com/office/drawing/2014/main" id="{BBEDE549-57CA-460E-BD9C-080175DF0F1D}"/>
+                <a16:creationId xmlns:a16="http://schemas.microsoft.com/office/drawing/2014/main" id="{78AACC2B-A683-4E73-A149-171B270F94B7}"/>
               </a:ext>
             </a:extLst>
           </p:cNvPr>
@@ -9929,7 +9929,7 @@
           <p:cNvPr id="6" name="text-5">
             <a:extLst xmlns:a="http://schemas.openxmlformats.org/drawingml/2006/main">
               <a:ext uri="{FF2B5EF4-FFF2-40B4-BE49-F238E27FC236}">
-                <a16:creationId xmlns:a16="http://schemas.microsoft.com/office/drawing/2014/main" id="{DBBB8776-B2FE-4B1C-9280-5E232B85E354}"/>
+                <a16:creationId xmlns:a16="http://schemas.microsoft.com/office/drawing/2014/main" id="{92AF4842-26DB-4D90-A6CC-8E993332169D}"/>
               </a:ext>
             </a:extLst>
           </p:cNvPr>
@@ -9991,7 +9991,7 @@
           <p:cNvPr id="7" name="text-6">
             <a:extLst xmlns:a="http://schemas.openxmlformats.org/drawingml/2006/main">
               <a:ext uri="{FF2B5EF4-FFF2-40B4-BE49-F238E27FC236}">
-                <a16:creationId xmlns:a16="http://schemas.microsoft.com/office/drawing/2014/main" id="{058FC869-3CB4-49DD-936C-1A0A0901AFDC}"/>
+                <a16:creationId xmlns:a16="http://schemas.microsoft.com/office/drawing/2014/main" id="{5955E058-3152-44AF-AD8A-B2BF47663FD8}"/>
               </a:ext>
             </a:extLst>
           </p:cNvPr>
@@ -10051,7 +10051,7 @@
     </p:spTree>
     <p:extLst>
       <p:ext uri="{BB962C8B-B14F-4D97-AF65-F5344CB8AC3E}">
-        <p14:creationId xmlns:p14="http://schemas.microsoft.com/office/powerpoint/2010/main" val="107306627"/>
+        <p14:creationId xmlns:p14="http://schemas.microsoft.com/office/powerpoint/2010/main" val="1582895087"/>
       </p:ext>
     </p:extLst>
   </p:cSld>
@@ -10082,7 +10082,7 @@
           <p:cNvPr id="8" name="text-0">
             <a:extLst xmlns:a="http://schemas.openxmlformats.org/drawingml/2006/main">
               <a:ext uri="{FF2B5EF4-FFF2-40B4-BE49-F238E27FC236}">
-                <a16:creationId xmlns:a16="http://schemas.microsoft.com/office/drawing/2014/main" id="{0A3A244F-69E8-4F05-A9E1-9B3F03530849}"/>
+                <a16:creationId xmlns:a16="http://schemas.microsoft.com/office/drawing/2014/main" id="{1451ED98-12CE-49E2-A857-5C7FF81F0C36}"/>
               </a:ext>
             </a:extLst>
           </p:cNvPr>
@@ -10144,7 +10144,7 @@
           <p:cNvPr id="2" name="text-1">
             <a:extLst xmlns:a="http://schemas.openxmlformats.org/drawingml/2006/main">
               <a:ext uri="{FF2B5EF4-FFF2-40B4-BE49-F238E27FC236}">
-                <a16:creationId xmlns:a16="http://schemas.microsoft.com/office/drawing/2014/main" id="{0F3E981C-E2FA-48EC-8C71-8076E8B2D4EF}"/>
+                <a16:creationId xmlns:a16="http://schemas.microsoft.com/office/drawing/2014/main" id="{808E71EE-EBC8-4A94-8BAE-A0EF98A7342B}"/>
               </a:ext>
             </a:extLst>
           </p:cNvPr>
@@ -10206,7 +10206,7 @@
           <p:cNvPr id="3" name="text-2">
             <a:extLst xmlns:a="http://schemas.openxmlformats.org/drawingml/2006/main">
               <a:ext uri="{FF2B5EF4-FFF2-40B4-BE49-F238E27FC236}">
-                <a16:creationId xmlns:a16="http://schemas.microsoft.com/office/drawing/2014/main" id="{274D0042-963A-47B8-B42C-3466CA108AB1}"/>
+                <a16:creationId xmlns:a16="http://schemas.microsoft.com/office/drawing/2014/main" id="{6BFFF3AA-A9DB-43FC-B182-CE9246C558C9}"/>
               </a:ext>
             </a:extLst>
           </p:cNvPr>
@@ -10298,7 +10298,7 @@
           <p:cNvPr id="4" name="text-3">
             <a:extLst xmlns:a="http://schemas.openxmlformats.org/drawingml/2006/main">
               <a:ext uri="{FF2B5EF4-FFF2-40B4-BE49-F238E27FC236}">
-                <a16:creationId xmlns:a16="http://schemas.microsoft.com/office/drawing/2014/main" id="{C00ABE0B-451D-46E2-BF67-9542CA65182C}"/>
+                <a16:creationId xmlns:a16="http://schemas.microsoft.com/office/drawing/2014/main" id="{FD919428-626B-4CF7-839C-BF2160367F0F}"/>
               </a:ext>
             </a:extLst>
           </p:cNvPr>
@@ -10360,7 +10360,7 @@
           <p:cNvPr id="5" name="">
             <a:extLst xmlns:a="http://schemas.openxmlformats.org/drawingml/2006/main">
               <a:ext uri="{FF2B5EF4-FFF2-40B4-BE49-F238E27FC236}">
-                <a16:creationId xmlns:a16="http://schemas.microsoft.com/office/drawing/2014/main" id="{2BD8C071-23CD-4C48-A86E-5F3249383A21}"/>
+                <a16:creationId xmlns:a16="http://schemas.microsoft.com/office/drawing/2014/main" id="{DD5C7A62-C90C-471A-A9FA-370BA9BCF7F9}"/>
               </a:ext>
             </a:extLst>
           </p:cNvPr>
@@ -10391,7 +10391,7 @@
           <p:cNvPr id="6" name="text-5">
             <a:extLst xmlns:a="http://schemas.openxmlformats.org/drawingml/2006/main">
               <a:ext uri="{FF2B5EF4-FFF2-40B4-BE49-F238E27FC236}">
-                <a16:creationId xmlns:a16="http://schemas.microsoft.com/office/drawing/2014/main" id="{62B01FBC-EB6A-45B9-A69C-F8F45D1CD8B0}"/>
+                <a16:creationId xmlns:a16="http://schemas.microsoft.com/office/drawing/2014/main" id="{FD3E46FF-1C15-4352-96F7-6FCCD9AEF983}"/>
               </a:ext>
             </a:extLst>
           </p:cNvPr>
@@ -10453,7 +10453,7 @@
           <p:cNvPr id="7" name="text-6">
             <a:extLst xmlns:a="http://schemas.openxmlformats.org/drawingml/2006/main">
               <a:ext uri="{FF2B5EF4-FFF2-40B4-BE49-F238E27FC236}">
-                <a16:creationId xmlns:a16="http://schemas.microsoft.com/office/drawing/2014/main" id="{6079E2AC-ACD5-4FBF-B1F7-6F98A3BC261C}"/>
+                <a16:creationId xmlns:a16="http://schemas.microsoft.com/office/drawing/2014/main" id="{AA54FF24-ED76-43F9-AF35-CB7342E7133F}"/>
               </a:ext>
             </a:extLst>
           </p:cNvPr>
@@ -10513,7 +10513,7 @@
     </p:spTree>
     <p:extLst>
       <p:ext uri="{BB962C8B-B14F-4D97-AF65-F5344CB8AC3E}">
-        <p14:creationId xmlns:p14="http://schemas.microsoft.com/office/powerpoint/2010/main" val="282009403"/>
+        <p14:creationId xmlns:p14="http://schemas.microsoft.com/office/powerpoint/2010/main" val="1214691371"/>
       </p:ext>
     </p:extLst>
   </p:cSld>
@@ -10544,7 +10544,7 @@
           <p:cNvPr id="8" name="text-0">
             <a:extLst xmlns:a="http://schemas.openxmlformats.org/drawingml/2006/main">
               <a:ext uri="{FF2B5EF4-FFF2-40B4-BE49-F238E27FC236}">
-                <a16:creationId xmlns:a16="http://schemas.microsoft.com/office/drawing/2014/main" id="{8B59BB00-0E05-4537-AD87-557355222730}"/>
+                <a16:creationId xmlns:a16="http://schemas.microsoft.com/office/drawing/2014/main" id="{4540B6C5-24E6-4E5C-BA7C-D1162DD9592F}"/>
               </a:ext>
             </a:extLst>
           </p:cNvPr>
@@ -10606,7 +10606,7 @@
           <p:cNvPr id="2" name="text-1">
             <a:extLst xmlns:a="http://schemas.openxmlformats.org/drawingml/2006/main">
               <a:ext uri="{FF2B5EF4-FFF2-40B4-BE49-F238E27FC236}">
-                <a16:creationId xmlns:a16="http://schemas.microsoft.com/office/drawing/2014/main" id="{0BF6183E-D62E-4DEE-8940-B346564DAE76}"/>
+                <a16:creationId xmlns:a16="http://schemas.microsoft.com/office/drawing/2014/main" id="{7E288BD3-097B-4C41-AFCC-770A222000D4}"/>
               </a:ext>
             </a:extLst>
           </p:cNvPr>
@@ -11091,7 +11091,7 @@
           <p:cNvPr id="4" name="text-2">
             <a:extLst xmlns:a="http://schemas.openxmlformats.org/drawingml/2006/main">
               <a:ext uri="{FF2B5EF4-FFF2-40B4-BE49-F238E27FC236}">
-                <a16:creationId xmlns:a16="http://schemas.microsoft.com/office/drawing/2014/main" id="{503ADD10-D199-44CE-8321-32E58573764F}"/>
+                <a16:creationId xmlns:a16="http://schemas.microsoft.com/office/drawing/2014/main" id="{EA726627-B28B-4A2B-A69B-EEEA99699D7E}"/>
               </a:ext>
             </a:extLst>
           </p:cNvPr>
@@ -11153,7 +11153,7 @@
           <p:cNvPr id="5" name="">
             <a:extLst xmlns:a="http://schemas.openxmlformats.org/drawingml/2006/main">
               <a:ext uri="{FF2B5EF4-FFF2-40B4-BE49-F238E27FC236}">
-                <a16:creationId xmlns:a16="http://schemas.microsoft.com/office/drawing/2014/main" id="{81CBEAA5-7E8F-4F90-91A5-DD1062651C42}"/>
+                <a16:creationId xmlns:a16="http://schemas.microsoft.com/office/drawing/2014/main" id="{5711E065-725F-4284-94A3-2A7FBD1E676A}"/>
               </a:ext>
             </a:extLst>
           </p:cNvPr>
@@ -11184,7 +11184,7 @@
           <p:cNvPr id="6" name="text-4">
             <a:extLst xmlns:a="http://schemas.openxmlformats.org/drawingml/2006/main">
               <a:ext uri="{FF2B5EF4-FFF2-40B4-BE49-F238E27FC236}">
-                <a16:creationId xmlns:a16="http://schemas.microsoft.com/office/drawing/2014/main" id="{3015717C-BCFB-4681-BB6C-6E893B96905E}"/>
+                <a16:creationId xmlns:a16="http://schemas.microsoft.com/office/drawing/2014/main" id="{5C0B4D2F-0F6B-4B0D-9DBC-68B8F67992C5}"/>
               </a:ext>
             </a:extLst>
           </p:cNvPr>
@@ -11246,7 +11246,7 @@
           <p:cNvPr id="7" name="text-5">
             <a:extLst xmlns:a="http://schemas.openxmlformats.org/drawingml/2006/main">
               <a:ext uri="{FF2B5EF4-FFF2-40B4-BE49-F238E27FC236}">
-                <a16:creationId xmlns:a16="http://schemas.microsoft.com/office/drawing/2014/main" id="{3207F9F5-CA4E-4B28-9345-EF3049EE4150}"/>
+                <a16:creationId xmlns:a16="http://schemas.microsoft.com/office/drawing/2014/main" id="{5E91E9B7-AF7D-4611-B6B4-68A421F70839}"/>
               </a:ext>
             </a:extLst>
           </p:cNvPr>
@@ -11306,7 +11306,7 @@
     </p:spTree>
     <p:extLst>
       <p:ext uri="{BB962C8B-B14F-4D97-AF65-F5344CB8AC3E}">
-        <p14:creationId xmlns:p14="http://schemas.microsoft.com/office/powerpoint/2010/main" val="812966733"/>
+        <p14:creationId xmlns:p14="http://schemas.microsoft.com/office/powerpoint/2010/main" val="555172206"/>
       </p:ext>
     </p:extLst>
   </p:cSld>
@@ -11337,7 +11337,7 @@
           <p:cNvPr id="8" name="text-0">
             <a:extLst xmlns:a="http://schemas.openxmlformats.org/drawingml/2006/main">
               <a:ext uri="{FF2B5EF4-FFF2-40B4-BE49-F238E27FC236}">
-                <a16:creationId xmlns:a16="http://schemas.microsoft.com/office/drawing/2014/main" id="{1DD21946-883D-44AB-BD8D-4EB17F9E57D0}"/>
+                <a16:creationId xmlns:a16="http://schemas.microsoft.com/office/drawing/2014/main" id="{77DD307F-EE65-408D-857D-B8B1197B358F}"/>
               </a:ext>
             </a:extLst>
           </p:cNvPr>
@@ -11399,7 +11399,7 @@
           <p:cNvPr id="2" name="text-1">
             <a:extLst xmlns:a="http://schemas.openxmlformats.org/drawingml/2006/main">
               <a:ext uri="{FF2B5EF4-FFF2-40B4-BE49-F238E27FC236}">
-                <a16:creationId xmlns:a16="http://schemas.microsoft.com/office/drawing/2014/main" id="{D354EC4D-8C5E-4B99-BE8C-8303E1CE9DCF}"/>
+                <a16:creationId xmlns:a16="http://schemas.microsoft.com/office/drawing/2014/main" id="{2E1FDF93-84CA-4B76-B613-FA32E5F1AF6F}"/>
               </a:ext>
             </a:extLst>
           </p:cNvPr>
@@ -11461,7 +11461,7 @@
           <p:cNvPr id="3" name="text-2">
             <a:extLst xmlns:a="http://schemas.openxmlformats.org/drawingml/2006/main">
               <a:ext uri="{FF2B5EF4-FFF2-40B4-BE49-F238E27FC236}">
-                <a16:creationId xmlns:a16="http://schemas.microsoft.com/office/drawing/2014/main" id="{34105186-EDC4-4E11-B480-81704E86AFC3}"/>
+                <a16:creationId xmlns:a16="http://schemas.microsoft.com/office/drawing/2014/main" id="{CE68D914-9F69-4153-B45F-777CE144F30A}"/>
               </a:ext>
             </a:extLst>
           </p:cNvPr>
@@ -11575,7 +11575,7 @@
           <p:cNvPr id="4" name="text-3">
             <a:extLst xmlns:a="http://schemas.openxmlformats.org/drawingml/2006/main">
               <a:ext uri="{FF2B5EF4-FFF2-40B4-BE49-F238E27FC236}">
-                <a16:creationId xmlns:a16="http://schemas.microsoft.com/office/drawing/2014/main" id="{3F2078D9-B0C5-4A3F-AFE8-368BC86962CD}"/>
+                <a16:creationId xmlns:a16="http://schemas.microsoft.com/office/drawing/2014/main" id="{60A7C2D5-CDE5-4226-BC94-FD16FC769FBF}"/>
               </a:ext>
             </a:extLst>
           </p:cNvPr>
@@ -11637,7 +11637,7 @@
           <p:cNvPr id="5" name="">
             <a:extLst xmlns:a="http://schemas.openxmlformats.org/drawingml/2006/main">
               <a:ext uri="{FF2B5EF4-FFF2-40B4-BE49-F238E27FC236}">
-                <a16:creationId xmlns:a16="http://schemas.microsoft.com/office/drawing/2014/main" id="{CF0AE78B-130F-4341-A35A-C40D0354D983}"/>
+                <a16:creationId xmlns:a16="http://schemas.microsoft.com/office/drawing/2014/main" id="{C8C1D221-B353-42DA-9F47-C2CA560C3E09}"/>
               </a:ext>
             </a:extLst>
           </p:cNvPr>
@@ -11668,7 +11668,7 @@
           <p:cNvPr id="6" name="text-5">
             <a:extLst xmlns:a="http://schemas.openxmlformats.org/drawingml/2006/main">
               <a:ext uri="{FF2B5EF4-FFF2-40B4-BE49-F238E27FC236}">
-                <a16:creationId xmlns:a16="http://schemas.microsoft.com/office/drawing/2014/main" id="{A381DA62-46F3-401D-A78D-E31807F67B68}"/>
+                <a16:creationId xmlns:a16="http://schemas.microsoft.com/office/drawing/2014/main" id="{B5B5DAE1-5B1B-4F7F-9E82-C461967B84F3}"/>
               </a:ext>
             </a:extLst>
           </p:cNvPr>
@@ -11730,7 +11730,7 @@
           <p:cNvPr id="7" name="text-6">
             <a:extLst xmlns:a="http://schemas.openxmlformats.org/drawingml/2006/main">
               <a:ext uri="{FF2B5EF4-FFF2-40B4-BE49-F238E27FC236}">
-                <a16:creationId xmlns:a16="http://schemas.microsoft.com/office/drawing/2014/main" id="{C14C36E8-133B-4C30-98E5-8639E5FE6C38}"/>
+                <a16:creationId xmlns:a16="http://schemas.microsoft.com/office/drawing/2014/main" id="{4AB0BFD5-A61B-4FDF-B1A9-3CD5E0D74DCE}"/>
               </a:ext>
             </a:extLst>
           </p:cNvPr>
@@ -11790,7 +11790,7 @@
     </p:spTree>
     <p:extLst>
       <p:ext uri="{BB962C8B-B14F-4D97-AF65-F5344CB8AC3E}">
-        <p14:creationId xmlns:p14="http://schemas.microsoft.com/office/powerpoint/2010/main" val="134927697"/>
+        <p14:creationId xmlns:p14="http://schemas.microsoft.com/office/powerpoint/2010/main" val="2061496102"/>
       </p:ext>
     </p:extLst>
   </p:cSld>
@@ -11821,7 +11821,7 @@
           <p:cNvPr id="8" name="text-0">
             <a:extLst xmlns:a="http://schemas.openxmlformats.org/drawingml/2006/main">
               <a:ext uri="{FF2B5EF4-FFF2-40B4-BE49-F238E27FC236}">
-                <a16:creationId xmlns:a16="http://schemas.microsoft.com/office/drawing/2014/main" id="{BA3D83B3-4A2D-4E7D-9827-7B53304A7096}"/>
+                <a16:creationId xmlns:a16="http://schemas.microsoft.com/office/drawing/2014/main" id="{79AF6D12-094C-459C-BF90-C88921A15AC4}"/>
               </a:ext>
             </a:extLst>
           </p:cNvPr>
@@ -11883,7 +11883,7 @@
           <p:cNvPr id="2" name="text-1">
             <a:extLst xmlns:a="http://schemas.openxmlformats.org/drawingml/2006/main">
               <a:ext uri="{FF2B5EF4-FFF2-40B4-BE49-F238E27FC236}">
-                <a16:creationId xmlns:a16="http://schemas.microsoft.com/office/drawing/2014/main" id="{DA995C2F-9243-4532-ACA5-7B4FEE96FFA9}"/>
+                <a16:creationId xmlns:a16="http://schemas.microsoft.com/office/drawing/2014/main" id="{55585B5D-AA57-4527-996A-7BDDDE39F550}"/>
               </a:ext>
             </a:extLst>
           </p:cNvPr>
@@ -11945,7 +11945,7 @@
           <p:cNvPr id="3" name="text-2">
             <a:extLst xmlns:a="http://schemas.openxmlformats.org/drawingml/2006/main">
               <a:ext uri="{FF2B5EF4-FFF2-40B4-BE49-F238E27FC236}">
-                <a16:creationId xmlns:a16="http://schemas.microsoft.com/office/drawing/2014/main" id="{4FFC763B-0A0D-41AC-80F0-3375E71384A9}"/>
+                <a16:creationId xmlns:a16="http://schemas.microsoft.com/office/drawing/2014/main" id="{DFAD5AFA-63F7-4BE0-8FA1-A40CA91BC8D0}"/>
               </a:ext>
             </a:extLst>
           </p:cNvPr>
@@ -12037,7 +12037,7 @@
           <p:cNvPr id="4" name="text-3">
             <a:extLst xmlns:a="http://schemas.openxmlformats.org/drawingml/2006/main">
               <a:ext uri="{FF2B5EF4-FFF2-40B4-BE49-F238E27FC236}">
-                <a16:creationId xmlns:a16="http://schemas.microsoft.com/office/drawing/2014/main" id="{8CC4AB9A-3654-492C-A295-0F5025D69184}"/>
+                <a16:creationId xmlns:a16="http://schemas.microsoft.com/office/drawing/2014/main" id="{E982BA15-43BA-4C46-8C93-648D986D8318}"/>
               </a:ext>
             </a:extLst>
           </p:cNvPr>
@@ -12099,7 +12099,7 @@
           <p:cNvPr id="5" name="">
             <a:extLst xmlns:a="http://schemas.openxmlformats.org/drawingml/2006/main">
               <a:ext uri="{FF2B5EF4-FFF2-40B4-BE49-F238E27FC236}">
-                <a16:creationId xmlns:a16="http://schemas.microsoft.com/office/drawing/2014/main" id="{CB065C0E-1956-4DBE-805F-91F6D068C60A}"/>
+                <a16:creationId xmlns:a16="http://schemas.microsoft.com/office/drawing/2014/main" id="{7255432F-BB59-4E2B-99EC-1C5C1278AD99}"/>
               </a:ext>
             </a:extLst>
           </p:cNvPr>
@@ -12130,7 +12130,7 @@
           <p:cNvPr id="6" name="text-5">
             <a:extLst xmlns:a="http://schemas.openxmlformats.org/drawingml/2006/main">
               <a:ext uri="{FF2B5EF4-FFF2-40B4-BE49-F238E27FC236}">
-                <a16:creationId xmlns:a16="http://schemas.microsoft.com/office/drawing/2014/main" id="{ACCEFDD5-991D-46B8-BAAB-908937835B38}"/>
+                <a16:creationId xmlns:a16="http://schemas.microsoft.com/office/drawing/2014/main" id="{99043D60-97A6-438C-A24C-CD6B042B118C}"/>
               </a:ext>
             </a:extLst>
           </p:cNvPr>
@@ -12192,7 +12192,7 @@
           <p:cNvPr id="7" name="text-6">
             <a:extLst xmlns:a="http://schemas.openxmlformats.org/drawingml/2006/main">
               <a:ext uri="{FF2B5EF4-FFF2-40B4-BE49-F238E27FC236}">
-                <a16:creationId xmlns:a16="http://schemas.microsoft.com/office/drawing/2014/main" id="{106BED12-EC39-4AB1-B4AC-3B94228F7220}"/>
+                <a16:creationId xmlns:a16="http://schemas.microsoft.com/office/drawing/2014/main" id="{EF3BA0E9-C808-44ED-873B-0EF9D9FD0D9D}"/>
               </a:ext>
             </a:extLst>
           </p:cNvPr>
@@ -12252,7 +12252,7 @@
     </p:spTree>
     <p:extLst>
       <p:ext uri="{BB962C8B-B14F-4D97-AF65-F5344CB8AC3E}">
-        <p14:creationId xmlns:p14="http://schemas.microsoft.com/office/powerpoint/2010/main" val="769533994"/>
+        <p14:creationId xmlns:p14="http://schemas.microsoft.com/office/powerpoint/2010/main" val="981315010"/>
       </p:ext>
     </p:extLst>
   </p:cSld>
@@ -12283,7 +12283,7 @@
           <p:cNvPr id="8" name="text-0">
             <a:extLst xmlns:a="http://schemas.openxmlformats.org/drawingml/2006/main">
               <a:ext uri="{FF2B5EF4-FFF2-40B4-BE49-F238E27FC236}">
-                <a16:creationId xmlns:a16="http://schemas.microsoft.com/office/drawing/2014/main" id="{3EC29854-8591-4B16-9A15-07EF9355A675}"/>
+                <a16:creationId xmlns:a16="http://schemas.microsoft.com/office/drawing/2014/main" id="{560EA5A6-85D9-4389-9EF5-4193BD5778F3}"/>
               </a:ext>
             </a:extLst>
           </p:cNvPr>
@@ -12345,7 +12345,7 @@
           <p:cNvPr id="2" name="text-1">
             <a:extLst xmlns:a="http://schemas.openxmlformats.org/drawingml/2006/main">
               <a:ext uri="{FF2B5EF4-FFF2-40B4-BE49-F238E27FC236}">
-                <a16:creationId xmlns:a16="http://schemas.microsoft.com/office/drawing/2014/main" id="{C5BA86DA-662B-4813-8E3A-2CA231E1549B}"/>
+                <a16:creationId xmlns:a16="http://schemas.microsoft.com/office/drawing/2014/main" id="{D3A1CAD5-9E83-468F-91D5-B83095820B85}"/>
               </a:ext>
             </a:extLst>
           </p:cNvPr>
@@ -12699,7 +12699,7 @@
           <p:cNvPr id="4" name="text-2">
             <a:extLst xmlns:a="http://schemas.openxmlformats.org/drawingml/2006/main">
               <a:ext uri="{FF2B5EF4-FFF2-40B4-BE49-F238E27FC236}">
-                <a16:creationId xmlns:a16="http://schemas.microsoft.com/office/drawing/2014/main" id="{B9E7AB20-4B50-4BC8-AE9D-3E8C5573F346}"/>
+                <a16:creationId xmlns:a16="http://schemas.microsoft.com/office/drawing/2014/main" id="{D97547DF-DE37-4148-B48C-B9CD78AD1769}"/>
               </a:ext>
             </a:extLst>
           </p:cNvPr>
@@ -12761,7 +12761,7 @@
           <p:cNvPr id="5" name="">
             <a:extLst xmlns:a="http://schemas.openxmlformats.org/drawingml/2006/main">
               <a:ext uri="{FF2B5EF4-FFF2-40B4-BE49-F238E27FC236}">
-                <a16:creationId xmlns:a16="http://schemas.microsoft.com/office/drawing/2014/main" id="{86B1F777-5850-41BF-80AB-A1225F260F02}"/>
+                <a16:creationId xmlns:a16="http://schemas.microsoft.com/office/drawing/2014/main" id="{501460A4-C31D-4C57-A838-A285FF6F844D}"/>
               </a:ext>
             </a:extLst>
           </p:cNvPr>
@@ -12792,7 +12792,7 @@
           <p:cNvPr id="6" name="text-4">
             <a:extLst xmlns:a="http://schemas.openxmlformats.org/drawingml/2006/main">
               <a:ext uri="{FF2B5EF4-FFF2-40B4-BE49-F238E27FC236}">
-                <a16:creationId xmlns:a16="http://schemas.microsoft.com/office/drawing/2014/main" id="{639ECA6A-BC42-46A9-930C-4EA912DA9B41}"/>
+                <a16:creationId xmlns:a16="http://schemas.microsoft.com/office/drawing/2014/main" id="{8809E0E7-0DFB-46F2-80C4-2D27F2EEDDBF}"/>
               </a:ext>
             </a:extLst>
           </p:cNvPr>
@@ -12854,7 +12854,7 @@
           <p:cNvPr id="7" name="text-5">
             <a:extLst xmlns:a="http://schemas.openxmlformats.org/drawingml/2006/main">
               <a:ext uri="{FF2B5EF4-FFF2-40B4-BE49-F238E27FC236}">
-                <a16:creationId xmlns:a16="http://schemas.microsoft.com/office/drawing/2014/main" id="{9C99EE76-A356-4C0F-B970-AD52ABA8C790}"/>
+                <a16:creationId xmlns:a16="http://schemas.microsoft.com/office/drawing/2014/main" id="{95071D84-C3AF-4C68-B175-CDA118F6AC38}"/>
               </a:ext>
             </a:extLst>
           </p:cNvPr>
@@ -12914,7 +12914,7 @@
     </p:spTree>
     <p:extLst>
       <p:ext uri="{BB962C8B-B14F-4D97-AF65-F5344CB8AC3E}">
-        <p14:creationId xmlns:p14="http://schemas.microsoft.com/office/powerpoint/2010/main" val="817887018"/>
+        <p14:creationId xmlns:p14="http://schemas.microsoft.com/office/powerpoint/2010/main" val="1619039551"/>
       </p:ext>
     </p:extLst>
   </p:cSld>
@@ -12945,7 +12945,7 @@
           <p:cNvPr id="8" name="text-0">
             <a:extLst xmlns:a="http://schemas.openxmlformats.org/drawingml/2006/main">
               <a:ext uri="{FF2B5EF4-FFF2-40B4-BE49-F238E27FC236}">
-                <a16:creationId xmlns:a16="http://schemas.microsoft.com/office/drawing/2014/main" id="{211161F2-1D31-4287-AC5C-B62AC5FA0D1D}"/>
+                <a16:creationId xmlns:a16="http://schemas.microsoft.com/office/drawing/2014/main" id="{2E967894-2161-4DF1-9A1A-CFAA447BD389}"/>
               </a:ext>
             </a:extLst>
           </p:cNvPr>
@@ -13007,7 +13007,7 @@
           <p:cNvPr id="2" name="text-1">
             <a:extLst xmlns:a="http://schemas.openxmlformats.org/drawingml/2006/main">
               <a:ext uri="{FF2B5EF4-FFF2-40B4-BE49-F238E27FC236}">
-                <a16:creationId xmlns:a16="http://schemas.microsoft.com/office/drawing/2014/main" id="{EF9B7A0E-7F21-4FA9-B629-691F26ECFC71}"/>
+                <a16:creationId xmlns:a16="http://schemas.microsoft.com/office/drawing/2014/main" id="{4F871DE0-8335-46BA-9C30-D31FCFB58CE7}"/>
               </a:ext>
             </a:extLst>
           </p:cNvPr>
@@ -13069,7 +13069,7 @@
           <p:cNvPr id="3" name="text-2">
             <a:extLst xmlns:a="http://schemas.openxmlformats.org/drawingml/2006/main">
               <a:ext uri="{FF2B5EF4-FFF2-40B4-BE49-F238E27FC236}">
-                <a16:creationId xmlns:a16="http://schemas.microsoft.com/office/drawing/2014/main" id="{77AC4BE7-99FB-49B0-9B3F-028ECA4EF2EC}"/>
+                <a16:creationId xmlns:a16="http://schemas.microsoft.com/office/drawing/2014/main" id="{9A156658-320B-4A9B-9836-83B64483C90B}"/>
               </a:ext>
             </a:extLst>
           </p:cNvPr>
@@ -13172,7 +13172,7 @@
           <p:cNvPr id="4" name="text-3">
             <a:extLst xmlns:a="http://schemas.openxmlformats.org/drawingml/2006/main">
               <a:ext uri="{FF2B5EF4-FFF2-40B4-BE49-F238E27FC236}">
-                <a16:creationId xmlns:a16="http://schemas.microsoft.com/office/drawing/2014/main" id="{64DED84B-8929-4952-876E-FACA5E252189}"/>
+                <a16:creationId xmlns:a16="http://schemas.microsoft.com/office/drawing/2014/main" id="{2D89A32D-6D87-4F64-A777-448A157EF994}"/>
               </a:ext>
             </a:extLst>
           </p:cNvPr>
@@ -13234,7 +13234,7 @@
           <p:cNvPr id="5" name="">
             <a:extLst xmlns:a="http://schemas.openxmlformats.org/drawingml/2006/main">
               <a:ext uri="{FF2B5EF4-FFF2-40B4-BE49-F238E27FC236}">
-                <a16:creationId xmlns:a16="http://schemas.microsoft.com/office/drawing/2014/main" id="{88B9DCAF-09CC-4805-A721-ABFF7ACF8185}"/>
+                <a16:creationId xmlns:a16="http://schemas.microsoft.com/office/drawing/2014/main" id="{F2FCF31C-DF2C-421C-B69E-746550B4EC0E}"/>
               </a:ext>
             </a:extLst>
           </p:cNvPr>
@@ -13265,7 +13265,7 @@
           <p:cNvPr id="6" name="text-5">
             <a:extLst xmlns:a="http://schemas.openxmlformats.org/drawingml/2006/main">
               <a:ext uri="{FF2B5EF4-FFF2-40B4-BE49-F238E27FC236}">
-                <a16:creationId xmlns:a16="http://schemas.microsoft.com/office/drawing/2014/main" id="{7FF47CC6-C857-4195-B44E-BB96F7E4E688}"/>
+                <a16:creationId xmlns:a16="http://schemas.microsoft.com/office/drawing/2014/main" id="{354E3BED-804C-4630-AC66-15D2EE5F5BF2}"/>
               </a:ext>
             </a:extLst>
           </p:cNvPr>
@@ -13327,7 +13327,7 @@
           <p:cNvPr id="7" name="text-6">
             <a:extLst xmlns:a="http://schemas.openxmlformats.org/drawingml/2006/main">
               <a:ext uri="{FF2B5EF4-FFF2-40B4-BE49-F238E27FC236}">
-                <a16:creationId xmlns:a16="http://schemas.microsoft.com/office/drawing/2014/main" id="{BD7E0C51-2993-4BEC-BB9A-850FCF76552F}"/>
+                <a16:creationId xmlns:a16="http://schemas.microsoft.com/office/drawing/2014/main" id="{8F2B1AF1-48E7-4796-90D5-D9A5448C0E99}"/>
               </a:ext>
             </a:extLst>
           </p:cNvPr>
@@ -13387,7 +13387,7 @@
     </p:spTree>
     <p:extLst>
       <p:ext uri="{BB962C8B-B14F-4D97-AF65-F5344CB8AC3E}">
-        <p14:creationId xmlns:p14="http://schemas.microsoft.com/office/powerpoint/2010/main" val="486140820"/>
+        <p14:creationId xmlns:p14="http://schemas.microsoft.com/office/powerpoint/2010/main" val="990420679"/>
       </p:ext>
     </p:extLst>
   </p:cSld>
@@ -13418,7 +13418,7 @@
           <p:cNvPr id="7" name="text-0">
             <a:extLst xmlns:a="http://schemas.openxmlformats.org/drawingml/2006/main">
               <a:ext uri="{FF2B5EF4-FFF2-40B4-BE49-F238E27FC236}">
-                <a16:creationId xmlns:a16="http://schemas.microsoft.com/office/drawing/2014/main" id="{2BF2DE82-7DD8-473E-8D0E-7E20F7E897DD}"/>
+                <a16:creationId xmlns:a16="http://schemas.microsoft.com/office/drawing/2014/main" id="{A741D679-7D99-44B9-A02B-FC2BBB9CB8FC}"/>
               </a:ext>
             </a:extLst>
           </p:cNvPr>
@@ -13480,7 +13480,7 @@
           <p:cNvPr id="2" name="text-1">
             <a:extLst xmlns:a="http://schemas.openxmlformats.org/drawingml/2006/main">
               <a:ext uri="{FF2B5EF4-FFF2-40B4-BE49-F238E27FC236}">
-                <a16:creationId xmlns:a16="http://schemas.microsoft.com/office/drawing/2014/main" id="{0EDC4C97-53E6-47AA-BCF3-885647D8C13E}"/>
+                <a16:creationId xmlns:a16="http://schemas.microsoft.com/office/drawing/2014/main" id="{1F56522B-9D20-41F8-A1C2-63E98E6B1682}"/>
               </a:ext>
             </a:extLst>
           </p:cNvPr>
@@ -13542,7 +13542,7 @@
           <p:cNvPr id="3" name="text-2">
             <a:extLst xmlns:a="http://schemas.openxmlformats.org/drawingml/2006/main">
               <a:ext uri="{FF2B5EF4-FFF2-40B4-BE49-F238E27FC236}">
-                <a16:creationId xmlns:a16="http://schemas.microsoft.com/office/drawing/2014/main" id="{6232F0C7-B2B2-4E8D-9C8B-4AE602BBAA78}"/>
+                <a16:creationId xmlns:a16="http://schemas.microsoft.com/office/drawing/2014/main" id="{75BB4423-ACA2-4940-84AE-670F3F626C96}"/>
               </a:ext>
             </a:extLst>
           </p:cNvPr>
@@ -13667,7 +13667,7 @@
           <p:cNvPr id="4" name="">
             <a:extLst xmlns:a="http://schemas.openxmlformats.org/drawingml/2006/main">
               <a:ext uri="{FF2B5EF4-FFF2-40B4-BE49-F238E27FC236}">
-                <a16:creationId xmlns:a16="http://schemas.microsoft.com/office/drawing/2014/main" id="{84A1EB23-FBC9-4EC6-B1D5-3C5304DB73F4}"/>
+                <a16:creationId xmlns:a16="http://schemas.microsoft.com/office/drawing/2014/main" id="{5A16080A-2AC7-4BF6-A79D-95A03CFFFD84}"/>
               </a:ext>
             </a:extLst>
           </p:cNvPr>
@@ -13698,7 +13698,7 @@
           <p:cNvPr id="5" name="text-4">
             <a:extLst xmlns:a="http://schemas.openxmlformats.org/drawingml/2006/main">
               <a:ext uri="{FF2B5EF4-FFF2-40B4-BE49-F238E27FC236}">
-                <a16:creationId xmlns:a16="http://schemas.microsoft.com/office/drawing/2014/main" id="{7052A3CC-4CC7-4C1D-8DC2-F7AE4B6ABEB8}"/>
+                <a16:creationId xmlns:a16="http://schemas.microsoft.com/office/drawing/2014/main" id="{7F6E42BF-0149-4CC1-8A5F-2735F7EA70E3}"/>
               </a:ext>
             </a:extLst>
           </p:cNvPr>
@@ -13760,7 +13760,7 @@
           <p:cNvPr id="6" name="text-5">
             <a:extLst xmlns:a="http://schemas.openxmlformats.org/drawingml/2006/main">
               <a:ext uri="{FF2B5EF4-FFF2-40B4-BE49-F238E27FC236}">
-                <a16:creationId xmlns:a16="http://schemas.microsoft.com/office/drawing/2014/main" id="{FDE5CDAA-8466-40E3-9564-875EF37D518F}"/>
+                <a16:creationId xmlns:a16="http://schemas.microsoft.com/office/drawing/2014/main" id="{CDD7AE2A-26C8-4F32-82C8-DA4CCADC9F42}"/>
               </a:ext>
             </a:extLst>
           </p:cNvPr>
@@ -13820,7 +13820,7 @@
     </p:spTree>
     <p:extLst>
       <p:ext uri="{BB962C8B-B14F-4D97-AF65-F5344CB8AC3E}">
-        <p14:creationId xmlns:p14="http://schemas.microsoft.com/office/powerpoint/2010/main" val="2128610800"/>
+        <p14:creationId xmlns:p14="http://schemas.microsoft.com/office/powerpoint/2010/main" val="718200267"/>
       </p:ext>
     </p:extLst>
   </p:cSld>
@@ -13851,7 +13851,7 @@
           <p:cNvPr id="8" name="text-0">
             <a:extLst xmlns:a="http://schemas.openxmlformats.org/drawingml/2006/main">
               <a:ext uri="{FF2B5EF4-FFF2-40B4-BE49-F238E27FC236}">
-                <a16:creationId xmlns:a16="http://schemas.microsoft.com/office/drawing/2014/main" id="{F61AD0D4-889B-4FDA-ABB7-4406D18A4260}"/>
+                <a16:creationId xmlns:a16="http://schemas.microsoft.com/office/drawing/2014/main" id="{E660E1E9-73F2-4893-86C0-2491F8272050}"/>
               </a:ext>
             </a:extLst>
           </p:cNvPr>
@@ -13913,7 +13913,7 @@
           <p:cNvPr id="2" name="text-1">
             <a:extLst xmlns:a="http://schemas.openxmlformats.org/drawingml/2006/main">
               <a:ext uri="{FF2B5EF4-FFF2-40B4-BE49-F238E27FC236}">
-                <a16:creationId xmlns:a16="http://schemas.microsoft.com/office/drawing/2014/main" id="{63385305-B162-4890-BC95-63C50387CD76}"/>
+                <a16:creationId xmlns:a16="http://schemas.microsoft.com/office/drawing/2014/main" id="{A72E7E20-78AE-4F84-8891-1995ADB57D66}"/>
               </a:ext>
             </a:extLst>
           </p:cNvPr>
@@ -13975,7 +13975,7 @@
           <p:cNvPr id="3" name="text-2">
             <a:extLst xmlns:a="http://schemas.openxmlformats.org/drawingml/2006/main">
               <a:ext uri="{FF2B5EF4-FFF2-40B4-BE49-F238E27FC236}">
-                <a16:creationId xmlns:a16="http://schemas.microsoft.com/office/drawing/2014/main" id="{DC46EC68-1CCB-4D95-8955-DCC23A02CC17}"/>
+                <a16:creationId xmlns:a16="http://schemas.microsoft.com/office/drawing/2014/main" id="{D35B5D1A-EF2C-4676-8FB7-BA14F22680F1}"/>
               </a:ext>
             </a:extLst>
           </p:cNvPr>
@@ -14070,7 +14070,7 @@
           <p:cNvPr id="4" name="text-3">
             <a:extLst xmlns:a="http://schemas.openxmlformats.org/drawingml/2006/main">
               <a:ext uri="{FF2B5EF4-FFF2-40B4-BE49-F238E27FC236}">
-                <a16:creationId xmlns:a16="http://schemas.microsoft.com/office/drawing/2014/main" id="{114B61B8-C86F-4A2A-8E23-5EB4E0338E05}"/>
+                <a16:creationId xmlns:a16="http://schemas.microsoft.com/office/drawing/2014/main" id="{8F046896-DF8E-4B0B-BE3A-337AA1579878}"/>
               </a:ext>
             </a:extLst>
           </p:cNvPr>
@@ -14132,7 +14132,7 @@
           <p:cNvPr id="5" name="">
             <a:extLst xmlns:a="http://schemas.openxmlformats.org/drawingml/2006/main">
               <a:ext uri="{FF2B5EF4-FFF2-40B4-BE49-F238E27FC236}">
-                <a16:creationId xmlns:a16="http://schemas.microsoft.com/office/drawing/2014/main" id="{FE555D82-E53F-4574-8C08-770C1110DCBC}"/>
+                <a16:creationId xmlns:a16="http://schemas.microsoft.com/office/drawing/2014/main" id="{9417C4BD-2EAA-4288-91A7-74C705E4E2A9}"/>
               </a:ext>
             </a:extLst>
           </p:cNvPr>
@@ -14163,7 +14163,7 @@
           <p:cNvPr id="6" name="text-5">
             <a:extLst xmlns:a="http://schemas.openxmlformats.org/drawingml/2006/main">
               <a:ext uri="{FF2B5EF4-FFF2-40B4-BE49-F238E27FC236}">
-                <a16:creationId xmlns:a16="http://schemas.microsoft.com/office/drawing/2014/main" id="{65DC7ED4-AADC-4B21-B04F-2B1EFBDD1B03}"/>
+                <a16:creationId xmlns:a16="http://schemas.microsoft.com/office/drawing/2014/main" id="{5A17CE87-C3A9-439C-B498-4322120D71BF}"/>
               </a:ext>
             </a:extLst>
           </p:cNvPr>
@@ -14225,7 +14225,7 @@
           <p:cNvPr id="7" name="text-6">
             <a:extLst xmlns:a="http://schemas.openxmlformats.org/drawingml/2006/main">
               <a:ext uri="{FF2B5EF4-FFF2-40B4-BE49-F238E27FC236}">
-                <a16:creationId xmlns:a16="http://schemas.microsoft.com/office/drawing/2014/main" id="{387D35A8-71AA-4DA7-AF21-15E67FA9FA15}"/>
+                <a16:creationId xmlns:a16="http://schemas.microsoft.com/office/drawing/2014/main" id="{9C97775A-A4C7-422D-A5B8-ADE816C030AD}"/>
               </a:ext>
             </a:extLst>
           </p:cNvPr>
@@ -14285,7 +14285,7 @@
     </p:spTree>
     <p:extLst>
       <p:ext uri="{BB962C8B-B14F-4D97-AF65-F5344CB8AC3E}">
-        <p14:creationId xmlns:p14="http://schemas.microsoft.com/office/powerpoint/2010/main" val="1575708799"/>
+        <p14:creationId xmlns:p14="http://schemas.microsoft.com/office/powerpoint/2010/main" val="474417178"/>
       </p:ext>
     </p:extLst>
   </p:cSld>
@@ -14316,7 +14316,7 @@
           <p:cNvPr id="8" name="text-0">
             <a:extLst xmlns:a="http://schemas.openxmlformats.org/drawingml/2006/main">
               <a:ext uri="{FF2B5EF4-FFF2-40B4-BE49-F238E27FC236}">
-                <a16:creationId xmlns:a16="http://schemas.microsoft.com/office/drawing/2014/main" id="{9E7CE732-54E6-4DE6-BBC5-E4DB7337CB63}"/>
+                <a16:creationId xmlns:a16="http://schemas.microsoft.com/office/drawing/2014/main" id="{F07EC9E1-F8F4-4CF7-B3BA-C4BA2766FEF2}"/>
               </a:ext>
             </a:extLst>
           </p:cNvPr>
@@ -14378,7 +14378,7 @@
           <p:cNvPr id="2" name="text-1">
             <a:extLst xmlns:a="http://schemas.openxmlformats.org/drawingml/2006/main">
               <a:ext uri="{FF2B5EF4-FFF2-40B4-BE49-F238E27FC236}">
-                <a16:creationId xmlns:a16="http://schemas.microsoft.com/office/drawing/2014/main" id="{1781FDBC-2275-4D24-85F9-F85D00A9710B}"/>
+                <a16:creationId xmlns:a16="http://schemas.microsoft.com/office/drawing/2014/main" id="{13E7EF4D-9061-4D06-8585-BDF8AF344DDD}"/>
               </a:ext>
             </a:extLst>
           </p:cNvPr>
@@ -14444,7 +14444,7 @@
           <p:nvPr/>
         </p:nvPicPr>
         <p:blipFill>
-          <a:blip xmlns:r="http://schemas.openxmlformats.org/officeDocument/2006/relationships" xmlns:a="http://schemas.openxmlformats.org/drawingml/2006/main" r:embed="Rad6a36e07bfc48a0"/>
+          <a:blip xmlns:r="http://schemas.openxmlformats.org/officeDocument/2006/relationships" xmlns:a="http://schemas.openxmlformats.org/drawingml/2006/main" r:embed="R54ec36bff7764403"/>
           <a:stretch xmlns:a="http://schemas.openxmlformats.org/drawingml/2006/main"/>
         </p:blipFill>
         <p:spPr>
@@ -14462,7 +14462,7 @@
           <p:cNvPr id="4" name="text-2">
             <a:extLst xmlns:a="http://schemas.openxmlformats.org/drawingml/2006/main">
               <a:ext uri="{FF2B5EF4-FFF2-40B4-BE49-F238E27FC236}">
-                <a16:creationId xmlns:a16="http://schemas.microsoft.com/office/drawing/2014/main" id="{E2BA3113-2615-4CAC-962F-E16D51BE013A}"/>
+                <a16:creationId xmlns:a16="http://schemas.microsoft.com/office/drawing/2014/main" id="{A4882DA2-D9BB-4F70-8891-73ED47619A63}"/>
               </a:ext>
             </a:extLst>
           </p:cNvPr>
@@ -14524,7 +14524,7 @@
           <p:cNvPr id="5" name="">
             <a:extLst xmlns:a="http://schemas.openxmlformats.org/drawingml/2006/main">
               <a:ext uri="{FF2B5EF4-FFF2-40B4-BE49-F238E27FC236}">
-                <a16:creationId xmlns:a16="http://schemas.microsoft.com/office/drawing/2014/main" id="{82D3534C-924A-4E03-90B6-DFC14A76D17B}"/>
+                <a16:creationId xmlns:a16="http://schemas.microsoft.com/office/drawing/2014/main" id="{106BA72B-A9FC-4333-A6A0-AF607009AFB4}"/>
               </a:ext>
             </a:extLst>
           </p:cNvPr>
@@ -14555,7 +14555,7 @@
           <p:cNvPr id="6" name="text-4">
             <a:extLst xmlns:a="http://schemas.openxmlformats.org/drawingml/2006/main">
               <a:ext uri="{FF2B5EF4-FFF2-40B4-BE49-F238E27FC236}">
-                <a16:creationId xmlns:a16="http://schemas.microsoft.com/office/drawing/2014/main" id="{EB802C8E-8628-4874-8EA8-B70A5C4E9AD3}"/>
+                <a16:creationId xmlns:a16="http://schemas.microsoft.com/office/drawing/2014/main" id="{5D267821-BB2E-4138-8BB7-96778EF2A7BF}"/>
               </a:ext>
             </a:extLst>
           </p:cNvPr>
@@ -14617,7 +14617,7 @@
           <p:cNvPr id="7" name="text-5">
             <a:extLst xmlns:a="http://schemas.openxmlformats.org/drawingml/2006/main">
               <a:ext uri="{FF2B5EF4-FFF2-40B4-BE49-F238E27FC236}">
-                <a16:creationId xmlns:a16="http://schemas.microsoft.com/office/drawing/2014/main" id="{86C4DB54-43F9-4C21-851F-2A3F7A90A1C5}"/>
+                <a16:creationId xmlns:a16="http://schemas.microsoft.com/office/drawing/2014/main" id="{5DCBAC6A-0948-4E2A-A12E-040EE8404080}"/>
               </a:ext>
             </a:extLst>
           </p:cNvPr>
@@ -14677,7 +14677,7 @@
     </p:spTree>
     <p:extLst>
       <p:ext uri="{BB962C8B-B14F-4D97-AF65-F5344CB8AC3E}">
-        <p14:creationId xmlns:p14="http://schemas.microsoft.com/office/powerpoint/2010/main" val="492961660"/>
+        <p14:creationId xmlns:p14="http://schemas.microsoft.com/office/powerpoint/2010/main" val="1333421811"/>
       </p:ext>
     </p:extLst>
   </p:cSld>
@@ -14708,7 +14708,7 @@
           <p:cNvPr id="8" name="text-0">
             <a:extLst xmlns:a="http://schemas.openxmlformats.org/drawingml/2006/main">
               <a:ext uri="{FF2B5EF4-FFF2-40B4-BE49-F238E27FC236}">
-                <a16:creationId xmlns:a16="http://schemas.microsoft.com/office/drawing/2014/main" id="{DAF12F95-7546-43C9-9FAA-E8F7C311C99A}"/>
+                <a16:creationId xmlns:a16="http://schemas.microsoft.com/office/drawing/2014/main" id="{690DD6F8-CEF5-4FF0-9885-7530B789F34B}"/>
               </a:ext>
             </a:extLst>
           </p:cNvPr>
@@ -14770,7 +14770,7 @@
           <p:cNvPr id="2" name="text-1">
             <a:extLst xmlns:a="http://schemas.openxmlformats.org/drawingml/2006/main">
               <a:ext uri="{FF2B5EF4-FFF2-40B4-BE49-F238E27FC236}">
-                <a16:creationId xmlns:a16="http://schemas.microsoft.com/office/drawing/2014/main" id="{DEBA4C74-E1A7-4538-BBD0-885AF3733539}"/>
+                <a16:creationId xmlns:a16="http://schemas.microsoft.com/office/drawing/2014/main" id="{B2B9558C-D4D5-4DCF-9960-1DF55BC9BC75}"/>
               </a:ext>
             </a:extLst>
           </p:cNvPr>
@@ -14832,7 +14832,7 @@
           <p:cNvPr id="3" name="text-2">
             <a:extLst xmlns:a="http://schemas.openxmlformats.org/drawingml/2006/main">
               <a:ext uri="{FF2B5EF4-FFF2-40B4-BE49-F238E27FC236}">
-                <a16:creationId xmlns:a16="http://schemas.microsoft.com/office/drawing/2014/main" id="{BD798A68-CAA8-4E7D-93D0-2EC2BD3800BC}"/>
+                <a16:creationId xmlns:a16="http://schemas.microsoft.com/office/drawing/2014/main" id="{EBF59133-A2F9-416F-8FD8-C861594B9C54}"/>
               </a:ext>
             </a:extLst>
           </p:cNvPr>
@@ -14924,7 +14924,7 @@
           <p:cNvPr id="4" name="text-3">
             <a:extLst xmlns:a="http://schemas.openxmlformats.org/drawingml/2006/main">
               <a:ext uri="{FF2B5EF4-FFF2-40B4-BE49-F238E27FC236}">
-                <a16:creationId xmlns:a16="http://schemas.microsoft.com/office/drawing/2014/main" id="{CFE718D6-4AAB-42DE-84CD-920803391C7B}"/>
+                <a16:creationId xmlns:a16="http://schemas.microsoft.com/office/drawing/2014/main" id="{D5458C0E-3A51-4CCE-AEBB-04E1DFF8A476}"/>
               </a:ext>
             </a:extLst>
           </p:cNvPr>
@@ -14986,7 +14986,7 @@
           <p:cNvPr id="5" name="">
             <a:extLst xmlns:a="http://schemas.openxmlformats.org/drawingml/2006/main">
               <a:ext uri="{FF2B5EF4-FFF2-40B4-BE49-F238E27FC236}">
-                <a16:creationId xmlns:a16="http://schemas.microsoft.com/office/drawing/2014/main" id="{736C2071-FFF3-4C3E-B27A-BDFFFC9D29A9}"/>
+                <a16:creationId xmlns:a16="http://schemas.microsoft.com/office/drawing/2014/main" id="{4D52D80F-48AC-4754-8114-F88021EA4C6D}"/>
               </a:ext>
             </a:extLst>
           </p:cNvPr>
@@ -15017,7 +15017,7 @@
           <p:cNvPr id="6" name="text-5">
             <a:extLst xmlns:a="http://schemas.openxmlformats.org/drawingml/2006/main">
               <a:ext uri="{FF2B5EF4-FFF2-40B4-BE49-F238E27FC236}">
-                <a16:creationId xmlns:a16="http://schemas.microsoft.com/office/drawing/2014/main" id="{B3372C94-FF31-4C3B-81F1-195DD9B050C3}"/>
+                <a16:creationId xmlns:a16="http://schemas.microsoft.com/office/drawing/2014/main" id="{1CC97C07-C34D-4496-BD55-2547B3217713}"/>
               </a:ext>
             </a:extLst>
           </p:cNvPr>
@@ -15079,7 +15079,7 @@
           <p:cNvPr id="7" name="text-6">
             <a:extLst xmlns:a="http://schemas.openxmlformats.org/drawingml/2006/main">
               <a:ext uri="{FF2B5EF4-FFF2-40B4-BE49-F238E27FC236}">
-                <a16:creationId xmlns:a16="http://schemas.microsoft.com/office/drawing/2014/main" id="{CF63168B-FF64-4862-B24E-FC05BE25F677}"/>
+                <a16:creationId xmlns:a16="http://schemas.microsoft.com/office/drawing/2014/main" id="{1737220E-6495-44CC-A4FB-8BF255D22FE0}"/>
               </a:ext>
             </a:extLst>
           </p:cNvPr>
@@ -15139,7 +15139,7 @@
     </p:spTree>
     <p:extLst>
       <p:ext uri="{BB962C8B-B14F-4D97-AF65-F5344CB8AC3E}">
-        <p14:creationId xmlns:p14="http://schemas.microsoft.com/office/powerpoint/2010/main" val="3310202"/>
+        <p14:creationId xmlns:p14="http://schemas.microsoft.com/office/powerpoint/2010/main" val="1190073138"/>
       </p:ext>
     </p:extLst>
   </p:cSld>
@@ -15170,7 +15170,7 @@
           <p:cNvPr id="8" name="text-0">
             <a:extLst xmlns:a="http://schemas.openxmlformats.org/drawingml/2006/main">
               <a:ext uri="{FF2B5EF4-FFF2-40B4-BE49-F238E27FC236}">
-                <a16:creationId xmlns:a16="http://schemas.microsoft.com/office/drawing/2014/main" id="{2EAF25C6-F945-4BE3-A424-04C095743E1B}"/>
+                <a16:creationId xmlns:a16="http://schemas.microsoft.com/office/drawing/2014/main" id="{E151CA8D-6E94-41E9-B5B5-749C840BBC25}"/>
               </a:ext>
             </a:extLst>
           </p:cNvPr>
@@ -15232,7 +15232,7 @@
           <p:cNvPr id="2" name="text-1">
             <a:extLst xmlns:a="http://schemas.openxmlformats.org/drawingml/2006/main">
               <a:ext uri="{FF2B5EF4-FFF2-40B4-BE49-F238E27FC236}">
-                <a16:creationId xmlns:a16="http://schemas.microsoft.com/office/drawing/2014/main" id="{7A2906BE-8E9C-4B87-A73A-BB980658AA4E}"/>
+                <a16:creationId xmlns:a16="http://schemas.microsoft.com/office/drawing/2014/main" id="{0FF47087-95E1-46D2-9B90-5F188CA5F5AD}"/>
               </a:ext>
             </a:extLst>
           </p:cNvPr>
@@ -15294,7 +15294,7 @@
           <p:cNvPr id="3" name="text-2">
             <a:extLst xmlns:a="http://schemas.openxmlformats.org/drawingml/2006/main">
               <a:ext uri="{FF2B5EF4-FFF2-40B4-BE49-F238E27FC236}">
-                <a16:creationId xmlns:a16="http://schemas.microsoft.com/office/drawing/2014/main" id="{4F9B0EE1-CA7E-4575-AAD3-8397C615D66F}"/>
+                <a16:creationId xmlns:a16="http://schemas.microsoft.com/office/drawing/2014/main" id="{1139A5BB-E4AA-43BD-AFF1-F6863AA5EEB5}"/>
               </a:ext>
             </a:extLst>
           </p:cNvPr>
@@ -15408,7 +15408,7 @@
           <p:cNvPr id="4" name="text-3">
             <a:extLst xmlns:a="http://schemas.openxmlformats.org/drawingml/2006/main">
               <a:ext uri="{FF2B5EF4-FFF2-40B4-BE49-F238E27FC236}">
-                <a16:creationId xmlns:a16="http://schemas.microsoft.com/office/drawing/2014/main" id="{49AC59C9-BCC5-4365-ABD2-FA87A8F345E1}"/>
+                <a16:creationId xmlns:a16="http://schemas.microsoft.com/office/drawing/2014/main" id="{C6EA2007-2325-4FF9-AF1D-83478453A4CC}"/>
               </a:ext>
             </a:extLst>
           </p:cNvPr>
@@ -15470,7 +15470,7 @@
           <p:cNvPr id="5" name="">
             <a:extLst xmlns:a="http://schemas.openxmlformats.org/drawingml/2006/main">
               <a:ext uri="{FF2B5EF4-FFF2-40B4-BE49-F238E27FC236}">
-                <a16:creationId xmlns:a16="http://schemas.microsoft.com/office/drawing/2014/main" id="{81BF44FB-7E55-46C0-94BA-09680CBE5BE1}"/>
+                <a16:creationId xmlns:a16="http://schemas.microsoft.com/office/drawing/2014/main" id="{F6F7F37C-0E0D-46C1-8915-903F6090449C}"/>
               </a:ext>
             </a:extLst>
           </p:cNvPr>
@@ -15501,7 +15501,7 @@
           <p:cNvPr id="6" name="text-5">
             <a:extLst xmlns:a="http://schemas.openxmlformats.org/drawingml/2006/main">
               <a:ext uri="{FF2B5EF4-FFF2-40B4-BE49-F238E27FC236}">
-                <a16:creationId xmlns:a16="http://schemas.microsoft.com/office/drawing/2014/main" id="{937013AB-9C23-4B61-B9A3-AFE929763D52}"/>
+                <a16:creationId xmlns:a16="http://schemas.microsoft.com/office/drawing/2014/main" id="{2A3E4541-2697-4683-93F8-89F9D6BED2DA}"/>
               </a:ext>
             </a:extLst>
           </p:cNvPr>
@@ -15563,7 +15563,7 @@
           <p:cNvPr id="7" name="text-6">
             <a:extLst xmlns:a="http://schemas.openxmlformats.org/drawingml/2006/main">
               <a:ext uri="{FF2B5EF4-FFF2-40B4-BE49-F238E27FC236}">
-                <a16:creationId xmlns:a16="http://schemas.microsoft.com/office/drawing/2014/main" id="{99E0EFEA-76F9-46D9-ABA9-C2013B3BEA69}"/>
+                <a16:creationId xmlns:a16="http://schemas.microsoft.com/office/drawing/2014/main" id="{547B773A-BA48-4FEA-9ED0-9DD73066BECF}"/>
               </a:ext>
             </a:extLst>
           </p:cNvPr>
@@ -15623,7 +15623,7 @@
     </p:spTree>
     <p:extLst>
       <p:ext uri="{BB962C8B-B14F-4D97-AF65-F5344CB8AC3E}">
-        <p14:creationId xmlns:p14="http://schemas.microsoft.com/office/powerpoint/2010/main" val="90434699"/>
+        <p14:creationId xmlns:p14="http://schemas.microsoft.com/office/powerpoint/2010/main" val="1925273923"/>
       </p:ext>
     </p:extLst>
   </p:cSld>
@@ -15654,7 +15654,7 @@
           <p:cNvPr id="8" name="text-0">
             <a:extLst xmlns:a="http://schemas.openxmlformats.org/drawingml/2006/main">
               <a:ext uri="{FF2B5EF4-FFF2-40B4-BE49-F238E27FC236}">
-                <a16:creationId xmlns:a16="http://schemas.microsoft.com/office/drawing/2014/main" id="{06A33F0A-8BA2-43D1-818D-98B018DF0A07}"/>
+                <a16:creationId xmlns:a16="http://schemas.microsoft.com/office/drawing/2014/main" id="{655E2E33-4159-423A-BBE6-D856747CC5A6}"/>
               </a:ext>
             </a:extLst>
           </p:cNvPr>
@@ -15716,7 +15716,7 @@
           <p:cNvPr id="2" name="text-1">
             <a:extLst xmlns:a="http://schemas.openxmlformats.org/drawingml/2006/main">
               <a:ext uri="{FF2B5EF4-FFF2-40B4-BE49-F238E27FC236}">
-                <a16:creationId xmlns:a16="http://schemas.microsoft.com/office/drawing/2014/main" id="{1FA6F4BF-440E-4832-9092-534FF15FB039}"/>
+                <a16:creationId xmlns:a16="http://schemas.microsoft.com/office/drawing/2014/main" id="{F4D298B9-F2D7-4665-B7F7-695551C57513}"/>
               </a:ext>
             </a:extLst>
           </p:cNvPr>
@@ -15778,7 +15778,7 @@
           <p:cNvPr id="3" name="text-2">
             <a:extLst xmlns:a="http://schemas.openxmlformats.org/drawingml/2006/main">
               <a:ext uri="{FF2B5EF4-FFF2-40B4-BE49-F238E27FC236}">
-                <a16:creationId xmlns:a16="http://schemas.microsoft.com/office/drawing/2014/main" id="{E5260838-DC77-4D22-8C7A-FE596ECCD643}"/>
+                <a16:creationId xmlns:a16="http://schemas.microsoft.com/office/drawing/2014/main" id="{8ABBB08D-1055-48C8-8661-791844EB4607}"/>
               </a:ext>
             </a:extLst>
           </p:cNvPr>
@@ -15870,7 +15870,7 @@
           <p:cNvPr id="4" name="text-3">
             <a:extLst xmlns:a="http://schemas.openxmlformats.org/drawingml/2006/main">
               <a:ext uri="{FF2B5EF4-FFF2-40B4-BE49-F238E27FC236}">
-                <a16:creationId xmlns:a16="http://schemas.microsoft.com/office/drawing/2014/main" id="{E961AF3B-BF88-439D-8CBE-C28A522AF6D3}"/>
+                <a16:creationId xmlns:a16="http://schemas.microsoft.com/office/drawing/2014/main" id="{2843AF0E-6A05-47F0-A600-45EB419964C6}"/>
               </a:ext>
             </a:extLst>
           </p:cNvPr>
@@ -15932,7 +15932,7 @@
           <p:cNvPr id="5" name="">
             <a:extLst xmlns:a="http://schemas.openxmlformats.org/drawingml/2006/main">
               <a:ext uri="{FF2B5EF4-FFF2-40B4-BE49-F238E27FC236}">
-                <a16:creationId xmlns:a16="http://schemas.microsoft.com/office/drawing/2014/main" id="{2D8E7383-7708-4DE7-AD2C-546E5743ACC2}"/>
+                <a16:creationId xmlns:a16="http://schemas.microsoft.com/office/drawing/2014/main" id="{CCD990D5-45B2-4A40-A33D-21850CF5F2AC}"/>
               </a:ext>
             </a:extLst>
           </p:cNvPr>
@@ -15963,7 +15963,7 @@
           <p:cNvPr id="6" name="text-5">
             <a:extLst xmlns:a="http://schemas.openxmlformats.org/drawingml/2006/main">
               <a:ext uri="{FF2B5EF4-FFF2-40B4-BE49-F238E27FC236}">
-                <a16:creationId xmlns:a16="http://schemas.microsoft.com/office/drawing/2014/main" id="{755EF22F-646F-49D1-A749-41FE94A561C3}"/>
+                <a16:creationId xmlns:a16="http://schemas.microsoft.com/office/drawing/2014/main" id="{B1C0F0EC-3CDB-44F1-8F81-A3AECB257B06}"/>
               </a:ext>
             </a:extLst>
           </p:cNvPr>
@@ -16025,7 +16025,7 @@
           <p:cNvPr id="7" name="text-6">
             <a:extLst xmlns:a="http://schemas.openxmlformats.org/drawingml/2006/main">
               <a:ext uri="{FF2B5EF4-FFF2-40B4-BE49-F238E27FC236}">
-                <a16:creationId xmlns:a16="http://schemas.microsoft.com/office/drawing/2014/main" id="{09A80CD8-5CCE-4F2F-9320-8AD305B80077}"/>
+                <a16:creationId xmlns:a16="http://schemas.microsoft.com/office/drawing/2014/main" id="{50D8A1DC-EEC7-4DFE-B02A-DB3C29071D9F}"/>
               </a:ext>
             </a:extLst>
           </p:cNvPr>
@@ -16085,7 +16085,7 @@
     </p:spTree>
     <p:extLst>
       <p:ext uri="{BB962C8B-B14F-4D97-AF65-F5344CB8AC3E}">
-        <p14:creationId xmlns:p14="http://schemas.microsoft.com/office/powerpoint/2010/main" val="339158808"/>
+        <p14:creationId xmlns:p14="http://schemas.microsoft.com/office/powerpoint/2010/main" val="363167824"/>
       </p:ext>
     </p:extLst>
   </p:cSld>
@@ -16116,7 +16116,7 @@
           <p:cNvPr id="8" name="text-0">
             <a:extLst xmlns:a="http://schemas.openxmlformats.org/drawingml/2006/main">
               <a:ext uri="{FF2B5EF4-FFF2-40B4-BE49-F238E27FC236}">
-                <a16:creationId xmlns:a16="http://schemas.microsoft.com/office/drawing/2014/main" id="{0251FB41-54AC-4D3A-803D-70654BDC8482}"/>
+                <a16:creationId xmlns:a16="http://schemas.microsoft.com/office/drawing/2014/main" id="{FEACE8BF-B7CD-4FFF-913C-7B3E262B6271}"/>
               </a:ext>
             </a:extLst>
           </p:cNvPr>
@@ -16178,7 +16178,7 @@
           <p:cNvPr id="2" name="text-1">
             <a:extLst xmlns:a="http://schemas.openxmlformats.org/drawingml/2006/main">
               <a:ext uri="{FF2B5EF4-FFF2-40B4-BE49-F238E27FC236}">
-                <a16:creationId xmlns:a16="http://schemas.microsoft.com/office/drawing/2014/main" id="{D2000ABE-BE68-4A1A-855E-D504D2A94FA5}"/>
+                <a16:creationId xmlns:a16="http://schemas.microsoft.com/office/drawing/2014/main" id="{8C5D4DE4-5F65-4F7A-9CB3-6AA12032E407}"/>
               </a:ext>
             </a:extLst>
           </p:cNvPr>
@@ -16240,7 +16240,7 @@
           <p:cNvPr id="3" name="text-2">
             <a:extLst xmlns:a="http://schemas.openxmlformats.org/drawingml/2006/main">
               <a:ext uri="{FF2B5EF4-FFF2-40B4-BE49-F238E27FC236}">
-                <a16:creationId xmlns:a16="http://schemas.microsoft.com/office/drawing/2014/main" id="{D5ED2449-21D9-4FBB-85C3-1E61F8001127}"/>
+                <a16:creationId xmlns:a16="http://schemas.microsoft.com/office/drawing/2014/main" id="{250E4DEA-83C7-4266-994B-30986651BECB}"/>
               </a:ext>
             </a:extLst>
           </p:cNvPr>
@@ -16332,7 +16332,7 @@
           <p:cNvPr id="4" name="text-3">
             <a:extLst xmlns:a="http://schemas.openxmlformats.org/drawingml/2006/main">
               <a:ext uri="{FF2B5EF4-FFF2-40B4-BE49-F238E27FC236}">
-                <a16:creationId xmlns:a16="http://schemas.microsoft.com/office/drawing/2014/main" id="{E1C34314-02FE-42E4-B867-6276EDB42662}"/>
+                <a16:creationId xmlns:a16="http://schemas.microsoft.com/office/drawing/2014/main" id="{3ABE7C62-CE9B-4441-800A-D8CDE633F251}"/>
               </a:ext>
             </a:extLst>
           </p:cNvPr>
@@ -16394,7 +16394,7 @@
           <p:cNvPr id="5" name="">
             <a:extLst xmlns:a="http://schemas.openxmlformats.org/drawingml/2006/main">
               <a:ext uri="{FF2B5EF4-FFF2-40B4-BE49-F238E27FC236}">
-                <a16:creationId xmlns:a16="http://schemas.microsoft.com/office/drawing/2014/main" id="{0E115840-CDFF-4CF5-BF33-C04B43FF4E44}"/>
+                <a16:creationId xmlns:a16="http://schemas.microsoft.com/office/drawing/2014/main" id="{EA889E44-6FB0-4D0A-AA86-F5A442B71428}"/>
               </a:ext>
             </a:extLst>
           </p:cNvPr>
@@ -16425,7 +16425,7 @@
           <p:cNvPr id="6" name="text-5">
             <a:extLst xmlns:a="http://schemas.openxmlformats.org/drawingml/2006/main">
               <a:ext uri="{FF2B5EF4-FFF2-40B4-BE49-F238E27FC236}">
-                <a16:creationId xmlns:a16="http://schemas.microsoft.com/office/drawing/2014/main" id="{FDF6FB0E-5691-42C8-89F6-E745EF501B0C}"/>
+                <a16:creationId xmlns:a16="http://schemas.microsoft.com/office/drawing/2014/main" id="{8179D2CA-209D-4A02-8AB9-73CCB29C4DBB}"/>
               </a:ext>
             </a:extLst>
           </p:cNvPr>
@@ -16487,7 +16487,7 @@
           <p:cNvPr id="7" name="text-6">
             <a:extLst xmlns:a="http://schemas.openxmlformats.org/drawingml/2006/main">
               <a:ext uri="{FF2B5EF4-FFF2-40B4-BE49-F238E27FC236}">
-                <a16:creationId xmlns:a16="http://schemas.microsoft.com/office/drawing/2014/main" id="{27FB4D4B-9F23-4A9B-A693-EB45AEC3800C}"/>
+                <a16:creationId xmlns:a16="http://schemas.microsoft.com/office/drawing/2014/main" id="{1606900A-D3D5-4B7E-88E0-60BE1138AFCB}"/>
               </a:ext>
             </a:extLst>
           </p:cNvPr>
@@ -16547,7 +16547,7 @@
     </p:spTree>
     <p:extLst>
       <p:ext uri="{BB962C8B-B14F-4D97-AF65-F5344CB8AC3E}">
-        <p14:creationId xmlns:p14="http://schemas.microsoft.com/office/powerpoint/2010/main" val="1992813518"/>
+        <p14:creationId xmlns:p14="http://schemas.microsoft.com/office/powerpoint/2010/main" val="680725663"/>
       </p:ext>
     </p:extLst>
   </p:cSld>
@@ -16578,7 +16578,7 @@
           <p:cNvPr id="8" name="text-0">
             <a:extLst xmlns:a="http://schemas.openxmlformats.org/drawingml/2006/main">
               <a:ext uri="{FF2B5EF4-FFF2-40B4-BE49-F238E27FC236}">
-                <a16:creationId xmlns:a16="http://schemas.microsoft.com/office/drawing/2014/main" id="{66C73F20-EA12-4E51-BB2F-26FD8C4BFA57}"/>
+                <a16:creationId xmlns:a16="http://schemas.microsoft.com/office/drawing/2014/main" id="{4C04977D-DECA-4467-8AEA-9FF5F6A37289}"/>
               </a:ext>
             </a:extLst>
           </p:cNvPr>
@@ -16640,7 +16640,7 @@
           <p:cNvPr id="2" name="text-1">
             <a:extLst xmlns:a="http://schemas.openxmlformats.org/drawingml/2006/main">
               <a:ext uri="{FF2B5EF4-FFF2-40B4-BE49-F238E27FC236}">
-                <a16:creationId xmlns:a16="http://schemas.microsoft.com/office/drawing/2014/main" id="{03C5DF8E-6D9C-463E-9ACC-10CD75620399}"/>
+                <a16:creationId xmlns:a16="http://schemas.microsoft.com/office/drawing/2014/main" id="{70A6EBB4-FF30-486E-AC77-D9C8346FC372}"/>
               </a:ext>
             </a:extLst>
           </p:cNvPr>
@@ -16994,7 +16994,7 @@
           <p:cNvPr id="4" name="text-2">
             <a:extLst xmlns:a="http://schemas.openxmlformats.org/drawingml/2006/main">
               <a:ext uri="{FF2B5EF4-FFF2-40B4-BE49-F238E27FC236}">
-                <a16:creationId xmlns:a16="http://schemas.microsoft.com/office/drawing/2014/main" id="{CE5FBE77-BDEA-4D9A-A5E8-F608CDA3D7A6}"/>
+                <a16:creationId xmlns:a16="http://schemas.microsoft.com/office/drawing/2014/main" id="{2D908F3A-833F-4FAA-B2F7-4A8903907BB4}"/>
               </a:ext>
             </a:extLst>
           </p:cNvPr>
@@ -17056,7 +17056,7 @@
           <p:cNvPr id="5" name="">
             <a:extLst xmlns:a="http://schemas.openxmlformats.org/drawingml/2006/main">
               <a:ext uri="{FF2B5EF4-FFF2-40B4-BE49-F238E27FC236}">
-                <a16:creationId xmlns:a16="http://schemas.microsoft.com/office/drawing/2014/main" id="{1B4ACB47-52CD-4202-9DE5-A4860E3954F0}"/>
+                <a16:creationId xmlns:a16="http://schemas.microsoft.com/office/drawing/2014/main" id="{70DA5371-2968-4064-869A-FFC9153EE1EF}"/>
               </a:ext>
             </a:extLst>
           </p:cNvPr>
@@ -17087,7 +17087,7 @@
           <p:cNvPr id="6" name="text-4">
             <a:extLst xmlns:a="http://schemas.openxmlformats.org/drawingml/2006/main">
               <a:ext uri="{FF2B5EF4-FFF2-40B4-BE49-F238E27FC236}">
-                <a16:creationId xmlns:a16="http://schemas.microsoft.com/office/drawing/2014/main" id="{7773890A-9863-4147-A99D-3C04605AE21C}"/>
+                <a16:creationId xmlns:a16="http://schemas.microsoft.com/office/drawing/2014/main" id="{602AC0C1-3404-4343-8AD2-7A30AA1A8C41}"/>
               </a:ext>
             </a:extLst>
           </p:cNvPr>
@@ -17149,7 +17149,7 @@
           <p:cNvPr id="7" name="text-5">
             <a:extLst xmlns:a="http://schemas.openxmlformats.org/drawingml/2006/main">
               <a:ext uri="{FF2B5EF4-FFF2-40B4-BE49-F238E27FC236}">
-                <a16:creationId xmlns:a16="http://schemas.microsoft.com/office/drawing/2014/main" id="{092A72B5-EC76-406D-A0BA-041D75548431}"/>
+                <a16:creationId xmlns:a16="http://schemas.microsoft.com/office/drawing/2014/main" id="{E2EE9946-0257-45EA-8188-BE49782DB285}"/>
               </a:ext>
             </a:extLst>
           </p:cNvPr>
@@ -17209,7 +17209,7 @@
     </p:spTree>
     <p:extLst>
       <p:ext uri="{BB962C8B-B14F-4D97-AF65-F5344CB8AC3E}">
-        <p14:creationId xmlns:p14="http://schemas.microsoft.com/office/powerpoint/2010/main" val="1497857142"/>
+        <p14:creationId xmlns:p14="http://schemas.microsoft.com/office/powerpoint/2010/main" val="23176056"/>
       </p:ext>
     </p:extLst>
   </p:cSld>
@@ -17240,7 +17240,7 @@
           <p:cNvPr id="7" name="text-0">
             <a:extLst xmlns:a="http://schemas.openxmlformats.org/drawingml/2006/main">
               <a:ext uri="{FF2B5EF4-FFF2-40B4-BE49-F238E27FC236}">
-                <a16:creationId xmlns:a16="http://schemas.microsoft.com/office/drawing/2014/main" id="{25322F72-5F9B-4621-AACC-4F2D2E160DE7}"/>
+                <a16:creationId xmlns:a16="http://schemas.microsoft.com/office/drawing/2014/main" id="{24949D32-2AFE-442E-8264-FC01024CE5E8}"/>
               </a:ext>
             </a:extLst>
           </p:cNvPr>
@@ -17302,7 +17302,7 @@
           <p:cNvPr id="2" name="text-1">
             <a:extLst xmlns:a="http://schemas.openxmlformats.org/drawingml/2006/main">
               <a:ext uri="{FF2B5EF4-FFF2-40B4-BE49-F238E27FC236}">
-                <a16:creationId xmlns:a16="http://schemas.microsoft.com/office/drawing/2014/main" id="{E0A5602C-9591-494F-811E-9B8435C75D0A}"/>
+                <a16:creationId xmlns:a16="http://schemas.microsoft.com/office/drawing/2014/main" id="{90DB01E7-A59D-472B-A047-9390385C023F}"/>
               </a:ext>
             </a:extLst>
           </p:cNvPr>
@@ -17364,7 +17364,7 @@
           <p:cNvPr id="3" name="text-2">
             <a:extLst xmlns:a="http://schemas.openxmlformats.org/drawingml/2006/main">
               <a:ext uri="{FF2B5EF4-FFF2-40B4-BE49-F238E27FC236}">
-                <a16:creationId xmlns:a16="http://schemas.microsoft.com/office/drawing/2014/main" id="{86D38FB4-1227-4CD6-8E04-9872AA79C716}"/>
+                <a16:creationId xmlns:a16="http://schemas.microsoft.com/office/drawing/2014/main" id="{862D1937-EC5F-4122-9885-B6CFBFC4AC0A}"/>
               </a:ext>
             </a:extLst>
           </p:cNvPr>
@@ -17489,7 +17489,7 @@
           <p:cNvPr id="4" name="">
             <a:extLst xmlns:a="http://schemas.openxmlformats.org/drawingml/2006/main">
               <a:ext uri="{FF2B5EF4-FFF2-40B4-BE49-F238E27FC236}">
-                <a16:creationId xmlns:a16="http://schemas.microsoft.com/office/drawing/2014/main" id="{563B08EF-479E-40E1-B7E7-C09AF29E66F1}"/>
+                <a16:creationId xmlns:a16="http://schemas.microsoft.com/office/drawing/2014/main" id="{52A0B1F8-BC3F-40B3-A2B2-CC4A0D57D1C8}"/>
               </a:ext>
             </a:extLst>
           </p:cNvPr>
@@ -17520,7 +17520,7 @@
           <p:cNvPr id="5" name="text-4">
             <a:extLst xmlns:a="http://schemas.openxmlformats.org/drawingml/2006/main">
               <a:ext uri="{FF2B5EF4-FFF2-40B4-BE49-F238E27FC236}">
-                <a16:creationId xmlns:a16="http://schemas.microsoft.com/office/drawing/2014/main" id="{D4A12633-D33B-496E-91AB-62E62C41E649}"/>
+                <a16:creationId xmlns:a16="http://schemas.microsoft.com/office/drawing/2014/main" id="{E31880CF-90AF-4CB9-A82E-83EAB4A6CC87}"/>
               </a:ext>
             </a:extLst>
           </p:cNvPr>
@@ -17582,7 +17582,7 @@
           <p:cNvPr id="6" name="text-5">
             <a:extLst xmlns:a="http://schemas.openxmlformats.org/drawingml/2006/main">
               <a:ext uri="{FF2B5EF4-FFF2-40B4-BE49-F238E27FC236}">
-                <a16:creationId xmlns:a16="http://schemas.microsoft.com/office/drawing/2014/main" id="{3E818879-5642-43B3-A46F-375101A5A141}"/>
+                <a16:creationId xmlns:a16="http://schemas.microsoft.com/office/drawing/2014/main" id="{E9157E17-19C2-474B-A7F5-97B42B6E1C11}"/>
               </a:ext>
             </a:extLst>
           </p:cNvPr>
@@ -17642,7 +17642,7 @@
     </p:spTree>
     <p:extLst>
       <p:ext uri="{BB962C8B-B14F-4D97-AF65-F5344CB8AC3E}">
-        <p14:creationId xmlns:p14="http://schemas.microsoft.com/office/powerpoint/2010/main" val="264379712"/>
+        <p14:creationId xmlns:p14="http://schemas.microsoft.com/office/powerpoint/2010/main" val="1463853052"/>
       </p:ext>
     </p:extLst>
   </p:cSld>
@@ -17673,7 +17673,7 @@
           <p:cNvPr id="8" name="text-0">
             <a:extLst xmlns:a="http://schemas.openxmlformats.org/drawingml/2006/main">
               <a:ext uri="{FF2B5EF4-FFF2-40B4-BE49-F238E27FC236}">
-                <a16:creationId xmlns:a16="http://schemas.microsoft.com/office/drawing/2014/main" id="{1F91B384-C506-4555-878C-A6CBE61CE8D1}"/>
+                <a16:creationId xmlns:a16="http://schemas.microsoft.com/office/drawing/2014/main" id="{E90A9723-EB3A-416D-9995-C3FD8B409B34}"/>
               </a:ext>
             </a:extLst>
           </p:cNvPr>
@@ -17735,7 +17735,7 @@
           <p:cNvPr id="2" name="text-1">
             <a:extLst xmlns:a="http://schemas.openxmlformats.org/drawingml/2006/main">
               <a:ext uri="{FF2B5EF4-FFF2-40B4-BE49-F238E27FC236}">
-                <a16:creationId xmlns:a16="http://schemas.microsoft.com/office/drawing/2014/main" id="{4B2D3CD2-E701-4636-ABF4-8D5DBB742D7B}"/>
+                <a16:creationId xmlns:a16="http://schemas.microsoft.com/office/drawing/2014/main" id="{24EA5470-6191-4B35-A5A8-8DFB07C56533}"/>
               </a:ext>
             </a:extLst>
           </p:cNvPr>
@@ -17797,7 +17797,7 @@
           <p:cNvPr id="3" name="text-2">
             <a:extLst xmlns:a="http://schemas.openxmlformats.org/drawingml/2006/main">
               <a:ext uri="{FF2B5EF4-FFF2-40B4-BE49-F238E27FC236}">
-                <a16:creationId xmlns:a16="http://schemas.microsoft.com/office/drawing/2014/main" id="{4FA7C4B4-2E8E-45A4-B4D1-74157AEE727F}"/>
+                <a16:creationId xmlns:a16="http://schemas.microsoft.com/office/drawing/2014/main" id="{4A6C21D2-3DAC-41F8-9FD2-A5FA7684A2A5}"/>
               </a:ext>
             </a:extLst>
           </p:cNvPr>
@@ -17922,7 +17922,7 @@
           <p:cNvPr id="4" name="text-3">
             <a:extLst xmlns:a="http://schemas.openxmlformats.org/drawingml/2006/main">
               <a:ext uri="{FF2B5EF4-FFF2-40B4-BE49-F238E27FC236}">
-                <a16:creationId xmlns:a16="http://schemas.microsoft.com/office/drawing/2014/main" id="{05C08091-01C3-487B-B041-1053BC7B1999}"/>
+                <a16:creationId xmlns:a16="http://schemas.microsoft.com/office/drawing/2014/main" id="{A32A4BB3-B89E-4BBE-AB77-A90BA7E738B2}"/>
               </a:ext>
             </a:extLst>
           </p:cNvPr>
@@ -17984,7 +17984,7 @@
           <p:cNvPr id="5" name="">
             <a:extLst xmlns:a="http://schemas.openxmlformats.org/drawingml/2006/main">
               <a:ext uri="{FF2B5EF4-FFF2-40B4-BE49-F238E27FC236}">
-                <a16:creationId xmlns:a16="http://schemas.microsoft.com/office/drawing/2014/main" id="{227F93B9-C5FD-4C67-93B0-29BE63FE497C}"/>
+                <a16:creationId xmlns:a16="http://schemas.microsoft.com/office/drawing/2014/main" id="{9D7BB6F3-C587-46D3-94BA-EC943BEEF2CA}"/>
               </a:ext>
             </a:extLst>
           </p:cNvPr>
@@ -18015,7 +18015,7 @@
           <p:cNvPr id="6" name="text-5">
             <a:extLst xmlns:a="http://schemas.openxmlformats.org/drawingml/2006/main">
               <a:ext uri="{FF2B5EF4-FFF2-40B4-BE49-F238E27FC236}">
-                <a16:creationId xmlns:a16="http://schemas.microsoft.com/office/drawing/2014/main" id="{6A7BBFE4-6255-4A6D-BA47-13BB55F89E99}"/>
+                <a16:creationId xmlns:a16="http://schemas.microsoft.com/office/drawing/2014/main" id="{4DDC2941-93C7-4AB9-BB6E-C1EA625BF736}"/>
               </a:ext>
             </a:extLst>
           </p:cNvPr>
@@ -18077,7 +18077,7 @@
           <p:cNvPr id="7" name="text-6">
             <a:extLst xmlns:a="http://schemas.openxmlformats.org/drawingml/2006/main">
               <a:ext uri="{FF2B5EF4-FFF2-40B4-BE49-F238E27FC236}">
-                <a16:creationId xmlns:a16="http://schemas.microsoft.com/office/drawing/2014/main" id="{D37755B4-8613-4C91-8F07-F2716D8296E0}"/>
+                <a16:creationId xmlns:a16="http://schemas.microsoft.com/office/drawing/2014/main" id="{88E098BB-BE29-4C8E-9318-3EA1D96B6D16}"/>
               </a:ext>
             </a:extLst>
           </p:cNvPr>
@@ -18137,7 +18137,7 @@
     </p:spTree>
     <p:extLst>
       <p:ext uri="{BB962C8B-B14F-4D97-AF65-F5344CB8AC3E}">
-        <p14:creationId xmlns:p14="http://schemas.microsoft.com/office/powerpoint/2010/main" val="465217690"/>
+        <p14:creationId xmlns:p14="http://schemas.microsoft.com/office/powerpoint/2010/main" val="421441950"/>
       </p:ext>
     </p:extLst>
   </p:cSld>
@@ -18168,7 +18168,7 @@
           <p:cNvPr id="8" name="text-0">
             <a:extLst xmlns:a="http://schemas.openxmlformats.org/drawingml/2006/main">
               <a:ext uri="{FF2B5EF4-FFF2-40B4-BE49-F238E27FC236}">
-                <a16:creationId xmlns:a16="http://schemas.microsoft.com/office/drawing/2014/main" id="{66DA4412-E1B6-4AF9-96A1-4354E057F4EB}"/>
+                <a16:creationId xmlns:a16="http://schemas.microsoft.com/office/drawing/2014/main" id="{3003D2FA-CFC7-41BD-BB58-325BBA56B5FA}"/>
               </a:ext>
             </a:extLst>
           </p:cNvPr>
@@ -18230,7 +18230,7 @@
           <p:cNvPr id="2" name="text-1">
             <a:extLst xmlns:a="http://schemas.openxmlformats.org/drawingml/2006/main">
               <a:ext uri="{FF2B5EF4-FFF2-40B4-BE49-F238E27FC236}">
-                <a16:creationId xmlns:a16="http://schemas.microsoft.com/office/drawing/2014/main" id="{7CF5E3EF-7E87-4672-8529-9126B4C2FB0A}"/>
+                <a16:creationId xmlns:a16="http://schemas.microsoft.com/office/drawing/2014/main" id="{557E9118-E88E-4317-9262-77383E77F147}"/>
               </a:ext>
             </a:extLst>
           </p:cNvPr>
@@ -18296,7 +18296,7 @@
           <p:nvPr/>
         </p:nvPicPr>
         <p:blipFill>
-          <a:blip xmlns:r="http://schemas.openxmlformats.org/officeDocument/2006/relationships" xmlns:a="http://schemas.openxmlformats.org/drawingml/2006/main" r:embed="R3cab76e18d6e4462"/>
+          <a:blip xmlns:r="http://schemas.openxmlformats.org/officeDocument/2006/relationships" xmlns:a="http://schemas.openxmlformats.org/drawingml/2006/main" r:embed="Re9f6a4b59a7142ee"/>
           <a:stretch xmlns:a="http://schemas.openxmlformats.org/drawingml/2006/main"/>
         </p:blipFill>
         <p:spPr>
@@ -18314,7 +18314,7 @@
           <p:cNvPr id="4" name="text-2">
             <a:extLst xmlns:a="http://schemas.openxmlformats.org/drawingml/2006/main">
               <a:ext uri="{FF2B5EF4-FFF2-40B4-BE49-F238E27FC236}">
-                <a16:creationId xmlns:a16="http://schemas.microsoft.com/office/drawing/2014/main" id="{61CAAA6D-53BA-4E52-BF7A-B746B857C983}"/>
+                <a16:creationId xmlns:a16="http://schemas.microsoft.com/office/drawing/2014/main" id="{0DF65DAF-2571-42D4-8F3C-6A8B0C36C179}"/>
               </a:ext>
             </a:extLst>
           </p:cNvPr>
@@ -18376,7 +18376,7 @@
           <p:cNvPr id="5" name="">
             <a:extLst xmlns:a="http://schemas.openxmlformats.org/drawingml/2006/main">
               <a:ext uri="{FF2B5EF4-FFF2-40B4-BE49-F238E27FC236}">
-                <a16:creationId xmlns:a16="http://schemas.microsoft.com/office/drawing/2014/main" id="{588028A9-5E90-47C8-A3D3-CBB42FF8B99D}"/>
+                <a16:creationId xmlns:a16="http://schemas.microsoft.com/office/drawing/2014/main" id="{96546244-79EF-4274-9D60-8AE78DE9B71B}"/>
               </a:ext>
             </a:extLst>
           </p:cNvPr>
@@ -18407,7 +18407,7 @@
           <p:cNvPr id="6" name="text-4">
             <a:extLst xmlns:a="http://schemas.openxmlformats.org/drawingml/2006/main">
               <a:ext uri="{FF2B5EF4-FFF2-40B4-BE49-F238E27FC236}">
-                <a16:creationId xmlns:a16="http://schemas.microsoft.com/office/drawing/2014/main" id="{212AE893-C94C-4FE6-912C-8874C6CDD5B6}"/>
+                <a16:creationId xmlns:a16="http://schemas.microsoft.com/office/drawing/2014/main" id="{20D063D2-1195-4187-BE53-EBC71B607B57}"/>
               </a:ext>
             </a:extLst>
           </p:cNvPr>
@@ -18469,7 +18469,7 @@
           <p:cNvPr id="7" name="text-5">
             <a:extLst xmlns:a="http://schemas.openxmlformats.org/drawingml/2006/main">
               <a:ext uri="{FF2B5EF4-FFF2-40B4-BE49-F238E27FC236}">
-                <a16:creationId xmlns:a16="http://schemas.microsoft.com/office/drawing/2014/main" id="{D9F29619-829C-4C91-A48D-F4139D764F47}"/>
+                <a16:creationId xmlns:a16="http://schemas.microsoft.com/office/drawing/2014/main" id="{531D2DA9-93C8-438A-B6B0-BA6FE41B0790}"/>
               </a:ext>
             </a:extLst>
           </p:cNvPr>
@@ -18529,7 +18529,7 @@
     </p:spTree>
     <p:extLst>
       <p:ext uri="{BB962C8B-B14F-4D97-AF65-F5344CB8AC3E}">
-        <p14:creationId xmlns:p14="http://schemas.microsoft.com/office/powerpoint/2010/main" val="92327203"/>
+        <p14:creationId xmlns:p14="http://schemas.microsoft.com/office/powerpoint/2010/main" val="1198731025"/>
       </p:ext>
     </p:extLst>
   </p:cSld>
@@ -18560,7 +18560,7 @@
           <p:cNvPr id="8" name="text-0">
             <a:extLst xmlns:a="http://schemas.openxmlformats.org/drawingml/2006/main">
               <a:ext uri="{FF2B5EF4-FFF2-40B4-BE49-F238E27FC236}">
-                <a16:creationId xmlns:a16="http://schemas.microsoft.com/office/drawing/2014/main" id="{4E7AADD4-33A6-4981-A12A-B5B1828855E8}"/>
+                <a16:creationId xmlns:a16="http://schemas.microsoft.com/office/drawing/2014/main" id="{E385A2D1-EC27-41E5-82C5-41ABB6F28822}"/>
               </a:ext>
             </a:extLst>
           </p:cNvPr>
@@ -18622,7 +18622,7 @@
           <p:cNvPr id="2" name="text-1">
             <a:extLst xmlns:a="http://schemas.openxmlformats.org/drawingml/2006/main">
               <a:ext uri="{FF2B5EF4-FFF2-40B4-BE49-F238E27FC236}">
-                <a16:creationId xmlns:a16="http://schemas.microsoft.com/office/drawing/2014/main" id="{90B0A654-37F6-4B91-AF16-0AFE7112D77D}"/>
+                <a16:creationId xmlns:a16="http://schemas.microsoft.com/office/drawing/2014/main" id="{51122D0C-F699-4D19-BE4D-F7CAB14E84EE}"/>
               </a:ext>
             </a:extLst>
           </p:cNvPr>
@@ -18684,7 +18684,7 @@
           <p:cNvPr id="3" name="text-2">
             <a:extLst xmlns:a="http://schemas.openxmlformats.org/drawingml/2006/main">
               <a:ext uri="{FF2B5EF4-FFF2-40B4-BE49-F238E27FC236}">
-                <a16:creationId xmlns:a16="http://schemas.microsoft.com/office/drawing/2014/main" id="{B228A037-C2D2-45D3-9529-829AAA446CA1}"/>
+                <a16:creationId xmlns:a16="http://schemas.microsoft.com/office/drawing/2014/main" id="{528A7955-3C27-4F4D-A4FD-48ECD3F0F934}"/>
               </a:ext>
             </a:extLst>
           </p:cNvPr>
@@ -18798,7 +18798,7 @@
           <p:cNvPr id="4" name="text-3">
             <a:extLst xmlns:a="http://schemas.openxmlformats.org/drawingml/2006/main">
               <a:ext uri="{FF2B5EF4-FFF2-40B4-BE49-F238E27FC236}">
-                <a16:creationId xmlns:a16="http://schemas.microsoft.com/office/drawing/2014/main" id="{12356311-9BF5-4706-8D6F-93ED67F3E54C}"/>
+                <a16:creationId xmlns:a16="http://schemas.microsoft.com/office/drawing/2014/main" id="{7EB2CA03-165D-4C93-93B7-7AFFA03B0E75}"/>
               </a:ext>
             </a:extLst>
           </p:cNvPr>
@@ -18860,7 +18860,7 @@
           <p:cNvPr id="5" name="">
             <a:extLst xmlns:a="http://schemas.openxmlformats.org/drawingml/2006/main">
               <a:ext uri="{FF2B5EF4-FFF2-40B4-BE49-F238E27FC236}">
-                <a16:creationId xmlns:a16="http://schemas.microsoft.com/office/drawing/2014/main" id="{9D5438F3-0495-475F-8770-B5ED48BD5A67}"/>
+                <a16:creationId xmlns:a16="http://schemas.microsoft.com/office/drawing/2014/main" id="{631F31A0-470D-4FDE-A1CA-A32497BBEC97}"/>
               </a:ext>
             </a:extLst>
           </p:cNvPr>
@@ -18891,7 +18891,7 @@
           <p:cNvPr id="6" name="text-5">
             <a:extLst xmlns:a="http://schemas.openxmlformats.org/drawingml/2006/main">
               <a:ext uri="{FF2B5EF4-FFF2-40B4-BE49-F238E27FC236}">
-                <a16:creationId xmlns:a16="http://schemas.microsoft.com/office/drawing/2014/main" id="{A2C6726D-0B14-48D4-901D-74EA5AF740C2}"/>
+                <a16:creationId xmlns:a16="http://schemas.microsoft.com/office/drawing/2014/main" id="{4E18D741-76A6-484D-A9EB-41F44A426D83}"/>
               </a:ext>
             </a:extLst>
           </p:cNvPr>
@@ -18953,7 +18953,7 @@
           <p:cNvPr id="7" name="text-6">
             <a:extLst xmlns:a="http://schemas.openxmlformats.org/drawingml/2006/main">
               <a:ext uri="{FF2B5EF4-FFF2-40B4-BE49-F238E27FC236}">
-                <a16:creationId xmlns:a16="http://schemas.microsoft.com/office/drawing/2014/main" id="{ED8903AB-2BAB-4006-AA73-802659618FDF}"/>
+                <a16:creationId xmlns:a16="http://schemas.microsoft.com/office/drawing/2014/main" id="{767A29A5-AEE0-4B7B-82E3-BA8A16E39AF9}"/>
               </a:ext>
             </a:extLst>
           </p:cNvPr>
@@ -19013,7 +19013,7 @@
     </p:spTree>
     <p:extLst>
       <p:ext uri="{BB962C8B-B14F-4D97-AF65-F5344CB8AC3E}">
-        <p14:creationId xmlns:p14="http://schemas.microsoft.com/office/powerpoint/2010/main" val="840821335"/>
+        <p14:creationId xmlns:p14="http://schemas.microsoft.com/office/powerpoint/2010/main" val="1032666823"/>
       </p:ext>
     </p:extLst>
   </p:cSld>
@@ -19044,7 +19044,7 @@
           <p:cNvPr id="8" name="text-0">
             <a:extLst xmlns:a="http://schemas.openxmlformats.org/drawingml/2006/main">
               <a:ext uri="{FF2B5EF4-FFF2-40B4-BE49-F238E27FC236}">
-                <a16:creationId xmlns:a16="http://schemas.microsoft.com/office/drawing/2014/main" id="{E9B9CCC8-4CFE-45FB-BB3C-7739BFEDF98C}"/>
+                <a16:creationId xmlns:a16="http://schemas.microsoft.com/office/drawing/2014/main" id="{F103061C-D076-49AA-90BF-D53345AB8197}"/>
               </a:ext>
             </a:extLst>
           </p:cNvPr>
@@ -19106,7 +19106,7 @@
           <p:cNvPr id="2" name="text-1">
             <a:extLst xmlns:a="http://schemas.openxmlformats.org/drawingml/2006/main">
               <a:ext uri="{FF2B5EF4-FFF2-40B4-BE49-F238E27FC236}">
-                <a16:creationId xmlns:a16="http://schemas.microsoft.com/office/drawing/2014/main" id="{8C75F7B3-37BA-49FE-A1DB-49C08DCEE0BA}"/>
+                <a16:creationId xmlns:a16="http://schemas.microsoft.com/office/drawing/2014/main" id="{81156BB4-22E0-42B2-A35D-F40CC599B949}"/>
               </a:ext>
             </a:extLst>
           </p:cNvPr>
@@ -19168,7 +19168,7 @@
           <p:cNvPr id="3" name="text-2">
             <a:extLst xmlns:a="http://schemas.openxmlformats.org/drawingml/2006/main">
               <a:ext uri="{FF2B5EF4-FFF2-40B4-BE49-F238E27FC236}">
-                <a16:creationId xmlns:a16="http://schemas.microsoft.com/office/drawing/2014/main" id="{C67529F7-8D97-45B4-AE49-22EEBD02FFC8}"/>
+                <a16:creationId xmlns:a16="http://schemas.microsoft.com/office/drawing/2014/main" id="{0671B1B7-4BA9-462A-BFED-DF2503324476}"/>
               </a:ext>
             </a:extLst>
           </p:cNvPr>
@@ -19260,7 +19260,7 @@
           <p:cNvPr id="4" name="text-3">
             <a:extLst xmlns:a="http://schemas.openxmlformats.org/drawingml/2006/main">
               <a:ext uri="{FF2B5EF4-FFF2-40B4-BE49-F238E27FC236}">
-                <a16:creationId xmlns:a16="http://schemas.microsoft.com/office/drawing/2014/main" id="{663B442F-5397-4199-970C-DBA7C3B293A2}"/>
+                <a16:creationId xmlns:a16="http://schemas.microsoft.com/office/drawing/2014/main" id="{D2A3BE5A-2ADF-4F61-B46A-360E93CD2C8B}"/>
               </a:ext>
             </a:extLst>
           </p:cNvPr>
@@ -19322,7 +19322,7 @@
           <p:cNvPr id="5" name="">
             <a:extLst xmlns:a="http://schemas.openxmlformats.org/drawingml/2006/main">
               <a:ext uri="{FF2B5EF4-FFF2-40B4-BE49-F238E27FC236}">
-                <a16:creationId xmlns:a16="http://schemas.microsoft.com/office/drawing/2014/main" id="{AB9C53F1-D8E2-45BB-9662-BE1B1598AE30}"/>
+                <a16:creationId xmlns:a16="http://schemas.microsoft.com/office/drawing/2014/main" id="{733567A7-FA44-405F-83E8-39E164579FA8}"/>
               </a:ext>
             </a:extLst>
           </p:cNvPr>
@@ -19353,7 +19353,7 @@
           <p:cNvPr id="6" name="text-5">
             <a:extLst xmlns:a="http://schemas.openxmlformats.org/drawingml/2006/main">
               <a:ext uri="{FF2B5EF4-FFF2-40B4-BE49-F238E27FC236}">
-                <a16:creationId xmlns:a16="http://schemas.microsoft.com/office/drawing/2014/main" id="{FE3DED15-DD6F-41DF-8C32-847193F2A92B}"/>
+                <a16:creationId xmlns:a16="http://schemas.microsoft.com/office/drawing/2014/main" id="{347CDFF0-AF04-4F1E-B660-F5FC8E616248}"/>
               </a:ext>
             </a:extLst>
           </p:cNvPr>
@@ -19415,7 +19415,7 @@
           <p:cNvPr id="7" name="text-6">
             <a:extLst xmlns:a="http://schemas.openxmlformats.org/drawingml/2006/main">
               <a:ext uri="{FF2B5EF4-FFF2-40B4-BE49-F238E27FC236}">
-                <a16:creationId xmlns:a16="http://schemas.microsoft.com/office/drawing/2014/main" id="{59C3F092-CA5F-4013-9CDF-699AECD5FB2F}"/>
+                <a16:creationId xmlns:a16="http://schemas.microsoft.com/office/drawing/2014/main" id="{ECF809FD-FF12-42FE-BD80-B2794785E4B5}"/>
               </a:ext>
             </a:extLst>
           </p:cNvPr>
@@ -19475,7 +19475,7 @@
     </p:spTree>
     <p:extLst>
       <p:ext uri="{BB962C8B-B14F-4D97-AF65-F5344CB8AC3E}">
-        <p14:creationId xmlns:p14="http://schemas.microsoft.com/office/powerpoint/2010/main" val="1694891428"/>
+        <p14:creationId xmlns:p14="http://schemas.microsoft.com/office/powerpoint/2010/main" val="1674431281"/>
       </p:ext>
     </p:extLst>
   </p:cSld>
@@ -19506,7 +19506,7 @@
           <p:cNvPr id="8" name="text-0">
             <a:extLst xmlns:a="http://schemas.openxmlformats.org/drawingml/2006/main">
               <a:ext uri="{FF2B5EF4-FFF2-40B4-BE49-F238E27FC236}">
-                <a16:creationId xmlns:a16="http://schemas.microsoft.com/office/drawing/2014/main" id="{8A344044-6AB1-4D3D-8078-BC25E27E6030}"/>
+                <a16:creationId xmlns:a16="http://schemas.microsoft.com/office/drawing/2014/main" id="{83BC4050-96AC-4CDD-85A5-E3CFBF703C52}"/>
               </a:ext>
             </a:extLst>
           </p:cNvPr>
@@ -19568,7 +19568,7 @@
           <p:cNvPr id="2" name="text-1">
             <a:extLst xmlns:a="http://schemas.openxmlformats.org/drawingml/2006/main">
               <a:ext uri="{FF2B5EF4-FFF2-40B4-BE49-F238E27FC236}">
-                <a16:creationId xmlns:a16="http://schemas.microsoft.com/office/drawing/2014/main" id="{C4ED6B15-25E5-4067-9846-9230ACD5EEA4}"/>
+                <a16:creationId xmlns:a16="http://schemas.microsoft.com/office/drawing/2014/main" id="{62683495-8D9D-4FD1-982A-66684E656B93}"/>
               </a:ext>
             </a:extLst>
           </p:cNvPr>
@@ -19634,7 +19634,7 @@
           <p:nvPr/>
         </p:nvPicPr>
         <p:blipFill>
-          <a:blip xmlns:r="http://schemas.openxmlformats.org/officeDocument/2006/relationships" xmlns:a="http://schemas.openxmlformats.org/drawingml/2006/main" r:embed="R87ea1a750bd0418b"/>
+          <a:blip xmlns:r="http://schemas.openxmlformats.org/officeDocument/2006/relationships" xmlns:a="http://schemas.openxmlformats.org/drawingml/2006/main" r:embed="Rb276addca6c04f50"/>
           <a:stretch xmlns:a="http://schemas.openxmlformats.org/drawingml/2006/main"/>
         </p:blipFill>
         <p:spPr>
@@ -19652,7 +19652,7 @@
           <p:cNvPr id="4" name="text-2">
             <a:extLst xmlns:a="http://schemas.openxmlformats.org/drawingml/2006/main">
               <a:ext uri="{FF2B5EF4-FFF2-40B4-BE49-F238E27FC236}">
-                <a16:creationId xmlns:a16="http://schemas.microsoft.com/office/drawing/2014/main" id="{A3EF62A7-7076-4810-848B-FC4B15779461}"/>
+                <a16:creationId xmlns:a16="http://schemas.microsoft.com/office/drawing/2014/main" id="{CC49C7E0-E8B2-480A-B959-8E2CE0A0121A}"/>
               </a:ext>
             </a:extLst>
           </p:cNvPr>
@@ -19714,7 +19714,7 @@
           <p:cNvPr id="5" name="">
             <a:extLst xmlns:a="http://schemas.openxmlformats.org/drawingml/2006/main">
               <a:ext uri="{FF2B5EF4-FFF2-40B4-BE49-F238E27FC236}">
-                <a16:creationId xmlns:a16="http://schemas.microsoft.com/office/drawing/2014/main" id="{7006526D-709E-4A75-917D-BEE459438675}"/>
+                <a16:creationId xmlns:a16="http://schemas.microsoft.com/office/drawing/2014/main" id="{52D1AA85-D60A-4156-BBC5-F154B4B4650C}"/>
               </a:ext>
             </a:extLst>
           </p:cNvPr>
@@ -19745,7 +19745,7 @@
           <p:cNvPr id="6" name="text-4">
             <a:extLst xmlns:a="http://schemas.openxmlformats.org/drawingml/2006/main">
               <a:ext uri="{FF2B5EF4-FFF2-40B4-BE49-F238E27FC236}">
-                <a16:creationId xmlns:a16="http://schemas.microsoft.com/office/drawing/2014/main" id="{B000392E-1579-4F69-B337-36E335A36C91}"/>
+                <a16:creationId xmlns:a16="http://schemas.microsoft.com/office/drawing/2014/main" id="{DE4FD961-3F1D-45DD-9648-A0A4C35CF852}"/>
               </a:ext>
             </a:extLst>
           </p:cNvPr>
@@ -19807,7 +19807,7 @@
           <p:cNvPr id="7" name="text-5">
             <a:extLst xmlns:a="http://schemas.openxmlformats.org/drawingml/2006/main">
               <a:ext uri="{FF2B5EF4-FFF2-40B4-BE49-F238E27FC236}">
-                <a16:creationId xmlns:a16="http://schemas.microsoft.com/office/drawing/2014/main" id="{DAD8F049-8BF0-4189-973A-B723398CC5F2}"/>
+                <a16:creationId xmlns:a16="http://schemas.microsoft.com/office/drawing/2014/main" id="{16CC9626-CC42-496C-9FE2-B4EE712F16B8}"/>
               </a:ext>
             </a:extLst>
           </p:cNvPr>
@@ -19867,7 +19867,7 @@
     </p:spTree>
     <p:extLst>
       <p:ext uri="{BB962C8B-B14F-4D97-AF65-F5344CB8AC3E}">
-        <p14:creationId xmlns:p14="http://schemas.microsoft.com/office/powerpoint/2010/main" val="1306777653"/>
+        <p14:creationId xmlns:p14="http://schemas.microsoft.com/office/powerpoint/2010/main" val="1364637725"/>
       </p:ext>
     </p:extLst>
   </p:cSld>
@@ -19898,7 +19898,7 @@
           <p:cNvPr id="7" name="text-0">
             <a:extLst xmlns:a="http://schemas.openxmlformats.org/drawingml/2006/main">
               <a:ext uri="{FF2B5EF4-FFF2-40B4-BE49-F238E27FC236}">
-                <a16:creationId xmlns:a16="http://schemas.microsoft.com/office/drawing/2014/main" id="{63031571-4D03-4D43-BCC7-348A1A7B8B9D}"/>
+                <a16:creationId xmlns:a16="http://schemas.microsoft.com/office/drawing/2014/main" id="{B52BA685-7EB9-461B-9633-E53847B9186E}"/>
               </a:ext>
             </a:extLst>
           </p:cNvPr>
@@ -19960,7 +19960,7 @@
           <p:cNvPr id="2" name="text-1">
             <a:extLst xmlns:a="http://schemas.openxmlformats.org/drawingml/2006/main">
               <a:ext uri="{FF2B5EF4-FFF2-40B4-BE49-F238E27FC236}">
-                <a16:creationId xmlns:a16="http://schemas.microsoft.com/office/drawing/2014/main" id="{A443D290-349E-480C-8E35-2DB9C962E049}"/>
+                <a16:creationId xmlns:a16="http://schemas.microsoft.com/office/drawing/2014/main" id="{66A21916-608D-43BF-A1E2-566390D6D697}"/>
               </a:ext>
             </a:extLst>
           </p:cNvPr>
@@ -20022,7 +20022,7 @@
           <p:cNvPr id="3" name="text-2">
             <a:extLst xmlns:a="http://schemas.openxmlformats.org/drawingml/2006/main">
               <a:ext uri="{FF2B5EF4-FFF2-40B4-BE49-F238E27FC236}">
-                <a16:creationId xmlns:a16="http://schemas.microsoft.com/office/drawing/2014/main" id="{9AED38C8-A766-43FC-B13B-D1DA02DED75C}"/>
+                <a16:creationId xmlns:a16="http://schemas.microsoft.com/office/drawing/2014/main" id="{8FB4520D-D946-415B-A57D-FC71939D7153}"/>
               </a:ext>
             </a:extLst>
           </p:cNvPr>
@@ -20171,7 +20171,7 @@
           <p:cNvPr id="4" name="">
             <a:extLst xmlns:a="http://schemas.openxmlformats.org/drawingml/2006/main">
               <a:ext uri="{FF2B5EF4-FFF2-40B4-BE49-F238E27FC236}">
-                <a16:creationId xmlns:a16="http://schemas.microsoft.com/office/drawing/2014/main" id="{29FAEE49-4D5B-41F1-9F32-BB5845AA649F}"/>
+                <a16:creationId xmlns:a16="http://schemas.microsoft.com/office/drawing/2014/main" id="{634F4155-7C31-465A-BE5C-CC9285E0F1A5}"/>
               </a:ext>
             </a:extLst>
           </p:cNvPr>
@@ -20202,7 +20202,7 @@
           <p:cNvPr id="5" name="text-4">
             <a:extLst xmlns:a="http://schemas.openxmlformats.org/drawingml/2006/main">
               <a:ext uri="{FF2B5EF4-FFF2-40B4-BE49-F238E27FC236}">
-                <a16:creationId xmlns:a16="http://schemas.microsoft.com/office/drawing/2014/main" id="{95B35069-A36A-403C-BECA-41845990E086}"/>
+                <a16:creationId xmlns:a16="http://schemas.microsoft.com/office/drawing/2014/main" id="{9541D542-869C-464C-B1A2-4AE83177A6B7}"/>
               </a:ext>
             </a:extLst>
           </p:cNvPr>
@@ -20264,7 +20264,7 @@
           <p:cNvPr id="6" name="text-5">
             <a:extLst xmlns:a="http://schemas.openxmlformats.org/drawingml/2006/main">
               <a:ext uri="{FF2B5EF4-FFF2-40B4-BE49-F238E27FC236}">
-                <a16:creationId xmlns:a16="http://schemas.microsoft.com/office/drawing/2014/main" id="{534F26F7-B64D-49C1-912B-BBD0E935E09D}"/>
+                <a16:creationId xmlns:a16="http://schemas.microsoft.com/office/drawing/2014/main" id="{3666072C-B36C-4F51-B180-BE3815A8DADD}"/>
               </a:ext>
             </a:extLst>
           </p:cNvPr>
@@ -20324,7 +20324,7 @@
     </p:spTree>
     <p:extLst>
       <p:ext uri="{BB962C8B-B14F-4D97-AF65-F5344CB8AC3E}">
-        <p14:creationId xmlns:p14="http://schemas.microsoft.com/office/powerpoint/2010/main" val="809407264"/>
+        <p14:creationId xmlns:p14="http://schemas.microsoft.com/office/powerpoint/2010/main" val="586866707"/>
       </p:ext>
     </p:extLst>
   </p:cSld>
@@ -20355,7 +20355,7 @@
           <p:cNvPr id="8" name="text-0">
             <a:extLst xmlns:a="http://schemas.openxmlformats.org/drawingml/2006/main">
               <a:ext uri="{FF2B5EF4-FFF2-40B4-BE49-F238E27FC236}">
-                <a16:creationId xmlns:a16="http://schemas.microsoft.com/office/drawing/2014/main" id="{3935FA15-A4AD-449E-AE0E-516A1099BA9C}"/>
+                <a16:creationId xmlns:a16="http://schemas.microsoft.com/office/drawing/2014/main" id="{82DD3DA5-CE69-45E9-8998-FBCDEF27497D}"/>
               </a:ext>
             </a:extLst>
           </p:cNvPr>
@@ -20417,7 +20417,7 @@
           <p:cNvPr id="2" name="text-1">
             <a:extLst xmlns:a="http://schemas.openxmlformats.org/drawingml/2006/main">
               <a:ext uri="{FF2B5EF4-FFF2-40B4-BE49-F238E27FC236}">
-                <a16:creationId xmlns:a16="http://schemas.microsoft.com/office/drawing/2014/main" id="{82BD23A0-8198-4955-8927-4A929079CD15}"/>
+                <a16:creationId xmlns:a16="http://schemas.microsoft.com/office/drawing/2014/main" id="{E6ECEF5D-0108-48DB-9D79-1081AAF8484C}"/>
               </a:ext>
             </a:extLst>
           </p:cNvPr>
@@ -20479,7 +20479,7 @@
           <p:cNvPr id="3" name="text-2">
             <a:extLst xmlns:a="http://schemas.openxmlformats.org/drawingml/2006/main">
               <a:ext uri="{FF2B5EF4-FFF2-40B4-BE49-F238E27FC236}">
-                <a16:creationId xmlns:a16="http://schemas.microsoft.com/office/drawing/2014/main" id="{FF51404F-A440-4D70-A48E-2FD2AF19F09C}"/>
+                <a16:creationId xmlns:a16="http://schemas.microsoft.com/office/drawing/2014/main" id="{0C12AFFC-D733-4D1B-B919-23684B5A596E}"/>
               </a:ext>
             </a:extLst>
           </p:cNvPr>
@@ -20571,7 +20571,7 @@
           <p:cNvPr id="4" name="text-3">
             <a:extLst xmlns:a="http://schemas.openxmlformats.org/drawingml/2006/main">
               <a:ext uri="{FF2B5EF4-FFF2-40B4-BE49-F238E27FC236}">
-                <a16:creationId xmlns:a16="http://schemas.microsoft.com/office/drawing/2014/main" id="{BA674042-88C0-4E3D-9A1C-AE14F6C6DD22}"/>
+                <a16:creationId xmlns:a16="http://schemas.microsoft.com/office/drawing/2014/main" id="{65BD1A25-5341-4C3B-8AD6-945B6F30B270}"/>
               </a:ext>
             </a:extLst>
           </p:cNvPr>
@@ -20633,7 +20633,7 @@
           <p:cNvPr id="5" name="">
             <a:extLst xmlns:a="http://schemas.openxmlformats.org/drawingml/2006/main">
               <a:ext uri="{FF2B5EF4-FFF2-40B4-BE49-F238E27FC236}">
-                <a16:creationId xmlns:a16="http://schemas.microsoft.com/office/drawing/2014/main" id="{6C52B3CD-AFC2-43C4-900F-3FDFA88EAD93}"/>
+                <a16:creationId xmlns:a16="http://schemas.microsoft.com/office/drawing/2014/main" id="{0BD69F00-A31C-4773-B364-A5F9D143B958}"/>
               </a:ext>
             </a:extLst>
           </p:cNvPr>
@@ -20664,7 +20664,7 @@
           <p:cNvPr id="6" name="text-5">
             <a:extLst xmlns:a="http://schemas.openxmlformats.org/drawingml/2006/main">
               <a:ext uri="{FF2B5EF4-FFF2-40B4-BE49-F238E27FC236}">
-                <a16:creationId xmlns:a16="http://schemas.microsoft.com/office/drawing/2014/main" id="{7274F657-6966-4FBC-B9EC-EB6CA85A1748}"/>
+                <a16:creationId xmlns:a16="http://schemas.microsoft.com/office/drawing/2014/main" id="{C99E6E88-056A-4367-B76C-A60527E1025C}"/>
               </a:ext>
             </a:extLst>
           </p:cNvPr>
@@ -20726,7 +20726,7 @@
           <p:cNvPr id="7" name="text-6">
             <a:extLst xmlns:a="http://schemas.openxmlformats.org/drawingml/2006/main">
               <a:ext uri="{FF2B5EF4-FFF2-40B4-BE49-F238E27FC236}">
-                <a16:creationId xmlns:a16="http://schemas.microsoft.com/office/drawing/2014/main" id="{72E63AA6-F68B-4B1D-B479-B696E426EA78}"/>
+                <a16:creationId xmlns:a16="http://schemas.microsoft.com/office/drawing/2014/main" id="{8907A108-A346-4BA2-8EC3-6118DA3E0639}"/>
               </a:ext>
             </a:extLst>
           </p:cNvPr>
@@ -20786,7 +20786,7 @@
     </p:spTree>
     <p:extLst>
       <p:ext uri="{BB962C8B-B14F-4D97-AF65-F5344CB8AC3E}">
-        <p14:creationId xmlns:p14="http://schemas.microsoft.com/office/powerpoint/2010/main" val="1736594333"/>
+        <p14:creationId xmlns:p14="http://schemas.microsoft.com/office/powerpoint/2010/main" val="512845143"/>
       </p:ext>
     </p:extLst>
   </p:cSld>
@@ -20817,7 +20817,7 @@
           <p:cNvPr id="11" name="text-0">
             <a:extLst xmlns:a="http://schemas.openxmlformats.org/drawingml/2006/main">
               <a:ext uri="{FF2B5EF4-FFF2-40B4-BE49-F238E27FC236}">
-                <a16:creationId xmlns:a16="http://schemas.microsoft.com/office/drawing/2014/main" id="{E1A9911F-CEA9-4B74-966E-E5D63624A9D5}"/>
+                <a16:creationId xmlns:a16="http://schemas.microsoft.com/office/drawing/2014/main" id="{18D0B2AE-18B8-4A74-AEC0-BB5CB3BEBDE8}"/>
               </a:ext>
             </a:extLst>
           </p:cNvPr>
@@ -20879,7 +20879,7 @@
           <p:cNvPr id="2" name="text-1">
             <a:extLst xmlns:a="http://schemas.openxmlformats.org/drawingml/2006/main">
               <a:ext uri="{FF2B5EF4-FFF2-40B4-BE49-F238E27FC236}">
-                <a16:creationId xmlns:a16="http://schemas.microsoft.com/office/drawing/2014/main" id="{EC4D98B1-1AA8-43ED-8D89-DE98D543C176}"/>
+                <a16:creationId xmlns:a16="http://schemas.microsoft.com/office/drawing/2014/main" id="{3900032B-2853-4581-9D8A-8722D14FA4ED}"/>
               </a:ext>
             </a:extLst>
           </p:cNvPr>
@@ -20941,7 +20941,7 @@
           <p:cNvPr id="3" name="text-2">
             <a:extLst xmlns:a="http://schemas.openxmlformats.org/drawingml/2006/main">
               <a:ext uri="{FF2B5EF4-FFF2-40B4-BE49-F238E27FC236}">
-                <a16:creationId xmlns:a16="http://schemas.microsoft.com/office/drawing/2014/main" id="{98B053FA-3E72-4F3F-BA86-EA090617E00A}"/>
+                <a16:creationId xmlns:a16="http://schemas.microsoft.com/office/drawing/2014/main" id="{096CEC34-FDDE-4DA0-B625-E79B37EDF804}"/>
               </a:ext>
             </a:extLst>
           </p:cNvPr>
@@ -21003,7 +21003,7 @@
           <p:cNvPr id="4" name="text-3">
             <a:extLst xmlns:a="http://schemas.openxmlformats.org/drawingml/2006/main">
               <a:ext uri="{FF2B5EF4-FFF2-40B4-BE49-F238E27FC236}">
-                <a16:creationId xmlns:a16="http://schemas.microsoft.com/office/drawing/2014/main" id="{732E60D2-4404-44FE-840A-1F7045307AAC}"/>
+                <a16:creationId xmlns:a16="http://schemas.microsoft.com/office/drawing/2014/main" id="{8DF8617A-39BC-4063-89D1-F70D26C3D971}"/>
               </a:ext>
             </a:extLst>
           </p:cNvPr>
@@ -21065,7 +21065,7 @@
           <p:cNvPr id="5" name="text-4">
             <a:extLst xmlns:a="http://schemas.openxmlformats.org/drawingml/2006/main">
               <a:ext uri="{FF2B5EF4-FFF2-40B4-BE49-F238E27FC236}">
-                <a16:creationId xmlns:a16="http://schemas.microsoft.com/office/drawing/2014/main" id="{0C461A30-6347-4F3C-B23C-1D57F165A579}"/>
+                <a16:creationId xmlns:a16="http://schemas.microsoft.com/office/drawing/2014/main" id="{968C73E5-774C-4182-A671-D2EFA6387D9A}"/>
               </a:ext>
             </a:extLst>
           </p:cNvPr>
@@ -21127,7 +21127,7 @@
           <p:cNvPr id="6" name="text-5">
             <a:extLst xmlns:a="http://schemas.openxmlformats.org/drawingml/2006/main">
               <a:ext uri="{FF2B5EF4-FFF2-40B4-BE49-F238E27FC236}">
-                <a16:creationId xmlns:a16="http://schemas.microsoft.com/office/drawing/2014/main" id="{A755D93B-F81B-4829-B9DE-5EAE8BEF6E15}"/>
+                <a16:creationId xmlns:a16="http://schemas.microsoft.com/office/drawing/2014/main" id="{E88AEE07-6B0E-496D-805D-5D09E61FF77F}"/>
               </a:ext>
             </a:extLst>
           </p:cNvPr>
@@ -21189,7 +21189,7 @@
           <p:cNvPr id="7" name="text-6">
             <a:extLst xmlns:a="http://schemas.openxmlformats.org/drawingml/2006/main">
               <a:ext uri="{FF2B5EF4-FFF2-40B4-BE49-F238E27FC236}">
-                <a16:creationId xmlns:a16="http://schemas.microsoft.com/office/drawing/2014/main" id="{A31877DA-0E8D-400B-8F0C-4DE5A5BB6058}"/>
+                <a16:creationId xmlns:a16="http://schemas.microsoft.com/office/drawing/2014/main" id="{32A74F6D-34F7-456A-866C-520A8C64A72C}"/>
               </a:ext>
             </a:extLst>
           </p:cNvPr>
@@ -21251,7 +21251,7 @@
           <p:cNvPr id="8" name="">
             <a:extLst xmlns:a="http://schemas.openxmlformats.org/drawingml/2006/main">
               <a:ext uri="{FF2B5EF4-FFF2-40B4-BE49-F238E27FC236}">
-                <a16:creationId xmlns:a16="http://schemas.microsoft.com/office/drawing/2014/main" id="{141F05F8-F02F-4E64-9294-6CA6D7A0F21F}"/>
+                <a16:creationId xmlns:a16="http://schemas.microsoft.com/office/drawing/2014/main" id="{34CE7FB9-E41D-49AB-8245-3F16C965989F}"/>
               </a:ext>
             </a:extLst>
           </p:cNvPr>
@@ -21282,7 +21282,7 @@
           <p:cNvPr id="9" name="text-8">
             <a:extLst xmlns:a="http://schemas.openxmlformats.org/drawingml/2006/main">
               <a:ext uri="{FF2B5EF4-FFF2-40B4-BE49-F238E27FC236}">
-                <a16:creationId xmlns:a16="http://schemas.microsoft.com/office/drawing/2014/main" id="{3294F0AE-4A82-4320-9E84-DB2D62789D0C}"/>
+                <a16:creationId xmlns:a16="http://schemas.microsoft.com/office/drawing/2014/main" id="{D8B27630-3545-4D02-B8BC-5998EBB8B5B6}"/>
               </a:ext>
             </a:extLst>
           </p:cNvPr>
@@ -21344,7 +21344,7 @@
           <p:cNvPr id="10" name="text-9">
             <a:extLst xmlns:a="http://schemas.openxmlformats.org/drawingml/2006/main">
               <a:ext uri="{FF2B5EF4-FFF2-40B4-BE49-F238E27FC236}">
-                <a16:creationId xmlns:a16="http://schemas.microsoft.com/office/drawing/2014/main" id="{77C3D8F5-F309-4B4F-8F1E-909ED99AEBEF}"/>
+                <a16:creationId xmlns:a16="http://schemas.microsoft.com/office/drawing/2014/main" id="{8771E48B-AD0F-40C1-82B4-AAA6353324C2}"/>
               </a:ext>
             </a:extLst>
           </p:cNvPr>
@@ -21404,7 +21404,7 @@
     </p:spTree>
     <p:extLst>
       <p:ext uri="{BB962C8B-B14F-4D97-AF65-F5344CB8AC3E}">
-        <p14:creationId xmlns:p14="http://schemas.microsoft.com/office/powerpoint/2010/main" val="155324998"/>
+        <p14:creationId xmlns:p14="http://schemas.microsoft.com/office/powerpoint/2010/main" val="2014966638"/>
       </p:ext>
     </p:extLst>
   </p:cSld>
@@ -21435,7 +21435,7 @@
           <p:cNvPr id="11" name="text-0">
             <a:extLst xmlns:a="http://schemas.openxmlformats.org/drawingml/2006/main">
               <a:ext uri="{FF2B5EF4-FFF2-40B4-BE49-F238E27FC236}">
-                <a16:creationId xmlns:a16="http://schemas.microsoft.com/office/drawing/2014/main" id="{6822A952-D865-4B9C-826E-969EB340A8E4}"/>
+                <a16:creationId xmlns:a16="http://schemas.microsoft.com/office/drawing/2014/main" id="{E6D6386A-3F45-48FB-84B6-A999D4668ADF}"/>
               </a:ext>
             </a:extLst>
           </p:cNvPr>
@@ -21497,7 +21497,7 @@
           <p:cNvPr id="2" name="text-1">
             <a:extLst xmlns:a="http://schemas.openxmlformats.org/drawingml/2006/main">
               <a:ext uri="{FF2B5EF4-FFF2-40B4-BE49-F238E27FC236}">
-                <a16:creationId xmlns:a16="http://schemas.microsoft.com/office/drawing/2014/main" id="{00CEE3A9-AE82-4EC3-BBDA-0DE1BA11DF6B}"/>
+                <a16:creationId xmlns:a16="http://schemas.microsoft.com/office/drawing/2014/main" id="{78A24632-F9C5-43F3-A140-8636C6753F20}"/>
               </a:ext>
             </a:extLst>
           </p:cNvPr>
@@ -21559,7 +21559,7 @@
           <p:cNvPr id="3" name="text-2">
             <a:extLst xmlns:a="http://schemas.openxmlformats.org/drawingml/2006/main">
               <a:ext uri="{FF2B5EF4-FFF2-40B4-BE49-F238E27FC236}">
-                <a16:creationId xmlns:a16="http://schemas.microsoft.com/office/drawing/2014/main" id="{499A242C-C008-4F1D-87DC-1673720EE68B}"/>
+                <a16:creationId xmlns:a16="http://schemas.microsoft.com/office/drawing/2014/main" id="{31F42CA8-EEC9-4FF1-B6CC-CCAAAF05D313}"/>
               </a:ext>
             </a:extLst>
           </p:cNvPr>
@@ -21621,7 +21621,7 @@
           <p:cNvPr id="4" name="text-3">
             <a:extLst xmlns:a="http://schemas.openxmlformats.org/drawingml/2006/main">
               <a:ext uri="{FF2B5EF4-FFF2-40B4-BE49-F238E27FC236}">
-                <a16:creationId xmlns:a16="http://schemas.microsoft.com/office/drawing/2014/main" id="{70CE752E-E341-4BC8-B0FE-54DFBC7E431C}"/>
+                <a16:creationId xmlns:a16="http://schemas.microsoft.com/office/drawing/2014/main" id="{7DBD13AE-2CEE-43BB-8132-DC2C1A0B9302}"/>
               </a:ext>
             </a:extLst>
           </p:cNvPr>
@@ -21683,7 +21683,7 @@
           <p:cNvPr id="5" name="text-4">
             <a:extLst xmlns:a="http://schemas.openxmlformats.org/drawingml/2006/main">
               <a:ext uri="{FF2B5EF4-FFF2-40B4-BE49-F238E27FC236}">
-                <a16:creationId xmlns:a16="http://schemas.microsoft.com/office/drawing/2014/main" id="{3BF303BA-2F13-4D7B-AA1D-1ACA57DC2A72}"/>
+                <a16:creationId xmlns:a16="http://schemas.microsoft.com/office/drawing/2014/main" id="{18EC2D6F-FEFA-4B63-861D-4C39876CC843}"/>
               </a:ext>
             </a:extLst>
           </p:cNvPr>
@@ -21745,7 +21745,7 @@
           <p:cNvPr id="6" name="text-5">
             <a:extLst xmlns:a="http://schemas.openxmlformats.org/drawingml/2006/main">
               <a:ext uri="{FF2B5EF4-FFF2-40B4-BE49-F238E27FC236}">
-                <a16:creationId xmlns:a16="http://schemas.microsoft.com/office/drawing/2014/main" id="{B3306969-4CBB-4EBC-81A3-D46C105D453A}"/>
+                <a16:creationId xmlns:a16="http://schemas.microsoft.com/office/drawing/2014/main" id="{3FD9814D-E06F-4999-8722-5D37822F0C4E}"/>
               </a:ext>
             </a:extLst>
           </p:cNvPr>
@@ -21807,7 +21807,7 @@
           <p:cNvPr id="7" name="text-6">
             <a:extLst xmlns:a="http://schemas.openxmlformats.org/drawingml/2006/main">
               <a:ext uri="{FF2B5EF4-FFF2-40B4-BE49-F238E27FC236}">
-                <a16:creationId xmlns:a16="http://schemas.microsoft.com/office/drawing/2014/main" id="{39617059-165D-448A-8290-6A6C17B7C01E}"/>
+                <a16:creationId xmlns:a16="http://schemas.microsoft.com/office/drawing/2014/main" id="{22C84331-F7C6-432A-803F-3BC808A4132F}"/>
               </a:ext>
             </a:extLst>
           </p:cNvPr>
@@ -21869,7 +21869,7 @@
           <p:cNvPr id="8" name="">
             <a:extLst xmlns:a="http://schemas.openxmlformats.org/drawingml/2006/main">
               <a:ext uri="{FF2B5EF4-FFF2-40B4-BE49-F238E27FC236}">
-                <a16:creationId xmlns:a16="http://schemas.microsoft.com/office/drawing/2014/main" id="{56B2497D-50A9-4F2C-8F56-9ACD518456B3}"/>
+                <a16:creationId xmlns:a16="http://schemas.microsoft.com/office/drawing/2014/main" id="{E02CE0E4-C363-42D6-BE83-037C19A4F6F1}"/>
               </a:ext>
             </a:extLst>
           </p:cNvPr>
@@ -21900,7 +21900,7 @@
           <p:cNvPr id="9" name="text-8">
             <a:extLst xmlns:a="http://schemas.openxmlformats.org/drawingml/2006/main">
               <a:ext uri="{FF2B5EF4-FFF2-40B4-BE49-F238E27FC236}">
-                <a16:creationId xmlns:a16="http://schemas.microsoft.com/office/drawing/2014/main" id="{EB074899-5080-4D9B-A4C1-00E1FE5FF2E3}"/>
+                <a16:creationId xmlns:a16="http://schemas.microsoft.com/office/drawing/2014/main" id="{79691A27-0E7E-43FC-B52A-1EDC993DA4E4}"/>
               </a:ext>
             </a:extLst>
           </p:cNvPr>
@@ -21962,7 +21962,7 @@
           <p:cNvPr id="10" name="text-9">
             <a:extLst xmlns:a="http://schemas.openxmlformats.org/drawingml/2006/main">
               <a:ext uri="{FF2B5EF4-FFF2-40B4-BE49-F238E27FC236}">
-                <a16:creationId xmlns:a16="http://schemas.microsoft.com/office/drawing/2014/main" id="{C7968BEB-7EE7-4761-BFB0-EDD883443995}"/>
+                <a16:creationId xmlns:a16="http://schemas.microsoft.com/office/drawing/2014/main" id="{79CE5E61-2FCB-4CB0-8369-8FCBC6076B0A}"/>
               </a:ext>
             </a:extLst>
           </p:cNvPr>
@@ -22022,7 +22022,7 @@
     </p:spTree>
     <p:extLst>
       <p:ext uri="{BB962C8B-B14F-4D97-AF65-F5344CB8AC3E}">
-        <p14:creationId xmlns:p14="http://schemas.microsoft.com/office/powerpoint/2010/main" val="508179680"/>
+        <p14:creationId xmlns:p14="http://schemas.microsoft.com/office/powerpoint/2010/main" val="690275999"/>
       </p:ext>
     </p:extLst>
   </p:cSld>
@@ -22053,7 +22053,7 @@
           <p:cNvPr id="8" name="text-0">
             <a:extLst xmlns:a="http://schemas.openxmlformats.org/drawingml/2006/main">
               <a:ext uri="{FF2B5EF4-FFF2-40B4-BE49-F238E27FC236}">
-                <a16:creationId xmlns:a16="http://schemas.microsoft.com/office/drawing/2014/main" id="{EDE6E781-C2A7-4B24-BD9A-B08FAE573A29}"/>
+                <a16:creationId xmlns:a16="http://schemas.microsoft.com/office/drawing/2014/main" id="{D3B9A5B8-96FB-4D30-B5DB-35A84EBAE5AD}"/>
               </a:ext>
             </a:extLst>
           </p:cNvPr>
@@ -22115,7 +22115,7 @@
           <p:cNvPr id="2" name="text-1">
             <a:extLst xmlns:a="http://schemas.openxmlformats.org/drawingml/2006/main">
               <a:ext uri="{FF2B5EF4-FFF2-40B4-BE49-F238E27FC236}">
-                <a16:creationId xmlns:a16="http://schemas.microsoft.com/office/drawing/2014/main" id="{0B9B7FE2-C10C-428D-A96E-211458239064}"/>
+                <a16:creationId xmlns:a16="http://schemas.microsoft.com/office/drawing/2014/main" id="{D416C0C9-2715-45D2-A957-06391CF1ED2C}"/>
               </a:ext>
             </a:extLst>
           </p:cNvPr>
@@ -22625,7 +22625,7 @@
           <p:cNvPr id="4" name="text-2">
             <a:extLst xmlns:a="http://schemas.openxmlformats.org/drawingml/2006/main">
               <a:ext uri="{FF2B5EF4-FFF2-40B4-BE49-F238E27FC236}">
-                <a16:creationId xmlns:a16="http://schemas.microsoft.com/office/drawing/2014/main" id="{D47C5153-FF49-49E1-A81B-C401F161EB48}"/>
+                <a16:creationId xmlns:a16="http://schemas.microsoft.com/office/drawing/2014/main" id="{735A6D14-39FA-4369-8341-E33310AADBE7}"/>
               </a:ext>
             </a:extLst>
           </p:cNvPr>
@@ -22687,7 +22687,7 @@
           <p:cNvPr id="5" name="">
             <a:extLst xmlns:a="http://schemas.openxmlformats.org/drawingml/2006/main">
               <a:ext uri="{FF2B5EF4-FFF2-40B4-BE49-F238E27FC236}">
-                <a16:creationId xmlns:a16="http://schemas.microsoft.com/office/drawing/2014/main" id="{CD77FF69-D0B4-461D-A5BE-E9C495090CCE}"/>
+                <a16:creationId xmlns:a16="http://schemas.microsoft.com/office/drawing/2014/main" id="{14B0229D-3E7A-488D-8FE0-2135AACDCBEC}"/>
               </a:ext>
             </a:extLst>
           </p:cNvPr>
@@ -22718,7 +22718,7 @@
           <p:cNvPr id="6" name="text-4">
             <a:extLst xmlns:a="http://schemas.openxmlformats.org/drawingml/2006/main">
               <a:ext uri="{FF2B5EF4-FFF2-40B4-BE49-F238E27FC236}">
-                <a16:creationId xmlns:a16="http://schemas.microsoft.com/office/drawing/2014/main" id="{984BE63E-9875-46E6-96CE-EC31A4EA2C39}"/>
+                <a16:creationId xmlns:a16="http://schemas.microsoft.com/office/drawing/2014/main" id="{A27A32CC-F9F9-4027-872A-4733B07205B7}"/>
               </a:ext>
             </a:extLst>
           </p:cNvPr>
@@ -22780,7 +22780,7 @@
           <p:cNvPr id="7" name="text-5">
             <a:extLst xmlns:a="http://schemas.openxmlformats.org/drawingml/2006/main">
               <a:ext uri="{FF2B5EF4-FFF2-40B4-BE49-F238E27FC236}">
-                <a16:creationId xmlns:a16="http://schemas.microsoft.com/office/drawing/2014/main" id="{3F40D0BD-AF1B-4E11-959A-925C8471C00C}"/>
+                <a16:creationId xmlns:a16="http://schemas.microsoft.com/office/drawing/2014/main" id="{6E111EEB-33D7-4D33-B35D-F1B063FC00BE}"/>
               </a:ext>
             </a:extLst>
           </p:cNvPr>
@@ -22840,7 +22840,7 @@
     </p:spTree>
     <p:extLst>
       <p:ext uri="{BB962C8B-B14F-4D97-AF65-F5344CB8AC3E}">
-        <p14:creationId xmlns:p14="http://schemas.microsoft.com/office/powerpoint/2010/main" val="508644370"/>
+        <p14:creationId xmlns:p14="http://schemas.microsoft.com/office/powerpoint/2010/main" val="286209664"/>
       </p:ext>
     </p:extLst>
   </p:cSld>
@@ -22871,7 +22871,7 @@
           <p:cNvPr id="8" name="text-0">
             <a:extLst xmlns:a="http://schemas.openxmlformats.org/drawingml/2006/main">
               <a:ext uri="{FF2B5EF4-FFF2-40B4-BE49-F238E27FC236}">
-                <a16:creationId xmlns:a16="http://schemas.microsoft.com/office/drawing/2014/main" id="{E8DB25D0-0C6B-484B-BFAE-5A533FE33B79}"/>
+                <a16:creationId xmlns:a16="http://schemas.microsoft.com/office/drawing/2014/main" id="{651D4D48-4240-4602-8924-D07289DCCBD2}"/>
               </a:ext>
             </a:extLst>
           </p:cNvPr>
@@ -22933,7 +22933,7 @@
           <p:cNvPr id="2" name="text-1">
             <a:extLst xmlns:a="http://schemas.openxmlformats.org/drawingml/2006/main">
               <a:ext uri="{FF2B5EF4-FFF2-40B4-BE49-F238E27FC236}">
-                <a16:creationId xmlns:a16="http://schemas.microsoft.com/office/drawing/2014/main" id="{AD0C142C-C3B8-4B03-9459-25FC4EB8114F}"/>
+                <a16:creationId xmlns:a16="http://schemas.microsoft.com/office/drawing/2014/main" id="{496086A1-9AC8-4508-B7DD-CEB16B8B7389}"/>
               </a:ext>
             </a:extLst>
           </p:cNvPr>
@@ -22999,7 +22999,7 @@
           <p:nvPr/>
         </p:nvPicPr>
         <p:blipFill>
-          <a:blip xmlns:r="http://schemas.openxmlformats.org/officeDocument/2006/relationships" xmlns:a="http://schemas.openxmlformats.org/drawingml/2006/main" r:embed="R8093540f6afa4c15"/>
+          <a:blip xmlns:r="http://schemas.openxmlformats.org/officeDocument/2006/relationships" xmlns:a="http://schemas.openxmlformats.org/drawingml/2006/main" r:embed="Rb9e2af6c3f24432f"/>
           <a:stretch xmlns:a="http://schemas.openxmlformats.org/drawingml/2006/main"/>
         </p:blipFill>
         <p:spPr>
@@ -23017,7 +23017,7 @@
           <p:cNvPr id="4" name="text-2">
             <a:extLst xmlns:a="http://schemas.openxmlformats.org/drawingml/2006/main">
               <a:ext uri="{FF2B5EF4-FFF2-40B4-BE49-F238E27FC236}">
-                <a16:creationId xmlns:a16="http://schemas.microsoft.com/office/drawing/2014/main" id="{D1C7AF48-961C-4316-936D-EBD4001F2754}"/>
+                <a16:creationId xmlns:a16="http://schemas.microsoft.com/office/drawing/2014/main" id="{E7EC30E5-0E91-4E35-9DC0-7CED040BD358}"/>
               </a:ext>
             </a:extLst>
           </p:cNvPr>
@@ -23079,7 +23079,7 @@
           <p:cNvPr id="5" name="">
             <a:extLst xmlns:a="http://schemas.openxmlformats.org/drawingml/2006/main">
               <a:ext uri="{FF2B5EF4-FFF2-40B4-BE49-F238E27FC236}">
-                <a16:creationId xmlns:a16="http://schemas.microsoft.com/office/drawing/2014/main" id="{123314B5-14DA-4452-B2AF-0E8480C0545C}"/>
+                <a16:creationId xmlns:a16="http://schemas.microsoft.com/office/drawing/2014/main" id="{68322C96-25FB-4D92-AE82-378DF672F5C0}"/>
               </a:ext>
             </a:extLst>
           </p:cNvPr>
@@ -23110,7 +23110,7 @@
           <p:cNvPr id="6" name="text-4">
             <a:extLst xmlns:a="http://schemas.openxmlformats.org/drawingml/2006/main">
               <a:ext uri="{FF2B5EF4-FFF2-40B4-BE49-F238E27FC236}">
-                <a16:creationId xmlns:a16="http://schemas.microsoft.com/office/drawing/2014/main" id="{09FA84AB-0713-4C55-9E7F-5FB9E5C9EC6A}"/>
+                <a16:creationId xmlns:a16="http://schemas.microsoft.com/office/drawing/2014/main" id="{23A38692-04F2-4DDC-B857-149841A4E8F2}"/>
               </a:ext>
             </a:extLst>
           </p:cNvPr>
@@ -23172,7 +23172,7 @@
           <p:cNvPr id="7" name="text-5">
             <a:extLst xmlns:a="http://schemas.openxmlformats.org/drawingml/2006/main">
               <a:ext uri="{FF2B5EF4-FFF2-40B4-BE49-F238E27FC236}">
-                <a16:creationId xmlns:a16="http://schemas.microsoft.com/office/drawing/2014/main" id="{BF158E32-2DFC-4A97-BBAB-391C5F1A3BDF}"/>
+                <a16:creationId xmlns:a16="http://schemas.microsoft.com/office/drawing/2014/main" id="{E54F8667-C488-43C4-BF71-325CFFE69C35}"/>
               </a:ext>
             </a:extLst>
           </p:cNvPr>
@@ -23232,7 +23232,7 @@
     </p:spTree>
     <p:extLst>
       <p:ext uri="{BB962C8B-B14F-4D97-AF65-F5344CB8AC3E}">
-        <p14:creationId xmlns:p14="http://schemas.microsoft.com/office/powerpoint/2010/main" val="988851317"/>
+        <p14:creationId xmlns:p14="http://schemas.microsoft.com/office/powerpoint/2010/main" val="221495658"/>
       </p:ext>
     </p:extLst>
   </p:cSld>
@@ -23263,7 +23263,7 @@
           <p:cNvPr id="8" name="text-0">
             <a:extLst xmlns:a="http://schemas.openxmlformats.org/drawingml/2006/main">
               <a:ext uri="{FF2B5EF4-FFF2-40B4-BE49-F238E27FC236}">
-                <a16:creationId xmlns:a16="http://schemas.microsoft.com/office/drawing/2014/main" id="{743EC967-9F3F-43BC-B952-252D5220A8BD}"/>
+                <a16:creationId xmlns:a16="http://schemas.microsoft.com/office/drawing/2014/main" id="{5F4DEDBD-EBEC-4991-8954-05881EB462E5}"/>
               </a:ext>
             </a:extLst>
           </p:cNvPr>
@@ -23325,7 +23325,7 @@
           <p:cNvPr id="2" name="text-1">
             <a:extLst xmlns:a="http://schemas.openxmlformats.org/drawingml/2006/main">
               <a:ext uri="{FF2B5EF4-FFF2-40B4-BE49-F238E27FC236}">
-                <a16:creationId xmlns:a16="http://schemas.microsoft.com/office/drawing/2014/main" id="{FF56B3D7-0B5C-4894-AB94-D16E2DC60D7C}"/>
+                <a16:creationId xmlns:a16="http://schemas.microsoft.com/office/drawing/2014/main" id="{17813A1D-DDCC-45BA-BEC0-18107A2E61B6}"/>
               </a:ext>
             </a:extLst>
           </p:cNvPr>
@@ -23387,7 +23387,7 @@
           <p:cNvPr id="3" name="text-2">
             <a:extLst xmlns:a="http://schemas.openxmlformats.org/drawingml/2006/main">
               <a:ext uri="{FF2B5EF4-FFF2-40B4-BE49-F238E27FC236}">
-                <a16:creationId xmlns:a16="http://schemas.microsoft.com/office/drawing/2014/main" id="{49C82580-90A4-40C7-9CF9-1E6A22071B6F}"/>
+                <a16:creationId xmlns:a16="http://schemas.microsoft.com/office/drawing/2014/main" id="{1B37B447-9639-4EC3-B976-A287B184F054}"/>
               </a:ext>
             </a:extLst>
           </p:cNvPr>
@@ -23479,7 +23479,7 @@
           <p:cNvPr id="4" name="text-3">
             <a:extLst xmlns:a="http://schemas.openxmlformats.org/drawingml/2006/main">
               <a:ext uri="{FF2B5EF4-FFF2-40B4-BE49-F238E27FC236}">
-                <a16:creationId xmlns:a16="http://schemas.microsoft.com/office/drawing/2014/main" id="{37F3664D-DB02-4E61-92A1-92E855A550BB}"/>
+                <a16:creationId xmlns:a16="http://schemas.microsoft.com/office/drawing/2014/main" id="{3D90868D-DDD3-499C-8C22-0EFEA80C0A67}"/>
               </a:ext>
             </a:extLst>
           </p:cNvPr>
@@ -23541,7 +23541,7 @@
           <p:cNvPr id="5" name="">
             <a:extLst xmlns:a="http://schemas.openxmlformats.org/drawingml/2006/main">
               <a:ext uri="{FF2B5EF4-FFF2-40B4-BE49-F238E27FC236}">
-                <a16:creationId xmlns:a16="http://schemas.microsoft.com/office/drawing/2014/main" id="{28766A8E-8784-4658-B5C2-9F84DA176C4D}"/>
+                <a16:creationId xmlns:a16="http://schemas.microsoft.com/office/drawing/2014/main" id="{1774263C-54E1-42F6-BB76-CF9AA8AA7092}"/>
               </a:ext>
             </a:extLst>
           </p:cNvPr>
@@ -23572,7 +23572,7 @@
           <p:cNvPr id="6" name="text-5">
             <a:extLst xmlns:a="http://schemas.openxmlformats.org/drawingml/2006/main">
               <a:ext uri="{FF2B5EF4-FFF2-40B4-BE49-F238E27FC236}">
-                <a16:creationId xmlns:a16="http://schemas.microsoft.com/office/drawing/2014/main" id="{2EBD251C-8BBD-4DC5-9DBD-438E08AB5BA6}"/>
+                <a16:creationId xmlns:a16="http://schemas.microsoft.com/office/drawing/2014/main" id="{2247E21F-E780-47DA-B26E-3889EB8EF8D1}"/>
               </a:ext>
             </a:extLst>
           </p:cNvPr>
@@ -23634,7 +23634,7 @@
           <p:cNvPr id="7" name="text-6">
             <a:extLst xmlns:a="http://schemas.openxmlformats.org/drawingml/2006/main">
               <a:ext uri="{FF2B5EF4-FFF2-40B4-BE49-F238E27FC236}">
-                <a16:creationId xmlns:a16="http://schemas.microsoft.com/office/drawing/2014/main" id="{4459C91E-7D95-4F01-9EA7-71F81C758B4B}"/>
+                <a16:creationId xmlns:a16="http://schemas.microsoft.com/office/drawing/2014/main" id="{988A9500-9364-4A6A-BEAD-7A10AE1A9633}"/>
               </a:ext>
             </a:extLst>
           </p:cNvPr>
@@ -23694,7 +23694,7 @@
     </p:spTree>
     <p:extLst>
       <p:ext uri="{BB962C8B-B14F-4D97-AF65-F5344CB8AC3E}">
-        <p14:creationId xmlns:p14="http://schemas.microsoft.com/office/powerpoint/2010/main" val="108624965"/>
+        <p14:creationId xmlns:p14="http://schemas.microsoft.com/office/powerpoint/2010/main" val="1574058627"/>
       </p:ext>
     </p:extLst>
   </p:cSld>
@@ -23725,7 +23725,7 @@
           <p:cNvPr id="9" name="text-0">
             <a:extLst xmlns:a="http://schemas.openxmlformats.org/drawingml/2006/main">
               <a:ext uri="{FF2B5EF4-FFF2-40B4-BE49-F238E27FC236}">
-                <a16:creationId xmlns:a16="http://schemas.microsoft.com/office/drawing/2014/main" id="{9005D6EF-7992-4AED-96BD-B8C647179606}"/>
+                <a16:creationId xmlns:a16="http://schemas.microsoft.com/office/drawing/2014/main" id="{70D6694D-7732-4F3A-AAA0-94AFA565E533}"/>
               </a:ext>
             </a:extLst>
           </p:cNvPr>
@@ -23787,7 +23787,7 @@
           <p:cNvPr id="2" name="text-1">
             <a:extLst xmlns:a="http://schemas.openxmlformats.org/drawingml/2006/main">
               <a:ext uri="{FF2B5EF4-FFF2-40B4-BE49-F238E27FC236}">
-                <a16:creationId xmlns:a16="http://schemas.microsoft.com/office/drawing/2014/main" id="{6EF2CB4E-7B16-4468-AFD1-A5AC1BBCE0C1}"/>
+                <a16:creationId xmlns:a16="http://schemas.microsoft.com/office/drawing/2014/main" id="{4843ED5E-475D-4620-B1B6-C424E96FE859}"/>
               </a:ext>
             </a:extLst>
           </p:cNvPr>
@@ -23849,7 +23849,7 @@
           <p:cNvPr id="3" name="text-2">
             <a:extLst xmlns:a="http://schemas.openxmlformats.org/drawingml/2006/main">
               <a:ext uri="{FF2B5EF4-FFF2-40B4-BE49-F238E27FC236}">
-                <a16:creationId xmlns:a16="http://schemas.microsoft.com/office/drawing/2014/main" id="{96C941E2-5745-446E-98F7-DFE8112C6885}"/>
+                <a16:creationId xmlns:a16="http://schemas.microsoft.com/office/drawing/2014/main" id="{433BA126-3C7C-4262-9039-DC11E78D6F1E}"/>
               </a:ext>
             </a:extLst>
           </p:cNvPr>
@@ -23911,7 +23911,7 @@
           <p:cNvPr id="4" name="text-3">
             <a:extLst xmlns:a="http://schemas.openxmlformats.org/drawingml/2006/main">
               <a:ext uri="{FF2B5EF4-FFF2-40B4-BE49-F238E27FC236}">
-                <a16:creationId xmlns:a16="http://schemas.microsoft.com/office/drawing/2014/main" id="{BA991D7E-CA73-4743-B0D7-E13DF898FFFC}"/>
+                <a16:creationId xmlns:a16="http://schemas.microsoft.com/office/drawing/2014/main" id="{FD857DC2-A7FA-472B-84EB-E47D4C2DDA86}"/>
               </a:ext>
             </a:extLst>
           </p:cNvPr>
@@ -24000,7 +24000,7 @@
           <p:cNvPr id="5" name="text-4">
             <a:extLst xmlns:a="http://schemas.openxmlformats.org/drawingml/2006/main">
               <a:ext uri="{FF2B5EF4-FFF2-40B4-BE49-F238E27FC236}">
-                <a16:creationId xmlns:a16="http://schemas.microsoft.com/office/drawing/2014/main" id="{E5405158-2B11-41E4-B63B-B770C713ACFC}"/>
+                <a16:creationId xmlns:a16="http://schemas.microsoft.com/office/drawing/2014/main" id="{46DE2CE0-9171-4F5E-9EB4-6D86DFEC2D1E}"/>
               </a:ext>
             </a:extLst>
           </p:cNvPr>
@@ -24062,7 +24062,7 @@
           <p:cNvPr id="6" name="">
             <a:extLst xmlns:a="http://schemas.openxmlformats.org/drawingml/2006/main">
               <a:ext uri="{FF2B5EF4-FFF2-40B4-BE49-F238E27FC236}">
-                <a16:creationId xmlns:a16="http://schemas.microsoft.com/office/drawing/2014/main" id="{F08F48DD-D662-4141-A491-1CA77C77465D}"/>
+                <a16:creationId xmlns:a16="http://schemas.microsoft.com/office/drawing/2014/main" id="{22BD8D5B-A3B7-48DE-A6EA-49E886690F4D}"/>
               </a:ext>
             </a:extLst>
           </p:cNvPr>
@@ -24093,7 +24093,7 @@
           <p:cNvPr id="7" name="text-6">
             <a:extLst xmlns:a="http://schemas.openxmlformats.org/drawingml/2006/main">
               <a:ext uri="{FF2B5EF4-FFF2-40B4-BE49-F238E27FC236}">
-                <a16:creationId xmlns:a16="http://schemas.microsoft.com/office/drawing/2014/main" id="{5E2D8773-2E4A-4895-8270-1EC97E22622C}"/>
+                <a16:creationId xmlns:a16="http://schemas.microsoft.com/office/drawing/2014/main" id="{7DB4DA41-3E68-4A22-8545-11FDB43612E9}"/>
               </a:ext>
             </a:extLst>
           </p:cNvPr>
@@ -24155,7 +24155,7 @@
           <p:cNvPr id="8" name="text-7">
             <a:extLst xmlns:a="http://schemas.openxmlformats.org/drawingml/2006/main">
               <a:ext uri="{FF2B5EF4-FFF2-40B4-BE49-F238E27FC236}">
-                <a16:creationId xmlns:a16="http://schemas.microsoft.com/office/drawing/2014/main" id="{58B78C03-AE75-4B43-B253-3C953AE5AA38}"/>
+                <a16:creationId xmlns:a16="http://schemas.microsoft.com/office/drawing/2014/main" id="{57D1535B-531E-4605-AC6F-6DB2354D95F2}"/>
               </a:ext>
             </a:extLst>
           </p:cNvPr>
@@ -24215,7 +24215,7 @@
     </p:spTree>
     <p:extLst>
       <p:ext uri="{BB962C8B-B14F-4D97-AF65-F5344CB8AC3E}">
-        <p14:creationId xmlns:p14="http://schemas.microsoft.com/office/powerpoint/2010/main" val="432236106"/>
+        <p14:creationId xmlns:p14="http://schemas.microsoft.com/office/powerpoint/2010/main" val="2046212433"/>
       </p:ext>
     </p:extLst>
   </p:cSld>
@@ -24246,7 +24246,7 @@
           <p:cNvPr id="8" name="text-0">
             <a:extLst xmlns:a="http://schemas.openxmlformats.org/drawingml/2006/main">
               <a:ext uri="{FF2B5EF4-FFF2-40B4-BE49-F238E27FC236}">
-                <a16:creationId xmlns:a16="http://schemas.microsoft.com/office/drawing/2014/main" id="{1ECDBEC3-082A-4EED-9DA9-E1F4FF06CA01}"/>
+                <a16:creationId xmlns:a16="http://schemas.microsoft.com/office/drawing/2014/main" id="{5DF11868-787F-4F6D-A868-07108BE3DE7D}"/>
               </a:ext>
             </a:extLst>
           </p:cNvPr>
@@ -24308,7 +24308,7 @@
           <p:cNvPr id="2" name="text-1">
             <a:extLst xmlns:a="http://schemas.openxmlformats.org/drawingml/2006/main">
               <a:ext uri="{FF2B5EF4-FFF2-40B4-BE49-F238E27FC236}">
-                <a16:creationId xmlns:a16="http://schemas.microsoft.com/office/drawing/2014/main" id="{ADAB07E9-4422-4440-B1D7-FD6549089A72}"/>
+                <a16:creationId xmlns:a16="http://schemas.microsoft.com/office/drawing/2014/main" id="{E9F10F48-1EA3-43A1-B58F-B32B6C0BABE3}"/>
               </a:ext>
             </a:extLst>
           </p:cNvPr>
@@ -24370,7 +24370,7 @@
           <p:cNvPr id="3" name="text-2">
             <a:extLst xmlns:a="http://schemas.openxmlformats.org/drawingml/2006/main">
               <a:ext uri="{FF2B5EF4-FFF2-40B4-BE49-F238E27FC236}">
-                <a16:creationId xmlns:a16="http://schemas.microsoft.com/office/drawing/2014/main" id="{2C31D5B3-F13B-4AB8-ACF3-067E3C02F022}"/>
+                <a16:creationId xmlns:a16="http://schemas.microsoft.com/office/drawing/2014/main" id="{1DB986E0-CA30-496C-B68A-21C833E9D5CC}"/>
               </a:ext>
             </a:extLst>
           </p:cNvPr>
@@ -24459,7 +24459,7 @@
           <p:cNvPr id="4" name="text-3">
             <a:extLst xmlns:a="http://schemas.openxmlformats.org/drawingml/2006/main">
               <a:ext uri="{FF2B5EF4-FFF2-40B4-BE49-F238E27FC236}">
-                <a16:creationId xmlns:a16="http://schemas.microsoft.com/office/drawing/2014/main" id="{40AE3374-CB9D-400C-891F-3187502CD105}"/>
+                <a16:creationId xmlns:a16="http://schemas.microsoft.com/office/drawing/2014/main" id="{67667906-FB42-4945-8DCA-4B176D8EDEC4}"/>
               </a:ext>
             </a:extLst>
           </p:cNvPr>
@@ -24521,7 +24521,7 @@
           <p:cNvPr id="5" name="">
             <a:extLst xmlns:a="http://schemas.openxmlformats.org/drawingml/2006/main">
               <a:ext uri="{FF2B5EF4-FFF2-40B4-BE49-F238E27FC236}">
-                <a16:creationId xmlns:a16="http://schemas.microsoft.com/office/drawing/2014/main" id="{5571F5FD-0E00-4170-9F42-0480762C4E3D}"/>
+                <a16:creationId xmlns:a16="http://schemas.microsoft.com/office/drawing/2014/main" id="{9B3A63DE-C5A4-4A63-8084-FC96C04D5D57}"/>
               </a:ext>
             </a:extLst>
           </p:cNvPr>
@@ -24552,7 +24552,7 @@
           <p:cNvPr id="6" name="text-5">
             <a:extLst xmlns:a="http://schemas.openxmlformats.org/drawingml/2006/main">
               <a:ext uri="{FF2B5EF4-FFF2-40B4-BE49-F238E27FC236}">
-                <a16:creationId xmlns:a16="http://schemas.microsoft.com/office/drawing/2014/main" id="{7795920F-F816-49E4-9796-14CEC1055729}"/>
+                <a16:creationId xmlns:a16="http://schemas.microsoft.com/office/drawing/2014/main" id="{D9657448-9264-49B4-B634-6D89C313B0E4}"/>
               </a:ext>
             </a:extLst>
           </p:cNvPr>
@@ -24614,7 +24614,7 @@
           <p:cNvPr id="7" name="text-6">
             <a:extLst xmlns:a="http://schemas.openxmlformats.org/drawingml/2006/main">
               <a:ext uri="{FF2B5EF4-FFF2-40B4-BE49-F238E27FC236}">
-                <a16:creationId xmlns:a16="http://schemas.microsoft.com/office/drawing/2014/main" id="{765573F1-5973-48D0-932D-682F2230D480}"/>
+                <a16:creationId xmlns:a16="http://schemas.microsoft.com/office/drawing/2014/main" id="{4DC5C377-BBCB-47DE-8189-979AE80F6863}"/>
               </a:ext>
             </a:extLst>
           </p:cNvPr>
@@ -24674,7 +24674,7 @@
     </p:spTree>
     <p:extLst>
       <p:ext uri="{BB962C8B-B14F-4D97-AF65-F5344CB8AC3E}">
-        <p14:creationId xmlns:p14="http://schemas.microsoft.com/office/powerpoint/2010/main" val="998140489"/>
+        <p14:creationId xmlns:p14="http://schemas.microsoft.com/office/powerpoint/2010/main" val="861206574"/>
       </p:ext>
     </p:extLst>
   </p:cSld>
@@ -24705,7 +24705,7 @@
           <p:cNvPr id="8" name="text-0">
             <a:extLst xmlns:a="http://schemas.openxmlformats.org/drawingml/2006/main">
               <a:ext uri="{FF2B5EF4-FFF2-40B4-BE49-F238E27FC236}">
-                <a16:creationId xmlns:a16="http://schemas.microsoft.com/office/drawing/2014/main" id="{D8A97FB2-C68E-4FB8-8984-9459B4105B63}"/>
+                <a16:creationId xmlns:a16="http://schemas.microsoft.com/office/drawing/2014/main" id="{35DC2832-2569-4649-A6EF-497E70107F37}"/>
               </a:ext>
             </a:extLst>
           </p:cNvPr>
@@ -24767,7 +24767,7 @@
           <p:cNvPr id="2" name="text-1">
             <a:extLst xmlns:a="http://schemas.openxmlformats.org/drawingml/2006/main">
               <a:ext uri="{FF2B5EF4-FFF2-40B4-BE49-F238E27FC236}">
-                <a16:creationId xmlns:a16="http://schemas.microsoft.com/office/drawing/2014/main" id="{65C8549C-6814-4CEA-B2FC-202990C5B8F6}"/>
+                <a16:creationId xmlns:a16="http://schemas.microsoft.com/office/drawing/2014/main" id="{36EAC8A5-264B-4A79-B73D-A9F17B949CF0}"/>
               </a:ext>
             </a:extLst>
           </p:cNvPr>
@@ -24833,7 +24833,7 @@
           <p:nvPr/>
         </p:nvPicPr>
         <p:blipFill>
-          <a:blip xmlns:r="http://schemas.openxmlformats.org/officeDocument/2006/relationships" xmlns:a="http://schemas.openxmlformats.org/drawingml/2006/main" r:embed="R32f70a32db284a9b"/>
+          <a:blip xmlns:r="http://schemas.openxmlformats.org/officeDocument/2006/relationships" xmlns:a="http://schemas.openxmlformats.org/drawingml/2006/main" r:embed="R0928cc8b3bfc47ca"/>
           <a:stretch xmlns:a="http://schemas.openxmlformats.org/drawingml/2006/main"/>
         </p:blipFill>
         <p:spPr>
@@ -24851,7 +24851,7 @@
           <p:cNvPr id="4" name="text-2">
             <a:extLst xmlns:a="http://schemas.openxmlformats.org/drawingml/2006/main">
               <a:ext uri="{FF2B5EF4-FFF2-40B4-BE49-F238E27FC236}">
-                <a16:creationId xmlns:a16="http://schemas.microsoft.com/office/drawing/2014/main" id="{7EF949FC-CFD9-44D6-AED6-BA5587650D49}"/>
+                <a16:creationId xmlns:a16="http://schemas.microsoft.com/office/drawing/2014/main" id="{55A4C17D-05FD-4876-A7AA-69C21F994D14}"/>
               </a:ext>
             </a:extLst>
           </p:cNvPr>
@@ -24913,7 +24913,7 @@
           <p:cNvPr id="5" name="">
             <a:extLst xmlns:a="http://schemas.openxmlformats.org/drawingml/2006/main">
               <a:ext uri="{FF2B5EF4-FFF2-40B4-BE49-F238E27FC236}">
-                <a16:creationId xmlns:a16="http://schemas.microsoft.com/office/drawing/2014/main" id="{85E2E96A-CE21-4064-85F0-2726B02BA9B1}"/>
+                <a16:creationId xmlns:a16="http://schemas.microsoft.com/office/drawing/2014/main" id="{782FBC8D-B45D-4587-BDFD-99BA4766F91D}"/>
               </a:ext>
             </a:extLst>
           </p:cNvPr>
@@ -24944,7 +24944,7 @@
           <p:cNvPr id="6" name="text-4">
             <a:extLst xmlns:a="http://schemas.openxmlformats.org/drawingml/2006/main">
               <a:ext uri="{FF2B5EF4-FFF2-40B4-BE49-F238E27FC236}">
-                <a16:creationId xmlns:a16="http://schemas.microsoft.com/office/drawing/2014/main" id="{0D9675D2-B0D0-444F-B8D7-A184990412BD}"/>
+                <a16:creationId xmlns:a16="http://schemas.microsoft.com/office/drawing/2014/main" id="{17983258-6668-40C6-92EC-B3582B90C11B}"/>
               </a:ext>
             </a:extLst>
           </p:cNvPr>
@@ -25006,7 +25006,7 @@
           <p:cNvPr id="7" name="text-5">
             <a:extLst xmlns:a="http://schemas.openxmlformats.org/drawingml/2006/main">
               <a:ext uri="{FF2B5EF4-FFF2-40B4-BE49-F238E27FC236}">
-                <a16:creationId xmlns:a16="http://schemas.microsoft.com/office/drawing/2014/main" id="{3E88BCB6-77A7-4F83-8F6C-1F2636921D64}"/>
+                <a16:creationId xmlns:a16="http://schemas.microsoft.com/office/drawing/2014/main" id="{D41CE0CF-D30E-46DF-AA2B-A7CDBE37C372}"/>
               </a:ext>
             </a:extLst>
           </p:cNvPr>
@@ -25066,7 +25066,7 @@
     </p:spTree>
     <p:extLst>
       <p:ext uri="{BB962C8B-B14F-4D97-AF65-F5344CB8AC3E}">
-        <p14:creationId xmlns:p14="http://schemas.microsoft.com/office/powerpoint/2010/main" val="389960554"/>
+        <p14:creationId xmlns:p14="http://schemas.microsoft.com/office/powerpoint/2010/main" val="1782689856"/>
       </p:ext>
     </p:extLst>
   </p:cSld>
@@ -25097,7 +25097,7 @@
           <p:cNvPr id="8" name="text-0">
             <a:extLst xmlns:a="http://schemas.openxmlformats.org/drawingml/2006/main">
               <a:ext uri="{FF2B5EF4-FFF2-40B4-BE49-F238E27FC236}">
-                <a16:creationId xmlns:a16="http://schemas.microsoft.com/office/drawing/2014/main" id="{F095A1C0-8EF5-46D6-A407-80861B19302F}"/>
+                <a16:creationId xmlns:a16="http://schemas.microsoft.com/office/drawing/2014/main" id="{7A07C712-4119-4AD5-A7DC-159C9E009F27}"/>
               </a:ext>
             </a:extLst>
           </p:cNvPr>
@@ -25159,7 +25159,7 @@
           <p:cNvPr id="2" name="text-1">
             <a:extLst xmlns:a="http://schemas.openxmlformats.org/drawingml/2006/main">
               <a:ext uri="{FF2B5EF4-FFF2-40B4-BE49-F238E27FC236}">
-                <a16:creationId xmlns:a16="http://schemas.microsoft.com/office/drawing/2014/main" id="{1D383886-2BD5-4C73-87D1-8038A38D25CB}"/>
+                <a16:creationId xmlns:a16="http://schemas.microsoft.com/office/drawing/2014/main" id="{4A04C165-AF9D-4F76-9FEF-D8D3358BDF48}"/>
               </a:ext>
             </a:extLst>
           </p:cNvPr>
@@ -25221,7 +25221,7 @@
           <p:cNvPr id="3" name="text-2">
             <a:extLst xmlns:a="http://schemas.openxmlformats.org/drawingml/2006/main">
               <a:ext uri="{FF2B5EF4-FFF2-40B4-BE49-F238E27FC236}">
-                <a16:creationId xmlns:a16="http://schemas.microsoft.com/office/drawing/2014/main" id="{E14DF1B4-4DCC-4511-902F-DFC9D967E87B}"/>
+                <a16:creationId xmlns:a16="http://schemas.microsoft.com/office/drawing/2014/main" id="{3136177A-C2A5-47E0-B377-DAE6934D7A36}"/>
               </a:ext>
             </a:extLst>
           </p:cNvPr>
@@ -25324,7 +25324,7 @@
           <p:cNvPr id="4" name="text-3">
             <a:extLst xmlns:a="http://schemas.openxmlformats.org/drawingml/2006/main">
               <a:ext uri="{FF2B5EF4-FFF2-40B4-BE49-F238E27FC236}">
-                <a16:creationId xmlns:a16="http://schemas.microsoft.com/office/drawing/2014/main" id="{F1FA7312-A58F-448A-9F9B-51E0DFEEE3B6}"/>
+                <a16:creationId xmlns:a16="http://schemas.microsoft.com/office/drawing/2014/main" id="{1AC4B963-B88F-47C7-A2C8-060CE0D1BDFD}"/>
               </a:ext>
             </a:extLst>
           </p:cNvPr>
@@ -25386,7 +25386,7 @@
           <p:cNvPr id="5" name="">
             <a:extLst xmlns:a="http://schemas.openxmlformats.org/drawingml/2006/main">
               <a:ext uri="{FF2B5EF4-FFF2-40B4-BE49-F238E27FC236}">
-                <a16:creationId xmlns:a16="http://schemas.microsoft.com/office/drawing/2014/main" id="{7FA1EA7D-6D7C-4515-923F-A942C305E220}"/>
+                <a16:creationId xmlns:a16="http://schemas.microsoft.com/office/drawing/2014/main" id="{1FE2B0A2-D2A9-48BD-9412-751F5E5790BA}"/>
               </a:ext>
             </a:extLst>
           </p:cNvPr>
@@ -25417,7 +25417,7 @@
           <p:cNvPr id="6" name="text-5">
             <a:extLst xmlns:a="http://schemas.openxmlformats.org/drawingml/2006/main">
               <a:ext uri="{FF2B5EF4-FFF2-40B4-BE49-F238E27FC236}">
-                <a16:creationId xmlns:a16="http://schemas.microsoft.com/office/drawing/2014/main" id="{4AD5794C-6C20-464E-9710-9A7CF3EF84F9}"/>
+                <a16:creationId xmlns:a16="http://schemas.microsoft.com/office/drawing/2014/main" id="{A2DD51A8-630C-4BF1-A9C7-8762BB92A93C}"/>
               </a:ext>
             </a:extLst>
           </p:cNvPr>
@@ -25479,7 +25479,7 @@
           <p:cNvPr id="7" name="text-6">
             <a:extLst xmlns:a="http://schemas.openxmlformats.org/drawingml/2006/main">
               <a:ext uri="{FF2B5EF4-FFF2-40B4-BE49-F238E27FC236}">
-                <a16:creationId xmlns:a16="http://schemas.microsoft.com/office/drawing/2014/main" id="{C16AB413-A970-4E2F-A094-01B45A2B1DBD}"/>
+                <a16:creationId xmlns:a16="http://schemas.microsoft.com/office/drawing/2014/main" id="{5A29689E-A267-429F-8241-D17F541D6C23}"/>
               </a:ext>
             </a:extLst>
           </p:cNvPr>
@@ -25539,7 +25539,7 @@
     </p:spTree>
     <p:extLst>
       <p:ext uri="{BB962C8B-B14F-4D97-AF65-F5344CB8AC3E}">
-        <p14:creationId xmlns:p14="http://schemas.microsoft.com/office/powerpoint/2010/main" val="559658265"/>
+        <p14:creationId xmlns:p14="http://schemas.microsoft.com/office/powerpoint/2010/main" val="197300389"/>
       </p:ext>
     </p:extLst>
   </p:cSld>
@@ -25570,7 +25570,7 @@
           <p:cNvPr id="7" name="text-0">
             <a:extLst xmlns:a="http://schemas.openxmlformats.org/drawingml/2006/main">
               <a:ext uri="{FF2B5EF4-FFF2-40B4-BE49-F238E27FC236}">
-                <a16:creationId xmlns:a16="http://schemas.microsoft.com/office/drawing/2014/main" id="{4FE966C3-88DE-4879-AD09-259ECFD9852C}"/>
+                <a16:creationId xmlns:a16="http://schemas.microsoft.com/office/drawing/2014/main" id="{6928200C-DF68-42A0-BE96-D7D25106ABB8}"/>
               </a:ext>
             </a:extLst>
           </p:cNvPr>
@@ -25632,7 +25632,7 @@
           <p:cNvPr id="2" name="text-1">
             <a:extLst xmlns:a="http://schemas.openxmlformats.org/drawingml/2006/main">
               <a:ext uri="{FF2B5EF4-FFF2-40B4-BE49-F238E27FC236}">
-                <a16:creationId xmlns:a16="http://schemas.microsoft.com/office/drawing/2014/main" id="{F1E4A392-91F3-42E9-8B1C-32271C0F83B5}"/>
+                <a16:creationId xmlns:a16="http://schemas.microsoft.com/office/drawing/2014/main" id="{0C6924DF-B473-453F-9569-6EAE8413755E}"/>
               </a:ext>
             </a:extLst>
           </p:cNvPr>
@@ -25694,7 +25694,7 @@
           <p:cNvPr id="3" name="text-2">
             <a:extLst xmlns:a="http://schemas.openxmlformats.org/drawingml/2006/main">
               <a:ext uri="{FF2B5EF4-FFF2-40B4-BE49-F238E27FC236}">
-                <a16:creationId xmlns:a16="http://schemas.microsoft.com/office/drawing/2014/main" id="{E1A9C917-2D17-461E-A789-E9A1966F2613}"/>
+                <a16:creationId xmlns:a16="http://schemas.microsoft.com/office/drawing/2014/main" id="{1E82C075-45BF-4D77-B695-5BAD6D8D0DDF}"/>
               </a:ext>
             </a:extLst>
           </p:cNvPr>
@@ -25824,7 +25824,7 @@
           <p:cNvPr id="4" name="">
             <a:extLst xmlns:a="http://schemas.openxmlformats.org/drawingml/2006/main">
               <a:ext uri="{FF2B5EF4-FFF2-40B4-BE49-F238E27FC236}">
-                <a16:creationId xmlns:a16="http://schemas.microsoft.com/office/drawing/2014/main" id="{6C02135E-6C9A-4650-B71F-C1B4787B57CA}"/>
+                <a16:creationId xmlns:a16="http://schemas.microsoft.com/office/drawing/2014/main" id="{7085161B-028A-427F-BA1E-9070E137DA14}"/>
               </a:ext>
             </a:extLst>
           </p:cNvPr>
@@ -25855,7 +25855,7 @@
           <p:cNvPr id="5" name="text-4">
             <a:extLst xmlns:a="http://schemas.openxmlformats.org/drawingml/2006/main">
               <a:ext uri="{FF2B5EF4-FFF2-40B4-BE49-F238E27FC236}">
-                <a16:creationId xmlns:a16="http://schemas.microsoft.com/office/drawing/2014/main" id="{B545B8DB-67B9-424F-99BD-4204B2A34883}"/>
+                <a16:creationId xmlns:a16="http://schemas.microsoft.com/office/drawing/2014/main" id="{EE217BE2-9E96-4F23-9978-776909E4FBEC}"/>
               </a:ext>
             </a:extLst>
           </p:cNvPr>
@@ -25917,7 +25917,7 @@
           <p:cNvPr id="6" name="text-5">
             <a:extLst xmlns:a="http://schemas.openxmlformats.org/drawingml/2006/main">
               <a:ext uri="{FF2B5EF4-FFF2-40B4-BE49-F238E27FC236}">
-                <a16:creationId xmlns:a16="http://schemas.microsoft.com/office/drawing/2014/main" id="{29243D6F-FE98-41D9-AF3B-C8F048090448}"/>
+                <a16:creationId xmlns:a16="http://schemas.microsoft.com/office/drawing/2014/main" id="{896DE901-4079-4644-9E52-61DC5A1D8B06}"/>
               </a:ext>
             </a:extLst>
           </p:cNvPr>
@@ -25977,7 +25977,7 @@
     </p:spTree>
     <p:extLst>
       <p:ext uri="{BB962C8B-B14F-4D97-AF65-F5344CB8AC3E}">
-        <p14:creationId xmlns:p14="http://schemas.microsoft.com/office/powerpoint/2010/main" val="368019531"/>
+        <p14:creationId xmlns:p14="http://schemas.microsoft.com/office/powerpoint/2010/main" val="2048989499"/>
       </p:ext>
     </p:extLst>
   </p:cSld>
@@ -26005,10 +26005,10 @@
       </p:grpSpPr>
       <p:sp>
         <p:nvSpPr>
-          <p:cNvPr id="7" name="text-0">
-            <a:extLst xmlns:a="http://schemas.openxmlformats.org/drawingml/2006/main">
-              <a:ext uri="{FF2B5EF4-FFF2-40B4-BE49-F238E27FC236}">
-                <a16:creationId xmlns:a16="http://schemas.microsoft.com/office/drawing/2014/main" id="{D8EBC1AF-7A8A-44E5-9AE6-0B7BB41F0D68}"/>
+          <p:cNvPr id="8" name="text-0">
+            <a:extLst xmlns:a="http://schemas.openxmlformats.org/drawingml/2006/main">
+              <a:ext uri="{FF2B5EF4-FFF2-40B4-BE49-F238E27FC236}">
+                <a16:creationId xmlns:a16="http://schemas.microsoft.com/office/drawing/2014/main" id="{2F55BEB9-4351-4B44-A428-3969B1D94014}"/>
               </a:ext>
             </a:extLst>
           </p:cNvPr>
@@ -26070,7 +26070,7 @@
           <p:cNvPr id="2" name="text-1">
             <a:extLst xmlns:a="http://schemas.openxmlformats.org/drawingml/2006/main">
               <a:ext uri="{FF2B5EF4-FFF2-40B4-BE49-F238E27FC236}">
-                <a16:creationId xmlns:a16="http://schemas.microsoft.com/office/drawing/2014/main" id="{C267CA7D-AE3D-45F2-87E8-96798EE5C233}"/>
+                <a16:creationId xmlns:a16="http://schemas.microsoft.com/office/drawing/2014/main" id="{521304F8-6540-4745-ADEF-648C8B2C0D8C}"/>
               </a:ext>
             </a:extLst>
           </p:cNvPr>
@@ -26132,7 +26132,7 @@
           <p:cNvPr id="3" name="text-2">
             <a:extLst xmlns:a="http://schemas.openxmlformats.org/drawingml/2006/main">
               <a:ext uri="{FF2B5EF4-FFF2-40B4-BE49-F238E27FC236}">
-                <a16:creationId xmlns:a16="http://schemas.microsoft.com/office/drawing/2014/main" id="{4BBE0A29-36C5-4B5C-A766-5CF9E165F602}"/>
+                <a16:creationId xmlns:a16="http://schemas.microsoft.com/office/drawing/2014/main" id="{E7714E68-7913-4897-AB93-84193BEC0A1E}"/>
               </a:ext>
             </a:extLst>
           </p:cNvPr>
@@ -26240,10 +26240,72 @@
       </p:sp>
       <p:sp>
         <p:nvSpPr>
-          <p:cNvPr id="4" name="">
-            <a:extLst xmlns:a="http://schemas.openxmlformats.org/drawingml/2006/main">
-              <a:ext uri="{FF2B5EF4-FFF2-40B4-BE49-F238E27FC236}">
-                <a16:creationId xmlns:a16="http://schemas.microsoft.com/office/drawing/2014/main" id="{7D49D169-130E-4FBD-A2EC-30D798181A26}"/>
+          <p:cNvPr id="4" name="text-3">
+            <a:extLst xmlns:a="http://schemas.openxmlformats.org/drawingml/2006/main">
+              <a:ext uri="{FF2B5EF4-FFF2-40B4-BE49-F238E27FC236}">
+                <a16:creationId xmlns:a16="http://schemas.microsoft.com/office/drawing/2014/main" id="{37DC2D04-E1A7-4CC0-8ED4-D7715CF46378}"/>
+              </a:ext>
+            </a:extLst>
+          </p:cNvPr>
+          <p:cNvSpPr>
+            <a:spLocks xmlns:a="http://schemas.openxmlformats.org/drawingml/2006/main" noGrp="1"/>
+          </p:cNvSpPr>
+          <p:nvPr/>
+        </p:nvSpPr>
+        <p:spPr>
+          <a:xfrm xmlns:a="http://schemas.openxmlformats.org/drawingml/2006/main">
+            <a:off x="723900" y="5486400"/>
+            <a:ext cx="10744200" cy="666750"/>
+          </a:xfrm>
+          <a:prstGeom xmlns:a="http://schemas.openxmlformats.org/drawingml/2006/main" prst="rect">
+            <a:avLst/>
+          </a:prstGeom>
+          <a:noFill xmlns:a="http://schemas.openxmlformats.org/drawingml/2006/main"/>
+          <a:ln xmlns:a="http://schemas.openxmlformats.org/drawingml/2006/main" w="0">
+            <a:noFill/>
+            <a:prstDash val="solid"/>
+          </a:ln>
+        </p:spPr>
+        <p:txBody>
+          <a:bodyPr xmlns:a="http://schemas.openxmlformats.org/drawingml/2006/main" lIns="0" tIns="0" rIns="0" bIns="0" anchor="t">
+            <a:noAutofit/>
+          </a:bodyPr>
+          <a:lstStyle xmlns:a="http://schemas.openxmlformats.org/drawingml/2006/main"/>
+          <a:p xmlns:a="http://schemas.openxmlformats.org/drawingml/2006/main">
+            <a:pPr algn="l">
+              <a:lnSpc>
+                <a:spcPct val="105000"/>
+              </a:lnSpc>
+              <a:buNone/>
+              <a:defRPr sz="2100" b="1" i="0">
+                <a:solidFill>
+                  <a:srgbClr val="12455E"/>
+                </a:solidFill>
+                <a:latin typeface="Aptos"/>
+                <a:ea typeface="Aptos"/>
+                <a:cs typeface="Aptos"/>
+              </a:defRPr>
+            </a:pPr>
+            <a:r>
+              <a:rPr sz="2100" b="1" i="0">
+                <a:solidFill>
+                  <a:srgbClr val="12455E"/>
+                </a:solidFill>
+                <a:latin typeface="Aptos"/>
+                <a:ea typeface="Aptos"/>
+                <a:cs typeface="Aptos"/>
+              </a:rPr>
+              <a:t>More practice: the Supply and Demand Shift Practice app linked in Chapter 2.</a:t>
+            </a:r>
+          </a:p>
+        </p:txBody>
+      </p:sp>
+      <p:sp>
+        <p:nvSpPr>
+          <p:cNvPr id="5" name="">
+            <a:extLst xmlns:a="http://schemas.openxmlformats.org/drawingml/2006/main">
+              <a:ext uri="{FF2B5EF4-FFF2-40B4-BE49-F238E27FC236}">
+                <a16:creationId xmlns:a16="http://schemas.microsoft.com/office/drawing/2014/main" id="{38C6C16A-62F9-4093-900F-7B894C7664A5}"/>
               </a:ext>
             </a:extLst>
           </p:cNvPr>
@@ -26271,10 +26333,10 @@
       </p:sp>
       <p:sp>
         <p:nvSpPr>
-          <p:cNvPr id="5" name="text-4">
-            <a:extLst xmlns:a="http://schemas.openxmlformats.org/drawingml/2006/main">
-              <a:ext uri="{FF2B5EF4-FFF2-40B4-BE49-F238E27FC236}">
-                <a16:creationId xmlns:a16="http://schemas.microsoft.com/office/drawing/2014/main" id="{3C9C61DB-7CE4-44B2-8AB3-05A56ABDA3DF}"/>
+          <p:cNvPr id="6" name="text-5">
+            <a:extLst xmlns:a="http://schemas.openxmlformats.org/drawingml/2006/main">
+              <a:ext uri="{FF2B5EF4-FFF2-40B4-BE49-F238E27FC236}">
+                <a16:creationId xmlns:a16="http://schemas.microsoft.com/office/drawing/2014/main" id="{71434A6E-C9CA-4FA4-AC94-020A2F2AA6CD}"/>
               </a:ext>
             </a:extLst>
           </p:cNvPr>
@@ -26333,10 +26395,10 @@
       </p:sp>
       <p:sp>
         <p:nvSpPr>
-          <p:cNvPr id="6" name="text-5">
-            <a:extLst xmlns:a="http://schemas.openxmlformats.org/drawingml/2006/main">
-              <a:ext uri="{FF2B5EF4-FFF2-40B4-BE49-F238E27FC236}">
-                <a16:creationId xmlns:a16="http://schemas.microsoft.com/office/drawing/2014/main" id="{15BA90C1-4276-4FC0-8A01-C3656455DCD0}"/>
+          <p:cNvPr id="7" name="text-6">
+            <a:extLst xmlns:a="http://schemas.openxmlformats.org/drawingml/2006/main">
+              <a:ext uri="{FF2B5EF4-FFF2-40B4-BE49-F238E27FC236}">
+                <a16:creationId xmlns:a16="http://schemas.microsoft.com/office/drawing/2014/main" id="{51E0FE16-EA58-49E5-BD36-3D62B97C515F}"/>
               </a:ext>
             </a:extLst>
           </p:cNvPr>
@@ -26396,7 +26458,7 @@
     </p:spTree>
     <p:extLst>
       <p:ext uri="{BB962C8B-B14F-4D97-AF65-F5344CB8AC3E}">
-        <p14:creationId xmlns:p14="http://schemas.microsoft.com/office/powerpoint/2010/main" val="597937451"/>
+        <p14:creationId xmlns:p14="http://schemas.microsoft.com/office/powerpoint/2010/main" val="124611533"/>
       </p:ext>
     </p:extLst>
   </p:cSld>
@@ -26427,7 +26489,7 @@
           <p:cNvPr id="11" name="text-0">
             <a:extLst xmlns:a="http://schemas.openxmlformats.org/drawingml/2006/main">
               <a:ext uri="{FF2B5EF4-FFF2-40B4-BE49-F238E27FC236}">
-                <a16:creationId xmlns:a16="http://schemas.microsoft.com/office/drawing/2014/main" id="{801385E9-684D-423B-A661-73D7D324764F}"/>
+                <a16:creationId xmlns:a16="http://schemas.microsoft.com/office/drawing/2014/main" id="{051E1031-7316-4682-B019-844F94D10EF1}"/>
               </a:ext>
             </a:extLst>
           </p:cNvPr>
@@ -26489,7 +26551,7 @@
           <p:cNvPr id="2" name="text-1">
             <a:extLst xmlns:a="http://schemas.openxmlformats.org/drawingml/2006/main">
               <a:ext uri="{FF2B5EF4-FFF2-40B4-BE49-F238E27FC236}">
-                <a16:creationId xmlns:a16="http://schemas.microsoft.com/office/drawing/2014/main" id="{D03E5F8C-4AD3-4565-8469-4514F7E388A8}"/>
+                <a16:creationId xmlns:a16="http://schemas.microsoft.com/office/drawing/2014/main" id="{0863D043-CB0D-48D5-925C-372B76204FD4}"/>
               </a:ext>
             </a:extLst>
           </p:cNvPr>
@@ -26551,7 +26613,7 @@
           <p:cNvPr id="3" name="text-2">
             <a:extLst xmlns:a="http://schemas.openxmlformats.org/drawingml/2006/main">
               <a:ext uri="{FF2B5EF4-FFF2-40B4-BE49-F238E27FC236}">
-                <a16:creationId xmlns:a16="http://schemas.microsoft.com/office/drawing/2014/main" id="{97BBEE4C-5061-449B-B4EF-1904874714DA}"/>
+                <a16:creationId xmlns:a16="http://schemas.microsoft.com/office/drawing/2014/main" id="{0A473E23-F85B-419D-9917-407E32F980AB}"/>
               </a:ext>
             </a:extLst>
           </p:cNvPr>
@@ -26613,7 +26675,7 @@
           <p:cNvPr id="4" name="text-3">
             <a:extLst xmlns:a="http://schemas.openxmlformats.org/drawingml/2006/main">
               <a:ext uri="{FF2B5EF4-FFF2-40B4-BE49-F238E27FC236}">
-                <a16:creationId xmlns:a16="http://schemas.microsoft.com/office/drawing/2014/main" id="{C12C0B3F-21AC-4D82-A4CD-CF4443FA1EE8}"/>
+                <a16:creationId xmlns:a16="http://schemas.microsoft.com/office/drawing/2014/main" id="{B9A58AF9-5FB5-4420-AA63-F0EBBFD6CB53}"/>
               </a:ext>
             </a:extLst>
           </p:cNvPr>
@@ -26675,7 +26737,7 @@
           <p:cNvPr id="5" name="text-4">
             <a:extLst xmlns:a="http://schemas.openxmlformats.org/drawingml/2006/main">
               <a:ext uri="{FF2B5EF4-FFF2-40B4-BE49-F238E27FC236}">
-                <a16:creationId xmlns:a16="http://schemas.microsoft.com/office/drawing/2014/main" id="{61A21EF1-E1D4-4E3E-94DC-B903C4EC2641}"/>
+                <a16:creationId xmlns:a16="http://schemas.microsoft.com/office/drawing/2014/main" id="{8883D3F4-4CF9-45DB-B02C-258FEDF9EF3E}"/>
               </a:ext>
             </a:extLst>
           </p:cNvPr>
@@ -26737,7 +26799,7 @@
           <p:cNvPr id="6" name="text-5">
             <a:extLst xmlns:a="http://schemas.openxmlformats.org/drawingml/2006/main">
               <a:ext uri="{FF2B5EF4-FFF2-40B4-BE49-F238E27FC236}">
-                <a16:creationId xmlns:a16="http://schemas.microsoft.com/office/drawing/2014/main" id="{828814C8-A3B6-48BD-8CC0-543C4D81445D}"/>
+                <a16:creationId xmlns:a16="http://schemas.microsoft.com/office/drawing/2014/main" id="{024369E0-6693-49DC-B11A-B32D48EC965C}"/>
               </a:ext>
             </a:extLst>
           </p:cNvPr>
@@ -26799,7 +26861,7 @@
           <p:cNvPr id="7" name="text-6">
             <a:extLst xmlns:a="http://schemas.openxmlformats.org/drawingml/2006/main">
               <a:ext uri="{FF2B5EF4-FFF2-40B4-BE49-F238E27FC236}">
-                <a16:creationId xmlns:a16="http://schemas.microsoft.com/office/drawing/2014/main" id="{69CCBFEB-6D93-4B6E-93D8-D945D7F731E0}"/>
+                <a16:creationId xmlns:a16="http://schemas.microsoft.com/office/drawing/2014/main" id="{FDD4196F-EE4B-49A4-A8DA-50DE08DF9720}"/>
               </a:ext>
             </a:extLst>
           </p:cNvPr>
@@ -26861,7 +26923,7 @@
           <p:cNvPr id="8" name="">
             <a:extLst xmlns:a="http://schemas.openxmlformats.org/drawingml/2006/main">
               <a:ext uri="{FF2B5EF4-FFF2-40B4-BE49-F238E27FC236}">
-                <a16:creationId xmlns:a16="http://schemas.microsoft.com/office/drawing/2014/main" id="{43F32685-2A56-497C-A8B2-0B37D50D6921}"/>
+                <a16:creationId xmlns:a16="http://schemas.microsoft.com/office/drawing/2014/main" id="{2FFEA705-E94F-4E7D-B429-CC038E6A3B0C}"/>
               </a:ext>
             </a:extLst>
           </p:cNvPr>
@@ -26892,7 +26954,7 @@
           <p:cNvPr id="9" name="text-8">
             <a:extLst xmlns:a="http://schemas.openxmlformats.org/drawingml/2006/main">
               <a:ext uri="{FF2B5EF4-FFF2-40B4-BE49-F238E27FC236}">
-                <a16:creationId xmlns:a16="http://schemas.microsoft.com/office/drawing/2014/main" id="{5A8D56D9-739E-4669-8983-21C6AF9BC53E}"/>
+                <a16:creationId xmlns:a16="http://schemas.microsoft.com/office/drawing/2014/main" id="{84F942AF-ACAD-45E3-A996-143B6B26C936}"/>
               </a:ext>
             </a:extLst>
           </p:cNvPr>
@@ -26954,7 +27016,7 @@
           <p:cNvPr id="10" name="text-9">
             <a:extLst xmlns:a="http://schemas.openxmlformats.org/drawingml/2006/main">
               <a:ext uri="{FF2B5EF4-FFF2-40B4-BE49-F238E27FC236}">
-                <a16:creationId xmlns:a16="http://schemas.microsoft.com/office/drawing/2014/main" id="{38353CDE-B8E4-47AB-A189-32F3408CA31B}"/>
+                <a16:creationId xmlns:a16="http://schemas.microsoft.com/office/drawing/2014/main" id="{2F311CBA-A2A4-4976-AB2E-B7DCF63F82B1}"/>
               </a:ext>
             </a:extLst>
           </p:cNvPr>
@@ -27014,7 +27076,7 @@
     </p:spTree>
     <p:extLst>
       <p:ext uri="{BB962C8B-B14F-4D97-AF65-F5344CB8AC3E}">
-        <p14:creationId xmlns:p14="http://schemas.microsoft.com/office/powerpoint/2010/main" val="1638792133"/>
+        <p14:creationId xmlns:p14="http://schemas.microsoft.com/office/powerpoint/2010/main" val="1035030625"/>
       </p:ext>
     </p:extLst>
   </p:cSld>
@@ -27045,7 +27107,7 @@
           <p:cNvPr id="12" name="text-0">
             <a:extLst xmlns:a="http://schemas.openxmlformats.org/drawingml/2006/main">
               <a:ext uri="{FF2B5EF4-FFF2-40B4-BE49-F238E27FC236}">
-                <a16:creationId xmlns:a16="http://schemas.microsoft.com/office/drawing/2014/main" id="{518A7768-0866-44FF-AF1E-E2A16B65A98A}"/>
+                <a16:creationId xmlns:a16="http://schemas.microsoft.com/office/drawing/2014/main" id="{523B70DC-4C9B-46C7-890A-E18990D09393}"/>
               </a:ext>
             </a:extLst>
           </p:cNvPr>
@@ -27107,7 +27169,7 @@
           <p:cNvPr id="2" name="text-1">
             <a:extLst xmlns:a="http://schemas.openxmlformats.org/drawingml/2006/main">
               <a:ext uri="{FF2B5EF4-FFF2-40B4-BE49-F238E27FC236}">
-                <a16:creationId xmlns:a16="http://schemas.microsoft.com/office/drawing/2014/main" id="{2B058EDF-C40D-40A5-B6C6-A472ACB05058}"/>
+                <a16:creationId xmlns:a16="http://schemas.microsoft.com/office/drawing/2014/main" id="{2F55C40D-A060-4E0F-AC81-D12BD44EF40E}"/>
               </a:ext>
             </a:extLst>
           </p:cNvPr>
@@ -27169,7 +27231,7 @@
           <p:cNvPr id="3" name="text-2">
             <a:extLst xmlns:a="http://schemas.openxmlformats.org/drawingml/2006/main">
               <a:ext uri="{FF2B5EF4-FFF2-40B4-BE49-F238E27FC236}">
-                <a16:creationId xmlns:a16="http://schemas.microsoft.com/office/drawing/2014/main" id="{B351101E-088A-4CBD-BC54-03680D25440F}"/>
+                <a16:creationId xmlns:a16="http://schemas.microsoft.com/office/drawing/2014/main" id="{87B49CE0-348F-42EA-9DA8-294156E5E3AB}"/>
               </a:ext>
             </a:extLst>
           </p:cNvPr>
@@ -27231,7 +27293,7 @@
           <p:cNvPr id="4" name="text-3">
             <a:extLst xmlns:a="http://schemas.openxmlformats.org/drawingml/2006/main">
               <a:ext uri="{FF2B5EF4-FFF2-40B4-BE49-F238E27FC236}">
-                <a16:creationId xmlns:a16="http://schemas.microsoft.com/office/drawing/2014/main" id="{43A499E2-4267-4101-954C-9E44C30DA101}"/>
+                <a16:creationId xmlns:a16="http://schemas.microsoft.com/office/drawing/2014/main" id="{E943C415-E0C3-401D-A65D-12DA73535B25}"/>
               </a:ext>
             </a:extLst>
           </p:cNvPr>
@@ -27293,7 +27355,7 @@
           <p:cNvPr id="5" name="text-4">
             <a:extLst xmlns:a="http://schemas.openxmlformats.org/drawingml/2006/main">
               <a:ext uri="{FF2B5EF4-FFF2-40B4-BE49-F238E27FC236}">
-                <a16:creationId xmlns:a16="http://schemas.microsoft.com/office/drawing/2014/main" id="{FB35769C-0A0B-403D-AC41-5F6AA9F6B747}"/>
+                <a16:creationId xmlns:a16="http://schemas.microsoft.com/office/drawing/2014/main" id="{4215DEE1-ACDA-4FF4-854E-8F58A7C24956}"/>
               </a:ext>
             </a:extLst>
           </p:cNvPr>
@@ -27355,7 +27417,7 @@
           <p:cNvPr id="6" name="text-5">
             <a:extLst xmlns:a="http://schemas.openxmlformats.org/drawingml/2006/main">
               <a:ext uri="{FF2B5EF4-FFF2-40B4-BE49-F238E27FC236}">
-                <a16:creationId xmlns:a16="http://schemas.microsoft.com/office/drawing/2014/main" id="{A1754375-5014-458C-AC42-D38437A1CFB5}"/>
+                <a16:creationId xmlns:a16="http://schemas.microsoft.com/office/drawing/2014/main" id="{DAB72C35-00D5-4BC9-A5A9-7BA035D4A72C}"/>
               </a:ext>
             </a:extLst>
           </p:cNvPr>
@@ -27417,7 +27479,7 @@
           <p:cNvPr id="7" name="text-6">
             <a:extLst xmlns:a="http://schemas.openxmlformats.org/drawingml/2006/main">
               <a:ext uri="{FF2B5EF4-FFF2-40B4-BE49-F238E27FC236}">
-                <a16:creationId xmlns:a16="http://schemas.microsoft.com/office/drawing/2014/main" id="{BA17BF92-C3FD-43C0-9BFB-639161DD8139}"/>
+                <a16:creationId xmlns:a16="http://schemas.microsoft.com/office/drawing/2014/main" id="{3CC800F7-D3F5-4093-A05A-A8D206F56B82}"/>
               </a:ext>
             </a:extLst>
           </p:cNvPr>
@@ -27479,7 +27541,7 @@
           <p:cNvPr id="8" name="text-7">
             <a:extLst xmlns:a="http://schemas.openxmlformats.org/drawingml/2006/main">
               <a:ext uri="{FF2B5EF4-FFF2-40B4-BE49-F238E27FC236}">
-                <a16:creationId xmlns:a16="http://schemas.microsoft.com/office/drawing/2014/main" id="{F0346311-33C6-4B64-B8A1-9FC159CA66D9}"/>
+                <a16:creationId xmlns:a16="http://schemas.microsoft.com/office/drawing/2014/main" id="{FD692D90-7F52-46F9-9C23-BB8BF6BB3F6C}"/>
               </a:ext>
             </a:extLst>
           </p:cNvPr>
@@ -27541,7 +27603,7 @@
           <p:cNvPr id="9" name="">
             <a:extLst xmlns:a="http://schemas.openxmlformats.org/drawingml/2006/main">
               <a:ext uri="{FF2B5EF4-FFF2-40B4-BE49-F238E27FC236}">
-                <a16:creationId xmlns:a16="http://schemas.microsoft.com/office/drawing/2014/main" id="{9A477AA5-3516-447E-8136-7027946EEDEE}"/>
+                <a16:creationId xmlns:a16="http://schemas.microsoft.com/office/drawing/2014/main" id="{D7F0DB91-A785-4D98-BB87-1A4914C2ACA9}"/>
               </a:ext>
             </a:extLst>
           </p:cNvPr>
@@ -27572,7 +27634,7 @@
           <p:cNvPr id="10" name="text-9">
             <a:extLst xmlns:a="http://schemas.openxmlformats.org/drawingml/2006/main">
               <a:ext uri="{FF2B5EF4-FFF2-40B4-BE49-F238E27FC236}">
-                <a16:creationId xmlns:a16="http://schemas.microsoft.com/office/drawing/2014/main" id="{5BC185FE-9841-4945-BC18-A4367F7FD700}"/>
+                <a16:creationId xmlns:a16="http://schemas.microsoft.com/office/drawing/2014/main" id="{553CEF66-7332-4223-B895-FB1E9903B638}"/>
               </a:ext>
             </a:extLst>
           </p:cNvPr>
@@ -27634,7 +27696,7 @@
           <p:cNvPr id="11" name="text-10">
             <a:extLst xmlns:a="http://schemas.openxmlformats.org/drawingml/2006/main">
               <a:ext uri="{FF2B5EF4-FFF2-40B4-BE49-F238E27FC236}">
-                <a16:creationId xmlns:a16="http://schemas.microsoft.com/office/drawing/2014/main" id="{8F6C7A00-51C1-4DDC-96B6-3FED086A27CE}"/>
+                <a16:creationId xmlns:a16="http://schemas.microsoft.com/office/drawing/2014/main" id="{9ABA3668-20C8-4729-815F-442C6F86C904}"/>
               </a:ext>
             </a:extLst>
           </p:cNvPr>
@@ -27694,7 +27756,7 @@
     </p:spTree>
     <p:extLst>
       <p:ext uri="{BB962C8B-B14F-4D97-AF65-F5344CB8AC3E}">
-        <p14:creationId xmlns:p14="http://schemas.microsoft.com/office/powerpoint/2010/main" val="1045677816"/>
+        <p14:creationId xmlns:p14="http://schemas.microsoft.com/office/powerpoint/2010/main" val="1395698131"/>
       </p:ext>
     </p:extLst>
   </p:cSld>
@@ -27725,7 +27787,7 @@
           <p:cNvPr id="8" name="text-0">
             <a:extLst xmlns:a="http://schemas.openxmlformats.org/drawingml/2006/main">
               <a:ext uri="{FF2B5EF4-FFF2-40B4-BE49-F238E27FC236}">
-                <a16:creationId xmlns:a16="http://schemas.microsoft.com/office/drawing/2014/main" id="{E279C730-8F31-4D4C-B7BD-576D2485BD02}"/>
+                <a16:creationId xmlns:a16="http://schemas.microsoft.com/office/drawing/2014/main" id="{1A292027-54A5-4958-BC8F-08175FD13666}"/>
               </a:ext>
             </a:extLst>
           </p:cNvPr>
@@ -27787,7 +27849,7 @@
           <p:cNvPr id="2" name="text-1">
             <a:extLst xmlns:a="http://schemas.openxmlformats.org/drawingml/2006/main">
               <a:ext uri="{FF2B5EF4-FFF2-40B4-BE49-F238E27FC236}">
-                <a16:creationId xmlns:a16="http://schemas.microsoft.com/office/drawing/2014/main" id="{D3125C5F-5D34-4D74-A66F-7BC694613365}"/>
+                <a16:creationId xmlns:a16="http://schemas.microsoft.com/office/drawing/2014/main" id="{0A1A60B2-66F8-4500-A89A-2BF6EABB07AF}"/>
               </a:ext>
             </a:extLst>
           </p:cNvPr>
@@ -28192,7 +28254,7 @@
           <p:cNvPr id="4" name="text-2">
             <a:extLst xmlns:a="http://schemas.openxmlformats.org/drawingml/2006/main">
               <a:ext uri="{FF2B5EF4-FFF2-40B4-BE49-F238E27FC236}">
-                <a16:creationId xmlns:a16="http://schemas.microsoft.com/office/drawing/2014/main" id="{8255BEC0-D733-4FF9-B830-7AD22681EFC8}"/>
+                <a16:creationId xmlns:a16="http://schemas.microsoft.com/office/drawing/2014/main" id="{A9DF46CC-A794-4961-85D8-D32DA74EFE8C}"/>
               </a:ext>
             </a:extLst>
           </p:cNvPr>
@@ -28254,7 +28316,7 @@
           <p:cNvPr id="5" name="">
             <a:extLst xmlns:a="http://schemas.openxmlformats.org/drawingml/2006/main">
               <a:ext uri="{FF2B5EF4-FFF2-40B4-BE49-F238E27FC236}">
-                <a16:creationId xmlns:a16="http://schemas.microsoft.com/office/drawing/2014/main" id="{EDF8ABD9-3BA3-466F-8A72-F48041729209}"/>
+                <a16:creationId xmlns:a16="http://schemas.microsoft.com/office/drawing/2014/main" id="{C5A0DF6E-563C-42B7-A378-15F24CD03AC8}"/>
               </a:ext>
             </a:extLst>
           </p:cNvPr>
@@ -28285,7 +28347,7 @@
           <p:cNvPr id="6" name="text-4">
             <a:extLst xmlns:a="http://schemas.openxmlformats.org/drawingml/2006/main">
               <a:ext uri="{FF2B5EF4-FFF2-40B4-BE49-F238E27FC236}">
-                <a16:creationId xmlns:a16="http://schemas.microsoft.com/office/drawing/2014/main" id="{6C4A24B7-CBD4-4DDD-943C-506DA6431178}"/>
+                <a16:creationId xmlns:a16="http://schemas.microsoft.com/office/drawing/2014/main" id="{B29E3D72-51C1-4B4E-B8A0-3D2E8C9B266D}"/>
               </a:ext>
             </a:extLst>
           </p:cNvPr>
@@ -28347,7 +28409,7 @@
           <p:cNvPr id="7" name="text-5">
             <a:extLst xmlns:a="http://schemas.openxmlformats.org/drawingml/2006/main">
               <a:ext uri="{FF2B5EF4-FFF2-40B4-BE49-F238E27FC236}">
-                <a16:creationId xmlns:a16="http://schemas.microsoft.com/office/drawing/2014/main" id="{96675F4C-6112-4173-9E50-0758EC4B4182}"/>
+                <a16:creationId xmlns:a16="http://schemas.microsoft.com/office/drawing/2014/main" id="{68C75985-CB44-4940-BC50-A8399A319DD7}"/>
               </a:ext>
             </a:extLst>
           </p:cNvPr>
@@ -28407,7 +28469,7 @@
     </p:spTree>
     <p:extLst>
       <p:ext uri="{BB962C8B-B14F-4D97-AF65-F5344CB8AC3E}">
-        <p14:creationId xmlns:p14="http://schemas.microsoft.com/office/powerpoint/2010/main" val="1107896891"/>
+        <p14:creationId xmlns:p14="http://schemas.microsoft.com/office/powerpoint/2010/main" val="405684461"/>
       </p:ext>
     </p:extLst>
   </p:cSld>
@@ -28438,7 +28500,7 @@
           <p:cNvPr id="7" name="text-0">
             <a:extLst xmlns:a="http://schemas.openxmlformats.org/drawingml/2006/main">
               <a:ext uri="{FF2B5EF4-FFF2-40B4-BE49-F238E27FC236}">
-                <a16:creationId xmlns:a16="http://schemas.microsoft.com/office/drawing/2014/main" id="{27BA49C2-44E1-4590-8604-554E74153447}"/>
+                <a16:creationId xmlns:a16="http://schemas.microsoft.com/office/drawing/2014/main" id="{09083AC7-0F76-4543-9D1E-251445CABA18}"/>
               </a:ext>
             </a:extLst>
           </p:cNvPr>
@@ -28500,7 +28562,7 @@
           <p:cNvPr id="2" name="text-1">
             <a:extLst xmlns:a="http://schemas.openxmlformats.org/drawingml/2006/main">
               <a:ext uri="{FF2B5EF4-FFF2-40B4-BE49-F238E27FC236}">
-                <a16:creationId xmlns:a16="http://schemas.microsoft.com/office/drawing/2014/main" id="{AAA6394A-7ACA-4309-B18D-B1BF1511F2B3}"/>
+                <a16:creationId xmlns:a16="http://schemas.microsoft.com/office/drawing/2014/main" id="{DA846469-727C-4E4A-8E20-7B20E037AD52}"/>
               </a:ext>
             </a:extLst>
           </p:cNvPr>
@@ -28562,7 +28624,7 @@
           <p:cNvPr id="3" name="text-2">
             <a:extLst xmlns:a="http://schemas.openxmlformats.org/drawingml/2006/main">
               <a:ext uri="{FF2B5EF4-FFF2-40B4-BE49-F238E27FC236}">
-                <a16:creationId xmlns:a16="http://schemas.microsoft.com/office/drawing/2014/main" id="{E2D1551F-775B-4825-AC28-4E3CFEC7BE85}"/>
+                <a16:creationId xmlns:a16="http://schemas.microsoft.com/office/drawing/2014/main" id="{FFC38632-83B6-46D1-AEED-5F0BF1412878}"/>
               </a:ext>
             </a:extLst>
           </p:cNvPr>
@@ -28687,7 +28749,7 @@
           <p:cNvPr id="4" name="">
             <a:extLst xmlns:a="http://schemas.openxmlformats.org/drawingml/2006/main">
               <a:ext uri="{FF2B5EF4-FFF2-40B4-BE49-F238E27FC236}">
-                <a16:creationId xmlns:a16="http://schemas.microsoft.com/office/drawing/2014/main" id="{486C34F2-89A6-436D-A79B-DA712FF3B0CE}"/>
+                <a16:creationId xmlns:a16="http://schemas.microsoft.com/office/drawing/2014/main" id="{3DB90367-E99E-4E02-B674-FFED66AA93C7}"/>
               </a:ext>
             </a:extLst>
           </p:cNvPr>
@@ -28718,7 +28780,7 @@
           <p:cNvPr id="5" name="text-4">
             <a:extLst xmlns:a="http://schemas.openxmlformats.org/drawingml/2006/main">
               <a:ext uri="{FF2B5EF4-FFF2-40B4-BE49-F238E27FC236}">
-                <a16:creationId xmlns:a16="http://schemas.microsoft.com/office/drawing/2014/main" id="{592523DA-8BDD-4A39-A86C-2C916696503C}"/>
+                <a16:creationId xmlns:a16="http://schemas.microsoft.com/office/drawing/2014/main" id="{24B546D1-A95C-4353-8C19-2883E5546AEE}"/>
               </a:ext>
             </a:extLst>
           </p:cNvPr>
@@ -28780,7 +28842,7 @@
           <p:cNvPr id="6" name="text-5">
             <a:extLst xmlns:a="http://schemas.openxmlformats.org/drawingml/2006/main">
               <a:ext uri="{FF2B5EF4-FFF2-40B4-BE49-F238E27FC236}">
-                <a16:creationId xmlns:a16="http://schemas.microsoft.com/office/drawing/2014/main" id="{7C424AB5-BAA5-4E13-8BDB-6781DC3F021B}"/>
+                <a16:creationId xmlns:a16="http://schemas.microsoft.com/office/drawing/2014/main" id="{4D0418B6-CEF9-4E20-A02D-8A92B382A51A}"/>
               </a:ext>
             </a:extLst>
           </p:cNvPr>
@@ -28840,7 +28902,7 @@
     </p:spTree>
     <p:extLst>
       <p:ext uri="{BB962C8B-B14F-4D97-AF65-F5344CB8AC3E}">
-        <p14:creationId xmlns:p14="http://schemas.microsoft.com/office/powerpoint/2010/main" val="145228265"/>
+        <p14:creationId xmlns:p14="http://schemas.microsoft.com/office/powerpoint/2010/main" val="1772890180"/>
       </p:ext>
     </p:extLst>
   </p:cSld>
@@ -28871,7 +28933,7 @@
           <p:cNvPr id="8" name="text-0">
             <a:extLst xmlns:a="http://schemas.openxmlformats.org/drawingml/2006/main">
               <a:ext uri="{FF2B5EF4-FFF2-40B4-BE49-F238E27FC236}">
-                <a16:creationId xmlns:a16="http://schemas.microsoft.com/office/drawing/2014/main" id="{5EFC3A3E-907C-4760-92DC-998C5377648E}"/>
+                <a16:creationId xmlns:a16="http://schemas.microsoft.com/office/drawing/2014/main" id="{6C1A0F73-0B9F-467F-9A59-7550DC88CD6A}"/>
               </a:ext>
             </a:extLst>
           </p:cNvPr>
@@ -28933,7 +28995,7 @@
           <p:cNvPr id="2" name="text-1">
             <a:extLst xmlns:a="http://schemas.openxmlformats.org/drawingml/2006/main">
               <a:ext uri="{FF2B5EF4-FFF2-40B4-BE49-F238E27FC236}">
-                <a16:creationId xmlns:a16="http://schemas.microsoft.com/office/drawing/2014/main" id="{BCBFE6E4-CBD5-4F6A-A024-7E49BF0AB6DC}"/>
+                <a16:creationId xmlns:a16="http://schemas.microsoft.com/office/drawing/2014/main" id="{75ED4FB9-1389-40AE-B458-30EBAF07B31F}"/>
               </a:ext>
             </a:extLst>
           </p:cNvPr>
@@ -28995,7 +29057,7 @@
           <p:cNvPr id="3" name="text-2">
             <a:extLst xmlns:a="http://schemas.openxmlformats.org/drawingml/2006/main">
               <a:ext uri="{FF2B5EF4-FFF2-40B4-BE49-F238E27FC236}">
-                <a16:creationId xmlns:a16="http://schemas.microsoft.com/office/drawing/2014/main" id="{A6A2FA65-ECD7-4F09-AC93-6AB1DC6B5F4E}"/>
+                <a16:creationId xmlns:a16="http://schemas.microsoft.com/office/drawing/2014/main" id="{698B1CAF-97B4-46DD-9E17-74D5434D3D97}"/>
               </a:ext>
             </a:extLst>
           </p:cNvPr>
@@ -29090,7 +29152,7 @@
           <p:cNvPr id="4" name="text-3">
             <a:extLst xmlns:a="http://schemas.openxmlformats.org/drawingml/2006/main">
               <a:ext uri="{FF2B5EF4-FFF2-40B4-BE49-F238E27FC236}">
-                <a16:creationId xmlns:a16="http://schemas.microsoft.com/office/drawing/2014/main" id="{B14CAADF-0B7A-49AD-BCB6-A2220D515D7D}"/>
+                <a16:creationId xmlns:a16="http://schemas.microsoft.com/office/drawing/2014/main" id="{C1A24BDE-FE77-4573-9283-43BC7B126A2C}"/>
               </a:ext>
             </a:extLst>
           </p:cNvPr>
@@ -29152,7 +29214,7 @@
           <p:cNvPr id="5" name="">
             <a:extLst xmlns:a="http://schemas.openxmlformats.org/drawingml/2006/main">
               <a:ext uri="{FF2B5EF4-FFF2-40B4-BE49-F238E27FC236}">
-                <a16:creationId xmlns:a16="http://schemas.microsoft.com/office/drawing/2014/main" id="{1490F956-4658-4222-A0EF-3527B0508A54}"/>
+                <a16:creationId xmlns:a16="http://schemas.microsoft.com/office/drawing/2014/main" id="{09B8F60E-4D67-4035-9701-617F8A86036D}"/>
               </a:ext>
             </a:extLst>
           </p:cNvPr>
@@ -29183,7 +29245,7 @@
           <p:cNvPr id="6" name="text-5">
             <a:extLst xmlns:a="http://schemas.openxmlformats.org/drawingml/2006/main">
               <a:ext uri="{FF2B5EF4-FFF2-40B4-BE49-F238E27FC236}">
-                <a16:creationId xmlns:a16="http://schemas.microsoft.com/office/drawing/2014/main" id="{8E9415B5-C29B-4657-99FA-1782DBB83415}"/>
+                <a16:creationId xmlns:a16="http://schemas.microsoft.com/office/drawing/2014/main" id="{E3AF67C4-7451-437C-A7B8-56FCF81DEFB3}"/>
               </a:ext>
             </a:extLst>
           </p:cNvPr>
@@ -29245,7 +29307,7 @@
           <p:cNvPr id="7" name="text-6">
             <a:extLst xmlns:a="http://schemas.openxmlformats.org/drawingml/2006/main">
               <a:ext uri="{FF2B5EF4-FFF2-40B4-BE49-F238E27FC236}">
-                <a16:creationId xmlns:a16="http://schemas.microsoft.com/office/drawing/2014/main" id="{5B3FC7E3-9D6F-43E3-A253-FD5199960D51}"/>
+                <a16:creationId xmlns:a16="http://schemas.microsoft.com/office/drawing/2014/main" id="{E62B1502-E575-448D-8670-256AE0218342}"/>
               </a:ext>
             </a:extLst>
           </p:cNvPr>
@@ -29305,7 +29367,7 @@
     </p:spTree>
     <p:extLst>
       <p:ext uri="{BB962C8B-B14F-4D97-AF65-F5344CB8AC3E}">
-        <p14:creationId xmlns:p14="http://schemas.microsoft.com/office/powerpoint/2010/main" val="1906500981"/>
+        <p14:creationId xmlns:p14="http://schemas.microsoft.com/office/powerpoint/2010/main" val="1583031134"/>
       </p:ext>
     </p:extLst>
   </p:cSld>
@@ -29336,7 +29398,7 @@
           <p:cNvPr id="8" name="text-0">
             <a:extLst xmlns:a="http://schemas.openxmlformats.org/drawingml/2006/main">
               <a:ext uri="{FF2B5EF4-FFF2-40B4-BE49-F238E27FC236}">
-                <a16:creationId xmlns:a16="http://schemas.microsoft.com/office/drawing/2014/main" id="{53B02535-8F77-4D60-B27E-F8C07095740E}"/>
+                <a16:creationId xmlns:a16="http://schemas.microsoft.com/office/drawing/2014/main" id="{1C7168FE-8570-4BDE-AA78-DDE24DC6CEC5}"/>
               </a:ext>
             </a:extLst>
           </p:cNvPr>
@@ -29398,7 +29460,7 @@
           <p:cNvPr id="2" name="text-1">
             <a:extLst xmlns:a="http://schemas.openxmlformats.org/drawingml/2006/main">
               <a:ext uri="{FF2B5EF4-FFF2-40B4-BE49-F238E27FC236}">
-                <a16:creationId xmlns:a16="http://schemas.microsoft.com/office/drawing/2014/main" id="{77194B00-2F50-4166-9637-17646BF3A620}"/>
+                <a16:creationId xmlns:a16="http://schemas.microsoft.com/office/drawing/2014/main" id="{389252D8-94D4-4F85-95DF-A812C0E6147C}"/>
               </a:ext>
             </a:extLst>
           </p:cNvPr>
@@ -29460,7 +29522,7 @@
           <p:cNvPr id="3" name="text-2">
             <a:extLst xmlns:a="http://schemas.openxmlformats.org/drawingml/2006/main">
               <a:ext uri="{FF2B5EF4-FFF2-40B4-BE49-F238E27FC236}">
-                <a16:creationId xmlns:a16="http://schemas.microsoft.com/office/drawing/2014/main" id="{F3CE5D3D-3C92-4393-B913-A89FB37FA818}"/>
+                <a16:creationId xmlns:a16="http://schemas.microsoft.com/office/drawing/2014/main" id="{B0B66CC0-4826-48FC-9979-49520E063016}"/>
               </a:ext>
             </a:extLst>
           </p:cNvPr>
@@ -29552,7 +29614,7 @@
           <p:cNvPr id="4" name="text-3">
             <a:extLst xmlns:a="http://schemas.openxmlformats.org/drawingml/2006/main">
               <a:ext uri="{FF2B5EF4-FFF2-40B4-BE49-F238E27FC236}">
-                <a16:creationId xmlns:a16="http://schemas.microsoft.com/office/drawing/2014/main" id="{E2B1BFEC-ADD2-44E3-A76F-577352F22186}"/>
+                <a16:creationId xmlns:a16="http://schemas.microsoft.com/office/drawing/2014/main" id="{2D0BB683-2632-4261-92EF-FAA61A96CD73}"/>
               </a:ext>
             </a:extLst>
           </p:cNvPr>
@@ -29614,7 +29676,7 @@
           <p:cNvPr id="5" name="">
             <a:extLst xmlns:a="http://schemas.openxmlformats.org/drawingml/2006/main">
               <a:ext uri="{FF2B5EF4-FFF2-40B4-BE49-F238E27FC236}">
-                <a16:creationId xmlns:a16="http://schemas.microsoft.com/office/drawing/2014/main" id="{0EE9429E-C36C-4092-839F-E4B05678D4D4}"/>
+                <a16:creationId xmlns:a16="http://schemas.microsoft.com/office/drawing/2014/main" id="{E3C0EA49-A1C5-4853-B386-DEB845B73BBF}"/>
               </a:ext>
             </a:extLst>
           </p:cNvPr>
@@ -29645,7 +29707,7 @@
           <p:cNvPr id="6" name="text-5">
             <a:extLst xmlns:a="http://schemas.openxmlformats.org/drawingml/2006/main">
               <a:ext uri="{FF2B5EF4-FFF2-40B4-BE49-F238E27FC236}">
-                <a16:creationId xmlns:a16="http://schemas.microsoft.com/office/drawing/2014/main" id="{D15A788C-71DC-4FBB-BF2B-790D3411D7E8}"/>
+                <a16:creationId xmlns:a16="http://schemas.microsoft.com/office/drawing/2014/main" id="{B8B9922C-C5F5-469A-BE4E-A97F9AB610BC}"/>
               </a:ext>
             </a:extLst>
           </p:cNvPr>
@@ -29707,7 +29769,7 @@
           <p:cNvPr id="7" name="text-6">
             <a:extLst xmlns:a="http://schemas.openxmlformats.org/drawingml/2006/main">
               <a:ext uri="{FF2B5EF4-FFF2-40B4-BE49-F238E27FC236}">
-                <a16:creationId xmlns:a16="http://schemas.microsoft.com/office/drawing/2014/main" id="{1AC16759-F480-4F73-AA1B-9A8190017166}"/>
+                <a16:creationId xmlns:a16="http://schemas.microsoft.com/office/drawing/2014/main" id="{77D49708-254F-42E3-B6F2-FBA6E0DA44DA}"/>
               </a:ext>
             </a:extLst>
           </p:cNvPr>
@@ -29767,7 +29829,7 @@
     </p:spTree>
     <p:extLst>
       <p:ext uri="{BB962C8B-B14F-4D97-AF65-F5344CB8AC3E}">
-        <p14:creationId xmlns:p14="http://schemas.microsoft.com/office/powerpoint/2010/main" val="20823536"/>
+        <p14:creationId xmlns:p14="http://schemas.microsoft.com/office/powerpoint/2010/main" val="1333395184"/>
       </p:ext>
     </p:extLst>
   </p:cSld>
@@ -29798,7 +29860,7 @@
           <p:cNvPr id="8" name="text-0">
             <a:extLst xmlns:a="http://schemas.openxmlformats.org/drawingml/2006/main">
               <a:ext uri="{FF2B5EF4-FFF2-40B4-BE49-F238E27FC236}">
-                <a16:creationId xmlns:a16="http://schemas.microsoft.com/office/drawing/2014/main" id="{BB68ACDD-A290-4077-AA25-837E579E55F8}"/>
+                <a16:creationId xmlns:a16="http://schemas.microsoft.com/office/drawing/2014/main" id="{4EB0020B-1947-4275-8519-C9B71D6A7CB8}"/>
               </a:ext>
             </a:extLst>
           </p:cNvPr>
@@ -29860,7 +29922,7 @@
           <p:cNvPr id="2" name="text-1">
             <a:extLst xmlns:a="http://schemas.openxmlformats.org/drawingml/2006/main">
               <a:ext uri="{FF2B5EF4-FFF2-40B4-BE49-F238E27FC236}">
-                <a16:creationId xmlns:a16="http://schemas.microsoft.com/office/drawing/2014/main" id="{17B83834-2E55-47DB-9A74-6156FC24632B}"/>
+                <a16:creationId xmlns:a16="http://schemas.microsoft.com/office/drawing/2014/main" id="{18BFA060-C2BA-4860-915D-97EF442BB1EE}"/>
               </a:ext>
             </a:extLst>
           </p:cNvPr>
@@ -29922,7 +29984,7 @@
           <p:cNvPr id="3" name="text-2">
             <a:extLst xmlns:a="http://schemas.openxmlformats.org/drawingml/2006/main">
               <a:ext uri="{FF2B5EF4-FFF2-40B4-BE49-F238E27FC236}">
-                <a16:creationId xmlns:a16="http://schemas.microsoft.com/office/drawing/2014/main" id="{F827C876-C61F-4D6C-9EFC-BDC550EED9E6}"/>
+                <a16:creationId xmlns:a16="http://schemas.microsoft.com/office/drawing/2014/main" id="{99ABC178-9C76-4A16-9B1C-126570757D4F}"/>
               </a:ext>
             </a:extLst>
           </p:cNvPr>
@@ -30014,7 +30076,7 @@
           <p:cNvPr id="4" name="text-3">
             <a:extLst xmlns:a="http://schemas.openxmlformats.org/drawingml/2006/main">
               <a:ext uri="{FF2B5EF4-FFF2-40B4-BE49-F238E27FC236}">
-                <a16:creationId xmlns:a16="http://schemas.microsoft.com/office/drawing/2014/main" id="{6D89576F-642C-45CE-AA11-89563DB10CF6}"/>
+                <a16:creationId xmlns:a16="http://schemas.microsoft.com/office/drawing/2014/main" id="{EC57AE77-65A1-4024-AE75-6C93D2D364DC}"/>
               </a:ext>
             </a:extLst>
           </p:cNvPr>
@@ -30076,7 +30138,7 @@
           <p:cNvPr id="5" name="">
             <a:extLst xmlns:a="http://schemas.openxmlformats.org/drawingml/2006/main">
               <a:ext uri="{FF2B5EF4-FFF2-40B4-BE49-F238E27FC236}">
-                <a16:creationId xmlns:a16="http://schemas.microsoft.com/office/drawing/2014/main" id="{9FE5EAFF-0523-4663-A684-7D88C7F0976E}"/>
+                <a16:creationId xmlns:a16="http://schemas.microsoft.com/office/drawing/2014/main" id="{668E122F-26D7-46FC-AEC3-E0F04590526A}"/>
               </a:ext>
             </a:extLst>
           </p:cNvPr>
@@ -30107,7 +30169,7 @@
           <p:cNvPr id="6" name="text-5">
             <a:extLst xmlns:a="http://schemas.openxmlformats.org/drawingml/2006/main">
               <a:ext uri="{FF2B5EF4-FFF2-40B4-BE49-F238E27FC236}">
-                <a16:creationId xmlns:a16="http://schemas.microsoft.com/office/drawing/2014/main" id="{C105B9D3-A5E0-4A0B-A532-E0A8259A9736}"/>
+                <a16:creationId xmlns:a16="http://schemas.microsoft.com/office/drawing/2014/main" id="{05325785-B391-463E-BD96-CB47C862AE61}"/>
               </a:ext>
             </a:extLst>
           </p:cNvPr>
@@ -30169,7 +30231,7 @@
           <p:cNvPr id="7" name="text-6">
             <a:extLst xmlns:a="http://schemas.openxmlformats.org/drawingml/2006/main">
               <a:ext uri="{FF2B5EF4-FFF2-40B4-BE49-F238E27FC236}">
-                <a16:creationId xmlns:a16="http://schemas.microsoft.com/office/drawing/2014/main" id="{5E9E82AB-ABA0-4871-BFC8-96150BCFEFA9}"/>
+                <a16:creationId xmlns:a16="http://schemas.microsoft.com/office/drawing/2014/main" id="{D5BB2F15-71C7-418A-9C19-07C636FB96BF}"/>
               </a:ext>
             </a:extLst>
           </p:cNvPr>
@@ -30229,7 +30291,7 @@
     </p:spTree>
     <p:extLst>
       <p:ext uri="{BB962C8B-B14F-4D97-AF65-F5344CB8AC3E}">
-        <p14:creationId xmlns:p14="http://schemas.microsoft.com/office/powerpoint/2010/main" val="2038745873"/>
+        <p14:creationId xmlns:p14="http://schemas.microsoft.com/office/powerpoint/2010/main" val="2127248606"/>
       </p:ext>
     </p:extLst>
   </p:cSld>
@@ -30260,7 +30322,7 @@
           <p:cNvPr id="11" name="text-0">
             <a:extLst xmlns:a="http://schemas.openxmlformats.org/drawingml/2006/main">
               <a:ext uri="{FF2B5EF4-FFF2-40B4-BE49-F238E27FC236}">
-                <a16:creationId xmlns:a16="http://schemas.microsoft.com/office/drawing/2014/main" id="{770CD2CB-7B44-4825-8408-0D246DCF5475}"/>
+                <a16:creationId xmlns:a16="http://schemas.microsoft.com/office/drawing/2014/main" id="{FC8003B7-BB94-4523-B481-8471DFA5F462}"/>
               </a:ext>
             </a:extLst>
           </p:cNvPr>
@@ -30322,7 +30384,7 @@
           <p:cNvPr id="2" name="text-1">
             <a:extLst xmlns:a="http://schemas.openxmlformats.org/drawingml/2006/main">
               <a:ext uri="{FF2B5EF4-FFF2-40B4-BE49-F238E27FC236}">
-                <a16:creationId xmlns:a16="http://schemas.microsoft.com/office/drawing/2014/main" id="{4E24E81E-688C-4CF9-AD45-DFE1815C4C76}"/>
+                <a16:creationId xmlns:a16="http://schemas.microsoft.com/office/drawing/2014/main" id="{C9CEEC3D-EA60-4191-B046-AA2244ECDA6A}"/>
               </a:ext>
             </a:extLst>
           </p:cNvPr>
@@ -30384,7 +30446,7 @@
           <p:cNvPr id="3" name="text-2">
             <a:extLst xmlns:a="http://schemas.openxmlformats.org/drawingml/2006/main">
               <a:ext uri="{FF2B5EF4-FFF2-40B4-BE49-F238E27FC236}">
-                <a16:creationId xmlns:a16="http://schemas.microsoft.com/office/drawing/2014/main" id="{E350C442-4BB1-4BA7-8A27-1D0427824867}"/>
+                <a16:creationId xmlns:a16="http://schemas.microsoft.com/office/drawing/2014/main" id="{0A730EE1-0186-4F60-9044-2750BB986280}"/>
               </a:ext>
             </a:extLst>
           </p:cNvPr>
@@ -30446,7 +30508,7 @@
           <p:cNvPr id="4" name="text-3">
             <a:extLst xmlns:a="http://schemas.openxmlformats.org/drawingml/2006/main">
               <a:ext uri="{FF2B5EF4-FFF2-40B4-BE49-F238E27FC236}">
-                <a16:creationId xmlns:a16="http://schemas.microsoft.com/office/drawing/2014/main" id="{CEF58783-52B5-4518-9B44-D23A2B67E640}"/>
+                <a16:creationId xmlns:a16="http://schemas.microsoft.com/office/drawing/2014/main" id="{F5BCB973-655D-4C27-997A-759765988F6C}"/>
               </a:ext>
             </a:extLst>
           </p:cNvPr>
@@ -30508,7 +30570,7 @@
           <p:cNvPr id="5" name="text-4">
             <a:extLst xmlns:a="http://schemas.openxmlformats.org/drawingml/2006/main">
               <a:ext uri="{FF2B5EF4-FFF2-40B4-BE49-F238E27FC236}">
-                <a16:creationId xmlns:a16="http://schemas.microsoft.com/office/drawing/2014/main" id="{828B0275-09E0-4328-9572-A41B780884EC}"/>
+                <a16:creationId xmlns:a16="http://schemas.microsoft.com/office/drawing/2014/main" id="{70B0305D-0175-4132-A883-0C7387BF07D1}"/>
               </a:ext>
             </a:extLst>
           </p:cNvPr>
@@ -30570,7 +30632,7 @@
           <p:cNvPr id="6" name="text-5">
             <a:extLst xmlns:a="http://schemas.openxmlformats.org/drawingml/2006/main">
               <a:ext uri="{FF2B5EF4-FFF2-40B4-BE49-F238E27FC236}">
-                <a16:creationId xmlns:a16="http://schemas.microsoft.com/office/drawing/2014/main" id="{8B1FDF9E-E6D1-41BB-81D9-678BFF807C64}"/>
+                <a16:creationId xmlns:a16="http://schemas.microsoft.com/office/drawing/2014/main" id="{126228D3-8848-4C01-806E-862ED898C78B}"/>
               </a:ext>
             </a:extLst>
           </p:cNvPr>
@@ -30632,7 +30694,7 @@
           <p:cNvPr id="7" name="text-6">
             <a:extLst xmlns:a="http://schemas.openxmlformats.org/drawingml/2006/main">
               <a:ext uri="{FF2B5EF4-FFF2-40B4-BE49-F238E27FC236}">
-                <a16:creationId xmlns:a16="http://schemas.microsoft.com/office/drawing/2014/main" id="{1DC54AAF-6C78-4B75-8D61-9FD80DBB0BC0}"/>
+                <a16:creationId xmlns:a16="http://schemas.microsoft.com/office/drawing/2014/main" id="{C2CFEE7A-44DA-4D11-AE43-1912E739B2A7}"/>
               </a:ext>
             </a:extLst>
           </p:cNvPr>
@@ -30694,7 +30756,7 @@
           <p:cNvPr id="8" name="">
             <a:extLst xmlns:a="http://schemas.openxmlformats.org/drawingml/2006/main">
               <a:ext uri="{FF2B5EF4-FFF2-40B4-BE49-F238E27FC236}">
-                <a16:creationId xmlns:a16="http://schemas.microsoft.com/office/drawing/2014/main" id="{92F42101-6249-4532-BFCA-46B86AD8EF6A}"/>
+                <a16:creationId xmlns:a16="http://schemas.microsoft.com/office/drawing/2014/main" id="{10991B7D-3644-4BB3-ABF6-2F8FA90A9527}"/>
               </a:ext>
             </a:extLst>
           </p:cNvPr>
@@ -30725,7 +30787,7 @@
           <p:cNvPr id="9" name="text-8">
             <a:extLst xmlns:a="http://schemas.openxmlformats.org/drawingml/2006/main">
               <a:ext uri="{FF2B5EF4-FFF2-40B4-BE49-F238E27FC236}">
-                <a16:creationId xmlns:a16="http://schemas.microsoft.com/office/drawing/2014/main" id="{50B30920-B38A-4EB6-9726-B9E6A3B470AA}"/>
+                <a16:creationId xmlns:a16="http://schemas.microsoft.com/office/drawing/2014/main" id="{5F7CBDCE-EAB3-4EFF-9E41-DB2C3B299FCF}"/>
               </a:ext>
             </a:extLst>
           </p:cNvPr>
@@ -30787,7 +30849,7 @@
           <p:cNvPr id="10" name="text-9">
             <a:extLst xmlns:a="http://schemas.openxmlformats.org/drawingml/2006/main">
               <a:ext uri="{FF2B5EF4-FFF2-40B4-BE49-F238E27FC236}">
-                <a16:creationId xmlns:a16="http://schemas.microsoft.com/office/drawing/2014/main" id="{5BC560C3-35FA-407F-B13F-704D410760C9}"/>
+                <a16:creationId xmlns:a16="http://schemas.microsoft.com/office/drawing/2014/main" id="{40307BA0-AA00-49DE-A645-174C13B6BF61}"/>
               </a:ext>
             </a:extLst>
           </p:cNvPr>
@@ -30847,7 +30909,7 @@
     </p:spTree>
     <p:extLst>
       <p:ext uri="{BB962C8B-B14F-4D97-AF65-F5344CB8AC3E}">
-        <p14:creationId xmlns:p14="http://schemas.microsoft.com/office/powerpoint/2010/main" val="486520264"/>
+        <p14:creationId xmlns:p14="http://schemas.microsoft.com/office/powerpoint/2010/main" val="1887404162"/>
       </p:ext>
     </p:extLst>
   </p:cSld>
@@ -30878,7 +30940,7 @@
           <p:cNvPr id="13" name="text-0">
             <a:extLst xmlns:a="http://schemas.openxmlformats.org/drawingml/2006/main">
               <a:ext uri="{FF2B5EF4-FFF2-40B4-BE49-F238E27FC236}">
-                <a16:creationId xmlns:a16="http://schemas.microsoft.com/office/drawing/2014/main" id="{8AFEF658-4785-48CB-BFF4-196FB88D81A6}"/>
+                <a16:creationId xmlns:a16="http://schemas.microsoft.com/office/drawing/2014/main" id="{B62A3B17-F1E0-4463-9E5A-6EE512B9EE8F}"/>
               </a:ext>
             </a:extLst>
           </p:cNvPr>
@@ -30940,7 +31002,7 @@
           <p:cNvPr id="2" name="text-1">
             <a:extLst xmlns:a="http://schemas.openxmlformats.org/drawingml/2006/main">
               <a:ext uri="{FF2B5EF4-FFF2-40B4-BE49-F238E27FC236}">
-                <a16:creationId xmlns:a16="http://schemas.microsoft.com/office/drawing/2014/main" id="{49059B94-3C76-4630-B375-DFFA7CCAFC4A}"/>
+                <a16:creationId xmlns:a16="http://schemas.microsoft.com/office/drawing/2014/main" id="{D7AD590D-CF21-4790-81AD-6E9644527402}"/>
               </a:ext>
             </a:extLst>
           </p:cNvPr>
@@ -31002,7 +31064,7 @@
           <p:cNvPr id="3" name="text-2">
             <a:extLst xmlns:a="http://schemas.openxmlformats.org/drawingml/2006/main">
               <a:ext uri="{FF2B5EF4-FFF2-40B4-BE49-F238E27FC236}">
-                <a16:creationId xmlns:a16="http://schemas.microsoft.com/office/drawing/2014/main" id="{058EBE96-36E5-4D17-835D-0E8A8A61C0A2}"/>
+                <a16:creationId xmlns:a16="http://schemas.microsoft.com/office/drawing/2014/main" id="{0E2F6428-A522-4EB9-8E0B-C92126D7429E}"/>
               </a:ext>
             </a:extLst>
           </p:cNvPr>
@@ -31064,7 +31126,7 @@
           <p:cNvPr id="4" name="text-3">
             <a:extLst xmlns:a="http://schemas.openxmlformats.org/drawingml/2006/main">
               <a:ext uri="{FF2B5EF4-FFF2-40B4-BE49-F238E27FC236}">
-                <a16:creationId xmlns:a16="http://schemas.microsoft.com/office/drawing/2014/main" id="{6B5E5CE8-1BEB-4416-8914-77D4FE4A37FF}"/>
+                <a16:creationId xmlns:a16="http://schemas.microsoft.com/office/drawing/2014/main" id="{23C7432E-462C-44F6-8E05-2E30BC812B92}"/>
               </a:ext>
             </a:extLst>
           </p:cNvPr>
@@ -31126,7 +31188,7 @@
           <p:cNvPr id="5" name="text-4">
             <a:extLst xmlns:a="http://schemas.openxmlformats.org/drawingml/2006/main">
               <a:ext uri="{FF2B5EF4-FFF2-40B4-BE49-F238E27FC236}">
-                <a16:creationId xmlns:a16="http://schemas.microsoft.com/office/drawing/2014/main" id="{587919EB-D2FA-4E77-B13B-BE0D9D700A0E}"/>
+                <a16:creationId xmlns:a16="http://schemas.microsoft.com/office/drawing/2014/main" id="{53CF73C1-84AA-4F14-BF91-7404ADBF5DB8}"/>
               </a:ext>
             </a:extLst>
           </p:cNvPr>
@@ -31188,7 +31250,7 @@
           <p:cNvPr id="6" name="text-5">
             <a:extLst xmlns:a="http://schemas.openxmlformats.org/drawingml/2006/main">
               <a:ext uri="{FF2B5EF4-FFF2-40B4-BE49-F238E27FC236}">
-                <a16:creationId xmlns:a16="http://schemas.microsoft.com/office/drawing/2014/main" id="{9710262A-E96C-4944-ABAB-EC0B1632E87A}"/>
+                <a16:creationId xmlns:a16="http://schemas.microsoft.com/office/drawing/2014/main" id="{44F31D59-BD0A-4650-B2E7-C589F6942CAF}"/>
               </a:ext>
             </a:extLst>
           </p:cNvPr>
@@ -31250,7 +31312,7 @@
           <p:cNvPr id="7" name="text-6">
             <a:extLst xmlns:a="http://schemas.openxmlformats.org/drawingml/2006/main">
               <a:ext uri="{FF2B5EF4-FFF2-40B4-BE49-F238E27FC236}">
-                <a16:creationId xmlns:a16="http://schemas.microsoft.com/office/drawing/2014/main" id="{8D7325D4-6F11-4630-8041-DAB187B25EA7}"/>
+                <a16:creationId xmlns:a16="http://schemas.microsoft.com/office/drawing/2014/main" id="{482C2C03-CDD4-420A-BCFB-8D245FCDE308}"/>
               </a:ext>
             </a:extLst>
           </p:cNvPr>
@@ -31312,7 +31374,7 @@
           <p:cNvPr id="8" name="text-7">
             <a:extLst xmlns:a="http://schemas.openxmlformats.org/drawingml/2006/main">
               <a:ext uri="{FF2B5EF4-FFF2-40B4-BE49-F238E27FC236}">
-                <a16:creationId xmlns:a16="http://schemas.microsoft.com/office/drawing/2014/main" id="{B1E444AE-938D-4207-8BFB-2A99E639AB63}"/>
+                <a16:creationId xmlns:a16="http://schemas.microsoft.com/office/drawing/2014/main" id="{0F5AEE59-429B-4D84-A0DB-C9A34B4C4025}"/>
               </a:ext>
             </a:extLst>
           </p:cNvPr>
@@ -31374,7 +31436,7 @@
           <p:cNvPr id="9" name="text-8">
             <a:extLst xmlns:a="http://schemas.openxmlformats.org/drawingml/2006/main">
               <a:ext uri="{FF2B5EF4-FFF2-40B4-BE49-F238E27FC236}">
-                <a16:creationId xmlns:a16="http://schemas.microsoft.com/office/drawing/2014/main" id="{5EB2612C-23CD-4145-AFF6-64E2195835EE}"/>
+                <a16:creationId xmlns:a16="http://schemas.microsoft.com/office/drawing/2014/main" id="{52AD8D4A-FB0F-4414-9A34-6B343EC8375E}"/>
               </a:ext>
             </a:extLst>
           </p:cNvPr>
@@ -31436,7 +31498,7 @@
           <p:cNvPr id="10" name="">
             <a:extLst xmlns:a="http://schemas.openxmlformats.org/drawingml/2006/main">
               <a:ext uri="{FF2B5EF4-FFF2-40B4-BE49-F238E27FC236}">
-                <a16:creationId xmlns:a16="http://schemas.microsoft.com/office/drawing/2014/main" id="{C9B38CDD-BA08-45FC-899F-8EDBABEA3324}"/>
+                <a16:creationId xmlns:a16="http://schemas.microsoft.com/office/drawing/2014/main" id="{ED5B1359-E90F-4E58-B5EB-9E1C0DADA729}"/>
               </a:ext>
             </a:extLst>
           </p:cNvPr>
@@ -31467,7 +31529,7 @@
           <p:cNvPr id="11" name="text-10">
             <a:extLst xmlns:a="http://schemas.openxmlformats.org/drawingml/2006/main">
               <a:ext uri="{FF2B5EF4-FFF2-40B4-BE49-F238E27FC236}">
-                <a16:creationId xmlns:a16="http://schemas.microsoft.com/office/drawing/2014/main" id="{45C4A817-3578-4EC5-AE7D-4F97F7117012}"/>
+                <a16:creationId xmlns:a16="http://schemas.microsoft.com/office/drawing/2014/main" id="{C9758AD6-CD86-47CB-A82D-0E80D16BA716}"/>
               </a:ext>
             </a:extLst>
           </p:cNvPr>
@@ -31529,7 +31591,7 @@
           <p:cNvPr id="12" name="text-11">
             <a:extLst xmlns:a="http://schemas.openxmlformats.org/drawingml/2006/main">
               <a:ext uri="{FF2B5EF4-FFF2-40B4-BE49-F238E27FC236}">
-                <a16:creationId xmlns:a16="http://schemas.microsoft.com/office/drawing/2014/main" id="{4EC65EE2-1F84-4848-B981-2363C270A475}"/>
+                <a16:creationId xmlns:a16="http://schemas.microsoft.com/office/drawing/2014/main" id="{40B7035A-BE72-4F00-8BC3-517693D79295}"/>
               </a:ext>
             </a:extLst>
           </p:cNvPr>
@@ -31589,7 +31651,7 @@
     </p:spTree>
     <p:extLst>
       <p:ext uri="{BB962C8B-B14F-4D97-AF65-F5344CB8AC3E}">
-        <p14:creationId xmlns:p14="http://schemas.microsoft.com/office/powerpoint/2010/main" val="1414796897"/>
+        <p14:creationId xmlns:p14="http://schemas.microsoft.com/office/powerpoint/2010/main" val="113794576"/>
       </p:ext>
     </p:extLst>
   </p:cSld>
@@ -31620,7 +31682,7 @@
           <p:cNvPr id="8" name="text-0">
             <a:extLst xmlns:a="http://schemas.openxmlformats.org/drawingml/2006/main">
               <a:ext uri="{FF2B5EF4-FFF2-40B4-BE49-F238E27FC236}">
-                <a16:creationId xmlns:a16="http://schemas.microsoft.com/office/drawing/2014/main" id="{768AF930-DCC1-4AF1-9E43-762E131A3670}"/>
+                <a16:creationId xmlns:a16="http://schemas.microsoft.com/office/drawing/2014/main" id="{E84E9E2B-C7DD-4EE2-B07E-3EA03E372DAE}"/>
               </a:ext>
             </a:extLst>
           </p:cNvPr>
@@ -31682,7 +31744,7 @@
           <p:cNvPr id="2" name="text-1">
             <a:extLst xmlns:a="http://schemas.openxmlformats.org/drawingml/2006/main">
               <a:ext uri="{FF2B5EF4-FFF2-40B4-BE49-F238E27FC236}">
-                <a16:creationId xmlns:a16="http://schemas.microsoft.com/office/drawing/2014/main" id="{8F2D5A10-75F3-48EF-8CA8-5C34EBFFCF8B}"/>
+                <a16:creationId xmlns:a16="http://schemas.microsoft.com/office/drawing/2014/main" id="{62731829-0641-4EFD-8EE5-9C3F44ED202C}"/>
               </a:ext>
             </a:extLst>
           </p:cNvPr>
@@ -31744,7 +31806,7 @@
           <p:cNvPr id="3" name="text-2">
             <a:extLst xmlns:a="http://schemas.openxmlformats.org/drawingml/2006/main">
               <a:ext uri="{FF2B5EF4-FFF2-40B4-BE49-F238E27FC236}">
-                <a16:creationId xmlns:a16="http://schemas.microsoft.com/office/drawing/2014/main" id="{5A0D716E-AB50-4E2D-963A-1FE3E701F4CA}"/>
+                <a16:creationId xmlns:a16="http://schemas.microsoft.com/office/drawing/2014/main" id="{0D490EBD-33F2-4623-96AC-7AD5A9EFEE06}"/>
               </a:ext>
             </a:extLst>
           </p:cNvPr>
@@ -31806,7 +31868,7 @@
           <p:cNvPr id="4" name="text-3">
             <a:extLst xmlns:a="http://schemas.openxmlformats.org/drawingml/2006/main">
               <a:ext uri="{FF2B5EF4-FFF2-40B4-BE49-F238E27FC236}">
-                <a16:creationId xmlns:a16="http://schemas.microsoft.com/office/drawing/2014/main" id="{30CC733D-42B1-41BB-B0EC-3D72AC0A420F}"/>
+                <a16:creationId xmlns:a16="http://schemas.microsoft.com/office/drawing/2014/main" id="{D5DFD897-87B7-4782-A9EE-676B5A2448CE}"/>
               </a:ext>
             </a:extLst>
           </p:cNvPr>
@@ -31898,7 +31960,7 @@
           <p:cNvPr id="5" name="">
             <a:extLst xmlns:a="http://schemas.openxmlformats.org/drawingml/2006/main">
               <a:ext uri="{FF2B5EF4-FFF2-40B4-BE49-F238E27FC236}">
-                <a16:creationId xmlns:a16="http://schemas.microsoft.com/office/drawing/2014/main" id="{DC4EC41E-ADC6-4093-86F1-C71B1488C395}"/>
+                <a16:creationId xmlns:a16="http://schemas.microsoft.com/office/drawing/2014/main" id="{A4CA7DEE-2707-4235-B13E-6A9B49D184A9}"/>
               </a:ext>
             </a:extLst>
           </p:cNvPr>
@@ -31929,7 +31991,7 @@
           <p:cNvPr id="6" name="text-5">
             <a:extLst xmlns:a="http://schemas.openxmlformats.org/drawingml/2006/main">
               <a:ext uri="{FF2B5EF4-FFF2-40B4-BE49-F238E27FC236}">
-                <a16:creationId xmlns:a16="http://schemas.microsoft.com/office/drawing/2014/main" id="{9750599A-707F-45F6-9510-18EA9864CA5C}"/>
+                <a16:creationId xmlns:a16="http://schemas.microsoft.com/office/drawing/2014/main" id="{06A6980A-057E-4BD2-850B-8C5CFF83E87B}"/>
               </a:ext>
             </a:extLst>
           </p:cNvPr>
@@ -31991,7 +32053,7 @@
           <p:cNvPr id="7" name="text-6">
             <a:extLst xmlns:a="http://schemas.openxmlformats.org/drawingml/2006/main">
               <a:ext uri="{FF2B5EF4-FFF2-40B4-BE49-F238E27FC236}">
-                <a16:creationId xmlns:a16="http://schemas.microsoft.com/office/drawing/2014/main" id="{1535F1D2-444A-4208-BA03-324A46EE8F15}"/>
+                <a16:creationId xmlns:a16="http://schemas.microsoft.com/office/drawing/2014/main" id="{2DC374AC-2B3F-46F0-900F-B3FCD010C220}"/>
               </a:ext>
             </a:extLst>
           </p:cNvPr>
@@ -32051,7 +32113,7 @@
     </p:spTree>
     <p:extLst>
       <p:ext uri="{BB962C8B-B14F-4D97-AF65-F5344CB8AC3E}">
-        <p14:creationId xmlns:p14="http://schemas.microsoft.com/office/powerpoint/2010/main" val="407868795"/>
+        <p14:creationId xmlns:p14="http://schemas.microsoft.com/office/powerpoint/2010/main" val="265063086"/>
       </p:ext>
     </p:extLst>
   </p:cSld>
@@ -32082,7 +32144,7 @@
           <p:cNvPr id="8" name="text-0">
             <a:extLst xmlns:a="http://schemas.openxmlformats.org/drawingml/2006/main">
               <a:ext uri="{FF2B5EF4-FFF2-40B4-BE49-F238E27FC236}">
-                <a16:creationId xmlns:a16="http://schemas.microsoft.com/office/drawing/2014/main" id="{FDC7B3B9-D448-49BA-9F50-D3013EF121CD}"/>
+                <a16:creationId xmlns:a16="http://schemas.microsoft.com/office/drawing/2014/main" id="{A801F037-0F53-4B39-9EF1-2ADA6A55A131}"/>
               </a:ext>
             </a:extLst>
           </p:cNvPr>
@@ -32144,7 +32206,7 @@
           <p:cNvPr id="2" name="text-1">
             <a:extLst xmlns:a="http://schemas.openxmlformats.org/drawingml/2006/main">
               <a:ext uri="{FF2B5EF4-FFF2-40B4-BE49-F238E27FC236}">
-                <a16:creationId xmlns:a16="http://schemas.microsoft.com/office/drawing/2014/main" id="{F586C6BD-CD7F-4D86-BD15-BBC0E3C1EDC5}"/>
+                <a16:creationId xmlns:a16="http://schemas.microsoft.com/office/drawing/2014/main" id="{E3D01B19-5333-4CFC-834D-44784DEB204E}"/>
               </a:ext>
             </a:extLst>
           </p:cNvPr>
@@ -32206,7 +32268,7 @@
           <p:cNvPr id="3" name="text-2">
             <a:extLst xmlns:a="http://schemas.openxmlformats.org/drawingml/2006/main">
               <a:ext uri="{FF2B5EF4-FFF2-40B4-BE49-F238E27FC236}">
-                <a16:creationId xmlns:a16="http://schemas.microsoft.com/office/drawing/2014/main" id="{582AC8F3-34FF-496C-85BC-800D577E32CF}"/>
+                <a16:creationId xmlns:a16="http://schemas.microsoft.com/office/drawing/2014/main" id="{21048108-DE53-4FF6-AFF6-631E28874E9A}"/>
               </a:ext>
             </a:extLst>
           </p:cNvPr>
@@ -32298,7 +32360,7 @@
           <p:cNvPr id="4" name="text-3">
             <a:extLst xmlns:a="http://schemas.openxmlformats.org/drawingml/2006/main">
               <a:ext uri="{FF2B5EF4-FFF2-40B4-BE49-F238E27FC236}">
-                <a16:creationId xmlns:a16="http://schemas.microsoft.com/office/drawing/2014/main" id="{1697B6EA-75C8-42F6-A4F6-C43C6587D85E}"/>
+                <a16:creationId xmlns:a16="http://schemas.microsoft.com/office/drawing/2014/main" id="{1514B1E9-8746-4B5E-B74A-2543ADFC22A5}"/>
               </a:ext>
             </a:extLst>
           </p:cNvPr>
@@ -32360,7 +32422,7 @@
           <p:cNvPr id="5" name="">
             <a:extLst xmlns:a="http://schemas.openxmlformats.org/drawingml/2006/main">
               <a:ext uri="{FF2B5EF4-FFF2-40B4-BE49-F238E27FC236}">
-                <a16:creationId xmlns:a16="http://schemas.microsoft.com/office/drawing/2014/main" id="{28C1994E-9142-4605-B207-D53196F34CA4}"/>
+                <a16:creationId xmlns:a16="http://schemas.microsoft.com/office/drawing/2014/main" id="{9DB24AE6-ACA3-4AB4-9BE2-47DBEEB72F3B}"/>
               </a:ext>
             </a:extLst>
           </p:cNvPr>
@@ -32391,7 +32453,7 @@
           <p:cNvPr id="6" name="text-5">
             <a:extLst xmlns:a="http://schemas.openxmlformats.org/drawingml/2006/main">
               <a:ext uri="{FF2B5EF4-FFF2-40B4-BE49-F238E27FC236}">
-                <a16:creationId xmlns:a16="http://schemas.microsoft.com/office/drawing/2014/main" id="{C708A8C0-D0C0-438D-8826-8BEF747BFA3D}"/>
+                <a16:creationId xmlns:a16="http://schemas.microsoft.com/office/drawing/2014/main" id="{17253647-6A84-44FB-9338-472C55781355}"/>
               </a:ext>
             </a:extLst>
           </p:cNvPr>
@@ -32453,7 +32515,7 @@
           <p:cNvPr id="7" name="text-6">
             <a:extLst xmlns:a="http://schemas.openxmlformats.org/drawingml/2006/main">
               <a:ext uri="{FF2B5EF4-FFF2-40B4-BE49-F238E27FC236}">
-                <a16:creationId xmlns:a16="http://schemas.microsoft.com/office/drawing/2014/main" id="{C05F588E-780D-4335-AB6B-84223E01D876}"/>
+                <a16:creationId xmlns:a16="http://schemas.microsoft.com/office/drawing/2014/main" id="{1BBC7374-6837-4BD3-9735-50545390F870}"/>
               </a:ext>
             </a:extLst>
           </p:cNvPr>
@@ -32513,7 +32575,7 @@
     </p:spTree>
     <p:extLst>
       <p:ext uri="{BB962C8B-B14F-4D97-AF65-F5344CB8AC3E}">
-        <p14:creationId xmlns:p14="http://schemas.microsoft.com/office/powerpoint/2010/main" val="772610764"/>
+        <p14:creationId xmlns:p14="http://schemas.microsoft.com/office/powerpoint/2010/main" val="1743053601"/>
       </p:ext>
     </p:extLst>
   </p:cSld>
@@ -32544,7 +32606,7 @@
           <p:cNvPr id="10" name="text-0">
             <a:extLst xmlns:a="http://schemas.openxmlformats.org/drawingml/2006/main">
               <a:ext uri="{FF2B5EF4-FFF2-40B4-BE49-F238E27FC236}">
-                <a16:creationId xmlns:a16="http://schemas.microsoft.com/office/drawing/2014/main" id="{9C3B7548-AC2E-4B25-B6F5-8E83FE8EB773}"/>
+                <a16:creationId xmlns:a16="http://schemas.microsoft.com/office/drawing/2014/main" id="{70E114D4-3BBC-4C70-9A7A-653843D89882}"/>
               </a:ext>
             </a:extLst>
           </p:cNvPr>
@@ -32606,7 +32668,7 @@
           <p:cNvPr id="2" name="text-1">
             <a:extLst xmlns:a="http://schemas.openxmlformats.org/drawingml/2006/main">
               <a:ext uri="{FF2B5EF4-FFF2-40B4-BE49-F238E27FC236}">
-                <a16:creationId xmlns:a16="http://schemas.microsoft.com/office/drawing/2014/main" id="{FED993F9-D79C-4A64-877B-5DDDF57EBDE6}"/>
+                <a16:creationId xmlns:a16="http://schemas.microsoft.com/office/drawing/2014/main" id="{12FABCC0-E4AB-4E82-B0BE-342216CEE6C6}"/>
               </a:ext>
             </a:extLst>
           </p:cNvPr>
@@ -32668,7 +32730,7 @@
           <p:cNvPr id="3" name="text-2">
             <a:extLst xmlns:a="http://schemas.openxmlformats.org/drawingml/2006/main">
               <a:ext uri="{FF2B5EF4-FFF2-40B4-BE49-F238E27FC236}">
-                <a16:creationId xmlns:a16="http://schemas.microsoft.com/office/drawing/2014/main" id="{7C159B4B-56DD-4C55-BA50-321C166BD77B}"/>
+                <a16:creationId xmlns:a16="http://schemas.microsoft.com/office/drawing/2014/main" id="{5E8625A3-B49C-477A-9832-415B09913861}"/>
               </a:ext>
             </a:extLst>
           </p:cNvPr>
@@ -32730,7 +32792,7 @@
           <p:cNvPr id="4" name="text-3">
             <a:extLst xmlns:a="http://schemas.openxmlformats.org/drawingml/2006/main">
               <a:ext uri="{FF2B5EF4-FFF2-40B4-BE49-F238E27FC236}">
-                <a16:creationId xmlns:a16="http://schemas.microsoft.com/office/drawing/2014/main" id="{D2ECAFB6-EF0C-4CBD-9E50-5B285EFA9B9A}"/>
+                <a16:creationId xmlns:a16="http://schemas.microsoft.com/office/drawing/2014/main" id="{EBF8ED16-2A5A-4B16-81F0-157D5D0AAE93}"/>
               </a:ext>
             </a:extLst>
           </p:cNvPr>
@@ -32792,7 +32854,7 @@
           <p:cNvPr id="5" name="text-4">
             <a:extLst xmlns:a="http://schemas.openxmlformats.org/drawingml/2006/main">
               <a:ext uri="{FF2B5EF4-FFF2-40B4-BE49-F238E27FC236}">
-                <a16:creationId xmlns:a16="http://schemas.microsoft.com/office/drawing/2014/main" id="{4556613B-0942-4018-9404-85BBA6FDB754}"/>
+                <a16:creationId xmlns:a16="http://schemas.microsoft.com/office/drawing/2014/main" id="{9C924134-D71A-452E-A9D7-7B43C018D444}"/>
               </a:ext>
             </a:extLst>
           </p:cNvPr>
@@ -32854,7 +32916,7 @@
           <p:cNvPr id="6" name="text-5">
             <a:extLst xmlns:a="http://schemas.openxmlformats.org/drawingml/2006/main">
               <a:ext uri="{FF2B5EF4-FFF2-40B4-BE49-F238E27FC236}">
-                <a16:creationId xmlns:a16="http://schemas.microsoft.com/office/drawing/2014/main" id="{4DABFB87-02E3-4320-BB3E-4774C48F2669}"/>
+                <a16:creationId xmlns:a16="http://schemas.microsoft.com/office/drawing/2014/main" id="{5C017FF7-EA35-438B-AECF-A3FE670CC2AE}"/>
               </a:ext>
             </a:extLst>
           </p:cNvPr>
@@ -32916,7 +32978,7 @@
           <p:cNvPr id="7" name="">
             <a:extLst xmlns:a="http://schemas.openxmlformats.org/drawingml/2006/main">
               <a:ext uri="{FF2B5EF4-FFF2-40B4-BE49-F238E27FC236}">
-                <a16:creationId xmlns:a16="http://schemas.microsoft.com/office/drawing/2014/main" id="{09C95DEB-3265-42D0-80C2-9CE25B602ED9}"/>
+                <a16:creationId xmlns:a16="http://schemas.microsoft.com/office/drawing/2014/main" id="{0A6F0936-BA22-45EC-9F9A-C1EAF258F42D}"/>
               </a:ext>
             </a:extLst>
           </p:cNvPr>
@@ -32947,7 +33009,7 @@
           <p:cNvPr id="8" name="text-7">
             <a:extLst xmlns:a="http://schemas.openxmlformats.org/drawingml/2006/main">
               <a:ext uri="{FF2B5EF4-FFF2-40B4-BE49-F238E27FC236}">
-                <a16:creationId xmlns:a16="http://schemas.microsoft.com/office/drawing/2014/main" id="{968D347F-B81F-456C-AE8B-8009BA810AC6}"/>
+                <a16:creationId xmlns:a16="http://schemas.microsoft.com/office/drawing/2014/main" id="{35B52650-F447-49FB-802E-C55CBFA727B1}"/>
               </a:ext>
             </a:extLst>
           </p:cNvPr>
@@ -33009,7 +33071,7 @@
           <p:cNvPr id="9" name="text-8">
             <a:extLst xmlns:a="http://schemas.openxmlformats.org/drawingml/2006/main">
               <a:ext uri="{FF2B5EF4-FFF2-40B4-BE49-F238E27FC236}">
-                <a16:creationId xmlns:a16="http://schemas.microsoft.com/office/drawing/2014/main" id="{521BF955-1189-44FC-84EA-8A08E287A2B5}"/>
+                <a16:creationId xmlns:a16="http://schemas.microsoft.com/office/drawing/2014/main" id="{7F71E183-1CA1-4C15-A54E-9FA7EF917BB0}"/>
               </a:ext>
             </a:extLst>
           </p:cNvPr>
@@ -33069,7 +33131,7 @@
     </p:spTree>
     <p:extLst>
       <p:ext uri="{BB962C8B-B14F-4D97-AF65-F5344CB8AC3E}">
-        <p14:creationId xmlns:p14="http://schemas.microsoft.com/office/powerpoint/2010/main" val="18012150"/>
+        <p14:creationId xmlns:p14="http://schemas.microsoft.com/office/powerpoint/2010/main" val="1095335232"/>
       </p:ext>
     </p:extLst>
   </p:cSld>
@@ -33100,7 +33162,7 @@
           <p:cNvPr id="12" name="text-0">
             <a:extLst xmlns:a="http://schemas.openxmlformats.org/drawingml/2006/main">
               <a:ext uri="{FF2B5EF4-FFF2-40B4-BE49-F238E27FC236}">
-                <a16:creationId xmlns:a16="http://schemas.microsoft.com/office/drawing/2014/main" id="{D84D0394-0AB0-4256-A9A6-08737132E816}"/>
+                <a16:creationId xmlns:a16="http://schemas.microsoft.com/office/drawing/2014/main" id="{993B89AF-5DBB-448E-A6BF-2FFB95D223CB}"/>
               </a:ext>
             </a:extLst>
           </p:cNvPr>
@@ -33162,7 +33224,7 @@
           <p:cNvPr id="2" name="text-1">
             <a:extLst xmlns:a="http://schemas.openxmlformats.org/drawingml/2006/main">
               <a:ext uri="{FF2B5EF4-FFF2-40B4-BE49-F238E27FC236}">
-                <a16:creationId xmlns:a16="http://schemas.microsoft.com/office/drawing/2014/main" id="{34CF5832-3510-4CBC-B01B-7620C65C9EE7}"/>
+                <a16:creationId xmlns:a16="http://schemas.microsoft.com/office/drawing/2014/main" id="{BB2FA364-FE3B-4E02-AFF2-C0BF43B1D7D3}"/>
               </a:ext>
             </a:extLst>
           </p:cNvPr>
@@ -33224,7 +33286,7 @@
           <p:cNvPr id="3" name="text-2">
             <a:extLst xmlns:a="http://schemas.openxmlformats.org/drawingml/2006/main">
               <a:ext uri="{FF2B5EF4-FFF2-40B4-BE49-F238E27FC236}">
-                <a16:creationId xmlns:a16="http://schemas.microsoft.com/office/drawing/2014/main" id="{2629F2F1-E006-45A8-8545-2CBC62446DB0}"/>
+                <a16:creationId xmlns:a16="http://schemas.microsoft.com/office/drawing/2014/main" id="{BBE775C0-9679-494F-B895-9536F3E44FBA}"/>
               </a:ext>
             </a:extLst>
           </p:cNvPr>
@@ -33286,7 +33348,7 @@
           <p:cNvPr id="4" name="text-3">
             <a:extLst xmlns:a="http://schemas.openxmlformats.org/drawingml/2006/main">
               <a:ext uri="{FF2B5EF4-FFF2-40B4-BE49-F238E27FC236}">
-                <a16:creationId xmlns:a16="http://schemas.microsoft.com/office/drawing/2014/main" id="{721D91A2-63CA-4FAF-B11E-F75C2DB0A36D}"/>
+                <a16:creationId xmlns:a16="http://schemas.microsoft.com/office/drawing/2014/main" id="{9D89CF0D-F79A-4F0B-B07E-F7C22FA2792D}"/>
               </a:ext>
             </a:extLst>
           </p:cNvPr>
@@ -33348,7 +33410,7 @@
           <p:cNvPr id="5" name="text-4">
             <a:extLst xmlns:a="http://schemas.openxmlformats.org/drawingml/2006/main">
               <a:ext uri="{FF2B5EF4-FFF2-40B4-BE49-F238E27FC236}">
-                <a16:creationId xmlns:a16="http://schemas.microsoft.com/office/drawing/2014/main" id="{F3ED132E-3ACA-4895-B6C9-D9E082254AB5}"/>
+                <a16:creationId xmlns:a16="http://schemas.microsoft.com/office/drawing/2014/main" id="{88CF9C5B-8360-4E9D-9471-74438C9B206D}"/>
               </a:ext>
             </a:extLst>
           </p:cNvPr>
@@ -33410,7 +33472,7 @@
           <p:cNvPr id="6" name="text-5">
             <a:extLst xmlns:a="http://schemas.openxmlformats.org/drawingml/2006/main">
               <a:ext uri="{FF2B5EF4-FFF2-40B4-BE49-F238E27FC236}">
-                <a16:creationId xmlns:a16="http://schemas.microsoft.com/office/drawing/2014/main" id="{20F83AAE-95B1-4EBE-946B-66F1523A5A60}"/>
+                <a16:creationId xmlns:a16="http://schemas.microsoft.com/office/drawing/2014/main" id="{872A870C-8F41-4285-A286-560D7847B999}"/>
               </a:ext>
             </a:extLst>
           </p:cNvPr>
@@ -33472,7 +33534,7 @@
           <p:cNvPr id="7" name="text-6">
             <a:extLst xmlns:a="http://schemas.openxmlformats.org/drawingml/2006/main">
               <a:ext uri="{FF2B5EF4-FFF2-40B4-BE49-F238E27FC236}">
-                <a16:creationId xmlns:a16="http://schemas.microsoft.com/office/drawing/2014/main" id="{9305CA63-EFDD-47E3-B97A-1AD1F7E2BD0B}"/>
+                <a16:creationId xmlns:a16="http://schemas.microsoft.com/office/drawing/2014/main" id="{A372D886-FF6C-4479-8E80-E0558505A12B}"/>
               </a:ext>
             </a:extLst>
           </p:cNvPr>
@@ -33534,7 +33596,7 @@
           <p:cNvPr id="8" name="text-7">
             <a:extLst xmlns:a="http://schemas.openxmlformats.org/drawingml/2006/main">
               <a:ext uri="{FF2B5EF4-FFF2-40B4-BE49-F238E27FC236}">
-                <a16:creationId xmlns:a16="http://schemas.microsoft.com/office/drawing/2014/main" id="{E1A41527-E2D0-4C72-A10A-829FF2FAA327}"/>
+                <a16:creationId xmlns:a16="http://schemas.microsoft.com/office/drawing/2014/main" id="{B8AE1693-9874-4199-8419-9D76C5EBAE16}"/>
               </a:ext>
             </a:extLst>
           </p:cNvPr>
@@ -33596,7 +33658,7 @@
           <p:cNvPr id="9" name="">
             <a:extLst xmlns:a="http://schemas.openxmlformats.org/drawingml/2006/main">
               <a:ext uri="{FF2B5EF4-FFF2-40B4-BE49-F238E27FC236}">
-                <a16:creationId xmlns:a16="http://schemas.microsoft.com/office/drawing/2014/main" id="{33D40542-6327-4D7F-928A-A9B6EF489D2C}"/>
+                <a16:creationId xmlns:a16="http://schemas.microsoft.com/office/drawing/2014/main" id="{1406B867-7DFB-4A65-A254-0F1F18E18DF3}"/>
               </a:ext>
             </a:extLst>
           </p:cNvPr>
@@ -33627,7 +33689,7 @@
           <p:cNvPr id="10" name="text-9">
             <a:extLst xmlns:a="http://schemas.openxmlformats.org/drawingml/2006/main">
               <a:ext uri="{FF2B5EF4-FFF2-40B4-BE49-F238E27FC236}">
-                <a16:creationId xmlns:a16="http://schemas.microsoft.com/office/drawing/2014/main" id="{915CE0F8-D04E-45AD-927E-E65498FA6741}"/>
+                <a16:creationId xmlns:a16="http://schemas.microsoft.com/office/drawing/2014/main" id="{8CCA4D53-8729-4B0E-A0A2-71C0D2482240}"/>
               </a:ext>
             </a:extLst>
           </p:cNvPr>
@@ -33689,7 +33751,7 @@
           <p:cNvPr id="11" name="text-10">
             <a:extLst xmlns:a="http://schemas.openxmlformats.org/drawingml/2006/main">
               <a:ext uri="{FF2B5EF4-FFF2-40B4-BE49-F238E27FC236}">
-                <a16:creationId xmlns:a16="http://schemas.microsoft.com/office/drawing/2014/main" id="{7C16EA3A-EBC6-4D33-8071-6E494F429096}"/>
+                <a16:creationId xmlns:a16="http://schemas.microsoft.com/office/drawing/2014/main" id="{7ED66B43-39B3-48F7-ADA7-A651267D0466}"/>
               </a:ext>
             </a:extLst>
           </p:cNvPr>
@@ -33749,7 +33811,7 @@
     </p:spTree>
     <p:extLst>
       <p:ext uri="{BB962C8B-B14F-4D97-AF65-F5344CB8AC3E}">
-        <p14:creationId xmlns:p14="http://schemas.microsoft.com/office/powerpoint/2010/main" val="684176911"/>
+        <p14:creationId xmlns:p14="http://schemas.microsoft.com/office/powerpoint/2010/main" val="1957608867"/>
       </p:ext>
     </p:extLst>
   </p:cSld>
@@ -33780,7 +33842,7 @@
           <p:cNvPr id="8" name="text-0">
             <a:extLst xmlns:a="http://schemas.openxmlformats.org/drawingml/2006/main">
               <a:ext uri="{FF2B5EF4-FFF2-40B4-BE49-F238E27FC236}">
-                <a16:creationId xmlns:a16="http://schemas.microsoft.com/office/drawing/2014/main" id="{1E7F9A77-7899-4953-B6B7-4919539EC9F7}"/>
+                <a16:creationId xmlns:a16="http://schemas.microsoft.com/office/drawing/2014/main" id="{8A0C5401-5A02-4C1D-A825-6A8A768F1885}"/>
               </a:ext>
             </a:extLst>
           </p:cNvPr>
@@ -33842,7 +33904,7 @@
           <p:cNvPr id="2" name="text-1">
             <a:extLst xmlns:a="http://schemas.openxmlformats.org/drawingml/2006/main">
               <a:ext uri="{FF2B5EF4-FFF2-40B4-BE49-F238E27FC236}">
-                <a16:creationId xmlns:a16="http://schemas.microsoft.com/office/drawing/2014/main" id="{24D96A68-135A-421F-9737-071641069BA1}"/>
+                <a16:creationId xmlns:a16="http://schemas.microsoft.com/office/drawing/2014/main" id="{44C37E89-2AA6-498E-BC73-83518552E887}"/>
               </a:ext>
             </a:extLst>
           </p:cNvPr>
@@ -33908,7 +33970,7 @@
           <p:nvPr/>
         </p:nvPicPr>
         <p:blipFill>
-          <a:blip xmlns:r="http://schemas.openxmlformats.org/officeDocument/2006/relationships" xmlns:a="http://schemas.openxmlformats.org/drawingml/2006/main" r:embed="Rd1c697a9468f4d8b"/>
+          <a:blip xmlns:r="http://schemas.openxmlformats.org/officeDocument/2006/relationships" xmlns:a="http://schemas.openxmlformats.org/drawingml/2006/main" r:embed="Rdc88d4e7586b457f"/>
           <a:stretch xmlns:a="http://schemas.openxmlformats.org/drawingml/2006/main"/>
         </p:blipFill>
         <p:spPr>
@@ -33926,7 +33988,7 @@
           <p:cNvPr id="4" name="text-2">
             <a:extLst xmlns:a="http://schemas.openxmlformats.org/drawingml/2006/main">
               <a:ext uri="{FF2B5EF4-FFF2-40B4-BE49-F238E27FC236}">
-                <a16:creationId xmlns:a16="http://schemas.microsoft.com/office/drawing/2014/main" id="{287B47FA-A299-49DE-94BE-443E37732BAE}"/>
+                <a16:creationId xmlns:a16="http://schemas.microsoft.com/office/drawing/2014/main" id="{3B206B2D-E5C4-409C-B6F5-EEC3989EAC56}"/>
               </a:ext>
             </a:extLst>
           </p:cNvPr>
@@ -33988,7 +34050,7 @@
           <p:cNvPr id="5" name="">
             <a:extLst xmlns:a="http://schemas.openxmlformats.org/drawingml/2006/main">
               <a:ext uri="{FF2B5EF4-FFF2-40B4-BE49-F238E27FC236}">
-                <a16:creationId xmlns:a16="http://schemas.microsoft.com/office/drawing/2014/main" id="{590FDB8F-3130-4691-8F68-EF407FDFB9F2}"/>
+                <a16:creationId xmlns:a16="http://schemas.microsoft.com/office/drawing/2014/main" id="{06D113A5-843C-48C7-AFB1-F4EB45BF425A}"/>
               </a:ext>
             </a:extLst>
           </p:cNvPr>
@@ -34019,7 +34081,7 @@
           <p:cNvPr id="6" name="text-4">
             <a:extLst xmlns:a="http://schemas.openxmlformats.org/drawingml/2006/main">
               <a:ext uri="{FF2B5EF4-FFF2-40B4-BE49-F238E27FC236}">
-                <a16:creationId xmlns:a16="http://schemas.microsoft.com/office/drawing/2014/main" id="{AFD3D7B9-16AA-4717-948F-E762AB4413C2}"/>
+                <a16:creationId xmlns:a16="http://schemas.microsoft.com/office/drawing/2014/main" id="{3C30989F-EB2D-4DE0-9622-EF26FAE7CD11}"/>
               </a:ext>
             </a:extLst>
           </p:cNvPr>
@@ -34081,7 +34143,7 @@
           <p:cNvPr id="7" name="text-5">
             <a:extLst xmlns:a="http://schemas.openxmlformats.org/drawingml/2006/main">
               <a:ext uri="{FF2B5EF4-FFF2-40B4-BE49-F238E27FC236}">
-                <a16:creationId xmlns:a16="http://schemas.microsoft.com/office/drawing/2014/main" id="{0BAAE4F1-E088-459A-987B-70C04B0A3A1D}"/>
+                <a16:creationId xmlns:a16="http://schemas.microsoft.com/office/drawing/2014/main" id="{DDB05E1E-AF27-4175-B367-583C060740B1}"/>
               </a:ext>
             </a:extLst>
           </p:cNvPr>
@@ -34141,7 +34203,7 @@
     </p:spTree>
     <p:extLst>
       <p:ext uri="{BB962C8B-B14F-4D97-AF65-F5344CB8AC3E}">
-        <p14:creationId xmlns:p14="http://schemas.microsoft.com/office/powerpoint/2010/main" val="316198773"/>
+        <p14:creationId xmlns:p14="http://schemas.microsoft.com/office/powerpoint/2010/main" val="355282753"/>
       </p:ext>
     </p:extLst>
   </p:cSld>
@@ -34172,7 +34234,7 @@
           <p:cNvPr id="8" name="text-0">
             <a:extLst xmlns:a="http://schemas.openxmlformats.org/drawingml/2006/main">
               <a:ext uri="{FF2B5EF4-FFF2-40B4-BE49-F238E27FC236}">
-                <a16:creationId xmlns:a16="http://schemas.microsoft.com/office/drawing/2014/main" id="{5A24DBF4-F376-4563-A81F-3FE4A3923896}"/>
+                <a16:creationId xmlns:a16="http://schemas.microsoft.com/office/drawing/2014/main" id="{E7B32BDC-02C6-41B3-9A75-D8D4DC166714}"/>
               </a:ext>
             </a:extLst>
           </p:cNvPr>
@@ -34234,7 +34296,7 @@
           <p:cNvPr id="2" name="text-1">
             <a:extLst xmlns:a="http://schemas.openxmlformats.org/drawingml/2006/main">
               <a:ext uri="{FF2B5EF4-FFF2-40B4-BE49-F238E27FC236}">
-                <a16:creationId xmlns:a16="http://schemas.microsoft.com/office/drawing/2014/main" id="{9FBCA711-95FD-4ECD-987D-B521B8FB3AF2}"/>
+                <a16:creationId xmlns:a16="http://schemas.microsoft.com/office/drawing/2014/main" id="{16520F2A-B127-4577-8705-320EBB8D1A0B}"/>
               </a:ext>
             </a:extLst>
           </p:cNvPr>
@@ -34639,7 +34701,7 @@
           <p:cNvPr id="4" name="text-2">
             <a:extLst xmlns:a="http://schemas.openxmlformats.org/drawingml/2006/main">
               <a:ext uri="{FF2B5EF4-FFF2-40B4-BE49-F238E27FC236}">
-                <a16:creationId xmlns:a16="http://schemas.microsoft.com/office/drawing/2014/main" id="{52587776-3C3D-45A9-8312-03394FF6F9E5}"/>
+                <a16:creationId xmlns:a16="http://schemas.microsoft.com/office/drawing/2014/main" id="{CBD4432C-EFC2-422F-9AAB-668993BD0790}"/>
               </a:ext>
             </a:extLst>
           </p:cNvPr>
@@ -34701,7 +34763,7 @@
           <p:cNvPr id="5" name="">
             <a:extLst xmlns:a="http://schemas.openxmlformats.org/drawingml/2006/main">
               <a:ext uri="{FF2B5EF4-FFF2-40B4-BE49-F238E27FC236}">
-                <a16:creationId xmlns:a16="http://schemas.microsoft.com/office/drawing/2014/main" id="{5C2E0F53-890D-486A-BD93-1BD9AF2CEE40}"/>
+                <a16:creationId xmlns:a16="http://schemas.microsoft.com/office/drawing/2014/main" id="{C7DCAE48-3BD4-4857-9DE3-202B54AFD1BD}"/>
               </a:ext>
             </a:extLst>
           </p:cNvPr>
@@ -34732,7 +34794,7 @@
           <p:cNvPr id="6" name="text-4">
             <a:extLst xmlns:a="http://schemas.openxmlformats.org/drawingml/2006/main">
               <a:ext uri="{FF2B5EF4-FFF2-40B4-BE49-F238E27FC236}">
-                <a16:creationId xmlns:a16="http://schemas.microsoft.com/office/drawing/2014/main" id="{69AD568B-8825-4922-88E2-027730726DDC}"/>
+                <a16:creationId xmlns:a16="http://schemas.microsoft.com/office/drawing/2014/main" id="{F1CD6985-F4DC-4A3F-9863-B05E4A400904}"/>
               </a:ext>
             </a:extLst>
           </p:cNvPr>
@@ -34794,7 +34856,7 @@
           <p:cNvPr id="7" name="text-5">
             <a:extLst xmlns:a="http://schemas.openxmlformats.org/drawingml/2006/main">
               <a:ext uri="{FF2B5EF4-FFF2-40B4-BE49-F238E27FC236}">
-                <a16:creationId xmlns:a16="http://schemas.microsoft.com/office/drawing/2014/main" id="{F21A1B37-A98F-48AE-A64E-A129B4C965EA}"/>
+                <a16:creationId xmlns:a16="http://schemas.microsoft.com/office/drawing/2014/main" id="{A489396F-61F5-4597-B003-B79DD4E8326D}"/>
               </a:ext>
             </a:extLst>
           </p:cNvPr>
@@ -34854,7 +34916,7 @@
     </p:spTree>
     <p:extLst>
       <p:ext uri="{BB962C8B-B14F-4D97-AF65-F5344CB8AC3E}">
-        <p14:creationId xmlns:p14="http://schemas.microsoft.com/office/powerpoint/2010/main" val="1273468899"/>
+        <p14:creationId xmlns:p14="http://schemas.microsoft.com/office/powerpoint/2010/main" val="1100270143"/>
       </p:ext>
     </p:extLst>
   </p:cSld>
@@ -34885,7 +34947,7 @@
           <p:cNvPr id="11" name="text-0">
             <a:extLst xmlns:a="http://schemas.openxmlformats.org/drawingml/2006/main">
               <a:ext uri="{FF2B5EF4-FFF2-40B4-BE49-F238E27FC236}">
-                <a16:creationId xmlns:a16="http://schemas.microsoft.com/office/drawing/2014/main" id="{D56DB5F0-1A97-4046-A130-E2AB787A3A78}"/>
+                <a16:creationId xmlns:a16="http://schemas.microsoft.com/office/drawing/2014/main" id="{C63663A4-CCAB-4963-B73E-FB68A5ACA5E9}"/>
               </a:ext>
             </a:extLst>
           </p:cNvPr>
@@ -34947,7 +35009,7 @@
           <p:cNvPr id="2" name="text-1">
             <a:extLst xmlns:a="http://schemas.openxmlformats.org/drawingml/2006/main">
               <a:ext uri="{FF2B5EF4-FFF2-40B4-BE49-F238E27FC236}">
-                <a16:creationId xmlns:a16="http://schemas.microsoft.com/office/drawing/2014/main" id="{3FEA9540-E080-4C58-84BF-0AD12BB81FF2}"/>
+                <a16:creationId xmlns:a16="http://schemas.microsoft.com/office/drawing/2014/main" id="{D9E355AE-3A0B-4F1C-A0B4-06AC28D60FA9}"/>
               </a:ext>
             </a:extLst>
           </p:cNvPr>
@@ -35009,7 +35071,7 @@
           <p:cNvPr id="3" name="text-2">
             <a:extLst xmlns:a="http://schemas.openxmlformats.org/drawingml/2006/main">
               <a:ext uri="{FF2B5EF4-FFF2-40B4-BE49-F238E27FC236}">
-                <a16:creationId xmlns:a16="http://schemas.microsoft.com/office/drawing/2014/main" id="{B53D0D13-9073-4983-9F01-9EB8FE882F4C}"/>
+                <a16:creationId xmlns:a16="http://schemas.microsoft.com/office/drawing/2014/main" id="{9B37763C-F23B-4B94-A799-7FCB449D8C9B}"/>
               </a:ext>
             </a:extLst>
           </p:cNvPr>
@@ -35071,7 +35133,7 @@
           <p:cNvPr id="4" name="text-3">
             <a:extLst xmlns:a="http://schemas.openxmlformats.org/drawingml/2006/main">
               <a:ext uri="{FF2B5EF4-FFF2-40B4-BE49-F238E27FC236}">
-                <a16:creationId xmlns:a16="http://schemas.microsoft.com/office/drawing/2014/main" id="{86D3C502-57B4-44DD-A658-82315119239E}"/>
+                <a16:creationId xmlns:a16="http://schemas.microsoft.com/office/drawing/2014/main" id="{22F43134-777F-4471-98F0-C0D3E9930165}"/>
               </a:ext>
             </a:extLst>
           </p:cNvPr>
@@ -35133,7 +35195,7 @@
           <p:cNvPr id="5" name="text-4">
             <a:extLst xmlns:a="http://schemas.openxmlformats.org/drawingml/2006/main">
               <a:ext uri="{FF2B5EF4-FFF2-40B4-BE49-F238E27FC236}">
-                <a16:creationId xmlns:a16="http://schemas.microsoft.com/office/drawing/2014/main" id="{57638A26-8BAA-472B-9AC3-C9BA56D931A3}"/>
+                <a16:creationId xmlns:a16="http://schemas.microsoft.com/office/drawing/2014/main" id="{D6EA8734-8C7A-48DF-8289-DDFA60B0E6D3}"/>
               </a:ext>
             </a:extLst>
           </p:cNvPr>
@@ -35195,7 +35257,7 @@
           <p:cNvPr id="6" name="text-5">
             <a:extLst xmlns:a="http://schemas.openxmlformats.org/drawingml/2006/main">
               <a:ext uri="{FF2B5EF4-FFF2-40B4-BE49-F238E27FC236}">
-                <a16:creationId xmlns:a16="http://schemas.microsoft.com/office/drawing/2014/main" id="{17C984DB-29D1-498E-9AD5-5533E12DB498}"/>
+                <a16:creationId xmlns:a16="http://schemas.microsoft.com/office/drawing/2014/main" id="{EA6E1B77-8761-4AAB-8B05-832C1D37C5C5}"/>
               </a:ext>
             </a:extLst>
           </p:cNvPr>
@@ -35257,7 +35319,7 @@
           <p:cNvPr id="7" name="text-6">
             <a:extLst xmlns:a="http://schemas.openxmlformats.org/drawingml/2006/main">
               <a:ext uri="{FF2B5EF4-FFF2-40B4-BE49-F238E27FC236}">
-                <a16:creationId xmlns:a16="http://schemas.microsoft.com/office/drawing/2014/main" id="{1E416072-509F-4909-8431-2FE756A51704}"/>
+                <a16:creationId xmlns:a16="http://schemas.microsoft.com/office/drawing/2014/main" id="{EB1AE7F4-D1C8-41C3-AF52-236A6F91F466}"/>
               </a:ext>
             </a:extLst>
           </p:cNvPr>
@@ -35319,7 +35381,7 @@
           <p:cNvPr id="8" name="">
             <a:extLst xmlns:a="http://schemas.openxmlformats.org/drawingml/2006/main">
               <a:ext uri="{FF2B5EF4-FFF2-40B4-BE49-F238E27FC236}">
-                <a16:creationId xmlns:a16="http://schemas.microsoft.com/office/drawing/2014/main" id="{6FB01E93-3C4B-4269-AFAD-8BC52FFC2E98}"/>
+                <a16:creationId xmlns:a16="http://schemas.microsoft.com/office/drawing/2014/main" id="{F3A390B5-1D00-4C76-B3C6-680CF321C176}"/>
               </a:ext>
             </a:extLst>
           </p:cNvPr>
@@ -35350,7 +35412,7 @@
           <p:cNvPr id="9" name="text-8">
             <a:extLst xmlns:a="http://schemas.openxmlformats.org/drawingml/2006/main">
               <a:ext uri="{FF2B5EF4-FFF2-40B4-BE49-F238E27FC236}">
-                <a16:creationId xmlns:a16="http://schemas.microsoft.com/office/drawing/2014/main" id="{0CAD7983-9384-48A5-A66D-E566CF2E2B77}"/>
+                <a16:creationId xmlns:a16="http://schemas.microsoft.com/office/drawing/2014/main" id="{9263DDC4-AA04-483F-AAC3-5EA9ED3C304F}"/>
               </a:ext>
             </a:extLst>
           </p:cNvPr>
@@ -35412,7 +35474,7 @@
           <p:cNvPr id="10" name="text-9">
             <a:extLst xmlns:a="http://schemas.openxmlformats.org/drawingml/2006/main">
               <a:ext uri="{FF2B5EF4-FFF2-40B4-BE49-F238E27FC236}">
-                <a16:creationId xmlns:a16="http://schemas.microsoft.com/office/drawing/2014/main" id="{7FD22291-6A64-4DBB-8886-D8D4D0EB60B3}"/>
+                <a16:creationId xmlns:a16="http://schemas.microsoft.com/office/drawing/2014/main" id="{67254073-FC79-46B8-A8B3-D9DB946CEEA5}"/>
               </a:ext>
             </a:extLst>
           </p:cNvPr>
@@ -35472,7 +35534,7 @@
     </p:spTree>
     <p:extLst>
       <p:ext uri="{BB962C8B-B14F-4D97-AF65-F5344CB8AC3E}">
-        <p14:creationId xmlns:p14="http://schemas.microsoft.com/office/powerpoint/2010/main" val="1091512623"/>
+        <p14:creationId xmlns:p14="http://schemas.microsoft.com/office/powerpoint/2010/main" val="1682888801"/>
       </p:ext>
     </p:extLst>
   </p:cSld>
@@ -35503,7 +35565,7 @@
           <p:cNvPr id="11" name="text-0">
             <a:extLst xmlns:a="http://schemas.openxmlformats.org/drawingml/2006/main">
               <a:ext uri="{FF2B5EF4-FFF2-40B4-BE49-F238E27FC236}">
-                <a16:creationId xmlns:a16="http://schemas.microsoft.com/office/drawing/2014/main" id="{0F421F05-A666-4483-8ED7-A41610EFFF2A}"/>
+                <a16:creationId xmlns:a16="http://schemas.microsoft.com/office/drawing/2014/main" id="{A37A5641-44E5-49F0-8945-FDA79319C3B4}"/>
               </a:ext>
             </a:extLst>
           </p:cNvPr>
@@ -35565,7 +35627,7 @@
           <p:cNvPr id="2" name="text-1">
             <a:extLst xmlns:a="http://schemas.openxmlformats.org/drawingml/2006/main">
               <a:ext uri="{FF2B5EF4-FFF2-40B4-BE49-F238E27FC236}">
-                <a16:creationId xmlns:a16="http://schemas.microsoft.com/office/drawing/2014/main" id="{937F91DD-8F3D-448F-A5E8-0900E6D36B90}"/>
+                <a16:creationId xmlns:a16="http://schemas.microsoft.com/office/drawing/2014/main" id="{18205AB1-B448-4439-AB1A-CB7B856D1E1C}"/>
               </a:ext>
             </a:extLst>
           </p:cNvPr>
@@ -35627,7 +35689,7 @@
           <p:cNvPr id="3" name="text-2">
             <a:extLst xmlns:a="http://schemas.openxmlformats.org/drawingml/2006/main">
               <a:ext uri="{FF2B5EF4-FFF2-40B4-BE49-F238E27FC236}">
-                <a16:creationId xmlns:a16="http://schemas.microsoft.com/office/drawing/2014/main" id="{8BC3F788-A416-4A01-A451-A224D4EBF74B}"/>
+                <a16:creationId xmlns:a16="http://schemas.microsoft.com/office/drawing/2014/main" id="{03324238-E3EC-4EB2-B65F-651944AD9E4F}"/>
               </a:ext>
             </a:extLst>
           </p:cNvPr>
@@ -35689,7 +35751,7 @@
           <p:cNvPr id="4" name="text-3">
             <a:extLst xmlns:a="http://schemas.openxmlformats.org/drawingml/2006/main">
               <a:ext uri="{FF2B5EF4-FFF2-40B4-BE49-F238E27FC236}">
-                <a16:creationId xmlns:a16="http://schemas.microsoft.com/office/drawing/2014/main" id="{76A37CF5-2211-4924-8676-D2A57AF19787}"/>
+                <a16:creationId xmlns:a16="http://schemas.microsoft.com/office/drawing/2014/main" id="{28CF63D1-944A-4436-8157-72C0DA311A99}"/>
               </a:ext>
             </a:extLst>
           </p:cNvPr>
@@ -35751,7 +35813,7 @@
           <p:cNvPr id="5" name="text-4">
             <a:extLst xmlns:a="http://schemas.openxmlformats.org/drawingml/2006/main">
               <a:ext uri="{FF2B5EF4-FFF2-40B4-BE49-F238E27FC236}">
-                <a16:creationId xmlns:a16="http://schemas.microsoft.com/office/drawing/2014/main" id="{74E734E9-E167-4431-AA07-B008371255BE}"/>
+                <a16:creationId xmlns:a16="http://schemas.microsoft.com/office/drawing/2014/main" id="{04AB20D1-C3FA-48F4-A8B7-E7E734B6ABEB}"/>
               </a:ext>
             </a:extLst>
           </p:cNvPr>
@@ -35813,7 +35875,7 @@
           <p:cNvPr id="6" name="text-5">
             <a:extLst xmlns:a="http://schemas.openxmlformats.org/drawingml/2006/main">
               <a:ext uri="{FF2B5EF4-FFF2-40B4-BE49-F238E27FC236}">
-                <a16:creationId xmlns:a16="http://schemas.microsoft.com/office/drawing/2014/main" id="{B57FF680-BED2-4D87-9E98-FC313DBABF87}"/>
+                <a16:creationId xmlns:a16="http://schemas.microsoft.com/office/drawing/2014/main" id="{46ECE0A3-75E7-4B2C-A13E-A9EBAE9D749F}"/>
               </a:ext>
             </a:extLst>
           </p:cNvPr>
@@ -35875,7 +35937,7 @@
           <p:cNvPr id="7" name="text-6">
             <a:extLst xmlns:a="http://schemas.openxmlformats.org/drawingml/2006/main">
               <a:ext uri="{FF2B5EF4-FFF2-40B4-BE49-F238E27FC236}">
-                <a16:creationId xmlns:a16="http://schemas.microsoft.com/office/drawing/2014/main" id="{BD1F4A9F-7D19-4CA6-98C5-4CDCADDC1004}"/>
+                <a16:creationId xmlns:a16="http://schemas.microsoft.com/office/drawing/2014/main" id="{EE17D3E5-2FF1-4C18-A022-EB35C22CD3B3}"/>
               </a:ext>
             </a:extLst>
           </p:cNvPr>
@@ -35937,7 +35999,7 @@
           <p:cNvPr id="8" name="">
             <a:extLst xmlns:a="http://schemas.openxmlformats.org/drawingml/2006/main">
               <a:ext uri="{FF2B5EF4-FFF2-40B4-BE49-F238E27FC236}">
-                <a16:creationId xmlns:a16="http://schemas.microsoft.com/office/drawing/2014/main" id="{DCD1D1BD-D9F3-4795-A812-447204670C86}"/>
+                <a16:creationId xmlns:a16="http://schemas.microsoft.com/office/drawing/2014/main" id="{34325428-69B8-40F1-B4A6-45A55E89E983}"/>
               </a:ext>
             </a:extLst>
           </p:cNvPr>
@@ -35968,7 +36030,7 @@
           <p:cNvPr id="9" name="text-8">
             <a:extLst xmlns:a="http://schemas.openxmlformats.org/drawingml/2006/main">
               <a:ext uri="{FF2B5EF4-FFF2-40B4-BE49-F238E27FC236}">
-                <a16:creationId xmlns:a16="http://schemas.microsoft.com/office/drawing/2014/main" id="{E3E36FBF-B1DF-4965-8444-40DC7AD79ECF}"/>
+                <a16:creationId xmlns:a16="http://schemas.microsoft.com/office/drawing/2014/main" id="{41F9196E-1556-46F0-A948-12F31CFD0579}"/>
               </a:ext>
             </a:extLst>
           </p:cNvPr>
@@ -36030,7 +36092,7 @@
           <p:cNvPr id="10" name="text-9">
             <a:extLst xmlns:a="http://schemas.openxmlformats.org/drawingml/2006/main">
               <a:ext uri="{FF2B5EF4-FFF2-40B4-BE49-F238E27FC236}">
-                <a16:creationId xmlns:a16="http://schemas.microsoft.com/office/drawing/2014/main" id="{8B4BB22C-A8CA-4A8C-91A6-40ACB4611852}"/>
+                <a16:creationId xmlns:a16="http://schemas.microsoft.com/office/drawing/2014/main" id="{A0675846-D1E3-4262-89FA-5063111127ED}"/>
               </a:ext>
             </a:extLst>
           </p:cNvPr>
@@ -36090,7 +36152,7 @@
     </p:spTree>
     <p:extLst>
       <p:ext uri="{BB962C8B-B14F-4D97-AF65-F5344CB8AC3E}">
-        <p14:creationId xmlns:p14="http://schemas.microsoft.com/office/powerpoint/2010/main" val="1863015882"/>
+        <p14:creationId xmlns:p14="http://schemas.microsoft.com/office/powerpoint/2010/main" val="1437692384"/>
       </p:ext>
     </p:extLst>
   </p:cSld>
@@ -36121,7 +36183,7 @@
           <p:cNvPr id="11" name="text-0">
             <a:extLst xmlns:a="http://schemas.openxmlformats.org/drawingml/2006/main">
               <a:ext uri="{FF2B5EF4-FFF2-40B4-BE49-F238E27FC236}">
-                <a16:creationId xmlns:a16="http://schemas.microsoft.com/office/drawing/2014/main" id="{C1DED26A-F051-4A15-ACDA-BE459CA8FEC0}"/>
+                <a16:creationId xmlns:a16="http://schemas.microsoft.com/office/drawing/2014/main" id="{C81FC6A5-1721-4CEB-B27E-E723E4A32BDB}"/>
               </a:ext>
             </a:extLst>
           </p:cNvPr>
@@ -36183,7 +36245,7 @@
           <p:cNvPr id="2" name="text-1">
             <a:extLst xmlns:a="http://schemas.openxmlformats.org/drawingml/2006/main">
               <a:ext uri="{FF2B5EF4-FFF2-40B4-BE49-F238E27FC236}">
-                <a16:creationId xmlns:a16="http://schemas.microsoft.com/office/drawing/2014/main" id="{CBBB3A3D-3EA0-4B08-8CD8-3B3491ADFE3D}"/>
+                <a16:creationId xmlns:a16="http://schemas.microsoft.com/office/drawing/2014/main" id="{A0FB1498-9F01-43E6-A478-FB2A798287D5}"/>
               </a:ext>
             </a:extLst>
           </p:cNvPr>
@@ -36245,7 +36307,7 @@
           <p:cNvPr id="3" name="text-2">
             <a:extLst xmlns:a="http://schemas.openxmlformats.org/drawingml/2006/main">
               <a:ext uri="{FF2B5EF4-FFF2-40B4-BE49-F238E27FC236}">
-                <a16:creationId xmlns:a16="http://schemas.microsoft.com/office/drawing/2014/main" id="{C1365753-0595-4E47-982C-C83C5D1F434B}"/>
+                <a16:creationId xmlns:a16="http://schemas.microsoft.com/office/drawing/2014/main" id="{7C8F648A-E115-47B1-BA44-27241FD62E74}"/>
               </a:ext>
             </a:extLst>
           </p:cNvPr>
@@ -36307,7 +36369,7 @@
           <p:cNvPr id="4" name="text-3">
             <a:extLst xmlns:a="http://schemas.openxmlformats.org/drawingml/2006/main">
               <a:ext uri="{FF2B5EF4-FFF2-40B4-BE49-F238E27FC236}">
-                <a16:creationId xmlns:a16="http://schemas.microsoft.com/office/drawing/2014/main" id="{67FC3B38-EF86-42DB-AAC1-79AE7D828C8B}"/>
+                <a16:creationId xmlns:a16="http://schemas.microsoft.com/office/drawing/2014/main" id="{721E71AC-1697-4327-98D7-87787D1D5FEE}"/>
               </a:ext>
             </a:extLst>
           </p:cNvPr>
@@ -36369,7 +36431,7 @@
           <p:cNvPr id="5" name="text-4">
             <a:extLst xmlns:a="http://schemas.openxmlformats.org/drawingml/2006/main">
               <a:ext uri="{FF2B5EF4-FFF2-40B4-BE49-F238E27FC236}">
-                <a16:creationId xmlns:a16="http://schemas.microsoft.com/office/drawing/2014/main" id="{A8F36111-AE47-441C-8F3D-FE3E4301B919}"/>
+                <a16:creationId xmlns:a16="http://schemas.microsoft.com/office/drawing/2014/main" id="{B15F25CB-6F98-4739-936B-340A97DEA87A}"/>
               </a:ext>
             </a:extLst>
           </p:cNvPr>
@@ -36431,7 +36493,7 @@
           <p:cNvPr id="6" name="text-5">
             <a:extLst xmlns:a="http://schemas.openxmlformats.org/drawingml/2006/main">
               <a:ext uri="{FF2B5EF4-FFF2-40B4-BE49-F238E27FC236}">
-                <a16:creationId xmlns:a16="http://schemas.microsoft.com/office/drawing/2014/main" id="{BBD11D3F-AE5A-488C-89B5-06E5FFD2AAC4}"/>
+                <a16:creationId xmlns:a16="http://schemas.microsoft.com/office/drawing/2014/main" id="{59113626-3C30-40B4-904B-0D3E8B6FA974}"/>
               </a:ext>
             </a:extLst>
           </p:cNvPr>
@@ -36493,7 +36555,7 @@
           <p:cNvPr id="7" name="text-6">
             <a:extLst xmlns:a="http://schemas.openxmlformats.org/drawingml/2006/main">
               <a:ext uri="{FF2B5EF4-FFF2-40B4-BE49-F238E27FC236}">
-                <a16:creationId xmlns:a16="http://schemas.microsoft.com/office/drawing/2014/main" id="{F4545B27-EB80-4A04-BB57-6310E8C97D80}"/>
+                <a16:creationId xmlns:a16="http://schemas.microsoft.com/office/drawing/2014/main" id="{70D2440A-3DF2-4AB1-8C4B-58BCD0AF72AC}"/>
               </a:ext>
             </a:extLst>
           </p:cNvPr>
@@ -36555,7 +36617,7 @@
           <p:cNvPr id="8" name="">
             <a:extLst xmlns:a="http://schemas.openxmlformats.org/drawingml/2006/main">
               <a:ext uri="{FF2B5EF4-FFF2-40B4-BE49-F238E27FC236}">
-                <a16:creationId xmlns:a16="http://schemas.microsoft.com/office/drawing/2014/main" id="{A313A756-F5CF-46C0-92F2-7A870B384E30}"/>
+                <a16:creationId xmlns:a16="http://schemas.microsoft.com/office/drawing/2014/main" id="{0C6C6193-414F-40E3-8600-CC399F07B4B4}"/>
               </a:ext>
             </a:extLst>
           </p:cNvPr>
@@ -36586,7 +36648,7 @@
           <p:cNvPr id="9" name="text-8">
             <a:extLst xmlns:a="http://schemas.openxmlformats.org/drawingml/2006/main">
               <a:ext uri="{FF2B5EF4-FFF2-40B4-BE49-F238E27FC236}">
-                <a16:creationId xmlns:a16="http://schemas.microsoft.com/office/drawing/2014/main" id="{8F71073A-64EA-489B-B23F-8BE690CD3CA9}"/>
+                <a16:creationId xmlns:a16="http://schemas.microsoft.com/office/drawing/2014/main" id="{53AAA3B5-9E0B-4C29-A991-6BF053269878}"/>
               </a:ext>
             </a:extLst>
           </p:cNvPr>
@@ -36648,7 +36710,7 @@
           <p:cNvPr id="10" name="text-9">
             <a:extLst xmlns:a="http://schemas.openxmlformats.org/drawingml/2006/main">
               <a:ext uri="{FF2B5EF4-FFF2-40B4-BE49-F238E27FC236}">
-                <a16:creationId xmlns:a16="http://schemas.microsoft.com/office/drawing/2014/main" id="{3986342C-8BB9-434E-9314-AAD4A0ABA1C8}"/>
+                <a16:creationId xmlns:a16="http://schemas.microsoft.com/office/drawing/2014/main" id="{DC69FEB2-2F88-4453-B38D-5C9A1BC452F8}"/>
               </a:ext>
             </a:extLst>
           </p:cNvPr>
@@ -36708,7 +36770,7 @@
     </p:spTree>
     <p:extLst>
       <p:ext uri="{BB962C8B-B14F-4D97-AF65-F5344CB8AC3E}">
-        <p14:creationId xmlns:p14="http://schemas.microsoft.com/office/powerpoint/2010/main" val="1666747289"/>
+        <p14:creationId xmlns:p14="http://schemas.microsoft.com/office/powerpoint/2010/main" val="1733903276"/>
       </p:ext>
     </p:extLst>
   </p:cSld>
@@ -36739,7 +36801,7 @@
           <p:cNvPr id="8" name="text-0">
             <a:extLst xmlns:a="http://schemas.openxmlformats.org/drawingml/2006/main">
               <a:ext uri="{FF2B5EF4-FFF2-40B4-BE49-F238E27FC236}">
-                <a16:creationId xmlns:a16="http://schemas.microsoft.com/office/drawing/2014/main" id="{F41B1851-4F29-442E-A46E-D83D30748361}"/>
+                <a16:creationId xmlns:a16="http://schemas.microsoft.com/office/drawing/2014/main" id="{C6AB85A5-16CD-4A2D-94BB-ABD97DE81E16}"/>
               </a:ext>
             </a:extLst>
           </p:cNvPr>
@@ -36801,7 +36863,7 @@
           <p:cNvPr id="2" name="text-1">
             <a:extLst xmlns:a="http://schemas.openxmlformats.org/drawingml/2006/main">
               <a:ext uri="{FF2B5EF4-FFF2-40B4-BE49-F238E27FC236}">
-                <a16:creationId xmlns:a16="http://schemas.microsoft.com/office/drawing/2014/main" id="{D4A53913-9563-4C82-B834-56520CEC4406}"/>
+                <a16:creationId xmlns:a16="http://schemas.microsoft.com/office/drawing/2014/main" id="{97A599CA-2FEC-4CE6-8571-4DC5F8AA8D62}"/>
               </a:ext>
             </a:extLst>
           </p:cNvPr>
@@ -37126,7 +37188,7 @@
           <p:cNvPr id="4" name="text-2">
             <a:extLst xmlns:a="http://schemas.openxmlformats.org/drawingml/2006/main">
               <a:ext uri="{FF2B5EF4-FFF2-40B4-BE49-F238E27FC236}">
-                <a16:creationId xmlns:a16="http://schemas.microsoft.com/office/drawing/2014/main" id="{6196CE95-A1A8-47F0-85E6-F7F632616113}"/>
+                <a16:creationId xmlns:a16="http://schemas.microsoft.com/office/drawing/2014/main" id="{54604335-76C1-4586-946A-CE5EE72F7007}"/>
               </a:ext>
             </a:extLst>
           </p:cNvPr>
@@ -37188,7 +37250,7 @@
           <p:cNvPr id="5" name="">
             <a:extLst xmlns:a="http://schemas.openxmlformats.org/drawingml/2006/main">
               <a:ext uri="{FF2B5EF4-FFF2-40B4-BE49-F238E27FC236}">
-                <a16:creationId xmlns:a16="http://schemas.microsoft.com/office/drawing/2014/main" id="{3A6C40D3-1D70-435E-A752-34DC6F7A379D}"/>
+                <a16:creationId xmlns:a16="http://schemas.microsoft.com/office/drawing/2014/main" id="{8DD3F4BF-6DC8-45F5-8BEF-80349D3D5E90}"/>
               </a:ext>
             </a:extLst>
           </p:cNvPr>
@@ -37219,7 +37281,7 @@
           <p:cNvPr id="6" name="text-4">
             <a:extLst xmlns:a="http://schemas.openxmlformats.org/drawingml/2006/main">
               <a:ext uri="{FF2B5EF4-FFF2-40B4-BE49-F238E27FC236}">
-                <a16:creationId xmlns:a16="http://schemas.microsoft.com/office/drawing/2014/main" id="{95F57465-58FD-4783-AE3A-DC6CAE74D20C}"/>
+                <a16:creationId xmlns:a16="http://schemas.microsoft.com/office/drawing/2014/main" id="{48CBFD0E-D6E3-4869-89CF-9696CD7A03E3}"/>
               </a:ext>
             </a:extLst>
           </p:cNvPr>
@@ -37281,7 +37343,7 @@
           <p:cNvPr id="7" name="text-5">
             <a:extLst xmlns:a="http://schemas.openxmlformats.org/drawingml/2006/main">
               <a:ext uri="{FF2B5EF4-FFF2-40B4-BE49-F238E27FC236}">
-                <a16:creationId xmlns:a16="http://schemas.microsoft.com/office/drawing/2014/main" id="{ADBE4501-200D-4191-A382-9D139E2446A4}"/>
+                <a16:creationId xmlns:a16="http://schemas.microsoft.com/office/drawing/2014/main" id="{9F9966D0-8E72-4C08-91DD-C9D5993E231C}"/>
               </a:ext>
             </a:extLst>
           </p:cNvPr>
@@ -37341,7 +37403,7 @@
     </p:spTree>
     <p:extLst>
       <p:ext uri="{BB962C8B-B14F-4D97-AF65-F5344CB8AC3E}">
-        <p14:creationId xmlns:p14="http://schemas.microsoft.com/office/powerpoint/2010/main" val="260773639"/>
+        <p14:creationId xmlns:p14="http://schemas.microsoft.com/office/powerpoint/2010/main" val="1793747119"/>
       </p:ext>
     </p:extLst>
   </p:cSld>
@@ -37372,7 +37434,7 @@
           <p:cNvPr id="8" name="text-0">
             <a:extLst xmlns:a="http://schemas.openxmlformats.org/drawingml/2006/main">
               <a:ext uri="{FF2B5EF4-FFF2-40B4-BE49-F238E27FC236}">
-                <a16:creationId xmlns:a16="http://schemas.microsoft.com/office/drawing/2014/main" id="{CB9C17CB-AE56-41F8-AB26-7F534C16288D}"/>
+                <a16:creationId xmlns:a16="http://schemas.microsoft.com/office/drawing/2014/main" id="{E5C388CC-6926-4515-937E-89F1EE97D2F5}"/>
               </a:ext>
             </a:extLst>
           </p:cNvPr>
@@ -37434,7 +37496,7 @@
           <p:cNvPr id="2" name="text-1">
             <a:extLst xmlns:a="http://schemas.openxmlformats.org/drawingml/2006/main">
               <a:ext uri="{FF2B5EF4-FFF2-40B4-BE49-F238E27FC236}">
-                <a16:creationId xmlns:a16="http://schemas.microsoft.com/office/drawing/2014/main" id="{A5915AF4-E22C-4ECC-ADFA-8FE299A15754}"/>
+                <a16:creationId xmlns:a16="http://schemas.microsoft.com/office/drawing/2014/main" id="{336F44C6-1754-459F-A2C8-EDE14C9BC779}"/>
               </a:ext>
             </a:extLst>
           </p:cNvPr>
@@ -37759,7 +37821,7 @@
           <p:cNvPr id="4" name="text-2">
             <a:extLst xmlns:a="http://schemas.openxmlformats.org/drawingml/2006/main">
               <a:ext uri="{FF2B5EF4-FFF2-40B4-BE49-F238E27FC236}">
-                <a16:creationId xmlns:a16="http://schemas.microsoft.com/office/drawing/2014/main" id="{20BD787C-1708-4B63-9D09-37CEE82045E2}"/>
+                <a16:creationId xmlns:a16="http://schemas.microsoft.com/office/drawing/2014/main" id="{DB197F50-3D84-492E-9292-560F940A0855}"/>
               </a:ext>
             </a:extLst>
           </p:cNvPr>
@@ -37821,7 +37883,7 @@
           <p:cNvPr id="5" name="">
             <a:extLst xmlns:a="http://schemas.openxmlformats.org/drawingml/2006/main">
               <a:ext uri="{FF2B5EF4-FFF2-40B4-BE49-F238E27FC236}">
-                <a16:creationId xmlns:a16="http://schemas.microsoft.com/office/drawing/2014/main" id="{3C0DA33D-F555-43C2-8FDD-2DCD14C52AE6}"/>
+                <a16:creationId xmlns:a16="http://schemas.microsoft.com/office/drawing/2014/main" id="{55498660-4B06-47E4-BC7E-BC8E10E889A2}"/>
               </a:ext>
             </a:extLst>
           </p:cNvPr>
@@ -37852,7 +37914,7 @@
           <p:cNvPr id="6" name="text-4">
             <a:extLst xmlns:a="http://schemas.openxmlformats.org/drawingml/2006/main">
               <a:ext uri="{FF2B5EF4-FFF2-40B4-BE49-F238E27FC236}">
-                <a16:creationId xmlns:a16="http://schemas.microsoft.com/office/drawing/2014/main" id="{F38252AA-6EA8-401C-A35D-234E8A83E889}"/>
+                <a16:creationId xmlns:a16="http://schemas.microsoft.com/office/drawing/2014/main" id="{579A2A30-0719-43B8-B207-2E6028571A7D}"/>
               </a:ext>
             </a:extLst>
           </p:cNvPr>
@@ -37914,7 +37976,7 @@
           <p:cNvPr id="7" name="text-5">
             <a:extLst xmlns:a="http://schemas.openxmlformats.org/drawingml/2006/main">
               <a:ext uri="{FF2B5EF4-FFF2-40B4-BE49-F238E27FC236}">
-                <a16:creationId xmlns:a16="http://schemas.microsoft.com/office/drawing/2014/main" id="{A1F44CF4-4CAE-427C-94EA-8E1DAEB45E88}"/>
+                <a16:creationId xmlns:a16="http://schemas.microsoft.com/office/drawing/2014/main" id="{62C2EF3A-1941-48A1-98C9-982D331E1AC9}"/>
               </a:ext>
             </a:extLst>
           </p:cNvPr>
@@ -37974,7 +38036,7 @@
     </p:spTree>
     <p:extLst>
       <p:ext uri="{BB962C8B-B14F-4D97-AF65-F5344CB8AC3E}">
-        <p14:creationId xmlns:p14="http://schemas.microsoft.com/office/powerpoint/2010/main" val="256203463"/>
+        <p14:creationId xmlns:p14="http://schemas.microsoft.com/office/powerpoint/2010/main" val="242075143"/>
       </p:ext>
     </p:extLst>
   </p:cSld>
@@ -38005,7 +38067,7 @@
           <p:cNvPr id="8" name="text-0">
             <a:extLst xmlns:a="http://schemas.openxmlformats.org/drawingml/2006/main">
               <a:ext uri="{FF2B5EF4-FFF2-40B4-BE49-F238E27FC236}">
-                <a16:creationId xmlns:a16="http://schemas.microsoft.com/office/drawing/2014/main" id="{ECEF6F92-DF0E-43F9-998E-BFDC20A9B34C}"/>
+                <a16:creationId xmlns:a16="http://schemas.microsoft.com/office/drawing/2014/main" id="{7A283EFA-352A-411E-A41D-86F253030E20}"/>
               </a:ext>
             </a:extLst>
           </p:cNvPr>
@@ -38067,7 +38129,7 @@
           <p:cNvPr id="2" name="text-1">
             <a:extLst xmlns:a="http://schemas.openxmlformats.org/drawingml/2006/main">
               <a:ext uri="{FF2B5EF4-FFF2-40B4-BE49-F238E27FC236}">
-                <a16:creationId xmlns:a16="http://schemas.microsoft.com/office/drawing/2014/main" id="{253678A8-0079-4C05-91CE-9721389F2BD2}"/>
+                <a16:creationId xmlns:a16="http://schemas.microsoft.com/office/drawing/2014/main" id="{23C16717-3518-413F-BCD4-09E07725508D}"/>
               </a:ext>
             </a:extLst>
           </p:cNvPr>
@@ -38129,7 +38191,7 @@
           <p:cNvPr id="3" name="text-2">
             <a:extLst xmlns:a="http://schemas.openxmlformats.org/drawingml/2006/main">
               <a:ext uri="{FF2B5EF4-FFF2-40B4-BE49-F238E27FC236}">
-                <a16:creationId xmlns:a16="http://schemas.microsoft.com/office/drawing/2014/main" id="{EE316D03-E647-4EB0-B7A8-D3C65CC99A47}"/>
+                <a16:creationId xmlns:a16="http://schemas.microsoft.com/office/drawing/2014/main" id="{842BBEE1-DDED-49D9-A089-15C2EE604892}"/>
               </a:ext>
             </a:extLst>
           </p:cNvPr>
@@ -38191,7 +38253,7 @@
           <p:cNvPr id="4" name="text-3">
             <a:extLst xmlns:a="http://schemas.openxmlformats.org/drawingml/2006/main">
               <a:ext uri="{FF2B5EF4-FFF2-40B4-BE49-F238E27FC236}">
-                <a16:creationId xmlns:a16="http://schemas.microsoft.com/office/drawing/2014/main" id="{FCE52081-BE76-4D40-A8C1-3970CA58D6F9}"/>
+                <a16:creationId xmlns:a16="http://schemas.microsoft.com/office/drawing/2014/main" id="{76F1C256-8ACF-4D7C-A83D-AEBBBCD83F8F}"/>
               </a:ext>
             </a:extLst>
           </p:cNvPr>
@@ -38283,7 +38345,7 @@
           <p:cNvPr id="5" name="">
             <a:extLst xmlns:a="http://schemas.openxmlformats.org/drawingml/2006/main">
               <a:ext uri="{FF2B5EF4-FFF2-40B4-BE49-F238E27FC236}">
-                <a16:creationId xmlns:a16="http://schemas.microsoft.com/office/drawing/2014/main" id="{04EC4EB0-B2AB-4FD3-84FA-9C3199595AE2}"/>
+                <a16:creationId xmlns:a16="http://schemas.microsoft.com/office/drawing/2014/main" id="{835D8DD9-3343-476D-86F5-4F82EFBD5857}"/>
               </a:ext>
             </a:extLst>
           </p:cNvPr>
@@ -38314,7 +38376,7 @@
           <p:cNvPr id="6" name="text-5">
             <a:extLst xmlns:a="http://schemas.openxmlformats.org/drawingml/2006/main">
               <a:ext uri="{FF2B5EF4-FFF2-40B4-BE49-F238E27FC236}">
-                <a16:creationId xmlns:a16="http://schemas.microsoft.com/office/drawing/2014/main" id="{206A6009-FF9C-444B-90ED-D34C4624D69A}"/>
+                <a16:creationId xmlns:a16="http://schemas.microsoft.com/office/drawing/2014/main" id="{2CABDB83-4C58-4B78-8D6E-6566D197B423}"/>
               </a:ext>
             </a:extLst>
           </p:cNvPr>
@@ -38376,7 +38438,7 @@
           <p:cNvPr id="7" name="text-6">
             <a:extLst xmlns:a="http://schemas.openxmlformats.org/drawingml/2006/main">
               <a:ext uri="{FF2B5EF4-FFF2-40B4-BE49-F238E27FC236}">
-                <a16:creationId xmlns:a16="http://schemas.microsoft.com/office/drawing/2014/main" id="{B4876ABF-9480-4898-B8FE-F86C77DDB0D7}"/>
+                <a16:creationId xmlns:a16="http://schemas.microsoft.com/office/drawing/2014/main" id="{AA993B02-EF08-41DE-83BA-EA9AEC656C5B}"/>
               </a:ext>
             </a:extLst>
           </p:cNvPr>
@@ -38436,7 +38498,7 @@
     </p:spTree>
     <p:extLst>
       <p:ext uri="{BB962C8B-B14F-4D97-AF65-F5344CB8AC3E}">
-        <p14:creationId xmlns:p14="http://schemas.microsoft.com/office/powerpoint/2010/main" val="117255446"/>
+        <p14:creationId xmlns:p14="http://schemas.microsoft.com/office/powerpoint/2010/main" val="1987675654"/>
       </p:ext>
     </p:extLst>
   </p:cSld>
@@ -38467,7 +38529,7 @@
           <p:cNvPr id="8" name="text-0">
             <a:extLst xmlns:a="http://schemas.openxmlformats.org/drawingml/2006/main">
               <a:ext uri="{FF2B5EF4-FFF2-40B4-BE49-F238E27FC236}">
-                <a16:creationId xmlns:a16="http://schemas.microsoft.com/office/drawing/2014/main" id="{57B1DE36-A366-4993-A010-BD6D9E77EEB1}"/>
+                <a16:creationId xmlns:a16="http://schemas.microsoft.com/office/drawing/2014/main" id="{323ED251-E137-40E6-AF6D-FD3EDD72F382}"/>
               </a:ext>
             </a:extLst>
           </p:cNvPr>
@@ -38529,7 +38591,7 @@
           <p:cNvPr id="2" name="text-1">
             <a:extLst xmlns:a="http://schemas.openxmlformats.org/drawingml/2006/main">
               <a:ext uri="{FF2B5EF4-FFF2-40B4-BE49-F238E27FC236}">
-                <a16:creationId xmlns:a16="http://schemas.microsoft.com/office/drawing/2014/main" id="{12C1C8F2-7883-48F0-B1B0-DB553749C26F}"/>
+                <a16:creationId xmlns:a16="http://schemas.microsoft.com/office/drawing/2014/main" id="{73DC0010-B0EA-4502-B38D-31FAC882DC53}"/>
               </a:ext>
             </a:extLst>
           </p:cNvPr>
@@ -38591,7 +38653,7 @@
           <p:cNvPr id="3" name="text-2">
             <a:extLst xmlns:a="http://schemas.openxmlformats.org/drawingml/2006/main">
               <a:ext uri="{FF2B5EF4-FFF2-40B4-BE49-F238E27FC236}">
-                <a16:creationId xmlns:a16="http://schemas.microsoft.com/office/drawing/2014/main" id="{5A112292-087B-4A77-96C5-821C81879876}"/>
+                <a16:creationId xmlns:a16="http://schemas.microsoft.com/office/drawing/2014/main" id="{26E461CA-FF11-431C-8158-9CBEF88A3F44}"/>
               </a:ext>
             </a:extLst>
           </p:cNvPr>
@@ -38683,7 +38745,7 @@
           <p:cNvPr id="4" name="text-3">
             <a:extLst xmlns:a="http://schemas.openxmlformats.org/drawingml/2006/main">
               <a:ext uri="{FF2B5EF4-FFF2-40B4-BE49-F238E27FC236}">
-                <a16:creationId xmlns:a16="http://schemas.microsoft.com/office/drawing/2014/main" id="{59D3E1C2-017C-452C-B4F8-B75E8D9D4254}"/>
+                <a16:creationId xmlns:a16="http://schemas.microsoft.com/office/drawing/2014/main" id="{E5B93B6B-1C3C-473D-ADD2-DBE0B7833875}"/>
               </a:ext>
             </a:extLst>
           </p:cNvPr>
@@ -38745,7 +38807,7 @@
           <p:cNvPr id="5" name="">
             <a:extLst xmlns:a="http://schemas.openxmlformats.org/drawingml/2006/main">
               <a:ext uri="{FF2B5EF4-FFF2-40B4-BE49-F238E27FC236}">
-                <a16:creationId xmlns:a16="http://schemas.microsoft.com/office/drawing/2014/main" id="{4C672D3F-4B84-4174-834E-E5E91597772F}"/>
+                <a16:creationId xmlns:a16="http://schemas.microsoft.com/office/drawing/2014/main" id="{94221880-6AD6-40D2-A895-8995827A3B0F}"/>
               </a:ext>
             </a:extLst>
           </p:cNvPr>
@@ -38776,7 +38838,7 @@
           <p:cNvPr id="6" name="text-5">
             <a:extLst xmlns:a="http://schemas.openxmlformats.org/drawingml/2006/main">
               <a:ext uri="{FF2B5EF4-FFF2-40B4-BE49-F238E27FC236}">
-                <a16:creationId xmlns:a16="http://schemas.microsoft.com/office/drawing/2014/main" id="{6820A733-FCD2-4DEB-8891-4A8561D28F96}"/>
+                <a16:creationId xmlns:a16="http://schemas.microsoft.com/office/drawing/2014/main" id="{FF89F04B-5338-4649-8742-1922A3B1F3AB}"/>
               </a:ext>
             </a:extLst>
           </p:cNvPr>
@@ -38838,7 +38900,7 @@
           <p:cNvPr id="7" name="text-6">
             <a:extLst xmlns:a="http://schemas.openxmlformats.org/drawingml/2006/main">
               <a:ext uri="{FF2B5EF4-FFF2-40B4-BE49-F238E27FC236}">
-                <a16:creationId xmlns:a16="http://schemas.microsoft.com/office/drawing/2014/main" id="{4DAD4536-533D-47AD-8C7E-EC0AFB86C0CF}"/>
+                <a16:creationId xmlns:a16="http://schemas.microsoft.com/office/drawing/2014/main" id="{159B191B-B8FF-4635-9AD6-A85AEBADA0F5}"/>
               </a:ext>
             </a:extLst>
           </p:cNvPr>
@@ -38898,7 +38960,7 @@
     </p:spTree>
     <p:extLst>
       <p:ext uri="{BB962C8B-B14F-4D97-AF65-F5344CB8AC3E}">
-        <p14:creationId xmlns:p14="http://schemas.microsoft.com/office/powerpoint/2010/main" val="1476786352"/>
+        <p14:creationId xmlns:p14="http://schemas.microsoft.com/office/powerpoint/2010/main" val="641954181"/>
       </p:ext>
     </p:extLst>
   </p:cSld>
@@ -38929,7 +38991,7 @@
           <p:cNvPr id="8" name="text-0">
             <a:extLst xmlns:a="http://schemas.openxmlformats.org/drawingml/2006/main">
               <a:ext uri="{FF2B5EF4-FFF2-40B4-BE49-F238E27FC236}">
-                <a16:creationId xmlns:a16="http://schemas.microsoft.com/office/drawing/2014/main" id="{0F55AD70-FE99-454C-807E-ED88D3BF010D}"/>
+                <a16:creationId xmlns:a16="http://schemas.microsoft.com/office/drawing/2014/main" id="{6138C482-2D33-479A-BF78-4915CB468F85}"/>
               </a:ext>
             </a:extLst>
           </p:cNvPr>
@@ -38991,7 +39053,7 @@
           <p:cNvPr id="2" name="text-1">
             <a:extLst xmlns:a="http://schemas.openxmlformats.org/drawingml/2006/main">
               <a:ext uri="{FF2B5EF4-FFF2-40B4-BE49-F238E27FC236}">
-                <a16:creationId xmlns:a16="http://schemas.microsoft.com/office/drawing/2014/main" id="{DFB8FF19-19BA-4461-8AB5-174D7C8D1864}"/>
+                <a16:creationId xmlns:a16="http://schemas.microsoft.com/office/drawing/2014/main" id="{4A166637-C89B-47E8-B8E9-4B67162C8F7D}"/>
               </a:ext>
             </a:extLst>
           </p:cNvPr>
@@ -39053,7 +39115,7 @@
           <p:cNvPr id="3" name="text-2">
             <a:extLst xmlns:a="http://schemas.openxmlformats.org/drawingml/2006/main">
               <a:ext uri="{FF2B5EF4-FFF2-40B4-BE49-F238E27FC236}">
-                <a16:creationId xmlns:a16="http://schemas.microsoft.com/office/drawing/2014/main" id="{FF3ECC41-2B60-41E1-BFDD-D05E5A238848}"/>
+                <a16:creationId xmlns:a16="http://schemas.microsoft.com/office/drawing/2014/main" id="{A488178E-35E0-495E-AE94-FC689DD403E4}"/>
               </a:ext>
             </a:extLst>
           </p:cNvPr>
@@ -39145,7 +39207,7 @@
           <p:cNvPr id="4" name="text-3">
             <a:extLst xmlns:a="http://schemas.openxmlformats.org/drawingml/2006/main">
               <a:ext uri="{FF2B5EF4-FFF2-40B4-BE49-F238E27FC236}">
-                <a16:creationId xmlns:a16="http://schemas.microsoft.com/office/drawing/2014/main" id="{7254AD3D-3D0D-4EBC-89D4-DF73267732A6}"/>
+                <a16:creationId xmlns:a16="http://schemas.microsoft.com/office/drawing/2014/main" id="{52237CB3-2CF4-42F6-8B75-D4BBD1ACA2A7}"/>
               </a:ext>
             </a:extLst>
           </p:cNvPr>
@@ -39207,7 +39269,7 @@
           <p:cNvPr id="5" name="">
             <a:extLst xmlns:a="http://schemas.openxmlformats.org/drawingml/2006/main">
               <a:ext uri="{FF2B5EF4-FFF2-40B4-BE49-F238E27FC236}">
-                <a16:creationId xmlns:a16="http://schemas.microsoft.com/office/drawing/2014/main" id="{200EE514-7632-4075-BB9B-7A2C778D488E}"/>
+                <a16:creationId xmlns:a16="http://schemas.microsoft.com/office/drawing/2014/main" id="{B3911E27-7AF9-4649-93FE-5D36EFCD12FA}"/>
               </a:ext>
             </a:extLst>
           </p:cNvPr>
@@ -39238,7 +39300,7 @@
           <p:cNvPr id="6" name="text-5">
             <a:extLst xmlns:a="http://schemas.openxmlformats.org/drawingml/2006/main">
               <a:ext uri="{FF2B5EF4-FFF2-40B4-BE49-F238E27FC236}">
-                <a16:creationId xmlns:a16="http://schemas.microsoft.com/office/drawing/2014/main" id="{7BC82F48-164E-4AF0-92D8-EEF942610106}"/>
+                <a16:creationId xmlns:a16="http://schemas.microsoft.com/office/drawing/2014/main" id="{C2C4875E-4155-4EFE-B4B5-79EB9EB7E6D5}"/>
               </a:ext>
             </a:extLst>
           </p:cNvPr>
@@ -39300,7 +39362,7 @@
           <p:cNvPr id="7" name="text-6">
             <a:extLst xmlns:a="http://schemas.openxmlformats.org/drawingml/2006/main">
               <a:ext uri="{FF2B5EF4-FFF2-40B4-BE49-F238E27FC236}">
-                <a16:creationId xmlns:a16="http://schemas.microsoft.com/office/drawing/2014/main" id="{BC5CD7DF-8184-4CB8-9C4E-E8DC19389448}"/>
+                <a16:creationId xmlns:a16="http://schemas.microsoft.com/office/drawing/2014/main" id="{5AF4634D-642F-4B31-814F-73A7BDCB2B1A}"/>
               </a:ext>
             </a:extLst>
           </p:cNvPr>
@@ -39360,7 +39422,7 @@
     </p:spTree>
     <p:extLst>
       <p:ext uri="{BB962C8B-B14F-4D97-AF65-F5344CB8AC3E}">
-        <p14:creationId xmlns:p14="http://schemas.microsoft.com/office/powerpoint/2010/main" val="825467852"/>
+        <p14:creationId xmlns:p14="http://schemas.microsoft.com/office/powerpoint/2010/main" val="896658490"/>
       </p:ext>
     </p:extLst>
   </p:cSld>
@@ -39391,7 +39453,7 @@
           <p:cNvPr id="7" name="text-0">
             <a:extLst xmlns:a="http://schemas.openxmlformats.org/drawingml/2006/main">
               <a:ext uri="{FF2B5EF4-FFF2-40B4-BE49-F238E27FC236}">
-                <a16:creationId xmlns:a16="http://schemas.microsoft.com/office/drawing/2014/main" id="{DC432C8B-F9D2-4BE5-9C61-D347FFE9DE51}"/>
+                <a16:creationId xmlns:a16="http://schemas.microsoft.com/office/drawing/2014/main" id="{62B9FDD8-5A2D-4D83-87C8-A5FB5A6E148D}"/>
               </a:ext>
             </a:extLst>
           </p:cNvPr>
@@ -39453,7 +39515,7 @@
           <p:cNvPr id="2" name="text-1">
             <a:extLst xmlns:a="http://schemas.openxmlformats.org/drawingml/2006/main">
               <a:ext uri="{FF2B5EF4-FFF2-40B4-BE49-F238E27FC236}">
-                <a16:creationId xmlns:a16="http://schemas.microsoft.com/office/drawing/2014/main" id="{3A65E6ED-4C7F-4990-8D86-41811D60EE48}"/>
+                <a16:creationId xmlns:a16="http://schemas.microsoft.com/office/drawing/2014/main" id="{6315D3AC-B809-4788-9475-2F622010E4F5}"/>
               </a:ext>
             </a:extLst>
           </p:cNvPr>
@@ -39515,7 +39577,7 @@
           <p:cNvPr id="3" name="text-2">
             <a:extLst xmlns:a="http://schemas.openxmlformats.org/drawingml/2006/main">
               <a:ext uri="{FF2B5EF4-FFF2-40B4-BE49-F238E27FC236}">
-                <a16:creationId xmlns:a16="http://schemas.microsoft.com/office/drawing/2014/main" id="{61F70249-F52F-4544-B630-C2D0325D5E57}"/>
+                <a16:creationId xmlns:a16="http://schemas.microsoft.com/office/drawing/2014/main" id="{CE1D3115-BCC2-47DC-B5D9-CF553EDF34B7}"/>
               </a:ext>
             </a:extLst>
           </p:cNvPr>
@@ -39626,7 +39688,7 @@
           <p:cNvPr id="4" name="">
             <a:extLst xmlns:a="http://schemas.openxmlformats.org/drawingml/2006/main">
               <a:ext uri="{FF2B5EF4-FFF2-40B4-BE49-F238E27FC236}">
-                <a16:creationId xmlns:a16="http://schemas.microsoft.com/office/drawing/2014/main" id="{B37FD8F1-424D-4BA6-8FC1-66229D4E34B8}"/>
+                <a16:creationId xmlns:a16="http://schemas.microsoft.com/office/drawing/2014/main" id="{5F5465D3-4172-440B-9428-421B9AD899C0}"/>
               </a:ext>
             </a:extLst>
           </p:cNvPr>
@@ -39657,7 +39719,7 @@
           <p:cNvPr id="5" name="text-4">
             <a:extLst xmlns:a="http://schemas.openxmlformats.org/drawingml/2006/main">
               <a:ext uri="{FF2B5EF4-FFF2-40B4-BE49-F238E27FC236}">
-                <a16:creationId xmlns:a16="http://schemas.microsoft.com/office/drawing/2014/main" id="{6E24CC03-162D-480F-BA61-A886B45DDC3A}"/>
+                <a16:creationId xmlns:a16="http://schemas.microsoft.com/office/drawing/2014/main" id="{61D48FC6-3DF2-46D3-8BC1-F4CE0F9BCAE9}"/>
               </a:ext>
             </a:extLst>
           </p:cNvPr>
@@ -39719,7 +39781,7 @@
           <p:cNvPr id="6" name="text-5">
             <a:extLst xmlns:a="http://schemas.openxmlformats.org/drawingml/2006/main">
               <a:ext uri="{FF2B5EF4-FFF2-40B4-BE49-F238E27FC236}">
-                <a16:creationId xmlns:a16="http://schemas.microsoft.com/office/drawing/2014/main" id="{ECB3AFE4-2241-48DE-93CC-D7C3EB10E9EC}"/>
+                <a16:creationId xmlns:a16="http://schemas.microsoft.com/office/drawing/2014/main" id="{20FE89D0-0B54-49E6-8E35-979C5B7AE0B3}"/>
               </a:ext>
             </a:extLst>
           </p:cNvPr>
@@ -39779,7 +39841,7 @@
     </p:spTree>
     <p:extLst>
       <p:ext uri="{BB962C8B-B14F-4D97-AF65-F5344CB8AC3E}">
-        <p14:creationId xmlns:p14="http://schemas.microsoft.com/office/powerpoint/2010/main" val="1833672200"/>
+        <p14:creationId xmlns:p14="http://schemas.microsoft.com/office/powerpoint/2010/main" val="1262191023"/>
       </p:ext>
     </p:extLst>
   </p:cSld>
@@ -39810,7 +39872,7 @@
           <p:cNvPr id="8" name="text-0">
             <a:extLst xmlns:a="http://schemas.openxmlformats.org/drawingml/2006/main">
               <a:ext uri="{FF2B5EF4-FFF2-40B4-BE49-F238E27FC236}">
-                <a16:creationId xmlns:a16="http://schemas.microsoft.com/office/drawing/2014/main" id="{649410F9-AA2F-4BED-A121-6BFDC974C15D}"/>
+                <a16:creationId xmlns:a16="http://schemas.microsoft.com/office/drawing/2014/main" id="{EB7373DC-0CB7-45E2-B915-2863C8CB50C3}"/>
               </a:ext>
             </a:extLst>
           </p:cNvPr>
@@ -39872,7 +39934,7 @@
           <p:cNvPr id="2" name="text-1">
             <a:extLst xmlns:a="http://schemas.openxmlformats.org/drawingml/2006/main">
               <a:ext uri="{FF2B5EF4-FFF2-40B4-BE49-F238E27FC236}">
-                <a16:creationId xmlns:a16="http://schemas.microsoft.com/office/drawing/2014/main" id="{6E62CB52-62F8-434B-91AD-F04DA22798CB}"/>
+                <a16:creationId xmlns:a16="http://schemas.microsoft.com/office/drawing/2014/main" id="{B1A13D2F-861D-4CF2-94A0-7564C8668120}"/>
               </a:ext>
             </a:extLst>
           </p:cNvPr>
@@ -39934,7 +39996,7 @@
           <p:cNvPr id="3" name="text-2">
             <a:extLst xmlns:a="http://schemas.openxmlformats.org/drawingml/2006/main">
               <a:ext uri="{FF2B5EF4-FFF2-40B4-BE49-F238E27FC236}">
-                <a16:creationId xmlns:a16="http://schemas.microsoft.com/office/drawing/2014/main" id="{79424CE8-D446-4AA8-9402-4E068B7AAC9C}"/>
+                <a16:creationId xmlns:a16="http://schemas.microsoft.com/office/drawing/2014/main" id="{C049EDF0-C3C2-4FEA-A2EA-96D62D407047}"/>
               </a:ext>
             </a:extLst>
           </p:cNvPr>
@@ -40026,7 +40088,7 @@
           <p:cNvPr id="4" name="text-3">
             <a:extLst xmlns:a="http://schemas.openxmlformats.org/drawingml/2006/main">
               <a:ext uri="{FF2B5EF4-FFF2-40B4-BE49-F238E27FC236}">
-                <a16:creationId xmlns:a16="http://schemas.microsoft.com/office/drawing/2014/main" id="{28C846F1-2459-44A3-BDF1-01D1766228DF}"/>
+                <a16:creationId xmlns:a16="http://schemas.microsoft.com/office/drawing/2014/main" id="{09084B45-FF40-40ED-B60F-A7BD7DA5E87C}"/>
               </a:ext>
             </a:extLst>
           </p:cNvPr>
@@ -40088,7 +40150,7 @@
           <p:cNvPr id="5" name="">
             <a:extLst xmlns:a="http://schemas.openxmlformats.org/drawingml/2006/main">
               <a:ext uri="{FF2B5EF4-FFF2-40B4-BE49-F238E27FC236}">
-                <a16:creationId xmlns:a16="http://schemas.microsoft.com/office/drawing/2014/main" id="{435DC2A2-597A-4CCF-8B61-4352C2DC8421}"/>
+                <a16:creationId xmlns:a16="http://schemas.microsoft.com/office/drawing/2014/main" id="{FE601858-5884-407F-BF05-655AE7C37A6A}"/>
               </a:ext>
             </a:extLst>
           </p:cNvPr>
@@ -40119,7 +40181,7 @@
           <p:cNvPr id="6" name="text-5">
             <a:extLst xmlns:a="http://schemas.openxmlformats.org/drawingml/2006/main">
               <a:ext uri="{FF2B5EF4-FFF2-40B4-BE49-F238E27FC236}">
-                <a16:creationId xmlns:a16="http://schemas.microsoft.com/office/drawing/2014/main" id="{C0ACC414-173E-4981-86AD-7C033BE0B848}"/>
+                <a16:creationId xmlns:a16="http://schemas.microsoft.com/office/drawing/2014/main" id="{5F18111C-6EA9-4804-9E78-1D774E6B7A74}"/>
               </a:ext>
             </a:extLst>
           </p:cNvPr>
@@ -40181,7 +40243,7 @@
           <p:cNvPr id="7" name="text-6">
             <a:extLst xmlns:a="http://schemas.openxmlformats.org/drawingml/2006/main">
               <a:ext uri="{FF2B5EF4-FFF2-40B4-BE49-F238E27FC236}">
-                <a16:creationId xmlns:a16="http://schemas.microsoft.com/office/drawing/2014/main" id="{43104EFC-CCEE-4642-9283-BEBB601785A6}"/>
+                <a16:creationId xmlns:a16="http://schemas.microsoft.com/office/drawing/2014/main" id="{38CFB97D-EE12-46C7-A9FA-A81CE01E6CFC}"/>
               </a:ext>
             </a:extLst>
           </p:cNvPr>
@@ -40241,7 +40303,7 @@
     </p:spTree>
     <p:extLst>
       <p:ext uri="{BB962C8B-B14F-4D97-AF65-F5344CB8AC3E}">
-        <p14:creationId xmlns:p14="http://schemas.microsoft.com/office/powerpoint/2010/main" val="1391756060"/>
+        <p14:creationId xmlns:p14="http://schemas.microsoft.com/office/powerpoint/2010/main" val="204732388"/>
       </p:ext>
     </p:extLst>
   </p:cSld>
@@ -40272,7 +40334,7 @@
           <p:cNvPr id="7" name="text-0">
             <a:extLst xmlns:a="http://schemas.openxmlformats.org/drawingml/2006/main">
               <a:ext uri="{FF2B5EF4-FFF2-40B4-BE49-F238E27FC236}">
-                <a16:creationId xmlns:a16="http://schemas.microsoft.com/office/drawing/2014/main" id="{6A583A19-7FB5-41AD-BBF7-9F9177D95A92}"/>
+                <a16:creationId xmlns:a16="http://schemas.microsoft.com/office/drawing/2014/main" id="{F4B4CAE4-2308-4A97-9A50-6BC1D6D6C702}"/>
               </a:ext>
             </a:extLst>
           </p:cNvPr>
@@ -40334,7 +40396,7 @@
           <p:cNvPr id="2" name="text-1">
             <a:extLst xmlns:a="http://schemas.openxmlformats.org/drawingml/2006/main">
               <a:ext uri="{FF2B5EF4-FFF2-40B4-BE49-F238E27FC236}">
-                <a16:creationId xmlns:a16="http://schemas.microsoft.com/office/drawing/2014/main" id="{4C74E1F2-51ED-4CE5-A955-B89BA958CBD8}"/>
+                <a16:creationId xmlns:a16="http://schemas.microsoft.com/office/drawing/2014/main" id="{F227D843-7D93-4512-8237-0BF30C2D80E1}"/>
               </a:ext>
             </a:extLst>
           </p:cNvPr>
@@ -40396,7 +40458,7 @@
           <p:cNvPr id="3" name="text-2">
             <a:extLst xmlns:a="http://schemas.openxmlformats.org/drawingml/2006/main">
               <a:ext uri="{FF2B5EF4-FFF2-40B4-BE49-F238E27FC236}">
-                <a16:creationId xmlns:a16="http://schemas.microsoft.com/office/drawing/2014/main" id="{6865931C-74A6-4DAF-B31B-339707D303B4}"/>
+                <a16:creationId xmlns:a16="http://schemas.microsoft.com/office/drawing/2014/main" id="{47CCB2E8-C8D7-48DA-98B1-6BBF818E31FF}"/>
               </a:ext>
             </a:extLst>
           </p:cNvPr>
@@ -40503,7 +40565,7 @@
           <p:cNvPr id="4" name="">
             <a:extLst xmlns:a="http://schemas.openxmlformats.org/drawingml/2006/main">
               <a:ext uri="{FF2B5EF4-FFF2-40B4-BE49-F238E27FC236}">
-                <a16:creationId xmlns:a16="http://schemas.microsoft.com/office/drawing/2014/main" id="{38F7BEF5-6A99-4605-A8E8-FF3BD866AA30}"/>
+                <a16:creationId xmlns:a16="http://schemas.microsoft.com/office/drawing/2014/main" id="{2BD0BF0A-F547-4A4C-81C7-9EDCEFAF8222}"/>
               </a:ext>
             </a:extLst>
           </p:cNvPr>
@@ -40534,7 +40596,7 @@
           <p:cNvPr id="5" name="text-4">
             <a:extLst xmlns:a="http://schemas.openxmlformats.org/drawingml/2006/main">
               <a:ext uri="{FF2B5EF4-FFF2-40B4-BE49-F238E27FC236}">
-                <a16:creationId xmlns:a16="http://schemas.microsoft.com/office/drawing/2014/main" id="{01231578-3241-4DC5-9FDC-7D4F694EC774}"/>
+                <a16:creationId xmlns:a16="http://schemas.microsoft.com/office/drawing/2014/main" id="{473E41A6-724E-44B1-95F7-FC56A5CDB2EC}"/>
               </a:ext>
             </a:extLst>
           </p:cNvPr>
@@ -40596,7 +40658,7 @@
           <p:cNvPr id="6" name="text-5">
             <a:extLst xmlns:a="http://schemas.openxmlformats.org/drawingml/2006/main">
               <a:ext uri="{FF2B5EF4-FFF2-40B4-BE49-F238E27FC236}">
-                <a16:creationId xmlns:a16="http://schemas.microsoft.com/office/drawing/2014/main" id="{15A61ABE-184A-471D-B1D8-FBE649C0B0BC}"/>
+                <a16:creationId xmlns:a16="http://schemas.microsoft.com/office/drawing/2014/main" id="{C696516B-31F3-4E8D-8647-C6EDA6ED72C7}"/>
               </a:ext>
             </a:extLst>
           </p:cNvPr>
@@ -40656,7 +40718,7 @@
     </p:spTree>
     <p:extLst>
       <p:ext uri="{BB962C8B-B14F-4D97-AF65-F5344CB8AC3E}">
-        <p14:creationId xmlns:p14="http://schemas.microsoft.com/office/powerpoint/2010/main" val="881280022"/>
+        <p14:creationId xmlns:p14="http://schemas.microsoft.com/office/powerpoint/2010/main" val="1225772827"/>
       </p:ext>
     </p:extLst>
   </p:cSld>
@@ -40687,7 +40749,7 @@
           <p:cNvPr id="7" name="text-0">
             <a:extLst xmlns:a="http://schemas.openxmlformats.org/drawingml/2006/main">
               <a:ext uri="{FF2B5EF4-FFF2-40B4-BE49-F238E27FC236}">
-                <a16:creationId xmlns:a16="http://schemas.microsoft.com/office/drawing/2014/main" id="{C3265730-D1C6-4D89-AF18-7EE834A63996}"/>
+                <a16:creationId xmlns:a16="http://schemas.microsoft.com/office/drawing/2014/main" id="{F9E16762-61C0-4CA3-97B7-85AB8E82B196}"/>
               </a:ext>
             </a:extLst>
           </p:cNvPr>
@@ -40749,7 +40811,7 @@
           <p:cNvPr id="2" name="text-1">
             <a:extLst xmlns:a="http://schemas.openxmlformats.org/drawingml/2006/main">
               <a:ext uri="{FF2B5EF4-FFF2-40B4-BE49-F238E27FC236}">
-                <a16:creationId xmlns:a16="http://schemas.microsoft.com/office/drawing/2014/main" id="{E7718CEE-E989-4DA9-8C64-BACEFCD839BE}"/>
+                <a16:creationId xmlns:a16="http://schemas.microsoft.com/office/drawing/2014/main" id="{57542C2D-4C4C-47F1-A144-47F4D7741B5F}"/>
               </a:ext>
             </a:extLst>
           </p:cNvPr>
@@ -40811,7 +40873,7 @@
           <p:cNvPr id="3" name="text-2">
             <a:extLst xmlns:a="http://schemas.openxmlformats.org/drawingml/2006/main">
               <a:ext uri="{FF2B5EF4-FFF2-40B4-BE49-F238E27FC236}">
-                <a16:creationId xmlns:a16="http://schemas.microsoft.com/office/drawing/2014/main" id="{DBCBD07C-5926-4398-8528-DB71D71F9BBD}"/>
+                <a16:creationId xmlns:a16="http://schemas.microsoft.com/office/drawing/2014/main" id="{7918EE9F-F01F-49A2-865C-7BDFEF3FF0D7}"/>
               </a:ext>
             </a:extLst>
           </p:cNvPr>
@@ -40918,7 +40980,7 @@
           <p:cNvPr id="4" name="">
             <a:extLst xmlns:a="http://schemas.openxmlformats.org/drawingml/2006/main">
               <a:ext uri="{FF2B5EF4-FFF2-40B4-BE49-F238E27FC236}">
-                <a16:creationId xmlns:a16="http://schemas.microsoft.com/office/drawing/2014/main" id="{011ACFDD-01E8-4795-BE23-4A14C675AB92}"/>
+                <a16:creationId xmlns:a16="http://schemas.microsoft.com/office/drawing/2014/main" id="{CAF3D01B-A039-491E-BB66-FE06BA0A4E99}"/>
               </a:ext>
             </a:extLst>
           </p:cNvPr>
@@ -40949,7 +41011,7 @@
           <p:cNvPr id="5" name="text-4">
             <a:extLst xmlns:a="http://schemas.openxmlformats.org/drawingml/2006/main">
               <a:ext uri="{FF2B5EF4-FFF2-40B4-BE49-F238E27FC236}">
-                <a16:creationId xmlns:a16="http://schemas.microsoft.com/office/drawing/2014/main" id="{C2E32F01-A671-4A9C-9FBC-CC61A7AFBE4B}"/>
+                <a16:creationId xmlns:a16="http://schemas.microsoft.com/office/drawing/2014/main" id="{89A34706-2C1D-4944-A569-2FF31D2F7CA8}"/>
               </a:ext>
             </a:extLst>
           </p:cNvPr>
@@ -41011,7 +41073,7 @@
           <p:cNvPr id="6" name="text-5">
             <a:extLst xmlns:a="http://schemas.openxmlformats.org/drawingml/2006/main">
               <a:ext uri="{FF2B5EF4-FFF2-40B4-BE49-F238E27FC236}">
-                <a16:creationId xmlns:a16="http://schemas.microsoft.com/office/drawing/2014/main" id="{FFE90AE5-C573-49DC-8A8B-09FC059A714B}"/>
+                <a16:creationId xmlns:a16="http://schemas.microsoft.com/office/drawing/2014/main" id="{580BC4D1-DA3B-4D09-BAEC-745484AEA06E}"/>
               </a:ext>
             </a:extLst>
           </p:cNvPr>
@@ -41071,7 +41133,7 @@
     </p:spTree>
     <p:extLst>
       <p:ext uri="{BB962C8B-B14F-4D97-AF65-F5344CB8AC3E}">
-        <p14:creationId xmlns:p14="http://schemas.microsoft.com/office/powerpoint/2010/main" val="1442399590"/>
+        <p14:creationId xmlns:p14="http://schemas.microsoft.com/office/powerpoint/2010/main" val="1405837613"/>
       </p:ext>
     </p:extLst>
   </p:cSld>
@@ -41102,7 +41164,7 @@
           <p:cNvPr id="7" name="text-0">
             <a:extLst xmlns:a="http://schemas.openxmlformats.org/drawingml/2006/main">
               <a:ext uri="{FF2B5EF4-FFF2-40B4-BE49-F238E27FC236}">
-                <a16:creationId xmlns:a16="http://schemas.microsoft.com/office/drawing/2014/main" id="{51FB049D-B341-43DF-A716-B50D2F152A26}"/>
+                <a16:creationId xmlns:a16="http://schemas.microsoft.com/office/drawing/2014/main" id="{BD331C72-51BB-4E78-ADB7-5132D082D871}"/>
               </a:ext>
             </a:extLst>
           </p:cNvPr>
@@ -41164,7 +41226,7 @@
           <p:cNvPr id="2" name="text-1">
             <a:extLst xmlns:a="http://schemas.openxmlformats.org/drawingml/2006/main">
               <a:ext uri="{FF2B5EF4-FFF2-40B4-BE49-F238E27FC236}">
-                <a16:creationId xmlns:a16="http://schemas.microsoft.com/office/drawing/2014/main" id="{22012F65-36DE-42B8-9230-C12CDD0D6D1D}"/>
+                <a16:creationId xmlns:a16="http://schemas.microsoft.com/office/drawing/2014/main" id="{EA5BE1B1-CC67-4BD3-8A37-A51DD3035D88}"/>
               </a:ext>
             </a:extLst>
           </p:cNvPr>
@@ -41226,7 +41288,7 @@
           <p:cNvPr id="3" name="text-2">
             <a:extLst xmlns:a="http://schemas.openxmlformats.org/drawingml/2006/main">
               <a:ext uri="{FF2B5EF4-FFF2-40B4-BE49-F238E27FC236}">
-                <a16:creationId xmlns:a16="http://schemas.microsoft.com/office/drawing/2014/main" id="{1646A0AA-EDA0-489A-A6ED-DB7F6FB1BBC6}"/>
+                <a16:creationId xmlns:a16="http://schemas.microsoft.com/office/drawing/2014/main" id="{DFB7448D-199B-49C4-8272-1B2FA7C81E3D}"/>
               </a:ext>
             </a:extLst>
           </p:cNvPr>
@@ -41333,7 +41395,7 @@
           <p:cNvPr id="4" name="">
             <a:extLst xmlns:a="http://schemas.openxmlformats.org/drawingml/2006/main">
               <a:ext uri="{FF2B5EF4-FFF2-40B4-BE49-F238E27FC236}">
-                <a16:creationId xmlns:a16="http://schemas.microsoft.com/office/drawing/2014/main" id="{8D8B9E2B-6C9E-43B6-B8F5-F71C131EB3B9}"/>
+                <a16:creationId xmlns:a16="http://schemas.microsoft.com/office/drawing/2014/main" id="{582393FF-90E2-4EA2-9614-F976C7F96B59}"/>
               </a:ext>
             </a:extLst>
           </p:cNvPr>
@@ -41364,7 +41426,7 @@
           <p:cNvPr id="5" name="text-4">
             <a:extLst xmlns:a="http://schemas.openxmlformats.org/drawingml/2006/main">
               <a:ext uri="{FF2B5EF4-FFF2-40B4-BE49-F238E27FC236}">
-                <a16:creationId xmlns:a16="http://schemas.microsoft.com/office/drawing/2014/main" id="{4E54DF57-DC02-4A12-95E8-1B0BF88B4ACB}"/>
+                <a16:creationId xmlns:a16="http://schemas.microsoft.com/office/drawing/2014/main" id="{CE148B0E-A1ED-4CC7-AFED-DAFBD3E64B2E}"/>
               </a:ext>
             </a:extLst>
           </p:cNvPr>
@@ -41426,7 +41488,7 @@
           <p:cNvPr id="6" name="text-5">
             <a:extLst xmlns:a="http://schemas.openxmlformats.org/drawingml/2006/main">
               <a:ext uri="{FF2B5EF4-FFF2-40B4-BE49-F238E27FC236}">
-                <a16:creationId xmlns:a16="http://schemas.microsoft.com/office/drawing/2014/main" id="{1F65D18A-AABA-4650-9235-689BFC04D895}"/>
+                <a16:creationId xmlns:a16="http://schemas.microsoft.com/office/drawing/2014/main" id="{B8F4DB03-1248-4781-B8C3-50345D71EF63}"/>
               </a:ext>
             </a:extLst>
           </p:cNvPr>
@@ -41486,7 +41548,7 @@
     </p:spTree>
     <p:extLst>
       <p:ext uri="{BB962C8B-B14F-4D97-AF65-F5344CB8AC3E}">
-        <p14:creationId xmlns:p14="http://schemas.microsoft.com/office/powerpoint/2010/main" val="1927297062"/>
+        <p14:creationId xmlns:p14="http://schemas.microsoft.com/office/powerpoint/2010/main" val="145104676"/>
       </p:ext>
     </p:extLst>
   </p:cSld>
@@ -41517,7 +41579,7 @@
           <p:cNvPr id="7" name="text-0">
             <a:extLst xmlns:a="http://schemas.openxmlformats.org/drawingml/2006/main">
               <a:ext uri="{FF2B5EF4-FFF2-40B4-BE49-F238E27FC236}">
-                <a16:creationId xmlns:a16="http://schemas.microsoft.com/office/drawing/2014/main" id="{62564B86-2CA9-4AF5-B64F-F2252F9FA3B9}"/>
+                <a16:creationId xmlns:a16="http://schemas.microsoft.com/office/drawing/2014/main" id="{DF6FAD32-570A-4583-BD30-D58BEB3E880F}"/>
               </a:ext>
             </a:extLst>
           </p:cNvPr>
@@ -41579,7 +41641,7 @@
           <p:cNvPr id="2" name="text-1">
             <a:extLst xmlns:a="http://schemas.openxmlformats.org/drawingml/2006/main">
               <a:ext uri="{FF2B5EF4-FFF2-40B4-BE49-F238E27FC236}">
-                <a16:creationId xmlns:a16="http://schemas.microsoft.com/office/drawing/2014/main" id="{150A8C9A-57D2-4CFC-BBA7-9BD4E5AD8BBE}"/>
+                <a16:creationId xmlns:a16="http://schemas.microsoft.com/office/drawing/2014/main" id="{A08BD62F-789B-4DAD-9412-78B5DCC2D285}"/>
               </a:ext>
             </a:extLst>
           </p:cNvPr>
@@ -41641,7 +41703,7 @@
           <p:cNvPr id="3" name="text-2">
             <a:extLst xmlns:a="http://schemas.openxmlformats.org/drawingml/2006/main">
               <a:ext uri="{FF2B5EF4-FFF2-40B4-BE49-F238E27FC236}">
-                <a16:creationId xmlns:a16="http://schemas.microsoft.com/office/drawing/2014/main" id="{B0DE21A6-5631-4AEE-96CA-4E9379E716D2}"/>
+                <a16:creationId xmlns:a16="http://schemas.microsoft.com/office/drawing/2014/main" id="{C9F8C13B-027D-471D-9A58-993721D05470}"/>
               </a:ext>
             </a:extLst>
           </p:cNvPr>
@@ -41694,7 +41756,7 @@
           <p:cNvPr id="4" name="">
             <a:extLst xmlns:a="http://schemas.openxmlformats.org/drawingml/2006/main">
               <a:ext uri="{FF2B5EF4-FFF2-40B4-BE49-F238E27FC236}">
-                <a16:creationId xmlns:a16="http://schemas.microsoft.com/office/drawing/2014/main" id="{7600EF15-D1E8-473E-9CFE-B657A59259A4}"/>
+                <a16:creationId xmlns:a16="http://schemas.microsoft.com/office/drawing/2014/main" id="{EE97473B-9172-44E2-890D-9DC94E33DE9E}"/>
               </a:ext>
             </a:extLst>
           </p:cNvPr>
@@ -41725,7 +41787,7 @@
           <p:cNvPr id="5" name="text-4">
             <a:extLst xmlns:a="http://schemas.openxmlformats.org/drawingml/2006/main">
               <a:ext uri="{FF2B5EF4-FFF2-40B4-BE49-F238E27FC236}">
-                <a16:creationId xmlns:a16="http://schemas.microsoft.com/office/drawing/2014/main" id="{064D478E-2434-472C-9E52-32E47F0BBE96}"/>
+                <a16:creationId xmlns:a16="http://schemas.microsoft.com/office/drawing/2014/main" id="{D14871C9-2A58-4E1C-B08B-A2E0570D02FB}"/>
               </a:ext>
             </a:extLst>
           </p:cNvPr>
@@ -41787,7 +41849,7 @@
           <p:cNvPr id="6" name="text-5">
             <a:extLst xmlns:a="http://schemas.openxmlformats.org/drawingml/2006/main">
               <a:ext uri="{FF2B5EF4-FFF2-40B4-BE49-F238E27FC236}">
-                <a16:creationId xmlns:a16="http://schemas.microsoft.com/office/drawing/2014/main" id="{4723D3C8-1991-4D1A-9342-E9551EDFF091}"/>
+                <a16:creationId xmlns:a16="http://schemas.microsoft.com/office/drawing/2014/main" id="{8317CC84-1BDC-4BE9-AD20-6C132DC1E952}"/>
               </a:ext>
             </a:extLst>
           </p:cNvPr>
@@ -41847,7 +41909,7 @@
     </p:spTree>
     <p:extLst>
       <p:ext uri="{BB962C8B-B14F-4D97-AF65-F5344CB8AC3E}">
-        <p14:creationId xmlns:p14="http://schemas.microsoft.com/office/powerpoint/2010/main" val="469198201"/>
+        <p14:creationId xmlns:p14="http://schemas.microsoft.com/office/powerpoint/2010/main" val="1608767496"/>
       </p:ext>
     </p:extLst>
   </p:cSld>
@@ -41878,7 +41940,7 @@
           <p:cNvPr id="11" name="text-0">
             <a:extLst xmlns:a="http://schemas.openxmlformats.org/drawingml/2006/main">
               <a:ext uri="{FF2B5EF4-FFF2-40B4-BE49-F238E27FC236}">
-                <a16:creationId xmlns:a16="http://schemas.microsoft.com/office/drawing/2014/main" id="{F6C1CB23-0D8C-4189-9628-3E6CD08ED49E}"/>
+                <a16:creationId xmlns:a16="http://schemas.microsoft.com/office/drawing/2014/main" id="{C4ADA2CC-EAD3-4247-B222-A3862D439CE6}"/>
               </a:ext>
             </a:extLst>
           </p:cNvPr>
@@ -41940,7 +42002,7 @@
           <p:cNvPr id="2" name="text-1">
             <a:extLst xmlns:a="http://schemas.openxmlformats.org/drawingml/2006/main">
               <a:ext uri="{FF2B5EF4-FFF2-40B4-BE49-F238E27FC236}">
-                <a16:creationId xmlns:a16="http://schemas.microsoft.com/office/drawing/2014/main" id="{10102C64-5EC6-4F3D-987E-E429FE73051A}"/>
+                <a16:creationId xmlns:a16="http://schemas.microsoft.com/office/drawing/2014/main" id="{2636ADDD-39D5-4272-ACB3-ABEEB8A7F1E4}"/>
               </a:ext>
             </a:extLst>
           </p:cNvPr>
@@ -42002,7 +42064,7 @@
           <p:cNvPr id="3" name="text-2">
             <a:extLst xmlns:a="http://schemas.openxmlformats.org/drawingml/2006/main">
               <a:ext uri="{FF2B5EF4-FFF2-40B4-BE49-F238E27FC236}">
-                <a16:creationId xmlns:a16="http://schemas.microsoft.com/office/drawing/2014/main" id="{9D7D0D88-38BF-4012-B8CF-7365AC06D28A}"/>
+                <a16:creationId xmlns:a16="http://schemas.microsoft.com/office/drawing/2014/main" id="{1B6DE734-3918-42B9-8684-DE6885AC13DF}"/>
               </a:ext>
             </a:extLst>
           </p:cNvPr>
@@ -42064,7 +42126,7 @@
           <p:cNvPr id="4" name="text-3">
             <a:extLst xmlns:a="http://schemas.openxmlformats.org/drawingml/2006/main">
               <a:ext uri="{FF2B5EF4-FFF2-40B4-BE49-F238E27FC236}">
-                <a16:creationId xmlns:a16="http://schemas.microsoft.com/office/drawing/2014/main" id="{3305EDC2-B71D-42E0-B1C2-354384BEE98A}"/>
+                <a16:creationId xmlns:a16="http://schemas.microsoft.com/office/drawing/2014/main" id="{898CB588-EDB0-42FE-BE7D-2589EF28D7F7}"/>
               </a:ext>
             </a:extLst>
           </p:cNvPr>
@@ -42126,7 +42188,7 @@
           <p:cNvPr id="5" name="text-4">
             <a:extLst xmlns:a="http://schemas.openxmlformats.org/drawingml/2006/main">
               <a:ext uri="{FF2B5EF4-FFF2-40B4-BE49-F238E27FC236}">
-                <a16:creationId xmlns:a16="http://schemas.microsoft.com/office/drawing/2014/main" id="{9C854B40-3936-4029-8D2F-47AAA41D3C41}"/>
+                <a16:creationId xmlns:a16="http://schemas.microsoft.com/office/drawing/2014/main" id="{AE11C744-D9C3-4D32-A975-29627D722D2D}"/>
               </a:ext>
             </a:extLst>
           </p:cNvPr>
@@ -42188,7 +42250,7 @@
           <p:cNvPr id="6" name="text-5">
             <a:extLst xmlns:a="http://schemas.openxmlformats.org/drawingml/2006/main">
               <a:ext uri="{FF2B5EF4-FFF2-40B4-BE49-F238E27FC236}">
-                <a16:creationId xmlns:a16="http://schemas.microsoft.com/office/drawing/2014/main" id="{9FCA768B-804C-462C-8F2D-9388767EC8D5}"/>
+                <a16:creationId xmlns:a16="http://schemas.microsoft.com/office/drawing/2014/main" id="{8A89655F-219E-42E3-874F-4ED4E5C426DF}"/>
               </a:ext>
             </a:extLst>
           </p:cNvPr>
@@ -42250,7 +42312,7 @@
           <p:cNvPr id="7" name="text-6">
             <a:extLst xmlns:a="http://schemas.openxmlformats.org/drawingml/2006/main">
               <a:ext uri="{FF2B5EF4-FFF2-40B4-BE49-F238E27FC236}">
-                <a16:creationId xmlns:a16="http://schemas.microsoft.com/office/drawing/2014/main" id="{82BEDCEF-6BFF-4255-A5AE-7FDF0C4C5F1B}"/>
+                <a16:creationId xmlns:a16="http://schemas.microsoft.com/office/drawing/2014/main" id="{D00CBE1F-67DA-473A-9152-63B124912376}"/>
               </a:ext>
             </a:extLst>
           </p:cNvPr>
@@ -42312,7 +42374,7 @@
           <p:cNvPr id="8" name="">
             <a:extLst xmlns:a="http://schemas.openxmlformats.org/drawingml/2006/main">
               <a:ext uri="{FF2B5EF4-FFF2-40B4-BE49-F238E27FC236}">
-                <a16:creationId xmlns:a16="http://schemas.microsoft.com/office/drawing/2014/main" id="{6252FB28-F044-49AF-A41A-2ADACC55207B}"/>
+                <a16:creationId xmlns:a16="http://schemas.microsoft.com/office/drawing/2014/main" id="{9696FC85-15AC-47C1-A740-FC2AEB5F922E}"/>
               </a:ext>
             </a:extLst>
           </p:cNvPr>
@@ -42343,7 +42405,7 @@
           <p:cNvPr id="9" name="text-8">
             <a:extLst xmlns:a="http://schemas.openxmlformats.org/drawingml/2006/main">
               <a:ext uri="{FF2B5EF4-FFF2-40B4-BE49-F238E27FC236}">
-                <a16:creationId xmlns:a16="http://schemas.microsoft.com/office/drawing/2014/main" id="{9C074C4E-06E8-438C-8E71-7A0053B536A6}"/>
+                <a16:creationId xmlns:a16="http://schemas.microsoft.com/office/drawing/2014/main" id="{B6B18B81-E0E5-4BBD-9E95-523C7DA0D260}"/>
               </a:ext>
             </a:extLst>
           </p:cNvPr>
@@ -42405,7 +42467,7 @@
           <p:cNvPr id="10" name="text-9">
             <a:extLst xmlns:a="http://schemas.openxmlformats.org/drawingml/2006/main">
               <a:ext uri="{FF2B5EF4-FFF2-40B4-BE49-F238E27FC236}">
-                <a16:creationId xmlns:a16="http://schemas.microsoft.com/office/drawing/2014/main" id="{DC47EC18-3000-43F1-B8A5-67C32383D151}"/>
+                <a16:creationId xmlns:a16="http://schemas.microsoft.com/office/drawing/2014/main" id="{27723177-C8EF-400A-A64C-B87A68E5C447}"/>
               </a:ext>
             </a:extLst>
           </p:cNvPr>
@@ -42465,7 +42527,7 @@
     </p:spTree>
     <p:extLst>
       <p:ext uri="{BB962C8B-B14F-4D97-AF65-F5344CB8AC3E}">
-        <p14:creationId xmlns:p14="http://schemas.microsoft.com/office/powerpoint/2010/main" val="144315331"/>
+        <p14:creationId xmlns:p14="http://schemas.microsoft.com/office/powerpoint/2010/main" val="1794991738"/>
       </p:ext>
     </p:extLst>
   </p:cSld>
@@ -42496,7 +42558,7 @@
           <p:cNvPr id="7" name="text-0">
             <a:extLst xmlns:a="http://schemas.openxmlformats.org/drawingml/2006/main">
               <a:ext uri="{FF2B5EF4-FFF2-40B4-BE49-F238E27FC236}">
-                <a16:creationId xmlns:a16="http://schemas.microsoft.com/office/drawing/2014/main" id="{248D066E-119A-4101-B05B-8EAE0701B557}"/>
+                <a16:creationId xmlns:a16="http://schemas.microsoft.com/office/drawing/2014/main" id="{9432FB75-9DD8-4A26-9ACC-F02D8A7A81E3}"/>
               </a:ext>
             </a:extLst>
           </p:cNvPr>
@@ -42558,7 +42620,7 @@
           <p:cNvPr id="2" name="text-1">
             <a:extLst xmlns:a="http://schemas.openxmlformats.org/drawingml/2006/main">
               <a:ext uri="{FF2B5EF4-FFF2-40B4-BE49-F238E27FC236}">
-                <a16:creationId xmlns:a16="http://schemas.microsoft.com/office/drawing/2014/main" id="{1BA68B58-2828-4D59-8D26-52FB9AD5339C}"/>
+                <a16:creationId xmlns:a16="http://schemas.microsoft.com/office/drawing/2014/main" id="{B1C1D09D-2042-49B8-9CDA-932AA754FD5A}"/>
               </a:ext>
             </a:extLst>
           </p:cNvPr>
@@ -42620,7 +42682,7 @@
           <p:cNvPr id="3" name="text-2">
             <a:extLst xmlns:a="http://schemas.openxmlformats.org/drawingml/2006/main">
               <a:ext uri="{FF2B5EF4-FFF2-40B4-BE49-F238E27FC236}">
-                <a16:creationId xmlns:a16="http://schemas.microsoft.com/office/drawing/2014/main" id="{C9F3324A-828C-4040-9871-6E406F49A5D2}"/>
+                <a16:creationId xmlns:a16="http://schemas.microsoft.com/office/drawing/2014/main" id="{D4EDF73E-492D-45A0-AEC3-4C22823C32AF}"/>
               </a:ext>
             </a:extLst>
           </p:cNvPr>
@@ -42691,7 +42753,7 @@
           <p:cNvPr id="4" name="">
             <a:extLst xmlns:a="http://schemas.openxmlformats.org/drawingml/2006/main">
               <a:ext uri="{FF2B5EF4-FFF2-40B4-BE49-F238E27FC236}">
-                <a16:creationId xmlns:a16="http://schemas.microsoft.com/office/drawing/2014/main" id="{EEA2AD75-DFD5-430C-9C0C-74B39BCAD1C3}"/>
+                <a16:creationId xmlns:a16="http://schemas.microsoft.com/office/drawing/2014/main" id="{962D0B0D-6D5B-401C-AA13-D6526D765B08}"/>
               </a:ext>
             </a:extLst>
           </p:cNvPr>
@@ -42722,7 +42784,7 @@
           <p:cNvPr id="5" name="text-4">
             <a:extLst xmlns:a="http://schemas.openxmlformats.org/drawingml/2006/main">
               <a:ext uri="{FF2B5EF4-FFF2-40B4-BE49-F238E27FC236}">
-                <a16:creationId xmlns:a16="http://schemas.microsoft.com/office/drawing/2014/main" id="{CA2DC5EB-C05B-4885-873C-BB0B7419D753}"/>
+                <a16:creationId xmlns:a16="http://schemas.microsoft.com/office/drawing/2014/main" id="{8AC27243-6242-41EC-856B-BA7F52AC388F}"/>
               </a:ext>
             </a:extLst>
           </p:cNvPr>
@@ -42784,7 +42846,7 @@
           <p:cNvPr id="6" name="text-5">
             <a:extLst xmlns:a="http://schemas.openxmlformats.org/drawingml/2006/main">
               <a:ext uri="{FF2B5EF4-FFF2-40B4-BE49-F238E27FC236}">
-                <a16:creationId xmlns:a16="http://schemas.microsoft.com/office/drawing/2014/main" id="{51296F20-5C3D-4F33-9D31-6BE6F49C80FD}"/>
+                <a16:creationId xmlns:a16="http://schemas.microsoft.com/office/drawing/2014/main" id="{F3BD2F88-B8B4-42C0-953D-592406F470ED}"/>
               </a:ext>
             </a:extLst>
           </p:cNvPr>
@@ -42844,7 +42906,7 @@
     </p:spTree>
     <p:extLst>
       <p:ext uri="{BB962C8B-B14F-4D97-AF65-F5344CB8AC3E}">
-        <p14:creationId xmlns:p14="http://schemas.microsoft.com/office/powerpoint/2010/main" val="1059835736"/>
+        <p14:creationId xmlns:p14="http://schemas.microsoft.com/office/powerpoint/2010/main" val="2059710622"/>
       </p:ext>
     </p:extLst>
   </p:cSld>
@@ -42875,7 +42937,7 @@
           <p:cNvPr id="8" name="text-0">
             <a:extLst xmlns:a="http://schemas.openxmlformats.org/drawingml/2006/main">
               <a:ext uri="{FF2B5EF4-FFF2-40B4-BE49-F238E27FC236}">
-                <a16:creationId xmlns:a16="http://schemas.microsoft.com/office/drawing/2014/main" id="{8405CB43-26A8-4D40-90A3-DCD46CE6E306}"/>
+                <a16:creationId xmlns:a16="http://schemas.microsoft.com/office/drawing/2014/main" id="{A2F3F296-2E52-4CE8-B232-8EEC8F385C3B}"/>
               </a:ext>
             </a:extLst>
           </p:cNvPr>
@@ -42937,7 +42999,7 @@
           <p:cNvPr id="2" name="text-1">
             <a:extLst xmlns:a="http://schemas.openxmlformats.org/drawingml/2006/main">
               <a:ext uri="{FF2B5EF4-FFF2-40B4-BE49-F238E27FC236}">
-                <a16:creationId xmlns:a16="http://schemas.microsoft.com/office/drawing/2014/main" id="{39AC19D2-B1EA-403E-826E-C04705F3F1A0}"/>
+                <a16:creationId xmlns:a16="http://schemas.microsoft.com/office/drawing/2014/main" id="{2E8F53E0-4D0F-4215-81D3-B08698A54071}"/>
               </a:ext>
             </a:extLst>
           </p:cNvPr>
@@ -42999,7 +43061,7 @@
           <p:cNvPr id="3" name="text-2">
             <a:extLst xmlns:a="http://schemas.openxmlformats.org/drawingml/2006/main">
               <a:ext uri="{FF2B5EF4-FFF2-40B4-BE49-F238E27FC236}">
-                <a16:creationId xmlns:a16="http://schemas.microsoft.com/office/drawing/2014/main" id="{9AEBCAF7-4E34-4015-9362-9700D9CE8449}"/>
+                <a16:creationId xmlns:a16="http://schemas.microsoft.com/office/drawing/2014/main" id="{A385A071-9476-4EE1-807A-B1455069E0F2}"/>
               </a:ext>
             </a:extLst>
           </p:cNvPr>
@@ -43061,7 +43123,7 @@
           <p:cNvPr id="4" name="text-3">
             <a:extLst xmlns:a="http://schemas.openxmlformats.org/drawingml/2006/main">
               <a:ext uri="{FF2B5EF4-FFF2-40B4-BE49-F238E27FC236}">
-                <a16:creationId xmlns:a16="http://schemas.microsoft.com/office/drawing/2014/main" id="{46D6FA8B-1FBE-41DC-980F-3805338B7D9F}"/>
+                <a16:creationId xmlns:a16="http://schemas.microsoft.com/office/drawing/2014/main" id="{ECA5A6F8-CC22-4695-8634-393789BF6676}"/>
               </a:ext>
             </a:extLst>
           </p:cNvPr>
@@ -43153,7 +43215,7 @@
           <p:cNvPr id="5" name="">
             <a:extLst xmlns:a="http://schemas.openxmlformats.org/drawingml/2006/main">
               <a:ext uri="{FF2B5EF4-FFF2-40B4-BE49-F238E27FC236}">
-                <a16:creationId xmlns:a16="http://schemas.microsoft.com/office/drawing/2014/main" id="{72A19AE4-3D98-4066-88FA-91D18F499C50}"/>
+                <a16:creationId xmlns:a16="http://schemas.microsoft.com/office/drawing/2014/main" id="{715006A3-BA8D-46C5-9310-9A0DD88F319C}"/>
               </a:ext>
             </a:extLst>
           </p:cNvPr>
@@ -43184,7 +43246,7 @@
           <p:cNvPr id="6" name="text-5">
             <a:extLst xmlns:a="http://schemas.openxmlformats.org/drawingml/2006/main">
               <a:ext uri="{FF2B5EF4-FFF2-40B4-BE49-F238E27FC236}">
-                <a16:creationId xmlns:a16="http://schemas.microsoft.com/office/drawing/2014/main" id="{E20E46F8-1907-46CC-9DB4-25F9C913DC72}"/>
+                <a16:creationId xmlns:a16="http://schemas.microsoft.com/office/drawing/2014/main" id="{581CAE08-DB82-4FA7-B50E-C19E234E1B60}"/>
               </a:ext>
             </a:extLst>
           </p:cNvPr>
@@ -43246,7 +43308,7 @@
           <p:cNvPr id="7" name="text-6">
             <a:extLst xmlns:a="http://schemas.openxmlformats.org/drawingml/2006/main">
               <a:ext uri="{FF2B5EF4-FFF2-40B4-BE49-F238E27FC236}">
-                <a16:creationId xmlns:a16="http://schemas.microsoft.com/office/drawing/2014/main" id="{FDB3FCCE-2E15-40A9-AA07-3F79BB6FE616}"/>
+                <a16:creationId xmlns:a16="http://schemas.microsoft.com/office/drawing/2014/main" id="{AFF03882-F96A-4C87-9E06-667DEC0BAF15}"/>
               </a:ext>
             </a:extLst>
           </p:cNvPr>
@@ -43306,7 +43368,7 @@
     </p:spTree>
     <p:extLst>
       <p:ext uri="{BB962C8B-B14F-4D97-AF65-F5344CB8AC3E}">
-        <p14:creationId xmlns:p14="http://schemas.microsoft.com/office/powerpoint/2010/main" val="2146325953"/>
+        <p14:creationId xmlns:p14="http://schemas.microsoft.com/office/powerpoint/2010/main" val="663735228"/>
       </p:ext>
     </p:extLst>
   </p:cSld>
@@ -43337,7 +43399,7 @@
           <p:cNvPr id="11" name="text-0">
             <a:extLst xmlns:a="http://schemas.openxmlformats.org/drawingml/2006/main">
               <a:ext uri="{FF2B5EF4-FFF2-40B4-BE49-F238E27FC236}">
-                <a16:creationId xmlns:a16="http://schemas.microsoft.com/office/drawing/2014/main" id="{463294E0-42BC-489C-8DBD-260BD3ACAFA2}"/>
+                <a16:creationId xmlns:a16="http://schemas.microsoft.com/office/drawing/2014/main" id="{09D3B5D6-2FAA-439F-A617-C2EEEC1F006E}"/>
               </a:ext>
             </a:extLst>
           </p:cNvPr>
@@ -43399,7 +43461,7 @@
           <p:cNvPr id="2" name="text-1">
             <a:extLst xmlns:a="http://schemas.openxmlformats.org/drawingml/2006/main">
               <a:ext uri="{FF2B5EF4-FFF2-40B4-BE49-F238E27FC236}">
-                <a16:creationId xmlns:a16="http://schemas.microsoft.com/office/drawing/2014/main" id="{5C138492-23B5-4E83-BF73-F18E44A2460F}"/>
+                <a16:creationId xmlns:a16="http://schemas.microsoft.com/office/drawing/2014/main" id="{AEBDC05E-D6B9-4654-8519-0A5F0669AA2F}"/>
               </a:ext>
             </a:extLst>
           </p:cNvPr>
@@ -43461,7 +43523,7 @@
           <p:cNvPr id="3" name="text-2">
             <a:extLst xmlns:a="http://schemas.openxmlformats.org/drawingml/2006/main">
               <a:ext uri="{FF2B5EF4-FFF2-40B4-BE49-F238E27FC236}">
-                <a16:creationId xmlns:a16="http://schemas.microsoft.com/office/drawing/2014/main" id="{E39FECA0-FB67-4910-96B6-F47AEB688F07}"/>
+                <a16:creationId xmlns:a16="http://schemas.microsoft.com/office/drawing/2014/main" id="{4706A4E2-FC28-4F3D-AEF4-E30558D2A389}"/>
               </a:ext>
             </a:extLst>
           </p:cNvPr>
@@ -43523,7 +43585,7 @@
           <p:cNvPr id="4" name="text-3">
             <a:extLst xmlns:a="http://schemas.openxmlformats.org/drawingml/2006/main">
               <a:ext uri="{FF2B5EF4-FFF2-40B4-BE49-F238E27FC236}">
-                <a16:creationId xmlns:a16="http://schemas.microsoft.com/office/drawing/2014/main" id="{A580F657-25F7-41E1-AF43-1C7D2A20A703}"/>
+                <a16:creationId xmlns:a16="http://schemas.microsoft.com/office/drawing/2014/main" id="{68EE96BC-3114-4BAB-AD6E-787A71451EBE}"/>
               </a:ext>
             </a:extLst>
           </p:cNvPr>
@@ -43585,7 +43647,7 @@
           <p:cNvPr id="5" name="text-4">
             <a:extLst xmlns:a="http://schemas.openxmlformats.org/drawingml/2006/main">
               <a:ext uri="{FF2B5EF4-FFF2-40B4-BE49-F238E27FC236}">
-                <a16:creationId xmlns:a16="http://schemas.microsoft.com/office/drawing/2014/main" id="{9DC91BEA-7A8B-4F70-8BB9-96CA3D46805B}"/>
+                <a16:creationId xmlns:a16="http://schemas.microsoft.com/office/drawing/2014/main" id="{BAD6A719-ACAA-4201-B518-897090A84D21}"/>
               </a:ext>
             </a:extLst>
           </p:cNvPr>
@@ -43647,7 +43709,7 @@
           <p:cNvPr id="6" name="text-5">
             <a:extLst xmlns:a="http://schemas.openxmlformats.org/drawingml/2006/main">
               <a:ext uri="{FF2B5EF4-FFF2-40B4-BE49-F238E27FC236}">
-                <a16:creationId xmlns:a16="http://schemas.microsoft.com/office/drawing/2014/main" id="{E7691CAB-53F9-4563-8E53-6C209FF77EA3}"/>
+                <a16:creationId xmlns:a16="http://schemas.microsoft.com/office/drawing/2014/main" id="{F6F6A194-D26B-426B-AF87-E1F51C68E2CA}"/>
               </a:ext>
             </a:extLst>
           </p:cNvPr>
@@ -43709,7 +43771,7 @@
           <p:cNvPr id="7" name="text-6">
             <a:extLst xmlns:a="http://schemas.openxmlformats.org/drawingml/2006/main">
               <a:ext uri="{FF2B5EF4-FFF2-40B4-BE49-F238E27FC236}">
-                <a16:creationId xmlns:a16="http://schemas.microsoft.com/office/drawing/2014/main" id="{8100BED7-5B94-4FD0-9A98-77DEC5D2DD4C}"/>
+                <a16:creationId xmlns:a16="http://schemas.microsoft.com/office/drawing/2014/main" id="{E1F52FFF-B3F0-411F-B932-A815FCEC1E31}"/>
               </a:ext>
             </a:extLst>
           </p:cNvPr>
@@ -43771,7 +43833,7 @@
           <p:cNvPr id="8" name="">
             <a:extLst xmlns:a="http://schemas.openxmlformats.org/drawingml/2006/main">
               <a:ext uri="{FF2B5EF4-FFF2-40B4-BE49-F238E27FC236}">
-                <a16:creationId xmlns:a16="http://schemas.microsoft.com/office/drawing/2014/main" id="{086E69CA-95BD-4CCA-85E2-76B2F551F4A5}"/>
+                <a16:creationId xmlns:a16="http://schemas.microsoft.com/office/drawing/2014/main" id="{79292FBE-9EB2-4A7D-A75F-E6B7D0A217EB}"/>
               </a:ext>
             </a:extLst>
           </p:cNvPr>
@@ -43802,7 +43864,7 @@
           <p:cNvPr id="9" name="text-8">
             <a:extLst xmlns:a="http://schemas.openxmlformats.org/drawingml/2006/main">
               <a:ext uri="{FF2B5EF4-FFF2-40B4-BE49-F238E27FC236}">
-                <a16:creationId xmlns:a16="http://schemas.microsoft.com/office/drawing/2014/main" id="{8C73EC95-59E4-4A87-AE68-58FE049DBFD3}"/>
+                <a16:creationId xmlns:a16="http://schemas.microsoft.com/office/drawing/2014/main" id="{E470D695-8036-4CBC-98A1-21B0B2D31D71}"/>
               </a:ext>
             </a:extLst>
           </p:cNvPr>
@@ -43864,7 +43926,7 @@
           <p:cNvPr id="10" name="text-9">
             <a:extLst xmlns:a="http://schemas.openxmlformats.org/drawingml/2006/main">
               <a:ext uri="{FF2B5EF4-FFF2-40B4-BE49-F238E27FC236}">
-                <a16:creationId xmlns:a16="http://schemas.microsoft.com/office/drawing/2014/main" id="{B4F5AFF7-EA62-4962-BCAF-171CACCE4781}"/>
+                <a16:creationId xmlns:a16="http://schemas.microsoft.com/office/drawing/2014/main" id="{C00674FC-0DF2-4E6F-80EA-83F02B6905E1}"/>
               </a:ext>
             </a:extLst>
           </p:cNvPr>
@@ -43924,7 +43986,7 @@
     </p:spTree>
     <p:extLst>
       <p:ext uri="{BB962C8B-B14F-4D97-AF65-F5344CB8AC3E}">
-        <p14:creationId xmlns:p14="http://schemas.microsoft.com/office/powerpoint/2010/main" val="1351542733"/>
+        <p14:creationId xmlns:p14="http://schemas.microsoft.com/office/powerpoint/2010/main" val="1948913607"/>
       </p:ext>
     </p:extLst>
   </p:cSld>
@@ -43955,7 +44017,7 @@
           <p:cNvPr id="7" name="text-0">
             <a:extLst xmlns:a="http://schemas.openxmlformats.org/drawingml/2006/main">
               <a:ext uri="{FF2B5EF4-FFF2-40B4-BE49-F238E27FC236}">
-                <a16:creationId xmlns:a16="http://schemas.microsoft.com/office/drawing/2014/main" id="{15968E31-876D-4121-9D11-5AC50DC6437D}"/>
+                <a16:creationId xmlns:a16="http://schemas.microsoft.com/office/drawing/2014/main" id="{59626802-0F8D-41C6-94F3-AE91993CBA4F}"/>
               </a:ext>
             </a:extLst>
           </p:cNvPr>
@@ -44017,7 +44079,7 @@
           <p:cNvPr id="2" name="text-1">
             <a:extLst xmlns:a="http://schemas.openxmlformats.org/drawingml/2006/main">
               <a:ext uri="{FF2B5EF4-FFF2-40B4-BE49-F238E27FC236}">
-                <a16:creationId xmlns:a16="http://schemas.microsoft.com/office/drawing/2014/main" id="{5A082417-FE7F-4E02-9111-BA2C255E15D8}"/>
+                <a16:creationId xmlns:a16="http://schemas.microsoft.com/office/drawing/2014/main" id="{9614B665-AE87-4334-82B8-170D5D9E9326}"/>
               </a:ext>
             </a:extLst>
           </p:cNvPr>
@@ -44079,7 +44141,7 @@
           <p:cNvPr id="3" name="text-2">
             <a:extLst xmlns:a="http://schemas.openxmlformats.org/drawingml/2006/main">
               <a:ext uri="{FF2B5EF4-FFF2-40B4-BE49-F238E27FC236}">
-                <a16:creationId xmlns:a16="http://schemas.microsoft.com/office/drawing/2014/main" id="{8E32C2E2-C7B5-4D31-89C2-4A6DFCB7F619}"/>
+                <a16:creationId xmlns:a16="http://schemas.microsoft.com/office/drawing/2014/main" id="{401AFA58-4DFF-48E1-A991-0F76FB2F7426}"/>
               </a:ext>
             </a:extLst>
           </p:cNvPr>
@@ -44150,7 +44212,7 @@
           <p:cNvPr id="4" name="">
             <a:extLst xmlns:a="http://schemas.openxmlformats.org/drawingml/2006/main">
               <a:ext uri="{FF2B5EF4-FFF2-40B4-BE49-F238E27FC236}">
-                <a16:creationId xmlns:a16="http://schemas.microsoft.com/office/drawing/2014/main" id="{A3A427E8-BE44-4E04-8688-AF485D68E34E}"/>
+                <a16:creationId xmlns:a16="http://schemas.microsoft.com/office/drawing/2014/main" id="{AF45BCE5-FDFA-4711-BD6E-ED8EFC844235}"/>
               </a:ext>
             </a:extLst>
           </p:cNvPr>
@@ -44181,7 +44243,7 @@
           <p:cNvPr id="5" name="text-4">
             <a:extLst xmlns:a="http://schemas.openxmlformats.org/drawingml/2006/main">
               <a:ext uri="{FF2B5EF4-FFF2-40B4-BE49-F238E27FC236}">
-                <a16:creationId xmlns:a16="http://schemas.microsoft.com/office/drawing/2014/main" id="{61C8D07D-700B-4FE1-BC3A-78D94D1D6DBA}"/>
+                <a16:creationId xmlns:a16="http://schemas.microsoft.com/office/drawing/2014/main" id="{B7FB6890-953B-4845-846F-79969F38E726}"/>
               </a:ext>
             </a:extLst>
           </p:cNvPr>
@@ -44243,7 +44305,7 @@
           <p:cNvPr id="6" name="text-5">
             <a:extLst xmlns:a="http://schemas.openxmlformats.org/drawingml/2006/main">
               <a:ext uri="{FF2B5EF4-FFF2-40B4-BE49-F238E27FC236}">
-                <a16:creationId xmlns:a16="http://schemas.microsoft.com/office/drawing/2014/main" id="{3D25FD72-A3C9-4749-BFA4-DAC2D81C92FC}"/>
+                <a16:creationId xmlns:a16="http://schemas.microsoft.com/office/drawing/2014/main" id="{C94A1AFC-7B3B-44A4-8CE8-EED11B836F42}"/>
               </a:ext>
             </a:extLst>
           </p:cNvPr>
@@ -44303,7 +44365,7 @@
     </p:spTree>
     <p:extLst>
       <p:ext uri="{BB962C8B-B14F-4D97-AF65-F5344CB8AC3E}">
-        <p14:creationId xmlns:p14="http://schemas.microsoft.com/office/powerpoint/2010/main" val="1518495593"/>
+        <p14:creationId xmlns:p14="http://schemas.microsoft.com/office/powerpoint/2010/main" val="2137543650"/>
       </p:ext>
     </p:extLst>
   </p:cSld>
@@ -44334,7 +44396,7 @@
           <p:cNvPr id="7" name="text-0">
             <a:extLst xmlns:a="http://schemas.openxmlformats.org/drawingml/2006/main">
               <a:ext uri="{FF2B5EF4-FFF2-40B4-BE49-F238E27FC236}">
-                <a16:creationId xmlns:a16="http://schemas.microsoft.com/office/drawing/2014/main" id="{F772AAF3-539F-4770-8EB0-4706FDB13721}"/>
+                <a16:creationId xmlns:a16="http://schemas.microsoft.com/office/drawing/2014/main" id="{7DBC9345-EC06-42BB-8888-84095CE95254}"/>
               </a:ext>
             </a:extLst>
           </p:cNvPr>
@@ -44396,7 +44458,7 @@
           <p:cNvPr id="2" name="text-1">
             <a:extLst xmlns:a="http://schemas.openxmlformats.org/drawingml/2006/main">
               <a:ext uri="{FF2B5EF4-FFF2-40B4-BE49-F238E27FC236}">
-                <a16:creationId xmlns:a16="http://schemas.microsoft.com/office/drawing/2014/main" id="{65FC189B-B340-47CE-9260-18E6788CCED0}"/>
+                <a16:creationId xmlns:a16="http://schemas.microsoft.com/office/drawing/2014/main" id="{2430A92B-86A5-4C0B-8559-F7C49CC99EC1}"/>
               </a:ext>
             </a:extLst>
           </p:cNvPr>
@@ -44458,7 +44520,7 @@
           <p:cNvPr id="3" name="text-2">
             <a:extLst xmlns:a="http://schemas.openxmlformats.org/drawingml/2006/main">
               <a:ext uri="{FF2B5EF4-FFF2-40B4-BE49-F238E27FC236}">
-                <a16:creationId xmlns:a16="http://schemas.microsoft.com/office/drawing/2014/main" id="{78B0CF73-0DBE-4620-9611-BC8D4E5FF424}"/>
+                <a16:creationId xmlns:a16="http://schemas.microsoft.com/office/drawing/2014/main" id="{E130250D-2BD0-4DB1-8005-C9CA88D031A1}"/>
               </a:ext>
             </a:extLst>
           </p:cNvPr>
@@ -44529,7 +44591,7 @@
           <p:cNvPr id="4" name="">
             <a:extLst xmlns:a="http://schemas.openxmlformats.org/drawingml/2006/main">
               <a:ext uri="{FF2B5EF4-FFF2-40B4-BE49-F238E27FC236}">
-                <a16:creationId xmlns:a16="http://schemas.microsoft.com/office/drawing/2014/main" id="{5B56694A-15E2-448A-A892-236D1E88A681}"/>
+                <a16:creationId xmlns:a16="http://schemas.microsoft.com/office/drawing/2014/main" id="{4896B1B3-94BE-4C28-8748-8545E981B23B}"/>
               </a:ext>
             </a:extLst>
           </p:cNvPr>
@@ -44560,7 +44622,7 @@
           <p:cNvPr id="5" name="text-4">
             <a:extLst xmlns:a="http://schemas.openxmlformats.org/drawingml/2006/main">
               <a:ext uri="{FF2B5EF4-FFF2-40B4-BE49-F238E27FC236}">
-                <a16:creationId xmlns:a16="http://schemas.microsoft.com/office/drawing/2014/main" id="{A0F7BDF7-EAB2-4BDA-93DB-D492F3DF10A7}"/>
+                <a16:creationId xmlns:a16="http://schemas.microsoft.com/office/drawing/2014/main" id="{D61CA1D6-AD66-453E-AB0F-67D619F1201B}"/>
               </a:ext>
             </a:extLst>
           </p:cNvPr>
@@ -44622,7 +44684,7 @@
           <p:cNvPr id="6" name="text-5">
             <a:extLst xmlns:a="http://schemas.openxmlformats.org/drawingml/2006/main">
               <a:ext uri="{FF2B5EF4-FFF2-40B4-BE49-F238E27FC236}">
-                <a16:creationId xmlns:a16="http://schemas.microsoft.com/office/drawing/2014/main" id="{74AA790E-C735-4CA0-9FD8-C2ED2CDB24D1}"/>
+                <a16:creationId xmlns:a16="http://schemas.microsoft.com/office/drawing/2014/main" id="{7D93E369-006E-48E0-9CD6-FBA589D82337}"/>
               </a:ext>
             </a:extLst>
           </p:cNvPr>
@@ -44682,7 +44744,7 @@
     </p:spTree>
     <p:extLst>
       <p:ext uri="{BB962C8B-B14F-4D97-AF65-F5344CB8AC3E}">
-        <p14:creationId xmlns:p14="http://schemas.microsoft.com/office/powerpoint/2010/main" val="1626864853"/>
+        <p14:creationId xmlns:p14="http://schemas.microsoft.com/office/powerpoint/2010/main" val="1010019438"/>
       </p:ext>
     </p:extLst>
   </p:cSld>
@@ -44713,7 +44775,7 @@
           <p:cNvPr id="7" name="text-0">
             <a:extLst xmlns:a="http://schemas.openxmlformats.org/drawingml/2006/main">
               <a:ext uri="{FF2B5EF4-FFF2-40B4-BE49-F238E27FC236}">
-                <a16:creationId xmlns:a16="http://schemas.microsoft.com/office/drawing/2014/main" id="{48F1F261-6B10-46B2-AD18-EFD0818EA31F}"/>
+                <a16:creationId xmlns:a16="http://schemas.microsoft.com/office/drawing/2014/main" id="{FF69CB38-D1A7-4712-BD65-940F3942ECA1}"/>
               </a:ext>
             </a:extLst>
           </p:cNvPr>
@@ -44775,7 +44837,7 @@
           <p:cNvPr id="2" name="text-1">
             <a:extLst xmlns:a="http://schemas.openxmlformats.org/drawingml/2006/main">
               <a:ext uri="{FF2B5EF4-FFF2-40B4-BE49-F238E27FC236}">
-                <a16:creationId xmlns:a16="http://schemas.microsoft.com/office/drawing/2014/main" id="{A122F626-C460-4616-BFCC-800CFC8B53CF}"/>
+                <a16:creationId xmlns:a16="http://schemas.microsoft.com/office/drawing/2014/main" id="{0C057151-636B-4A08-B40A-18B0F22C5B04}"/>
               </a:ext>
             </a:extLst>
           </p:cNvPr>
@@ -44837,7 +44899,7 @@
           <p:cNvPr id="3" name="text-2">
             <a:extLst xmlns:a="http://schemas.openxmlformats.org/drawingml/2006/main">
               <a:ext uri="{FF2B5EF4-FFF2-40B4-BE49-F238E27FC236}">
-                <a16:creationId xmlns:a16="http://schemas.microsoft.com/office/drawing/2014/main" id="{E0EC4CDC-5A92-4F82-88EB-2182474F83E9}"/>
+                <a16:creationId xmlns:a16="http://schemas.microsoft.com/office/drawing/2014/main" id="{9866519F-4C4B-4608-8CE1-AC498AC8CDE9}"/>
               </a:ext>
             </a:extLst>
           </p:cNvPr>
@@ -44908,7 +44970,7 @@
           <p:cNvPr id="4" name="">
             <a:extLst xmlns:a="http://schemas.openxmlformats.org/drawingml/2006/main">
               <a:ext uri="{FF2B5EF4-FFF2-40B4-BE49-F238E27FC236}">
-                <a16:creationId xmlns:a16="http://schemas.microsoft.com/office/drawing/2014/main" id="{4A403FE7-A91C-48D8-82A7-77888944A1AD}"/>
+                <a16:creationId xmlns:a16="http://schemas.microsoft.com/office/drawing/2014/main" id="{7C2A11D2-1B4C-4946-8F63-1D6C9294CA15}"/>
               </a:ext>
             </a:extLst>
           </p:cNvPr>
@@ -44939,7 +45001,7 @@
           <p:cNvPr id="5" name="text-4">
             <a:extLst xmlns:a="http://schemas.openxmlformats.org/drawingml/2006/main">
               <a:ext uri="{FF2B5EF4-FFF2-40B4-BE49-F238E27FC236}">
-                <a16:creationId xmlns:a16="http://schemas.microsoft.com/office/drawing/2014/main" id="{2346395C-3DBB-4C59-89E0-12BE9E2B9F3E}"/>
+                <a16:creationId xmlns:a16="http://schemas.microsoft.com/office/drawing/2014/main" id="{3443F22E-4F39-42AA-87D1-A8BE2A231A90}"/>
               </a:ext>
             </a:extLst>
           </p:cNvPr>
@@ -45001,7 +45063,7 @@
           <p:cNvPr id="6" name="text-5">
             <a:extLst xmlns:a="http://schemas.openxmlformats.org/drawingml/2006/main">
               <a:ext uri="{FF2B5EF4-FFF2-40B4-BE49-F238E27FC236}">
-                <a16:creationId xmlns:a16="http://schemas.microsoft.com/office/drawing/2014/main" id="{47A519B1-191A-4F98-8AD1-C987F8C9CB5B}"/>
+                <a16:creationId xmlns:a16="http://schemas.microsoft.com/office/drawing/2014/main" id="{94AF718A-2698-4410-ABA6-3FB28C1C2115}"/>
               </a:ext>
             </a:extLst>
           </p:cNvPr>
@@ -45061,7 +45123,7 @@
     </p:spTree>
     <p:extLst>
       <p:ext uri="{BB962C8B-B14F-4D97-AF65-F5344CB8AC3E}">
-        <p14:creationId xmlns:p14="http://schemas.microsoft.com/office/powerpoint/2010/main" val="1019559692"/>
+        <p14:creationId xmlns:p14="http://schemas.microsoft.com/office/powerpoint/2010/main" val="1634786883"/>
       </p:ext>
     </p:extLst>
   </p:cSld>
@@ -45092,7 +45154,7 @@
           <p:cNvPr id="7" name="text-0">
             <a:extLst xmlns:a="http://schemas.openxmlformats.org/drawingml/2006/main">
               <a:ext uri="{FF2B5EF4-FFF2-40B4-BE49-F238E27FC236}">
-                <a16:creationId xmlns:a16="http://schemas.microsoft.com/office/drawing/2014/main" id="{402CBDE2-576D-4BD6-BE83-AFA906BAED6B}"/>
+                <a16:creationId xmlns:a16="http://schemas.microsoft.com/office/drawing/2014/main" id="{DAC005BB-865F-489F-AE7B-BE7398BD6C6B}"/>
               </a:ext>
             </a:extLst>
           </p:cNvPr>
@@ -45154,7 +45216,7 @@
           <p:cNvPr id="2" name="text-1">
             <a:extLst xmlns:a="http://schemas.openxmlformats.org/drawingml/2006/main">
               <a:ext uri="{FF2B5EF4-FFF2-40B4-BE49-F238E27FC236}">
-                <a16:creationId xmlns:a16="http://schemas.microsoft.com/office/drawing/2014/main" id="{4BDBB10B-2D50-4AAA-B02F-E41AA26F055D}"/>
+                <a16:creationId xmlns:a16="http://schemas.microsoft.com/office/drawing/2014/main" id="{96EC69FD-D01A-4547-A417-92A6DB6B8CE2}"/>
               </a:ext>
             </a:extLst>
           </p:cNvPr>
@@ -45216,7 +45278,7 @@
           <p:cNvPr id="3" name="text-2">
             <a:extLst xmlns:a="http://schemas.openxmlformats.org/drawingml/2006/main">
               <a:ext uri="{FF2B5EF4-FFF2-40B4-BE49-F238E27FC236}">
-                <a16:creationId xmlns:a16="http://schemas.microsoft.com/office/drawing/2014/main" id="{39B2BDE8-0EA3-4911-88BE-4329287B6207}"/>
+                <a16:creationId xmlns:a16="http://schemas.microsoft.com/office/drawing/2014/main" id="{E170569C-46C7-4AF2-A295-FBA8850351E5}"/>
               </a:ext>
             </a:extLst>
           </p:cNvPr>
@@ -45308,7 +45370,7 @@
           <p:cNvPr id="4" name="">
             <a:extLst xmlns:a="http://schemas.openxmlformats.org/drawingml/2006/main">
               <a:ext uri="{FF2B5EF4-FFF2-40B4-BE49-F238E27FC236}">
-                <a16:creationId xmlns:a16="http://schemas.microsoft.com/office/drawing/2014/main" id="{5A2437AE-5F15-492C-953C-E14E04FF047E}"/>
+                <a16:creationId xmlns:a16="http://schemas.microsoft.com/office/drawing/2014/main" id="{54248F5E-730E-4E62-B1FA-1CD3C05D9491}"/>
               </a:ext>
             </a:extLst>
           </p:cNvPr>
@@ -45339,7 +45401,7 @@
           <p:cNvPr id="5" name="text-4">
             <a:extLst xmlns:a="http://schemas.openxmlformats.org/drawingml/2006/main">
               <a:ext uri="{FF2B5EF4-FFF2-40B4-BE49-F238E27FC236}">
-                <a16:creationId xmlns:a16="http://schemas.microsoft.com/office/drawing/2014/main" id="{4C66A446-BA61-4102-83DA-CAEBA449FB0C}"/>
+                <a16:creationId xmlns:a16="http://schemas.microsoft.com/office/drawing/2014/main" id="{7D0EC62D-8CFF-4D34-AC7B-99A288B17D57}"/>
               </a:ext>
             </a:extLst>
           </p:cNvPr>
@@ -45401,7 +45463,7 @@
           <p:cNvPr id="6" name="text-5">
             <a:extLst xmlns:a="http://schemas.openxmlformats.org/drawingml/2006/main">
               <a:ext uri="{FF2B5EF4-FFF2-40B4-BE49-F238E27FC236}">
-                <a16:creationId xmlns:a16="http://schemas.microsoft.com/office/drawing/2014/main" id="{6DF0A094-8E5D-4D83-8900-DEA0423BECDA}"/>
+                <a16:creationId xmlns:a16="http://schemas.microsoft.com/office/drawing/2014/main" id="{2D3FFCA1-FF77-45D4-B7FD-7EBA3EA95C6F}"/>
               </a:ext>
             </a:extLst>
           </p:cNvPr>
@@ -45461,7 +45523,7 @@
     </p:spTree>
     <p:extLst>
       <p:ext uri="{BB962C8B-B14F-4D97-AF65-F5344CB8AC3E}">
-        <p14:creationId xmlns:p14="http://schemas.microsoft.com/office/powerpoint/2010/main" val="1762146665"/>
+        <p14:creationId xmlns:p14="http://schemas.microsoft.com/office/powerpoint/2010/main" val="1348802073"/>
       </p:ext>
     </p:extLst>
   </p:cSld>
@@ -45492,7 +45554,7 @@
           <p:cNvPr id="7" name="text-0">
             <a:extLst xmlns:a="http://schemas.openxmlformats.org/drawingml/2006/main">
               <a:ext uri="{FF2B5EF4-FFF2-40B4-BE49-F238E27FC236}">
-                <a16:creationId xmlns:a16="http://schemas.microsoft.com/office/drawing/2014/main" id="{8E665EF3-9036-4CAF-927A-68D5F3694BD5}"/>
+                <a16:creationId xmlns:a16="http://schemas.microsoft.com/office/drawing/2014/main" id="{ABE99613-6B03-47EC-A853-0FCF1EB452EF}"/>
               </a:ext>
             </a:extLst>
           </p:cNvPr>
@@ -45554,7 +45616,7 @@
           <p:cNvPr id="2" name="text-1">
             <a:extLst xmlns:a="http://schemas.openxmlformats.org/drawingml/2006/main">
               <a:ext uri="{FF2B5EF4-FFF2-40B4-BE49-F238E27FC236}">
-                <a16:creationId xmlns:a16="http://schemas.microsoft.com/office/drawing/2014/main" id="{D07991A6-DF73-49F3-8C72-A78B3D4966D9}"/>
+                <a16:creationId xmlns:a16="http://schemas.microsoft.com/office/drawing/2014/main" id="{3A307A1A-5257-469E-97CE-99E4D417E71F}"/>
               </a:ext>
             </a:extLst>
           </p:cNvPr>
@@ -45616,7 +45678,7 @@
           <p:cNvPr id="3" name="text-2">
             <a:extLst xmlns:a="http://schemas.openxmlformats.org/drawingml/2006/main">
               <a:ext uri="{FF2B5EF4-FFF2-40B4-BE49-F238E27FC236}">
-                <a16:creationId xmlns:a16="http://schemas.microsoft.com/office/drawing/2014/main" id="{1326CD52-C992-4CAC-803A-66E1481992F4}"/>
+                <a16:creationId xmlns:a16="http://schemas.microsoft.com/office/drawing/2014/main" id="{11D61A44-2BDF-4477-B1B9-23C9A725E3A9}"/>
               </a:ext>
             </a:extLst>
           </p:cNvPr>
@@ -45708,7 +45770,7 @@
           <p:cNvPr id="4" name="">
             <a:extLst xmlns:a="http://schemas.openxmlformats.org/drawingml/2006/main">
               <a:ext uri="{FF2B5EF4-FFF2-40B4-BE49-F238E27FC236}">
-                <a16:creationId xmlns:a16="http://schemas.microsoft.com/office/drawing/2014/main" id="{5604DA4D-29D0-4518-9834-2E7ECE627CA5}"/>
+                <a16:creationId xmlns:a16="http://schemas.microsoft.com/office/drawing/2014/main" id="{20A104B7-3781-43DC-84EA-CD2E7066A40E}"/>
               </a:ext>
             </a:extLst>
           </p:cNvPr>
@@ -45739,7 +45801,7 @@
           <p:cNvPr id="5" name="text-4">
             <a:extLst xmlns:a="http://schemas.openxmlformats.org/drawingml/2006/main">
               <a:ext uri="{FF2B5EF4-FFF2-40B4-BE49-F238E27FC236}">
-                <a16:creationId xmlns:a16="http://schemas.microsoft.com/office/drawing/2014/main" id="{13E1BCA1-C40E-45C4-8EBE-A4C5F6B9023B}"/>
+                <a16:creationId xmlns:a16="http://schemas.microsoft.com/office/drawing/2014/main" id="{DA9B0320-938C-4824-9228-46E341FFDCCD}"/>
               </a:ext>
             </a:extLst>
           </p:cNvPr>
@@ -45801,7 +45863,7 @@
           <p:cNvPr id="6" name="text-5">
             <a:extLst xmlns:a="http://schemas.openxmlformats.org/drawingml/2006/main">
               <a:ext uri="{FF2B5EF4-FFF2-40B4-BE49-F238E27FC236}">
-                <a16:creationId xmlns:a16="http://schemas.microsoft.com/office/drawing/2014/main" id="{CED1C4C6-2BCD-4A25-A5F6-2B461B624C93}"/>
+                <a16:creationId xmlns:a16="http://schemas.microsoft.com/office/drawing/2014/main" id="{5C7BB425-7145-499D-AD35-18481141FABC}"/>
               </a:ext>
             </a:extLst>
           </p:cNvPr>
@@ -45861,7 +45923,7 @@
     </p:spTree>
     <p:extLst>
       <p:ext uri="{BB962C8B-B14F-4D97-AF65-F5344CB8AC3E}">
-        <p14:creationId xmlns:p14="http://schemas.microsoft.com/office/powerpoint/2010/main" val="1826103409"/>
+        <p14:creationId xmlns:p14="http://schemas.microsoft.com/office/powerpoint/2010/main" val="1553639642"/>
       </p:ext>
     </p:extLst>
   </p:cSld>
@@ -45892,7 +45954,7 @@
           <p:cNvPr id="8" name="text-0">
             <a:extLst xmlns:a="http://schemas.openxmlformats.org/drawingml/2006/main">
               <a:ext uri="{FF2B5EF4-FFF2-40B4-BE49-F238E27FC236}">
-                <a16:creationId xmlns:a16="http://schemas.microsoft.com/office/drawing/2014/main" id="{A92FDABF-DCAA-42E9-BD0B-8A0FF0FBBD31}"/>
+                <a16:creationId xmlns:a16="http://schemas.microsoft.com/office/drawing/2014/main" id="{0AB15C97-F7C0-424E-93EF-48413995A845}"/>
               </a:ext>
             </a:extLst>
           </p:cNvPr>
@@ -45954,7 +46016,7 @@
           <p:cNvPr id="2" name="text-1">
             <a:extLst xmlns:a="http://schemas.openxmlformats.org/drawingml/2006/main">
               <a:ext uri="{FF2B5EF4-FFF2-40B4-BE49-F238E27FC236}">
-                <a16:creationId xmlns:a16="http://schemas.microsoft.com/office/drawing/2014/main" id="{1E490713-47BE-4119-9689-2DAA65E7114F}"/>
+                <a16:creationId xmlns:a16="http://schemas.microsoft.com/office/drawing/2014/main" id="{687A5A3D-1948-4409-B1E5-F62DB89B5505}"/>
               </a:ext>
             </a:extLst>
           </p:cNvPr>
@@ -46016,7 +46078,7 @@
           <p:cNvPr id="3" name="text-2">
             <a:extLst xmlns:a="http://schemas.openxmlformats.org/drawingml/2006/main">
               <a:ext uri="{FF2B5EF4-FFF2-40B4-BE49-F238E27FC236}">
-                <a16:creationId xmlns:a16="http://schemas.microsoft.com/office/drawing/2014/main" id="{B14625EC-CB8E-49CE-88C0-A97C8141DEE1}"/>
+                <a16:creationId xmlns:a16="http://schemas.microsoft.com/office/drawing/2014/main" id="{2246EC85-BBA5-4F3C-AE39-83D73B4C35FE}"/>
               </a:ext>
             </a:extLst>
           </p:cNvPr>
@@ -46089,7 +46151,7 @@
           <p:cNvPr id="4" name="text-3">
             <a:extLst xmlns:a="http://schemas.openxmlformats.org/drawingml/2006/main">
               <a:ext uri="{FF2B5EF4-FFF2-40B4-BE49-F238E27FC236}">
-                <a16:creationId xmlns:a16="http://schemas.microsoft.com/office/drawing/2014/main" id="{1D76F6E2-953D-48C6-873E-384C5F80F7D6}"/>
+                <a16:creationId xmlns:a16="http://schemas.microsoft.com/office/drawing/2014/main" id="{8421B62E-F80D-4F6D-A190-5B5E16D63B47}"/>
               </a:ext>
             </a:extLst>
           </p:cNvPr>
@@ -46151,7 +46213,7 @@
           <p:cNvPr id="5" name="">
             <a:extLst xmlns:a="http://schemas.openxmlformats.org/drawingml/2006/main">
               <a:ext uri="{FF2B5EF4-FFF2-40B4-BE49-F238E27FC236}">
-                <a16:creationId xmlns:a16="http://schemas.microsoft.com/office/drawing/2014/main" id="{D4E27EA7-A389-4837-B6AD-4E64242CA129}"/>
+                <a16:creationId xmlns:a16="http://schemas.microsoft.com/office/drawing/2014/main" id="{0B134CAE-E1F9-4053-ACC1-0B01A81DB6C3}"/>
               </a:ext>
             </a:extLst>
           </p:cNvPr>
@@ -46182,7 +46244,7 @@
           <p:cNvPr id="6" name="text-5">
             <a:extLst xmlns:a="http://schemas.openxmlformats.org/drawingml/2006/main">
               <a:ext uri="{FF2B5EF4-FFF2-40B4-BE49-F238E27FC236}">
-                <a16:creationId xmlns:a16="http://schemas.microsoft.com/office/drawing/2014/main" id="{137BC9AA-9BFF-44F4-817B-249317ED3E6C}"/>
+                <a16:creationId xmlns:a16="http://schemas.microsoft.com/office/drawing/2014/main" id="{D0C4379D-6A5D-4340-A520-1444B6A85C02}"/>
               </a:ext>
             </a:extLst>
           </p:cNvPr>
@@ -46244,7 +46306,7 @@
           <p:cNvPr id="7" name="text-6">
             <a:extLst xmlns:a="http://schemas.openxmlformats.org/drawingml/2006/main">
               <a:ext uri="{FF2B5EF4-FFF2-40B4-BE49-F238E27FC236}">
-                <a16:creationId xmlns:a16="http://schemas.microsoft.com/office/drawing/2014/main" id="{7EC298B8-F8DB-4BE5-9739-C5B04CAED57A}"/>
+                <a16:creationId xmlns:a16="http://schemas.microsoft.com/office/drawing/2014/main" id="{EFE6ECBA-59D0-460F-B8A2-36774F42AB7F}"/>
               </a:ext>
             </a:extLst>
           </p:cNvPr>
@@ -46304,7 +46366,7 @@
     </p:spTree>
     <p:extLst>
       <p:ext uri="{BB962C8B-B14F-4D97-AF65-F5344CB8AC3E}">
-        <p14:creationId xmlns:p14="http://schemas.microsoft.com/office/powerpoint/2010/main" val="1030667633"/>
+        <p14:creationId xmlns:p14="http://schemas.microsoft.com/office/powerpoint/2010/main" val="704009545"/>
       </p:ext>
     </p:extLst>
   </p:cSld>
@@ -46335,7 +46397,7 @@
           <p:cNvPr id="8" name="text-0">
             <a:extLst xmlns:a="http://schemas.openxmlformats.org/drawingml/2006/main">
               <a:ext uri="{FF2B5EF4-FFF2-40B4-BE49-F238E27FC236}">
-                <a16:creationId xmlns:a16="http://schemas.microsoft.com/office/drawing/2014/main" id="{63935A3D-6A77-4A39-9B27-9B6EDC06E2C5}"/>
+                <a16:creationId xmlns:a16="http://schemas.microsoft.com/office/drawing/2014/main" id="{BDF7E028-A7A3-4D6C-A068-76B115BE5021}"/>
               </a:ext>
             </a:extLst>
           </p:cNvPr>
@@ -46397,7 +46459,7 @@
           <p:cNvPr id="2" name="text-1">
             <a:extLst xmlns:a="http://schemas.openxmlformats.org/drawingml/2006/main">
               <a:ext uri="{FF2B5EF4-FFF2-40B4-BE49-F238E27FC236}">
-                <a16:creationId xmlns:a16="http://schemas.microsoft.com/office/drawing/2014/main" id="{75D79659-D82E-4E75-8CF3-A7DC546785E7}"/>
+                <a16:creationId xmlns:a16="http://schemas.microsoft.com/office/drawing/2014/main" id="{9497482D-D193-4DD4-9C08-983FFE3B500B}"/>
               </a:ext>
             </a:extLst>
           </p:cNvPr>
@@ -46459,7 +46521,7 @@
           <p:cNvPr id="3" name="text-2">
             <a:extLst xmlns:a="http://schemas.openxmlformats.org/drawingml/2006/main">
               <a:ext uri="{FF2B5EF4-FFF2-40B4-BE49-F238E27FC236}">
-                <a16:creationId xmlns:a16="http://schemas.microsoft.com/office/drawing/2014/main" id="{F164B038-A8F0-4850-89A0-AB38F65F5099}"/>
+                <a16:creationId xmlns:a16="http://schemas.microsoft.com/office/drawing/2014/main" id="{D9AD0769-026F-4ACE-B887-DD661F392A5E}"/>
               </a:ext>
             </a:extLst>
           </p:cNvPr>
@@ -46551,7 +46613,7 @@
           <p:cNvPr id="4" name="text-3">
             <a:extLst xmlns:a="http://schemas.openxmlformats.org/drawingml/2006/main">
               <a:ext uri="{FF2B5EF4-FFF2-40B4-BE49-F238E27FC236}">
-                <a16:creationId xmlns:a16="http://schemas.microsoft.com/office/drawing/2014/main" id="{FB980C3A-6F23-4476-8368-3C6AF6808B7F}"/>
+                <a16:creationId xmlns:a16="http://schemas.microsoft.com/office/drawing/2014/main" id="{EEBB2235-2A78-4052-8461-D9EDA0F5F117}"/>
               </a:ext>
             </a:extLst>
           </p:cNvPr>
@@ -46613,7 +46675,7 @@
           <p:cNvPr id="5" name="">
             <a:extLst xmlns:a="http://schemas.openxmlformats.org/drawingml/2006/main">
               <a:ext uri="{FF2B5EF4-FFF2-40B4-BE49-F238E27FC236}">
-                <a16:creationId xmlns:a16="http://schemas.microsoft.com/office/drawing/2014/main" id="{563BE2D2-EFE0-4307-95B8-FC798720B19B}"/>
+                <a16:creationId xmlns:a16="http://schemas.microsoft.com/office/drawing/2014/main" id="{837D6AC7-31BE-43AB-9AED-715B7DB88817}"/>
               </a:ext>
             </a:extLst>
           </p:cNvPr>
@@ -46644,7 +46706,7 @@
           <p:cNvPr id="6" name="text-5">
             <a:extLst xmlns:a="http://schemas.openxmlformats.org/drawingml/2006/main">
               <a:ext uri="{FF2B5EF4-FFF2-40B4-BE49-F238E27FC236}">
-                <a16:creationId xmlns:a16="http://schemas.microsoft.com/office/drawing/2014/main" id="{F77083D8-A5E4-4233-9FF9-7868CA6B3D6A}"/>
+                <a16:creationId xmlns:a16="http://schemas.microsoft.com/office/drawing/2014/main" id="{C49E4C39-C19E-4408-AF07-E588A2ADE2A2}"/>
               </a:ext>
             </a:extLst>
           </p:cNvPr>
@@ -46706,7 +46768,7 @@
           <p:cNvPr id="7" name="text-6">
             <a:extLst xmlns:a="http://schemas.openxmlformats.org/drawingml/2006/main">
               <a:ext uri="{FF2B5EF4-FFF2-40B4-BE49-F238E27FC236}">
-                <a16:creationId xmlns:a16="http://schemas.microsoft.com/office/drawing/2014/main" id="{2F2145F6-8356-4F1A-AB92-544443853568}"/>
+                <a16:creationId xmlns:a16="http://schemas.microsoft.com/office/drawing/2014/main" id="{9D5568AF-54A9-437A-98E3-D49C6B59B1A2}"/>
               </a:ext>
             </a:extLst>
           </p:cNvPr>
@@ -46766,7 +46828,7 @@
     </p:spTree>
     <p:extLst>
       <p:ext uri="{BB962C8B-B14F-4D97-AF65-F5344CB8AC3E}">
-        <p14:creationId xmlns:p14="http://schemas.microsoft.com/office/powerpoint/2010/main" val="1043447262"/>
+        <p14:creationId xmlns:p14="http://schemas.microsoft.com/office/powerpoint/2010/main" val="1762030392"/>
       </p:ext>
     </p:extLst>
   </p:cSld>
@@ -46797,7 +46859,7 @@
           <p:cNvPr id="8" name="text-0">
             <a:extLst xmlns:a="http://schemas.openxmlformats.org/drawingml/2006/main">
               <a:ext uri="{FF2B5EF4-FFF2-40B4-BE49-F238E27FC236}">
-                <a16:creationId xmlns:a16="http://schemas.microsoft.com/office/drawing/2014/main" id="{92B6F501-485B-4BD2-89D0-62425C31A108}"/>
+                <a16:creationId xmlns:a16="http://schemas.microsoft.com/office/drawing/2014/main" id="{B88B7B5A-6CBE-4C35-9774-EA09F0FCA668}"/>
               </a:ext>
             </a:extLst>
           </p:cNvPr>
@@ -46859,7 +46921,7 @@
           <p:cNvPr id="2" name="text-1">
             <a:extLst xmlns:a="http://schemas.openxmlformats.org/drawingml/2006/main">
               <a:ext uri="{FF2B5EF4-FFF2-40B4-BE49-F238E27FC236}">
-                <a16:creationId xmlns:a16="http://schemas.microsoft.com/office/drawing/2014/main" id="{44B6BC11-75D8-41C6-88BD-DBF983E41A1C}"/>
+                <a16:creationId xmlns:a16="http://schemas.microsoft.com/office/drawing/2014/main" id="{4181FAFE-75AA-4A6B-9988-47199B135412}"/>
               </a:ext>
             </a:extLst>
           </p:cNvPr>
@@ -46921,7 +46983,7 @@
           <p:cNvPr id="3" name="text-2">
             <a:extLst xmlns:a="http://schemas.openxmlformats.org/drawingml/2006/main">
               <a:ext uri="{FF2B5EF4-FFF2-40B4-BE49-F238E27FC236}">
-                <a16:creationId xmlns:a16="http://schemas.microsoft.com/office/drawing/2014/main" id="{AD32C1F7-7F99-43CA-987E-F0B66EC13E0F}"/>
+                <a16:creationId xmlns:a16="http://schemas.microsoft.com/office/drawing/2014/main" id="{A71F46D5-7E42-46CF-A67C-BC3F4D71F6D8}"/>
               </a:ext>
             </a:extLst>
           </p:cNvPr>
@@ -47035,7 +47097,7 @@
           <p:cNvPr id="4" name="text-3">
             <a:extLst xmlns:a="http://schemas.openxmlformats.org/drawingml/2006/main">
               <a:ext uri="{FF2B5EF4-FFF2-40B4-BE49-F238E27FC236}">
-                <a16:creationId xmlns:a16="http://schemas.microsoft.com/office/drawing/2014/main" id="{B0604643-927F-4A15-A3F1-A4A9066645E5}"/>
+                <a16:creationId xmlns:a16="http://schemas.microsoft.com/office/drawing/2014/main" id="{FED10397-8EF4-4C5D-9532-ED262A8F841B}"/>
               </a:ext>
             </a:extLst>
           </p:cNvPr>
@@ -47097,7 +47159,7 @@
           <p:cNvPr id="5" name="">
             <a:extLst xmlns:a="http://schemas.openxmlformats.org/drawingml/2006/main">
               <a:ext uri="{FF2B5EF4-FFF2-40B4-BE49-F238E27FC236}">
-                <a16:creationId xmlns:a16="http://schemas.microsoft.com/office/drawing/2014/main" id="{750718C2-2DD9-42D7-9BEB-81956A175993}"/>
+                <a16:creationId xmlns:a16="http://schemas.microsoft.com/office/drawing/2014/main" id="{63CD5C4F-0D93-43DF-ACF4-70CECCE08548}"/>
               </a:ext>
             </a:extLst>
           </p:cNvPr>
@@ -47128,7 +47190,7 @@
           <p:cNvPr id="6" name="text-5">
             <a:extLst xmlns:a="http://schemas.openxmlformats.org/drawingml/2006/main">
               <a:ext uri="{FF2B5EF4-FFF2-40B4-BE49-F238E27FC236}">
-                <a16:creationId xmlns:a16="http://schemas.microsoft.com/office/drawing/2014/main" id="{296384E8-5431-47B9-8A38-90282E66D1D1}"/>
+                <a16:creationId xmlns:a16="http://schemas.microsoft.com/office/drawing/2014/main" id="{817E2DC2-A6B6-4E55-9513-D8DE6D360882}"/>
               </a:ext>
             </a:extLst>
           </p:cNvPr>
@@ -47190,7 +47252,7 @@
           <p:cNvPr id="7" name="text-6">
             <a:extLst xmlns:a="http://schemas.openxmlformats.org/drawingml/2006/main">
               <a:ext uri="{FF2B5EF4-FFF2-40B4-BE49-F238E27FC236}">
-                <a16:creationId xmlns:a16="http://schemas.microsoft.com/office/drawing/2014/main" id="{8F14DFBA-6CCF-4695-BABC-5CC86868BBC5}"/>
+                <a16:creationId xmlns:a16="http://schemas.microsoft.com/office/drawing/2014/main" id="{F54E3140-40E0-4AC4-8081-D721D1E593C9}"/>
               </a:ext>
             </a:extLst>
           </p:cNvPr>
@@ -47250,7 +47312,7 @@
     </p:spTree>
     <p:extLst>
       <p:ext uri="{BB962C8B-B14F-4D97-AF65-F5344CB8AC3E}">
-        <p14:creationId xmlns:p14="http://schemas.microsoft.com/office/powerpoint/2010/main" val="1284786794"/>
+        <p14:creationId xmlns:p14="http://schemas.microsoft.com/office/powerpoint/2010/main" val="645298926"/>
       </p:ext>
     </p:extLst>
   </p:cSld>
@@ -47281,7 +47343,7 @@
           <p:cNvPr id="8" name="text-0">
             <a:extLst xmlns:a="http://schemas.openxmlformats.org/drawingml/2006/main">
               <a:ext uri="{FF2B5EF4-FFF2-40B4-BE49-F238E27FC236}">
-                <a16:creationId xmlns:a16="http://schemas.microsoft.com/office/drawing/2014/main" id="{F7E2B7CF-F7EA-490D-8F27-8BD604E2D136}"/>
+                <a16:creationId xmlns:a16="http://schemas.microsoft.com/office/drawing/2014/main" id="{AA0CEE2B-0DFA-4867-A45A-E71F7B16FBE9}"/>
               </a:ext>
             </a:extLst>
           </p:cNvPr>
@@ -47343,7 +47405,7 @@
           <p:cNvPr id="2" name="text-1">
             <a:extLst xmlns:a="http://schemas.openxmlformats.org/drawingml/2006/main">
               <a:ext uri="{FF2B5EF4-FFF2-40B4-BE49-F238E27FC236}">
-                <a16:creationId xmlns:a16="http://schemas.microsoft.com/office/drawing/2014/main" id="{EFA5EAEB-1DD1-4C83-96A0-396D12D9B000}"/>
+                <a16:creationId xmlns:a16="http://schemas.microsoft.com/office/drawing/2014/main" id="{0527A94D-D0E7-4CA8-A82E-4AF293C83446}"/>
               </a:ext>
             </a:extLst>
           </p:cNvPr>
@@ -47405,7 +47467,7 @@
           <p:cNvPr id="3" name="text-2">
             <a:extLst xmlns:a="http://schemas.openxmlformats.org/drawingml/2006/main">
               <a:ext uri="{FF2B5EF4-FFF2-40B4-BE49-F238E27FC236}">
-                <a16:creationId xmlns:a16="http://schemas.microsoft.com/office/drawing/2014/main" id="{5EC51E58-28EF-45A3-978D-E38FC30C0D35}"/>
+                <a16:creationId xmlns:a16="http://schemas.microsoft.com/office/drawing/2014/main" id="{B17F0559-45AA-4B00-8863-2B1665C8F3A5}"/>
               </a:ext>
             </a:extLst>
           </p:cNvPr>
@@ -47497,7 +47559,7 @@
           <p:cNvPr id="4" name="text-3">
             <a:extLst xmlns:a="http://schemas.openxmlformats.org/drawingml/2006/main">
               <a:ext uri="{FF2B5EF4-FFF2-40B4-BE49-F238E27FC236}">
-                <a16:creationId xmlns:a16="http://schemas.microsoft.com/office/drawing/2014/main" id="{64A041E2-678C-4E97-9BDC-B7BC138DB6F9}"/>
+                <a16:creationId xmlns:a16="http://schemas.microsoft.com/office/drawing/2014/main" id="{F7894ECD-FBC9-47B2-85F7-ACDCDEBF6665}"/>
               </a:ext>
             </a:extLst>
           </p:cNvPr>
@@ -47559,7 +47621,7 @@
           <p:cNvPr id="5" name="">
             <a:extLst xmlns:a="http://schemas.openxmlformats.org/drawingml/2006/main">
               <a:ext uri="{FF2B5EF4-FFF2-40B4-BE49-F238E27FC236}">
-                <a16:creationId xmlns:a16="http://schemas.microsoft.com/office/drawing/2014/main" id="{FA221273-0DF1-4D86-97CB-8D5CDF7E5C15}"/>
+                <a16:creationId xmlns:a16="http://schemas.microsoft.com/office/drawing/2014/main" id="{E2EDC565-900F-42AA-AF11-319B62CE09C5}"/>
               </a:ext>
             </a:extLst>
           </p:cNvPr>
@@ -47590,7 +47652,7 @@
           <p:cNvPr id="6" name="text-5">
             <a:extLst xmlns:a="http://schemas.openxmlformats.org/drawingml/2006/main">
               <a:ext uri="{FF2B5EF4-FFF2-40B4-BE49-F238E27FC236}">
-                <a16:creationId xmlns:a16="http://schemas.microsoft.com/office/drawing/2014/main" id="{984F3D1C-34FD-4721-A9FC-D116BAD56C9E}"/>
+                <a16:creationId xmlns:a16="http://schemas.microsoft.com/office/drawing/2014/main" id="{98DBA304-4DB4-417D-8481-7B103020C39A}"/>
               </a:ext>
             </a:extLst>
           </p:cNvPr>
@@ -47652,7 +47714,7 @@
           <p:cNvPr id="7" name="text-6">
             <a:extLst xmlns:a="http://schemas.openxmlformats.org/drawingml/2006/main">
               <a:ext uri="{FF2B5EF4-FFF2-40B4-BE49-F238E27FC236}">
-                <a16:creationId xmlns:a16="http://schemas.microsoft.com/office/drawing/2014/main" id="{4F4BBF52-7717-4375-A215-9003A1E2837C}"/>
+                <a16:creationId xmlns:a16="http://schemas.microsoft.com/office/drawing/2014/main" id="{3FAF7D1B-BF10-4C7E-A90E-C025210898AB}"/>
               </a:ext>
             </a:extLst>
           </p:cNvPr>
@@ -47712,7 +47774,7 @@
     </p:spTree>
     <p:extLst>
       <p:ext uri="{BB962C8B-B14F-4D97-AF65-F5344CB8AC3E}">
-        <p14:creationId xmlns:p14="http://schemas.microsoft.com/office/powerpoint/2010/main" val="192684655"/>
+        <p14:creationId xmlns:p14="http://schemas.microsoft.com/office/powerpoint/2010/main" val="8229635"/>
       </p:ext>
     </p:extLst>
   </p:cSld>
